--- a/presentations/ev-investment-update.pptx
+++ b/presentations/ev-investment-update.pptx
@@ -984,6 +984,592 @@
 </c:chartSpace>
 </file>
 
+<file path=ppt/charts/chart4.xml><?xml version="1.0" encoding="utf-8"?>
+<c:chartSpace xmlns:c="http://schemas.openxmlformats.org/drawingml/2006/chart" xmlns:a="http://schemas.openxmlformats.org/drawingml/2006/main" xmlns:r="http://schemas.openxmlformats.org/officeDocument/2006/relationships">
+  <c:date1904 val="0"/>
+  <c:roundedCorners val="1"/>
+  <c:chart>
+    <c:autoTitleDeleted val="1"/>
+    <c:plotArea>
+      <c:layout/>
+      <c:lineChart>
+        <c:varyColors val="0"/>
+        <c:ser>
+          <c:idx val="0"/>
+          <c:order val="0"/>
+          <c:tx>
+            <c:strRef>
+              <c:f>Sheet1!$B$1</c:f>
+              <c:strCache>
+                <c:ptCount val="1"/>
+                <c:pt idx="0">
+                  <c:v>Large effect (RR 2.0)</c:v>
+                </c:pt>
+              </c:strCache>
+            </c:strRef>
+          </c:tx>
+          <c:spPr>
+            <a:solidFill>
+              <a:srgbClr val="0D9488"/>
+            </a:solidFill>
+            <a:ln w="38100" cap="flat">
+              <a:solidFill>
+                <a:srgbClr val="0D9488"/>
+              </a:solidFill>
+              <a:prstDash val="solid"/>
+              <a:round/>
+            </a:ln>
+            <a:effectLst/>
+          </c:spPr>
+          <c:invertIfNegative val="0"/>
+          <c:dLbls>
+            <c:numFmt formatCode="#,##0" sourceLinked="0"/>
+            <c:txPr>
+              <a:bodyPr/>
+              <a:lstStyle/>
+              <a:p>
+                <a:pPr>
+                  <a:defRPr b="0" i="0" strike="noStrike" sz="1200" u="none">
+                    <a:solidFill>
+                      <a:srgbClr val="000000"/>
+                    </a:solidFill>
+                    <a:latin typeface="Arial"/>
+                  </a:defRPr>
+                </a:pPr>
+              </a:p>
+            </c:txPr>
+            <c:showLegendKey val="0"/>
+            <c:showVal val="0"/>
+            <c:showCatName val="0"/>
+            <c:showSerName val="0"/>
+            <c:showPercent val="0"/>
+            <c:showBubbleSize val="0"/>
+            <c:showLeaderLines val="0"/>
+          </c:dLbls>
+          <c:marker>
+            <c:symbol val="circle"/>
+            <c:size val="6"/>
+            <c:spPr>
+              <a:solidFill>
+                <a:srgbClr val="0D9488"/>
+              </a:solidFill>
+              <a:ln w="9525" cap="flat">
+                <a:solidFill>
+                  <a:srgbClr val="0D9488"/>
+                </a:solidFill>
+                <a:prstDash val="solid"/>
+                <a:round/>
+              </a:ln>
+              <a:effectLst/>
+            </c:spPr>
+          </c:marker>
+          <c:cat>
+            <c:multiLvlStrRef>
+              <c:f>Sheet1!$A$2:$A$9</c:f>
+              <c:multiLvlStrCache>
+                <c:ptCount val="8"/>
+                <c:lvl>
+                  <c:pt idx="0">
+                    <c:v>16</c:v>
+                  </c:pt>
+                  <c:pt idx="1">
+                    <c:v>25</c:v>
+                  </c:pt>
+                  <c:pt idx="2">
+                    <c:v>35</c:v>
+                  </c:pt>
+                  <c:pt idx="3">
+                    <c:v>50</c:v>
+                  </c:pt>
+                  <c:pt idx="4">
+                    <c:v>65</c:v>
+                  </c:pt>
+                  <c:pt idx="5">
+                    <c:v>80</c:v>
+                  </c:pt>
+                  <c:pt idx="6">
+                    <c:v>100</c:v>
+                  </c:pt>
+                  <c:pt idx="7">
+                    <c:v>120</c:v>
+                  </c:pt>
+                </c:lvl>
+              </c:multiLvlStrCache>
+            </c:multiLvlStrRef>
+          </c:cat>
+          <c:val>
+            <c:numRef>
+              <c:f>Sheet1!$B$2:$B$9</c:f>
+              <c:numCache>
+                <c:formatCode>General</c:formatCode>
+                <c:ptCount val="8"/>
+                <c:pt idx="0">
+                  <c:v>54</c:v>
+                </c:pt>
+                <c:pt idx="1">
+                  <c:v>80</c:v>
+                </c:pt>
+                <c:pt idx="2">
+                  <c:v>93</c:v>
+                </c:pt>
+                <c:pt idx="3">
+                  <c:v>99</c:v>
+                </c:pt>
+                <c:pt idx="4">
+                  <c:v>100</c:v>
+                </c:pt>
+                <c:pt idx="5">
+                  <c:v>100</c:v>
+                </c:pt>
+                <c:pt idx="6">
+                  <c:v>100</c:v>
+                </c:pt>
+                <c:pt idx="7">
+                  <c:v>100</c:v>
+                </c:pt>
+              </c:numCache>
+            </c:numRef>
+          </c:val>
+          <c:smooth val="0"/>
+        </c:ser>
+        <c:ser>
+          <c:idx val="1"/>
+          <c:order val="1"/>
+          <c:tx>
+            <c:strRef>
+              <c:f>Sheet1!$C$1</c:f>
+              <c:strCache>
+                <c:ptCount val="1"/>
+                <c:pt idx="0">
+                  <c:v>Moderate effect (RR 1.5)</c:v>
+                </c:pt>
+              </c:strCache>
+            </c:strRef>
+          </c:tx>
+          <c:spPr>
+            <a:solidFill>
+              <a:srgbClr val="D94F04"/>
+            </a:solidFill>
+            <a:ln w="38100" cap="flat">
+              <a:solidFill>
+                <a:srgbClr val="D94F04"/>
+              </a:solidFill>
+              <a:prstDash val="solid"/>
+              <a:round/>
+            </a:ln>
+            <a:effectLst/>
+          </c:spPr>
+          <c:invertIfNegative val="0"/>
+          <c:dLbls>
+            <c:numFmt formatCode="#,##0" sourceLinked="0"/>
+            <c:txPr>
+              <a:bodyPr/>
+              <a:lstStyle/>
+              <a:p>
+                <a:pPr>
+                  <a:defRPr b="0" i="0" strike="noStrike" sz="1200" u="none">
+                    <a:solidFill>
+                      <a:srgbClr val="000000"/>
+                    </a:solidFill>
+                    <a:latin typeface="Arial"/>
+                  </a:defRPr>
+                </a:pPr>
+              </a:p>
+            </c:txPr>
+            <c:showLegendKey val="0"/>
+            <c:showVal val="0"/>
+            <c:showCatName val="0"/>
+            <c:showSerName val="0"/>
+            <c:showPercent val="0"/>
+            <c:showBubbleSize val="0"/>
+            <c:showLeaderLines val="0"/>
+          </c:dLbls>
+          <c:marker>
+            <c:symbol val="circle"/>
+            <c:size val="6"/>
+            <c:spPr>
+              <a:solidFill>
+                <a:srgbClr val="D94F04"/>
+              </a:solidFill>
+              <a:ln w="9525" cap="flat">
+                <a:solidFill>
+                  <a:srgbClr val="D94F04"/>
+                </a:solidFill>
+                <a:prstDash val="solid"/>
+                <a:round/>
+              </a:ln>
+              <a:effectLst/>
+            </c:spPr>
+          </c:marker>
+          <c:cat>
+            <c:multiLvlStrRef>
+              <c:f>Sheet1!$A$2:$A$9</c:f>
+              <c:multiLvlStrCache>
+                <c:ptCount val="8"/>
+                <c:lvl>
+                  <c:pt idx="0">
+                    <c:v>16</c:v>
+                  </c:pt>
+                  <c:pt idx="1">
+                    <c:v>25</c:v>
+                  </c:pt>
+                  <c:pt idx="2">
+                    <c:v>35</c:v>
+                  </c:pt>
+                  <c:pt idx="3">
+                    <c:v>50</c:v>
+                  </c:pt>
+                  <c:pt idx="4">
+                    <c:v>65</c:v>
+                  </c:pt>
+                  <c:pt idx="5">
+                    <c:v>80</c:v>
+                  </c:pt>
+                  <c:pt idx="6">
+                    <c:v>100</c:v>
+                  </c:pt>
+                  <c:pt idx="7">
+                    <c:v>120</c:v>
+                  </c:pt>
+                </c:lvl>
+              </c:multiLvlStrCache>
+            </c:multiLvlStrRef>
+          </c:cat>
+          <c:val>
+            <c:numRef>
+              <c:f>Sheet1!$C$2:$C$9</c:f>
+              <c:numCache>
+                <c:formatCode>General</c:formatCode>
+                <c:ptCount val="8"/>
+                <c:pt idx="0">
+                  <c:v>15</c:v>
+                </c:pt>
+                <c:pt idx="1">
+                  <c:v>28</c:v>
+                </c:pt>
+                <c:pt idx="2">
+                  <c:v>42</c:v>
+                </c:pt>
+                <c:pt idx="3">
+                  <c:v>61</c:v>
+                </c:pt>
+                <c:pt idx="4">
+                  <c:v>75</c:v>
+                </c:pt>
+                <c:pt idx="5">
+                  <c:v>84</c:v>
+                </c:pt>
+                <c:pt idx="6">
+                  <c:v>92</c:v>
+                </c:pt>
+                <c:pt idx="7">
+                  <c:v>96</c:v>
+                </c:pt>
+              </c:numCache>
+            </c:numRef>
+          </c:val>
+          <c:smooth val="0"/>
+        </c:ser>
+        <c:ser>
+          <c:idx val="2"/>
+          <c:order val="2"/>
+          <c:tx>
+            <c:strRef>
+              <c:f>Sheet1!$D$1</c:f>
+              <c:strCache>
+                <c:ptCount val="1"/>
+                <c:pt idx="0">
+                  <c:v>Small effect (RR 1.25)</c:v>
+                </c:pt>
+              </c:strCache>
+            </c:strRef>
+          </c:tx>
+          <c:spPr>
+            <a:solidFill>
+              <a:srgbClr val="7048C4"/>
+            </a:solidFill>
+            <a:ln w="38100" cap="flat">
+              <a:solidFill>
+                <a:srgbClr val="7048C4"/>
+              </a:solidFill>
+              <a:prstDash val="solid"/>
+              <a:round/>
+            </a:ln>
+            <a:effectLst/>
+          </c:spPr>
+          <c:invertIfNegative val="0"/>
+          <c:dLbls>
+            <c:numFmt formatCode="#,##0" sourceLinked="0"/>
+            <c:txPr>
+              <a:bodyPr/>
+              <a:lstStyle/>
+              <a:p>
+                <a:pPr>
+                  <a:defRPr b="0" i="0" strike="noStrike" sz="1200" u="none">
+                    <a:solidFill>
+                      <a:srgbClr val="000000"/>
+                    </a:solidFill>
+                    <a:latin typeface="Arial"/>
+                  </a:defRPr>
+                </a:pPr>
+              </a:p>
+            </c:txPr>
+            <c:showLegendKey val="0"/>
+            <c:showVal val="0"/>
+            <c:showCatName val="0"/>
+            <c:showSerName val="0"/>
+            <c:showPercent val="0"/>
+            <c:showBubbleSize val="0"/>
+            <c:showLeaderLines val="0"/>
+          </c:dLbls>
+          <c:marker>
+            <c:symbol val="circle"/>
+            <c:size val="6"/>
+            <c:spPr>
+              <a:solidFill>
+                <a:srgbClr val="7048C4"/>
+              </a:solidFill>
+              <a:ln w="9525" cap="flat">
+                <a:solidFill>
+                  <a:srgbClr val="7048C4"/>
+                </a:solidFill>
+                <a:prstDash val="solid"/>
+                <a:round/>
+              </a:ln>
+              <a:effectLst/>
+            </c:spPr>
+          </c:marker>
+          <c:cat>
+            <c:multiLvlStrRef>
+              <c:f>Sheet1!$A$2:$A$9</c:f>
+              <c:multiLvlStrCache>
+                <c:ptCount val="8"/>
+                <c:lvl>
+                  <c:pt idx="0">
+                    <c:v>16</c:v>
+                  </c:pt>
+                  <c:pt idx="1">
+                    <c:v>25</c:v>
+                  </c:pt>
+                  <c:pt idx="2">
+                    <c:v>35</c:v>
+                  </c:pt>
+                  <c:pt idx="3">
+                    <c:v>50</c:v>
+                  </c:pt>
+                  <c:pt idx="4">
+                    <c:v>65</c:v>
+                  </c:pt>
+                  <c:pt idx="5">
+                    <c:v>80</c:v>
+                  </c:pt>
+                  <c:pt idx="6">
+                    <c:v>100</c:v>
+                  </c:pt>
+                  <c:pt idx="7">
+                    <c:v>120</c:v>
+                  </c:pt>
+                </c:lvl>
+              </c:multiLvlStrCache>
+            </c:multiLvlStrRef>
+          </c:cat>
+          <c:val>
+            <c:numRef>
+              <c:f>Sheet1!$D$2:$D$9</c:f>
+              <c:numCache>
+                <c:formatCode>General</c:formatCode>
+                <c:ptCount val="8"/>
+                <c:pt idx="0">
+                  <c:v>4</c:v>
+                </c:pt>
+                <c:pt idx="1">
+                  <c:v>7</c:v>
+                </c:pt>
+                <c:pt idx="2">
+                  <c:v>10</c:v>
+                </c:pt>
+                <c:pt idx="3">
+                  <c:v>17</c:v>
+                </c:pt>
+                <c:pt idx="4">
+                  <c:v>22</c:v>
+                </c:pt>
+                <c:pt idx="5">
+                  <c:v>26</c:v>
+                </c:pt>
+                <c:pt idx="6">
+                  <c:v>35</c:v>
+                </c:pt>
+                <c:pt idx="7">
+                  <c:v>44</c:v>
+                </c:pt>
+              </c:numCache>
+            </c:numRef>
+          </c:val>
+          <c:smooth val="0"/>
+        </c:ser>
+        <c:dLbls>
+          <c:numFmt formatCode="#,##0" sourceLinked="0"/>
+          <c:txPr>
+            <a:bodyPr/>
+            <a:lstStyle/>
+            <a:p>
+              <a:pPr>
+                <a:defRPr b="0" i="0" strike="noStrike" sz="1200" u="none">
+                  <a:solidFill>
+                    <a:srgbClr val="000000"/>
+                  </a:solidFill>
+                  <a:latin typeface="Arial"/>
+                </a:defRPr>
+              </a:pPr>
+            </a:p>
+          </c:txPr>
+          <c:showLegendKey val="0"/>
+          <c:showVal val="0"/>
+          <c:showCatName val="0"/>
+          <c:showSerName val="0"/>
+          <c:showPercent val="0"/>
+          <c:showBubbleSize val="0"/>
+          <c:showLeaderLines val="0"/>
+        </c:dLbls>
+        <c:marker val="1"/>
+        <c:axId val="2094734554"/>
+        <c:axId val="2094734552"/>
+        <c:axId val="2094734556"/>
+      </c:lineChart>
+      <c:catAx>
+        <c:axId val="2094734554"/>
+        <c:scaling>
+          <c:orientation val="minMax"/>
+        </c:scaling>
+        <c:delete val="0"/>
+        <c:axPos val="b"/>
+        <c:numFmt formatCode="General" sourceLinked="1"/>
+        <c:majorTickMark val="out"/>
+        <c:minorTickMark val="none"/>
+        <c:tickLblPos val="low"/>
+        <c:spPr>
+          <a:ln w="12700" cap="flat">
+            <a:noFill/>
+            <a:prstDash val="solid"/>
+            <a:round/>
+          </a:ln>
+        </c:spPr>
+        <c:txPr>
+          <a:bodyPr/>
+          <a:lstStyle/>
+          <a:p>
+            <a:pPr>
+              <a:defRPr sz="1100" b="0" i="0" u="none" strike="noStrike">
+                <a:solidFill>
+                  <a:srgbClr val="5F706D"/>
+                </a:solidFill>
+                <a:latin typeface="Calibri"/>
+              </a:defRPr>
+            </a:pPr>
+            <a:endParaRPr lang="en-US"/>
+          </a:p>
+        </c:txPr>
+        <c:crossAx val="2094734552"/>
+        <c:crosses val="autoZero"/>
+        <c:auto val="1"/>
+        <c:lblAlgn val="ctr"/>
+        <c:noMultiLvlLbl val="1"/>
+      </c:catAx>
+      <c:valAx>
+        <c:axId val="2094734552"/>
+        <c:scaling>
+          <c:orientation val="minMax"/>
+          <c:max val="100"/>
+          <c:min val="0"/>
+        </c:scaling>
+        <c:delete val="0"/>
+        <c:axPos val="l"/>
+        <c:majorGridlines>
+          <c:spPr>
+            <a:ln w="12700" cap="flat">
+              <a:solidFill>
+                <a:srgbClr val="DCE4E2"/>
+              </a:solidFill>
+              <a:prstDash val="solid"/>
+              <a:round/>
+            </a:ln>
+          </c:spPr>
+        </c:majorGridlines>
+        <c:numFmt formatCode="0&quot;%&quot;" sourceLinked="0"/>
+        <c:majorTickMark val="out"/>
+        <c:minorTickMark val="none"/>
+        <c:tickLblPos val="nextTo"/>
+        <c:spPr>
+          <a:ln w="12700" cap="flat">
+            <a:noFill/>
+            <a:prstDash val="solid"/>
+            <a:round/>
+          </a:ln>
+        </c:spPr>
+        <c:txPr>
+          <a:bodyPr/>
+          <a:lstStyle/>
+          <a:p>
+            <a:pPr>
+              <a:defRPr sz="1100" b="0" i="0" u="none" strike="noStrike">
+                <a:solidFill>
+                  <a:srgbClr val="5F706D"/>
+                </a:solidFill>
+                <a:latin typeface="Calibri"/>
+              </a:defRPr>
+            </a:pPr>
+            <a:endParaRPr lang="en-US"/>
+          </a:p>
+        </c:txPr>
+        <c:crossAx val="2094734554"/>
+        <c:crosses val="autoZero"/>
+        <c:crossBetween val="between"/>
+      </c:valAx>
+      <c:spPr>
+        <a:noFill/>
+        <a:ln>
+          <a:noFill/>
+        </a:ln>
+        <a:effectLst/>
+      </c:spPr>
+    </c:plotArea>
+    <c:legend>
+      <c:legendPos val="b"/>
+      <c:overlay val="0"/>
+      <c:txPr>
+        <a:bodyPr/>
+        <a:lstStyle/>
+        <a:p>
+          <a:pPr>
+            <a:defRPr sz="1000">
+              <a:solidFill>
+                <a:srgbClr val="5F706D"/>
+              </a:solidFill>
+              <a:latin typeface="Calibri"/>
+              <a:cs typeface="Calibri"/>
+            </a:defRPr>
+          </a:pPr>
+          <a:endParaRPr lang="en-US"/>
+        </a:p>
+      </c:txPr>
+    </c:legend>
+    <c:plotVisOnly val="1"/>
+    <c:dispBlanksAs val="span"/>
+  </c:chart>
+  <c:spPr>
+    <a:noFill/>
+    <a:ln>
+      <a:noFill/>
+    </a:ln>
+    <a:effectLst/>
+  </c:spPr>
+  <c:externalData r:id="rId1">
+    <c:autoUpdate val="0"/>
+  </c:externalData>
+</c:chartSpace>
+</file>
+
 <file path=ppt/notesMasters/notesMaster1.xml><?xml version="1.0" encoding="utf-8"?>
 <p:notesMaster xmlns:a="http://schemas.openxmlformats.org/drawingml/2006/main" xmlns:r="http://schemas.openxmlformats.org/officeDocument/2006/relationships" xmlns:p="http://schemas.openxmlformats.org/presentationml/2006/main">
   <p:cSld>
@@ -1379,7 +1965,11 @@
           <a:p>
             <a:r>
               <a:rPr lang="en-US" dirty="0"/>
-              <a:t>Framing: EV production as a leading indicator for where manufacturing capital gets committed. Primary question is national; the siting question is a stretch. ~30 seconds here.</a:t>
+              <a:t>• 30 seconds here — set the frame and move on
+• Question: does national EV production growth lead investment announcements
+• Alt-data angle: production as an early signal of where capital gets committed
+• Two parts: national (primary), state siting (stretch)
+• All data via the Thurro connector, India only</a:t>
             </a:r>
             <a:endParaRPr lang="en-US" dirty="0"/>
           </a:p>
@@ -1467,7 +2057,13 @@
           <a:p>
             <a:r>
               <a:rPr lang="en-US" dirty="0"/>
-              <a:t>Keep this tight. The key point for the audience: the gradeable question is the national one, so the project does not fail if siting turns out to be incentive-driven rather than demand-driven.</a:t>
+              <a:t>• Say explicitly that the primary question is gradeable on its own
+• X = monthly national EV production growth
+• Y = count and value of new manufacturing-investment announcements
+• The test is lead-lag: does X move first, and at what lag
+• Stretch: does a state's demand share predict its share of announced capacity
+• Honest caveat: siting may be incentive-driven, as the US IRA wave suggests
+• So the project does not fail if the stretch answer is that incentives decide</a:t>
             </a:r>
             <a:endParaRPr lang="en-US" dirty="0"/>
           </a:p>
@@ -1555,7 +2151,13 @@
           <a:p>
             <a:r>
               <a:rPr lang="en-US" dirty="0"/>
-              <a:t>Say plainly: three of four landed well. The fourth is the story, and I have a backup slide on it. Do not spend more than 60 seconds here.</a:t>
+              <a:t>• Three of four datasets landed clean — do not dwell, 60 seconds max
+• Production: SIAM, 40 usable months, 2023-04 to 2026-07
+• Registrations: VAHAN, 3,216 state-month rows, reconciles exactly to the national file
+• Pricing: 654 variants, weekly from Nov 2025 — thinnest and least load-bearing
+• The fourth was meant to be the dependent variable and is unusable
+• Do not read the orange detail aloud — point at it, defer to the backup slide
+• Substitute: 34 events hand-coded from exchange filings</a:t>
             </a:r>
             <a:endParaRPr lang="en-US" dirty="0"/>
           </a:p>
@@ -1643,7 +2245,13 @@
           <a:p>
             <a:r>
               <a:rPr lang="en-US" dirty="0"/>
-              <a:t>Lead with the growth, then immediately complicate it: the mix is 2W/3W but capex is 4W and cells. That mismatch is a genuine analytical risk, not a caveat.</a:t>
+              <a:t>• Lead with the growth, then immediately complicate it
+• Registrations grew about 18x from 2018 to 2025
+• Peak month was 332,544 in July 2026
+• But the mix is 62% two-wheelers, 27% three-wheelers, only 10% four-wheelers
+• The capex we care about is four-wheelers and cell manufacturing
+• So the demand signal and the capex signal may not track the same market
+• This is a real analytical risk, not a footnote</a:t>
             </a:r>
             <a:endParaRPr lang="en-US" dirty="0"/>
           </a:p>
@@ -1731,7 +2339,13 @@
           <a:p>
             <a:r>
               <a:rPr lang="en-US" dirty="0"/>
-              <a:t>Two points: demand is concentrated enough for the siting question to be meaningful, and the lead-lag machinery is built and running. The alternating signs are honest - I am not claiming a result yet.</a:t>
+              <a:t>• Two points: siting is a fair question, and the machinery is built
+• Top-5 states hold 49% of demand, HHI 0.071 — concentrated but not extreme
+• UP 14.2%, Maharashtra 11.2%, Karnataka 9.2%, Tamil Nadu 8.6%
+• Production coverage of registrations rose from 27% to 60%
+• Four-wheeler EVs still under-captured: ICE and EV share one nameplate in the feed
+• Lead test runs: +0.24 at k=0, -0.20 at k=1, +0.40 at k=2, n=39
+• Be honest — signs alternate, so that is noise, not a result</a:t>
             </a:r>
             <a:endParaRPr lang="en-US" dirty="0"/>
           </a:p>
@@ -1819,7 +2433,18 @@
           <a:p>
             <a:r>
               <a:rPr lang="en-US" dirty="0"/>
-              <a:t>This is the slide that earns credit. Say out loud that a null is acceptable and that the real deliverable is a test with stated power.</a:t>
+              <a:t>• This is the slide that earns credit — spend your time here
+• Success is a defensible answer, not a positive one
+• A clean null is valid only if the test could have detected a lead
+• Method: Poisson regression on monthly counts, lagged production growth
+• Baseline uses their own lag plus a time trend; placebo shuffles dates within year
+• The power study is done, not planned — that is the point to land
+• At our 16 events a moderate effect is caught just 15% of the time
+• 80% power needs about 73 events scanning six lags, about 48 if the lag is fixed
+• Fixing the lag in advance is the cheapest win we have
+• Real data at 16 events: no significant lead at any k, best p = 0.11
+• Say it plainly — that is not evidence of no lead, it is an underpowered test
+• If asked: false-positive rate checks out at 1.5-2.5%, solver validated against statsmodels</a:t>
             </a:r>
             <a:endParaRPr lang="en-US" dirty="0"/>
           </a:p>
@@ -1907,7 +2532,14 @@
           <a:p>
             <a:r>
               <a:rPr lang="en-US" dirty="0"/>
-              <a:t>Close on: the modelling is not the risk. The dependent variable is. Steps 1 and 2 are where the remaining effort goes.</a:t>
+              <a:t>• Steps 1 and 2 are the critical path — everything else waits on them
+• Step 1: settle what counts as an announcement (board approval, press note, commissioning)
+• Step 2: scale extraction toward 45-75 dated events
+• We are at 22 dated, 16 inside the production window
+• Step 3: build the month panel, plus the state panel for the stretch
+• Step 4: run the tests with the lag pre-registered at k=3
+• Step 5: write up, including the negative result on the investment source
+• Close on this: the modelling is not the risk, the dependent variable is</a:t>
             </a:r>
             <a:endParaRPr lang="en-US" dirty="0"/>
           </a:p>
@@ -1995,7 +2627,14 @@
           <a:p>
             <a:r>
               <a:rPr lang="en-US" dirty="0"/>
-              <a:t>Only pull this up if asked, or if time allows. The four questions are the real ask - I want a steer on the inclusion rule and on whether a better capex feed exists.</a:t>
+              <a:t>• Only pull this up if asked, or if time allows
+• Problem 1: the dependent variable does not exist in the structured source
+• Problem 2: the substitute is thin — 16 usable events against a 45-75 target
+• Problem 3: two silent data defects found during ingestion
+• The four questions are the real ask
+• Q2 (the inclusion rule) unblocks the most work — push for an answer on that
+• Q1 (a better capex feed) is highest value if the answer is yes
+• Fallback if events stay low: pre-register the lag, or pivot to the state panel</a:t>
             </a:r>
             <a:endParaRPr lang="en-US" dirty="0"/>
           </a:p>
@@ -4137,7 +4776,7 @@
                 <a:ea typeface="Calibri" pitchFamily="34" charset="-122"/>
                 <a:cs typeface="Calibri" pitchFamily="34" charset="-120"/>
               </a:rPr>
-              <a:t>Substitute: 21 hand-coded filing events</a:t>
+              <a:t>Substitute: 34 hand-coded filing events</a:t>
             </a:r>
             <a:endParaRPr lang="en-US" sz="1000" dirty="0"/>
           </a:p>
@@ -5169,7 +5808,7 @@
                 <a:ea typeface="Calibri" pitchFamily="34" charset="-122"/>
                 <a:cs typeface="Calibri" pitchFamily="34" charset="-120"/>
               </a:rPr>
-              <a:t>Sign-alternating at n≈37 — the machinery runs, but this reads as noise, not structure.</a:t>
+              <a:t>Sign-alternating at n=39 — the machinery runs, but this reads as noise, not structure.</a:t>
             </a:r>
             <a:endParaRPr lang="en-US" sz="1300" dirty="0"/>
           </a:p>
@@ -5279,7 +5918,7 @@
                 <a:ea typeface="Cambria" pitchFamily="34" charset="-122"/>
                 <a:cs typeface="Cambria" pitchFamily="34" charset="-120"/>
               </a:rPr>
-              <a:t>What would count as an answer</a:t>
+              <a:t>What counts as an answer — and can we detect one?</a:t>
             </a:r>
             <a:endParaRPr lang="en-US" sz="3600" dirty="0"/>
           </a:p>
@@ -5294,11 +5933,11 @@
         <p:spPr>
           <a:xfrm>
             <a:off x="640080" y="1645920"/>
-            <a:ext cx="3566160" cy="3931920"/>
+            <a:ext cx="3840480" cy="3977640"/>
           </a:xfrm>
           <a:prstGeom prst="roundRect">
             <a:avLst>
-              <a:gd name="adj" fmla="val 2051"/>
+              <a:gd name="adj" fmla="val 1905"/>
             </a:avLst>
           </a:prstGeom>
           <a:solidFill>
@@ -5320,7 +5959,7 @@
         </p:nvSpPr>
         <p:spPr>
           <a:xfrm>
-            <a:off x="914400" y="1920240"/>
+            <a:off x="914400" y="1901952"/>
             <a:ext cx="274320" cy="274320"/>
           </a:xfrm>
           <a:prstGeom prst="ellipse">
@@ -5345,8 +5984,8 @@
         </p:nvSpPr>
         <p:spPr>
           <a:xfrm>
-            <a:off x="914400" y="2331720"/>
-            <a:ext cx="3017520" cy="777240"/>
+            <a:off x="914400" y="2304288"/>
+            <a:ext cx="3291840" cy="731520"/>
           </a:xfrm>
           <a:prstGeom prst="rect">
             <a:avLst/>
@@ -5384,8 +6023,8 @@
         </p:nvSpPr>
         <p:spPr>
           <a:xfrm>
-            <a:off x="914400" y="3200400"/>
-            <a:ext cx="3017520" cy="2240280"/>
+            <a:off x="914400" y="3108960"/>
+            <a:ext cx="3291840" cy="2331720"/>
           </a:xfrm>
           <a:prstGeom prst="rect">
             <a:avLst/>
@@ -5399,7 +6038,7 @@
           <a:p>
             <a:pPr marL="342900" indent="-342900">
               <a:spcAft>
-                <a:spcPts val="800"/>
+                <a:spcPts val="900"/>
               </a:spcAft>
               <a:buSzPct val="100000"/>
               <a:buChar char="•"/>
@@ -5413,14 +6052,14 @@
                 <a:ea typeface="Calibri" pitchFamily="34" charset="-122"/>
                 <a:cs typeface="Calibri" pitchFamily="34" charset="-120"/>
               </a:rPr>
-              <a:t>A clean "production does not lead announcements" is a valid result, provided the test had power to detect a lead if one existed.</a:t>
+              <a:t>A clean "production does not lead announcements" is valid — but only if the test could have detected a lead.</a:t>
             </a:r>
             <a:endParaRPr lang="en-US" sz="1200" dirty="0"/>
           </a:p>
           <a:p>
             <a:pPr marL="342900" indent="-342900">
               <a:spcAft>
-                <a:spcPts val="800"/>
+                <a:spcPts val="900"/>
               </a:spcAft>
               <a:buSzPct val="100000"/>
               <a:buChar char="•"/>
@@ -5434,26 +6073,123 @@
                 <a:ea typeface="Calibri" pitchFamily="34" charset="-122"/>
                 <a:cs typeface="Calibri" pitchFamily="34" charset="-120"/>
               </a:rPr>
-              <a:t>The deliverable is the test and its honest power, not a significant coefficient.</a:t>
+              <a:t>Poisson regression on monthly announcement counts, with lagged production growth.</a:t>
             </a:r>
             <a:endParaRPr lang="en-US" sz="1200" dirty="0"/>
           </a:p>
-        </p:txBody>
-      </p:sp>
-      <p:sp>
-        <p:nvSpPr>
-          <p:cNvPr id="8" name="Shape 6"/>
+          <a:p>
+            <a:pPr marL="342900" indent="-342900">
+              <a:spcAft>
+                <a:spcPts val="900"/>
+              </a:spcAft>
+              <a:buSzPct val="100000"/>
+              <a:buChar char="•"/>
+            </a:pPr>
+            <a:r>
+              <a:rPr lang="en-US" sz="1200" dirty="0">
+                <a:solidFill>
+                  <a:srgbClr val="5F706D"/>
+                </a:solidFill>
+                <a:latin typeface="Calibri" pitchFamily="34" charset="0"/>
+                <a:ea typeface="Calibri" pitchFamily="34" charset="-122"/>
+                <a:cs typeface="Calibri" pitchFamily="34" charset="-120"/>
+              </a:rPr>
+              <a:t>Baseline to beat: counts from their own lag plus a time trend.</a:t>
+            </a:r>
+            <a:endParaRPr lang="en-US" sz="1200" dirty="0"/>
+          </a:p>
+          <a:p>
+            <a:pPr marL="342900" indent="-342900">
+              <a:spcAft>
+                <a:spcPts val="900"/>
+              </a:spcAft>
+              <a:buSzPct val="100000"/>
+              <a:buChar char="•"/>
+            </a:pPr>
+            <a:r>
+              <a:rPr lang="en-US" sz="1200" dirty="0">
+                <a:solidFill>
+                  <a:srgbClr val="5F706D"/>
+                </a:solidFill>
+                <a:latin typeface="Calibri" pitchFamily="34" charset="0"/>
+                <a:ea typeface="Calibri" pitchFamily="34" charset="-122"/>
+                <a:cs typeface="Calibri" pitchFamily="34" charset="-120"/>
+              </a:rPr>
+              <a:t>Placebo: shuffle announcement dates within year; the lead must vanish.</a:t>
+            </a:r>
+            <a:endParaRPr lang="en-US" sz="1200" dirty="0"/>
+          </a:p>
+        </p:txBody>
+      </p:sp>
+      <p:graphicFrame>
+        <p:nvGraphicFramePr>
+          <p:cNvPr id="8" name="Chart 0" descr=""/>
+          <p:cNvGraphicFramePr/>
+          <p:nvPr/>
+        </p:nvGraphicFramePr>
+        <p:xfrm>
+          <a:off x="4709160" y="1645920"/>
+          <a:ext cx="6830568" cy="2880360"/>
+        </p:xfrm>
+        <a:graphic xmlns:a="http://schemas.openxmlformats.org/drawingml/2006/main">
+          <a:graphicData uri="http://schemas.openxmlformats.org/drawingml/2006/chart">
+            <c:chart xmlns:c="http://schemas.openxmlformats.org/drawingml/2006/chart" r:id="rId1"/>
+          </a:graphicData>
+        </a:graphic>
+      </p:graphicFrame>
+      <p:sp>
+        <p:nvSpPr>
+          <p:cNvPr id="9" name="Text 6"/>
+          <p:cNvSpPr txBox="1"/>
+          <p:nvPr/>
+        </p:nvSpPr>
+        <p:spPr>
+          <a:xfrm>
+            <a:off x="4709160" y="4526280"/>
+            <a:ext cx="6830568" cy="274320"/>
+          </a:xfrm>
+          <a:prstGeom prst="rect">
+            <a:avLst/>
+          </a:prstGeom>
+          <a:noFill/>
+          <a:ln/>
+        </p:spPr>
+        <p:txBody>
+          <a:bodyPr wrap="square" lIns="0" tIns="0" rIns="0" bIns="0" rtlCol="0" anchor="ctr"/>
+          <a:lstStyle/>
+          <a:p>
+            <a:pPr indent="0" marL="0">
+              <a:buNone/>
+            </a:pPr>
+            <a:r>
+              <a:rPr lang="en-US" sz="1050" i="1" dirty="0">
+                <a:solidFill>
+                  <a:srgbClr val="5F706D"/>
+                </a:solidFill>
+                <a:latin typeface="Calibri" pitchFamily="34" charset="0"/>
+                <a:ea typeface="Calibri" pitchFamily="34" charset="-122"/>
+                <a:cs typeface="Calibri" pitchFamily="34" charset="-120"/>
+              </a:rPr>
+              <a:t>Simulated power vs number of dated events, scanning lags k = 1…6. We have 16.</a:t>
+            </a:r>
+            <a:endParaRPr lang="en-US" sz="1050" dirty="0"/>
+          </a:p>
+        </p:txBody>
+      </p:sp>
+      <p:sp>
+        <p:nvSpPr>
+          <p:cNvPr id="10" name="Shape 7"/>
           <p:cNvSpPr/>
           <p:nvPr/>
         </p:nvSpPr>
         <p:spPr>
           <a:xfrm>
-            <a:off x="4352544" y="1645920"/>
-            <a:ext cx="3566160" cy="3931920"/>
+            <a:off x="4709160" y="4864608"/>
+            <a:ext cx="3337560" cy="758952"/>
           </a:xfrm>
           <a:prstGeom prst="roundRect">
             <a:avLst>
-              <a:gd name="adj" fmla="val 2051"/>
+              <a:gd name="adj" fmla="val 9639"/>
             </a:avLst>
           </a:prstGeom>
           <a:solidFill>
@@ -5461,7 +6197,7 @@
           </a:solidFill>
           <a:ln w="12700">
             <a:solidFill>
-              <a:srgbClr val="333333"/>
+              <a:srgbClr val="FFFFFF"/>
             </a:solidFill>
             <a:prstDash val="solid"/>
           </a:ln>
@@ -5469,24 +6205,104 @@
       </p:sp>
       <p:sp>
         <p:nvSpPr>
-          <p:cNvPr id="9" name="Shape 7"/>
+          <p:cNvPr id="11" name="Text 8"/>
+          <p:cNvSpPr txBox="1"/>
+          <p:nvPr/>
+        </p:nvSpPr>
+        <p:spPr>
+          <a:xfrm>
+            <a:off x="4736592" y="4992624"/>
+            <a:ext cx="3282696" cy="566928"/>
+          </a:xfrm>
+          <a:prstGeom prst="rect">
+            <a:avLst/>
+          </a:prstGeom>
+          <a:noFill/>
+          <a:ln/>
+        </p:spPr>
+        <p:txBody>
+          <a:bodyPr wrap="square" lIns="0" tIns="0" rIns="0" bIns="0" rtlCol="0" anchor="ctr"/>
+          <a:lstStyle/>
+          <a:p>
+            <a:pPr algn="ctr" indent="0" marL="0">
+              <a:buNone/>
+            </a:pPr>
+            <a:r>
+              <a:rPr lang="en-US" sz="3200" b="1" dirty="0">
+                <a:solidFill>
+                  <a:srgbClr val="D94F04"/>
+                </a:solidFill>
+                <a:latin typeface="Cambria" pitchFamily="34" charset="0"/>
+                <a:ea typeface="Cambria" pitchFamily="34" charset="-122"/>
+                <a:cs typeface="Cambria" pitchFamily="34" charset="-120"/>
+              </a:rPr>
+              <a:t>~73 events</a:t>
+            </a:r>
+            <a:endParaRPr lang="en-US" sz="3200" dirty="0"/>
+          </a:p>
+        </p:txBody>
+      </p:sp>
+      <p:sp>
+        <p:nvSpPr>
+          <p:cNvPr id="12" name="Text 9"/>
+          <p:cNvSpPr txBox="1"/>
+          <p:nvPr/>
+        </p:nvSpPr>
+        <p:spPr>
+          <a:xfrm>
+            <a:off x="4800600" y="5577840"/>
+            <a:ext cx="3154680" cy="658368"/>
+          </a:xfrm>
+          <a:prstGeom prst="rect">
+            <a:avLst/>
+          </a:prstGeom>
+          <a:noFill/>
+          <a:ln/>
+        </p:spPr>
+        <p:txBody>
+          <a:bodyPr wrap="square" lIns="0" tIns="0" rIns="0" bIns="0" rtlCol="0" anchor="ctr"/>
+          <a:lstStyle/>
+          <a:p>
+            <a:pPr algn="ctr" indent="0" marL="0">
+              <a:buNone/>
+            </a:pPr>
+            <a:r>
+              <a:rPr lang="en-US" sz="1050" dirty="0">
+                <a:solidFill>
+                  <a:srgbClr val="5F706D"/>
+                </a:solidFill>
+                <a:latin typeface="Calibri" pitchFamily="34" charset="0"/>
+                <a:ea typeface="Calibri" pitchFamily="34" charset="-122"/>
+                <a:cs typeface="Calibri" pitchFamily="34" charset="-120"/>
+              </a:rPr>
+              <a:t>for 80% power scanning six lags</a:t>
+            </a:r>
+            <a:endParaRPr lang="en-US" sz="1050" dirty="0"/>
+          </a:p>
+        </p:txBody>
+      </p:sp>
+      <p:sp>
+        <p:nvSpPr>
+          <p:cNvPr id="13" name="Shape 10"/>
           <p:cNvSpPr/>
           <p:nvPr/>
         </p:nvSpPr>
         <p:spPr>
           <a:xfrm>
-            <a:off x="4626864" y="1920240"/>
-            <a:ext cx="274320" cy="274320"/>
-          </a:xfrm>
-          <a:prstGeom prst="ellipse">
-            <a:avLst/>
+            <a:off x="8202168" y="4864608"/>
+            <a:ext cx="3337560" cy="758952"/>
+          </a:xfrm>
+          <a:prstGeom prst="roundRect">
+            <a:avLst>
+              <a:gd name="adj" fmla="val 9639"/>
+            </a:avLst>
           </a:prstGeom>
           <a:solidFill>
-            <a:srgbClr val="0D9488"/>
+            <a:srgbClr val="F4F8F7"/>
           </a:solidFill>
           <a:ln w="12700">
             <a:solidFill>
-              <a:srgbClr val="333333"/>
+              <a:srgbClr val="FFFFFF"/>
             </a:solidFill>
             <a:prstDash val="solid"/>
           </a:ln>
@@ -5494,73 +6310,69 @@
       </p:sp>
       <p:sp>
         <p:nvSpPr>
-          <p:cNvPr id="10" name="Text 8"/>
-          <p:cNvSpPr txBox="1"/>
-          <p:nvPr/>
-        </p:nvSpPr>
-        <p:spPr>
-          <a:xfrm>
-            <a:off x="4626864" y="2331720"/>
-            <a:ext cx="3017520" cy="777240"/>
-          </a:xfrm>
-          <a:prstGeom prst="rect">
-            <a:avLst/>
-          </a:prstGeom>
-          <a:noFill/>
-          <a:ln/>
-        </p:spPr>
-        <p:txBody>
-          <a:bodyPr wrap="square" lIns="0" tIns="0" rIns="0" bIns="0" rtlCol="0" anchor="ctr"/>
-          <a:lstStyle/>
-          <a:p>
-            <a:pPr indent="0" marL="0">
-              <a:buNone/>
-            </a:pPr>
-            <a:r>
-              <a:rPr lang="en-US" sz="1600" b="1" dirty="0">
-                <a:solidFill>
-                  <a:srgbClr val="14211F"/>
+          <p:cNvPr id="14" name="Text 11"/>
+          <p:cNvSpPr txBox="1"/>
+          <p:nvPr/>
+        </p:nvSpPr>
+        <p:spPr>
+          <a:xfrm>
+            <a:off x="8229600" y="4992624"/>
+            <a:ext cx="3282696" cy="566928"/>
+          </a:xfrm>
+          <a:prstGeom prst="rect">
+            <a:avLst/>
+          </a:prstGeom>
+          <a:noFill/>
+          <a:ln/>
+        </p:spPr>
+        <p:txBody>
+          <a:bodyPr wrap="square" lIns="0" tIns="0" rIns="0" bIns="0" rtlCol="0" anchor="ctr"/>
+          <a:lstStyle/>
+          <a:p>
+            <a:pPr algn="ctr" indent="0" marL="0">
+              <a:buNone/>
+            </a:pPr>
+            <a:r>
+              <a:rPr lang="en-US" sz="3200" b="1" dirty="0">
+                <a:solidFill>
+                  <a:srgbClr val="0D9488"/>
                 </a:solidFill>
                 <a:latin typeface="Cambria" pitchFamily="34" charset="0"/>
                 <a:ea typeface="Cambria" pitchFamily="34" charset="-122"/>
                 <a:cs typeface="Cambria" pitchFamily="34" charset="-120"/>
               </a:rPr>
-              <a:t>How we evaluate</a:t>
-            </a:r>
-            <a:endParaRPr lang="en-US" sz="1600" dirty="0"/>
-          </a:p>
-        </p:txBody>
-      </p:sp>
-      <p:sp>
-        <p:nvSpPr>
-          <p:cNvPr id="11" name="Text 9"/>
-          <p:cNvSpPr txBox="1"/>
-          <p:nvPr/>
-        </p:nvSpPr>
-        <p:spPr>
-          <a:xfrm>
-            <a:off x="4626864" y="3200400"/>
-            <a:ext cx="3017520" cy="2240280"/>
-          </a:xfrm>
-          <a:prstGeom prst="rect">
-            <a:avLst/>
-          </a:prstGeom>
-          <a:noFill/>
-          <a:ln/>
-        </p:spPr>
-        <p:txBody>
-          <a:bodyPr wrap="square" lIns="0" tIns="0" rIns="0" bIns="0" rtlCol="0" anchor="ctr"/>
-          <a:lstStyle/>
-          <a:p>
-            <a:pPr marL="342900" indent="-342900">
-              <a:spcAft>
-                <a:spcPts val="800"/>
-              </a:spcAft>
-              <a:buSzPct val="100000"/>
-              <a:buChar char="•"/>
-            </a:pPr>
-            <a:r>
-              <a:rPr lang="en-US" sz="1200" dirty="0">
+              <a:t>~48 events</a:t>
+            </a:r>
+            <a:endParaRPr lang="en-US" sz="3200" dirty="0"/>
+          </a:p>
+        </p:txBody>
+      </p:sp>
+      <p:sp>
+        <p:nvSpPr>
+          <p:cNvPr id="15" name="Text 12"/>
+          <p:cNvSpPr txBox="1"/>
+          <p:nvPr/>
+        </p:nvSpPr>
+        <p:spPr>
+          <a:xfrm>
+            <a:off x="8293608" y="5577840"/>
+            <a:ext cx="3154680" cy="658368"/>
+          </a:xfrm>
+          <a:prstGeom prst="rect">
+            <a:avLst/>
+          </a:prstGeom>
+          <a:noFill/>
+          <a:ln/>
+        </p:spPr>
+        <p:txBody>
+          <a:bodyPr wrap="square" lIns="0" tIns="0" rIns="0" bIns="0" rtlCol="0" anchor="ctr"/>
+          <a:lstStyle/>
+          <a:p>
+            <a:pPr algn="ctr" indent="0" marL="0">
+              <a:buNone/>
+            </a:pPr>
+            <a:r>
+              <a:rPr lang="en-US" sz="1050" dirty="0">
                 <a:solidFill>
                   <a:srgbClr val="5F706D"/>
                 </a:solidFill>
@@ -5568,41 +6380,52 @@
                 <a:ea typeface="Calibri" pitchFamily="34" charset="-122"/>
                 <a:cs typeface="Calibri" pitchFamily="34" charset="-120"/>
               </a:rPr>
-              <a:t>Lead–lag correlation and Granger-style tests across k = 1…6 months.</a:t>
-            </a:r>
-            <a:endParaRPr lang="en-US" sz="1200" dirty="0"/>
-          </a:p>
-          <a:p>
-            <a:pPr marL="342900" indent="-342900">
-              <a:spcAft>
-                <a:spcPts val="800"/>
-              </a:spcAft>
-              <a:buSzPct val="100000"/>
-              <a:buChar char="•"/>
-            </a:pPr>
-            <a:r>
-              <a:rPr lang="en-US" sz="1200" dirty="0">
-                <a:solidFill>
-                  <a:srgbClr val="5F706D"/>
+              <a:t>if the lag is fixed in advance</a:t>
+            </a:r>
+            <a:endParaRPr lang="en-US" sz="1050" dirty="0"/>
+          </a:p>
+        </p:txBody>
+      </p:sp>
+      <p:sp>
+        <p:nvSpPr>
+          <p:cNvPr id="16" name="Text 13"/>
+          <p:cNvSpPr txBox="1"/>
+          <p:nvPr/>
+        </p:nvSpPr>
+        <p:spPr>
+          <a:xfrm>
+            <a:off x="640080" y="5833872"/>
+            <a:ext cx="10881360" cy="493776"/>
+          </a:xfrm>
+          <a:prstGeom prst="rect">
+            <a:avLst/>
+          </a:prstGeom>
+          <a:noFill/>
+          <a:ln/>
+        </p:spPr>
+        <p:txBody>
+          <a:bodyPr wrap="square" lIns="0" tIns="0" rIns="0" bIns="0" rtlCol="0" anchor="ctr"/>
+          <a:lstStyle/>
+          <a:p>
+            <a:pPr indent="0" marL="0">
+              <a:buNone/>
+            </a:pPr>
+            <a:r>
+              <a:rPr lang="en-US" sz="1300" b="1" dirty="0">
+                <a:solidFill>
+                  <a:srgbClr val="14211F"/>
                 </a:solidFill>
                 <a:latin typeface="Calibri" pitchFamily="34" charset="0"/>
                 <a:ea typeface="Calibri" pitchFamily="34" charset="-122"/>
                 <a:cs typeface="Calibri" pitchFamily="34" charset="-120"/>
               </a:rPr>
-              <a:t>Baseline to beat: announcement counts predicted by their own lag plus a time trend.</a:t>
-            </a:r>
-            <a:endParaRPr lang="en-US" sz="1200" dirty="0"/>
-          </a:p>
-          <a:p>
-            <a:pPr marL="342900" indent="-342900">
-              <a:spcAft>
-                <a:spcPts val="800"/>
-              </a:spcAft>
-              <a:buSzPct val="100000"/>
-              <a:buChar char="•"/>
-            </a:pPr>
-            <a:r>
-              <a:rPr lang="en-US" sz="1200" dirty="0">
+              <a:t>At our 16 events a moderate effect is caught 15% of the time. </a:t>
+            </a:r>
+            <a:pPr indent="0" marL="0">
+              <a:buNone/>
+            </a:pPr>
+            <a:r>
+              <a:rPr lang="en-US" sz="1300" dirty="0">
                 <a:solidFill>
                   <a:srgbClr val="5F706D"/>
                 </a:solidFill>
@@ -5610,203 +6433,9 @@
                 <a:ea typeface="Calibri" pitchFamily="34" charset="-122"/>
                 <a:cs typeface="Calibri" pitchFamily="34" charset="-120"/>
               </a:rPr>
-              <a:t>Placebo: shuffle announcement dates within year; the lead must vanish.</a:t>
-            </a:r>
-            <a:endParaRPr lang="en-US" sz="1200" dirty="0"/>
-          </a:p>
-        </p:txBody>
-      </p:sp>
-      <p:sp>
-        <p:nvSpPr>
-          <p:cNvPr id="12" name="Shape 10"/>
-          <p:cNvSpPr/>
-          <p:nvPr/>
-        </p:nvSpPr>
-        <p:spPr>
-          <a:xfrm>
-            <a:off x="8065008" y="1645920"/>
-            <a:ext cx="3566160" cy="3931920"/>
-          </a:xfrm>
-          <a:prstGeom prst="roundRect">
-            <a:avLst>
-              <a:gd name="adj" fmla="val 2051"/>
-            </a:avLst>
-          </a:prstGeom>
-          <a:solidFill>
-            <a:srgbClr val="FDF1EC"/>
-          </a:solidFill>
-          <a:ln w="12700">
-            <a:solidFill>
-              <a:srgbClr val="333333"/>
-            </a:solidFill>
-            <a:prstDash val="solid"/>
-          </a:ln>
-        </p:spPr>
-      </p:sp>
-      <p:sp>
-        <p:nvSpPr>
-          <p:cNvPr id="13" name="Shape 11"/>
-          <p:cNvSpPr/>
-          <p:nvPr/>
-        </p:nvSpPr>
-        <p:spPr>
-          <a:xfrm>
-            <a:off x="8339328" y="1920240"/>
-            <a:ext cx="274320" cy="274320"/>
-          </a:xfrm>
-          <a:prstGeom prst="ellipse">
-            <a:avLst/>
-          </a:prstGeom>
-          <a:solidFill>
-            <a:srgbClr val="D94F04"/>
-          </a:solidFill>
-          <a:ln w="12700">
-            <a:solidFill>
-              <a:srgbClr val="333333"/>
-            </a:solidFill>
-            <a:prstDash val="solid"/>
-          </a:ln>
-        </p:spPr>
-      </p:sp>
-      <p:sp>
-        <p:nvSpPr>
-          <p:cNvPr id="14" name="Text 12"/>
-          <p:cNvSpPr txBox="1"/>
-          <p:nvPr/>
-        </p:nvSpPr>
-        <p:spPr>
-          <a:xfrm>
-            <a:off x="8339328" y="2331720"/>
-            <a:ext cx="3017520" cy="777240"/>
-          </a:xfrm>
-          <a:prstGeom prst="rect">
-            <a:avLst/>
-          </a:prstGeom>
-          <a:noFill/>
-          <a:ln/>
-        </p:spPr>
-        <p:txBody>
-          <a:bodyPr wrap="square" lIns="0" tIns="0" rIns="0" bIns="0" rtlCol="0" anchor="ctr"/>
-          <a:lstStyle/>
-          <a:p>
-            <a:pPr indent="0" marL="0">
-              <a:buNone/>
-            </a:pPr>
-            <a:r>
-              <a:rPr lang="en-US" sz="1600" b="1" dirty="0">
-                <a:solidFill>
-                  <a:srgbClr val="14211F"/>
-                </a:solidFill>
-                <a:latin typeface="Cambria" pitchFamily="34" charset="0"/>
-                <a:ea typeface="Cambria" pitchFamily="34" charset="-122"/>
-                <a:cs typeface="Cambria" pitchFamily="34" charset="-120"/>
-              </a:rPr>
-              <a:t>Where it breaks</a:t>
-            </a:r>
-            <a:endParaRPr lang="en-US" sz="1600" dirty="0"/>
-          </a:p>
-        </p:txBody>
-      </p:sp>
-      <p:sp>
-        <p:nvSpPr>
-          <p:cNvPr id="15" name="Text 13"/>
-          <p:cNvSpPr txBox="1"/>
-          <p:nvPr/>
-        </p:nvSpPr>
-        <p:spPr>
-          <a:xfrm>
-            <a:off x="8339328" y="3200400"/>
-            <a:ext cx="3017520" cy="2240280"/>
-          </a:xfrm>
-          <a:prstGeom prst="rect">
-            <a:avLst/>
-          </a:prstGeom>
-          <a:noFill/>
-          <a:ln/>
-        </p:spPr>
-        <p:txBody>
-          <a:bodyPr wrap="square" lIns="0" tIns="0" rIns="0" bIns="0" rtlCol="0" anchor="ctr"/>
-          <a:lstStyle/>
-          <a:p>
-            <a:pPr marL="342900" indent="-342900">
-              <a:spcAft>
-                <a:spcPts val="800"/>
-              </a:spcAft>
-              <a:buSzPct val="100000"/>
-              <a:buChar char="•"/>
-            </a:pPr>
-            <a:r>
-              <a:rPr lang="en-US" sz="1200" dirty="0">
-                <a:solidFill>
-                  <a:srgbClr val="5F706D"/>
-                </a:solidFill>
-                <a:latin typeface="Calibri" pitchFamily="34" charset="0"/>
-                <a:ea typeface="Calibri" pitchFamily="34" charset="-122"/>
-                <a:cs typeface="Calibri" pitchFamily="34" charset="-120"/>
-              </a:rPr>
-              <a:t>n is the binding constraint, not method. 40 months of X against 8 months carrying a dated event.</a:t>
-            </a:r>
-            <a:endParaRPr lang="en-US" sz="1200" dirty="0"/>
-          </a:p>
-          <a:p>
-            <a:pPr marL="342900" indent="-342900">
-              <a:spcAft>
-                <a:spcPts val="800"/>
-              </a:spcAft>
-              <a:buSzPct val="100000"/>
-              <a:buChar char="•"/>
-            </a:pPr>
-            <a:r>
-              <a:rPr lang="en-US" sz="1200" dirty="0">
-                <a:solidFill>
-                  <a:srgbClr val="5F706D"/>
-                </a:solidFill>
-                <a:latin typeface="Calibri" pitchFamily="34" charset="0"/>
-                <a:ea typeface="Calibri" pitchFamily="34" charset="-122"/>
-                <a:cs typeface="Calibri" pitchFamily="34" charset="-120"/>
-              </a:rPr>
-              <a:t>We report achieved power. If it is too low to distinguish a real null from an underpowered one, we say so.</a:t>
-            </a:r>
-            <a:endParaRPr lang="en-US" sz="1200" dirty="0"/>
-          </a:p>
-        </p:txBody>
-      </p:sp>
-      <p:sp>
-        <p:nvSpPr>
-          <p:cNvPr id="16" name="Text 14"/>
-          <p:cNvSpPr txBox="1"/>
-          <p:nvPr/>
-        </p:nvSpPr>
-        <p:spPr>
-          <a:xfrm>
-            <a:off x="640080" y="5852160"/>
-            <a:ext cx="10881360" cy="365760"/>
-          </a:xfrm>
-          <a:prstGeom prst="rect">
-            <a:avLst/>
-          </a:prstGeom>
-          <a:noFill/>
-          <a:ln/>
-        </p:spPr>
-        <p:txBody>
-          <a:bodyPr wrap="square" lIns="0" tIns="0" rIns="0" bIns="0" rtlCol="0" anchor="ctr"/>
-          <a:lstStyle/>
-          <a:p>
-            <a:pPr indent="0" marL="0">
-              <a:buNone/>
-            </a:pPr>
-            <a:r>
-              <a:rPr lang="en-US" sz="1200" i="1" dirty="0">
-                <a:solidFill>
-                  <a:srgbClr val="5F706D"/>
-                </a:solidFill>
-                <a:latin typeface="Calibri" pitchFamily="34" charset="0"/>
-                <a:ea typeface="Calibri" pitchFamily="34" charset="-122"/>
-                <a:cs typeface="Calibri" pitchFamily="34" charset="-120"/>
-              </a:rPr>
-              <a:t>The honest framing: with the dependent variable as thin as it is, the most likely outcome is an underpowered null — which is worth reporting as such.</a:t>
-            </a:r>
-            <a:endParaRPr lang="en-US" sz="1200" dirty="0"/>
+              <a:t>Fixing the lag in advance cuts the events we need by a third — the cheapest win available.</a:t>
+            </a:r>
+            <a:endParaRPr lang="en-US" sz="1300" dirty="0"/>
           </a:p>
         </p:txBody>
       </p:sp>
@@ -6159,7 +6788,7 @@
                 <a:ea typeface="Cambria" pitchFamily="34" charset="-122"/>
                 <a:cs typeface="Cambria" pitchFamily="34" charset="-120"/>
               </a:rPr>
-              <a:t>Scale the event extraction</a:t>
+              <a:t>Scale to the power target</a:t>
             </a:r>
             <a:endParaRPr lang="en-US" sz="1600" dirty="0"/>
           </a:p>
@@ -6198,7 +6827,7 @@
                 <a:ea typeface="Calibri" pitchFamily="34" charset="-122"/>
                 <a:cs typeface="Calibri" pitchFamily="34" charset="-120"/>
               </a:rPr>
-              <a:t>Systematic sweep of the filings corpus across the full company roster, applying that rule. Target a usable monthly series.</a:t>
+              <a:t>Systematic sweep of the filings corpus under that rule. We need 45–75 dated events; we have 22 dated, 16 inside the production window.</a:t>
             </a:r>
             <a:endParaRPr lang="en-US" sz="1250" dirty="0"/>
           </a:p>
@@ -6443,7 +7072,7 @@
                 <a:ea typeface="Cambria" pitchFamily="34" charset="-122"/>
                 <a:cs typeface="Cambria" pitchFamily="34" charset="-120"/>
               </a:rPr>
-              <a:t>Run the lead–lag tests</a:t>
+              <a:t>Run the tests</a:t>
             </a:r>
             <a:endParaRPr lang="en-US" sz="1600" dirty="0"/>
           </a:p>
@@ -6482,7 +7111,7 @@
                 <a:ea typeface="Calibri" pitchFamily="34" charset="-122"/>
                 <a:cs typeface="Calibri" pitchFamily="34" charset="-120"/>
               </a:rPr>
-              <a:t>k = 1…6, with the baseline and placebo checks. Report achieved power alongside every coefficient.</a:t>
+              <a:t>Lag pre-registered at k=3 rather than scanned, with the baseline and placebo checks. Achieved power beside every coefficient.</a:t>
             </a:r>
             <a:endParaRPr lang="en-US" sz="1250" dirty="0"/>
           </a:p>
@@ -7008,7 +7637,7 @@
                 <a:ea typeface="Calibri" pitchFamily="34" charset="-122"/>
                 <a:cs typeface="Calibri" pitchFamily="34" charset="-120"/>
               </a:rPr>
-              <a:t>21 hand-coded filing events, 16 companies. Only 11 carry a date better than a fiscal period, and only 9 fall inside the 40-month production window — across 8 distinct months.</a:t>
+              <a:t>34 events across 24 companies, hand-coded from filings. 22 carry a date better than a fiscal period, but only 16 land inside the 40-month production window — across 11 months. The power study says we need 45–75.</a:t>
             </a:r>
             <a:endParaRPr lang="en-US" sz="1150" dirty="0"/>
           </a:p>

--- a/presentations/ev-investment-update.pptx
+++ b/presentations/ev-investment-update.pptx
@@ -2634,7 +2634,7 @@
 • The four questions are the real ask
 • Q2 (the inclusion rule) unblocks the most work — push for an answer on that
 • Q1 (a better capex feed) is highest value if the answer is yes
-• Fallback if events stay low: pre-register the lag, or pivot to the state panel</a:t>
+• Fallback if events stay well short of 45-75: pre-register the lag, or pivot to the state panel</a:t>
             </a:r>
             <a:endParaRPr lang="en-US" dirty="0"/>
           </a:p>
@@ -7914,7 +7914,7 @@
                 <a:ea typeface="Calibri" pitchFamily="34" charset="-122"/>
                 <a:cs typeface="Calibri" pitchFamily="34" charset="-120"/>
               </a:rPr>
-              <a:t>If the dated-event count stays in single digits, do you prefer an underpowered national test or a pivot to the state panel?</a:t>
+              <a:t>If the dated-event count stays well short of 45–75, do you prefer an underpowered national test or a pivot to the state panel?</a:t>
             </a:r>
             <a:endParaRPr lang="en-US" sz="1200" dirty="0"/>
           </a:p>

--- a/presentations/ev-investment-update.pptx
+++ b/presentations/ev-investment-update.pptx
@@ -7928,8 +7928,8 @@
         </p:nvSpPr>
         <p:spPr>
           <a:xfrm>
-            <a:off x="640080" y="5943600"/>
-            <a:ext cx="10881360" cy="365760"/>
+            <a:off x="640080" y="5907024"/>
+            <a:ext cx="7452360" cy="420624"/>
           </a:xfrm>
           <a:prstGeom prst="rect">
             <a:avLst/>
@@ -7956,6 +7956,45 @@
               <a:t>None of this blocks the stretch question — the state panel has 3,216 clean rows and reconciles exactly.</a:t>
             </a:r>
             <a:endParaRPr lang="en-US" sz="1200" dirty="0"/>
+          </a:p>
+        </p:txBody>
+      </p:sp>
+      <p:sp>
+        <p:nvSpPr>
+          <p:cNvPr id="18" name="Text 16"/>
+          <p:cNvSpPr txBox="1"/>
+          <p:nvPr/>
+        </p:nvSpPr>
+        <p:spPr>
+          <a:xfrm>
+            <a:off x="8183880" y="5907024"/>
+            <a:ext cx="3355848" cy="420624"/>
+          </a:xfrm>
+          <a:prstGeom prst="rect">
+            <a:avLst/>
+          </a:prstGeom>
+          <a:noFill/>
+          <a:ln/>
+        </p:spPr>
+        <p:txBody>
+          <a:bodyPr wrap="square" lIns="0" tIns="0" rIns="0" bIns="0" rtlCol="0" anchor="ctr"/>
+          <a:lstStyle/>
+          <a:p>
+            <a:pPr algn="r" indent="0" marL="0">
+              <a:buNone/>
+            </a:pPr>
+            <a:r>
+              <a:rPr lang="en-US" sz="950" dirty="0">
+                <a:solidFill>
+                  <a:srgbClr val="8FB4AF"/>
+                </a:solidFill>
+                <a:latin typeface="Calibri" pitchFamily="34" charset="0"/>
+                <a:ea typeface="Calibri" pitchFamily="34" charset="-122"/>
+                <a:cs typeface="Calibri" pitchFamily="34" charset="-120"/>
+              </a:rPr>
+              <a:t>Slide design and layout generated with Claude (Anthropic Claude Code)</a:t>
+            </a:r>
+            <a:endParaRPr lang="en-US" sz="950" dirty="0"/>
           </a:p>
         </p:txBody>
       </p:sp>

--- a/presentations/ev-investment-update.pptx
+++ b/presentations/ev-investment-update.pptx
@@ -12,10 +12,9 @@
     <p:sldId id="260" r:id="rId6"/>
     <p:sldId id="261" r:id="rId7"/>
     <p:sldId id="262" r:id="rId8"/>
-    <p:sldId id="263" r:id="rId9"/>
   </p:sldIdLst>
   <p:notesMasterIdLst>
-    <p:notesMasterId r:id="rId10"/>
+    <p:notesMasterId r:id="rId9"/>
   </p:notesMasterIdLst>
   <p:sldSz cx="12192000" cy="6858000"/>
   <p:notesSz cx="6858000" cy="12192000"/>
@@ -411,587 +410,6 @@
     <c:autoTitleDeleted val="1"/>
     <c:plotArea>
       <c:layout/>
-      <c:barChart>
-        <c:barDir val="bar"/>
-        <c:grouping val="clustered"/>
-        <c:varyColors val="0"/>
-        <c:ser>
-          <c:idx val="0"/>
-          <c:order val="0"/>
-          <c:tx>
-            <c:strRef>
-              <c:f>Sheet1!$B$1</c:f>
-              <c:strCache>
-                <c:ptCount val="1"/>
-                <c:pt idx="0">
-                  <c:v>Share of 2026 EV registrations</c:v>
-                </c:pt>
-              </c:strCache>
-            </c:strRef>
-          </c:tx>
-          <c:spPr>
-            <a:solidFill>
-              <a:srgbClr val="0D9488"/>
-            </a:solidFill>
-            <a:effectLst/>
-          </c:spPr>
-          <c:invertIfNegative val="0"/>
-          <c:dLbls>
-            <c:numFmt formatCode="0.0&quot;%&quot;" sourceLinked="0"/>
-            <c:txPr>
-              <a:bodyPr/>
-              <a:lstStyle/>
-              <a:p>
-                <a:pPr>
-                  <a:defRPr b="0" i="0" strike="noStrike" sz="1000" u="none">
-                    <a:solidFill>
-                      <a:srgbClr val="5F706D"/>
-                    </a:solidFill>
-                    <a:latin typeface="Calibri"/>
-                  </a:defRPr>
-                </a:pPr>
-              </a:p>
-            </c:txPr>
-            <c:showLegendKey val="0"/>
-            <c:showVal val="1"/>
-            <c:showCatName val="0"/>
-            <c:showSerName val="0"/>
-            <c:showPercent val="0"/>
-            <c:showBubbleSize val="0"/>
-            <c:showLeaderLines val="0"/>
-          </c:dLbls>
-          <c:cat>
-            <c:multiLvlStrRef>
-              <c:f>Sheet1!$A$2:$A$9</c:f>
-              <c:multiLvlStrCache>
-                <c:ptCount val="8"/>
-                <c:lvl>
-                  <c:pt idx="0">
-                    <c:v>Uttar Pradesh</c:v>
-                  </c:pt>
-                  <c:pt idx="1">
-                    <c:v>Maharashtra</c:v>
-                  </c:pt>
-                  <c:pt idx="2">
-                    <c:v>Karnataka</c:v>
-                  </c:pt>
-                  <c:pt idx="3">
-                    <c:v>Tamil Nadu</c:v>
-                  </c:pt>
-                  <c:pt idx="4">
-                    <c:v>Madhya Pradesh</c:v>
-                  </c:pt>
-                  <c:pt idx="5">
-                    <c:v>Rajasthan</c:v>
-                  </c:pt>
-                  <c:pt idx="6">
-                    <c:v>West Bengal</c:v>
-                  </c:pt>
-                  <c:pt idx="7">
-                    <c:v>Bihar</c:v>
-                  </c:pt>
-                </c:lvl>
-              </c:multiLvlStrCache>
-            </c:multiLvlStrRef>
-          </c:cat>
-          <c:val>
-            <c:numRef>
-              <c:f>Sheet1!$B$2:$B$9</c:f>
-              <c:numCache>
-                <c:formatCode>General</c:formatCode>
-                <c:ptCount val="8"/>
-                <c:pt idx="0">
-                  <c:v>14.2</c:v>
-                </c:pt>
-                <c:pt idx="1">
-                  <c:v>11.2</c:v>
-                </c:pt>
-                <c:pt idx="2">
-                  <c:v>9.2</c:v>
-                </c:pt>
-                <c:pt idx="3">
-                  <c:v>8.6</c:v>
-                </c:pt>
-                <c:pt idx="4">
-                  <c:v>5.8</c:v>
-                </c:pt>
-                <c:pt idx="5">
-                  <c:v>5.1</c:v>
-                </c:pt>
-                <c:pt idx="6">
-                  <c:v>5</c:v>
-                </c:pt>
-                <c:pt idx="7">
-                  <c:v>4.7</c:v>
-                </c:pt>
-              </c:numCache>
-            </c:numRef>
-          </c:val>
-        </c:ser>
-        <c:dLbls>
-          <c:numFmt formatCode="0.0&quot;%&quot;" sourceLinked="0"/>
-          <c:txPr>
-            <a:bodyPr/>
-            <a:lstStyle/>
-            <a:p>
-              <a:pPr>
-                <a:defRPr b="0" i="0" strike="noStrike" sz="1000" u="none">
-                  <a:solidFill>
-                    <a:srgbClr val="5F706D"/>
-                  </a:solidFill>
-                  <a:latin typeface="Calibri"/>
-                </a:defRPr>
-              </a:pPr>
-            </a:p>
-          </c:txPr>
-          <c:showLegendKey val="0"/>
-          <c:showVal val="1"/>
-          <c:showCatName val="0"/>
-          <c:showSerName val="0"/>
-          <c:showPercent val="0"/>
-          <c:showBubbleSize val="0"/>
-          <c:showLeaderLines val="0"/>
-        </c:dLbls>
-        <c:gapWidth val="45"/>
-        <c:overlap val="0"/>
-        <c:axId val="2094734554"/>
-        <c:axId val="2094734552"/>
-        <c:axId val="2094734556"/>
-      </c:barChart>
-      <c:catAx>
-        <c:axId val="2094734554"/>
-        <c:scaling>
-          <c:orientation val="minMax"/>
-        </c:scaling>
-        <c:delete val="0"/>
-        <c:axPos val="l"/>
-        <c:numFmt formatCode="General" sourceLinked="1"/>
-        <c:majorTickMark val="out"/>
-        <c:minorTickMark val="none"/>
-        <c:tickLblPos val="nextTo"/>
-        <c:spPr>
-          <a:ln w="12700" cap="flat">
-            <a:noFill/>
-            <a:prstDash val="solid"/>
-            <a:round/>
-          </a:ln>
-        </c:spPr>
-        <c:txPr>
-          <a:bodyPr/>
-          <a:lstStyle/>
-          <a:p>
-            <a:pPr>
-              <a:defRPr sz="1100" b="0" i="0" u="none" strike="noStrike">
-                <a:solidFill>
-                  <a:srgbClr val="5F706D"/>
-                </a:solidFill>
-                <a:latin typeface="Calibri"/>
-              </a:defRPr>
-            </a:pPr>
-            <a:endParaRPr lang="en-US"/>
-          </a:p>
-        </c:txPr>
-        <c:crossAx val="2094734552"/>
-        <c:crosses val="autoZero"/>
-        <c:auto val="1"/>
-        <c:lblAlgn val="ctr"/>
-        <c:noMultiLvlLbl val="1"/>
-      </c:catAx>
-      <c:valAx>
-        <c:axId val="2094734552"/>
-        <c:scaling>
-          <c:orientation val="minMax"/>
-        </c:scaling>
-        <c:delete val="1"/>
-        <c:axPos val="b"/>
-        <c:numFmt formatCode="General" sourceLinked="0"/>
-        <c:majorTickMark val="out"/>
-        <c:minorTickMark val="none"/>
-        <c:tickLblPos val="low"/>
-        <c:spPr>
-          <a:ln w="12700" cap="flat">
-            <a:noFill/>
-            <a:prstDash val="solid"/>
-            <a:round/>
-          </a:ln>
-        </c:spPr>
-        <c:txPr>
-          <a:bodyPr/>
-          <a:lstStyle/>
-          <a:p>
-            <a:pPr>
-              <a:defRPr sz="1100" b="0" i="0" u="none" strike="noStrike">
-                <a:solidFill>
-                  <a:srgbClr val="5F706D"/>
-                </a:solidFill>
-                <a:latin typeface="Calibri"/>
-              </a:defRPr>
-            </a:pPr>
-            <a:endParaRPr lang="en-US"/>
-          </a:p>
-        </c:txPr>
-        <c:crossAx val="2094734554"/>
-        <c:crosses val="autoZero"/>
-        <c:crossBetween val="between"/>
-      </c:valAx>
-      <c:spPr>
-        <a:noFill/>
-        <a:ln>
-          <a:noFill/>
-        </a:ln>
-        <a:effectLst/>
-      </c:spPr>
-    </c:plotArea>
-    <c:plotVisOnly val="1"/>
-    <c:dispBlanksAs val="span"/>
-  </c:chart>
-  <c:spPr>
-    <a:noFill/>
-    <a:ln>
-      <a:noFill/>
-    </a:ln>
-    <a:effectLst/>
-  </c:spPr>
-  <c:externalData r:id="rId1">
-    <c:autoUpdate val="0"/>
-  </c:externalData>
-</c:chartSpace>
-</file>
-
-<file path=ppt/charts/chart3.xml><?xml version="1.0" encoding="utf-8"?>
-<c:chartSpace xmlns:c="http://schemas.openxmlformats.org/drawingml/2006/chart" xmlns:a="http://schemas.openxmlformats.org/drawingml/2006/main" xmlns:r="http://schemas.openxmlformats.org/officeDocument/2006/relationships">
-  <c:date1904 val="0"/>
-  <c:roundedCorners val="1"/>
-  <c:chart>
-    <c:autoTitleDeleted val="1"/>
-    <c:plotArea>
-      <c:layout/>
-      <c:lineChart>
-        <c:varyColors val="0"/>
-        <c:ser>
-          <c:idx val="0"/>
-          <c:order val="0"/>
-          <c:tx>
-            <c:strRef>
-              <c:f>Sheet1!$B$1</c:f>
-              <c:strCache>
-                <c:ptCount val="1"/>
-                <c:pt idx="0">
-                  <c:v>Production as % of registrations</c:v>
-                </c:pt>
-              </c:strCache>
-            </c:strRef>
-          </c:tx>
-          <c:spPr>
-            <a:solidFill>
-              <a:srgbClr val="7048C4"/>
-            </a:solidFill>
-            <a:ln w="38100" cap="flat">
-              <a:solidFill>
-                <a:srgbClr val="7048C4"/>
-              </a:solidFill>
-              <a:prstDash val="solid"/>
-              <a:round/>
-            </a:ln>
-            <a:effectLst/>
-          </c:spPr>
-          <c:invertIfNegative val="0"/>
-          <c:dLbls>
-            <c:numFmt formatCode="#,##0" sourceLinked="0"/>
-            <c:txPr>
-              <a:bodyPr/>
-              <a:lstStyle/>
-              <a:p>
-                <a:pPr>
-                  <a:defRPr b="0" i="0" strike="noStrike" sz="1200" u="none">
-                    <a:solidFill>
-                      <a:srgbClr val="000000"/>
-                    </a:solidFill>
-                    <a:latin typeface="Arial"/>
-                  </a:defRPr>
-                </a:pPr>
-              </a:p>
-            </c:txPr>
-            <c:showLegendKey val="0"/>
-            <c:showVal val="0"/>
-            <c:showCatName val="0"/>
-            <c:showSerName val="0"/>
-            <c:showPercent val="0"/>
-            <c:showBubbleSize val="0"/>
-            <c:showLeaderLines val="0"/>
-          </c:dLbls>
-          <c:marker>
-            <c:symbol val="circle"/>
-            <c:size val="6"/>
-            <c:spPr>
-              <a:solidFill>
-                <a:srgbClr val="7048C4"/>
-              </a:solidFill>
-              <a:ln w="9525" cap="flat">
-                <a:solidFill>
-                  <a:srgbClr val="7048C4"/>
-                </a:solidFill>
-                <a:prstDash val="solid"/>
-                <a:round/>
-              </a:ln>
-              <a:effectLst/>
-            </c:spPr>
-          </c:marker>
-          <c:cat>
-            <c:multiLvlStrRef>
-              <c:f>Sheet1!$A$2:$A$15</c:f>
-              <c:multiLvlStrCache>
-                <c:ptCount val="14"/>
-                <c:lvl>
-                  <c:pt idx="0">
-                    <c:v>23Q2</c:v>
-                  </c:pt>
-                  <c:pt idx="1">
-                    <c:v>23Q3</c:v>
-                  </c:pt>
-                  <c:pt idx="2">
-                    <c:v>23Q4</c:v>
-                  </c:pt>
-                  <c:pt idx="3">
-                    <c:v>24Q1</c:v>
-                  </c:pt>
-                  <c:pt idx="4">
-                    <c:v>24Q2</c:v>
-                  </c:pt>
-                  <c:pt idx="5">
-                    <c:v>24Q3</c:v>
-                  </c:pt>
-                  <c:pt idx="6">
-                    <c:v>24Q4</c:v>
-                  </c:pt>
-                  <c:pt idx="7">
-                    <c:v>25Q1</c:v>
-                  </c:pt>
-                  <c:pt idx="8">
-                    <c:v>25Q2</c:v>
-                  </c:pt>
-                  <c:pt idx="9">
-                    <c:v>25Q3</c:v>
-                  </c:pt>
-                  <c:pt idx="10">
-                    <c:v>25Q4</c:v>
-                  </c:pt>
-                  <c:pt idx="11">
-                    <c:v>26Q1</c:v>
-                  </c:pt>
-                  <c:pt idx="12">
-                    <c:v>26Q2</c:v>
-                  </c:pt>
-                  <c:pt idx="13">
-                    <c:v>26Q3</c:v>
-                  </c:pt>
-                </c:lvl>
-              </c:multiLvlStrCache>
-            </c:multiLvlStrRef>
-          </c:cat>
-          <c:val>
-            <c:numRef>
-              <c:f>Sheet1!$B$2:$B$15</c:f>
-              <c:numCache>
-                <c:formatCode>General</c:formatCode>
-                <c:ptCount val="14"/>
-                <c:pt idx="0">
-                  <c:v>26.5</c:v>
-                </c:pt>
-                <c:pt idx="1">
-                  <c:v>34.9</c:v>
-                </c:pt>
-                <c:pt idx="2">
-                  <c:v>27.6</c:v>
-                </c:pt>
-                <c:pt idx="3">
-                  <c:v>25.7</c:v>
-                </c:pt>
-                <c:pt idx="4">
-                  <c:v>33.9</c:v>
-                </c:pt>
-                <c:pt idx="5">
-                  <c:v>44.6</c:v>
-                </c:pt>
-                <c:pt idx="6">
-                  <c:v>37.7</c:v>
-                </c:pt>
-                <c:pt idx="7">
-                  <c:v>44.8</c:v>
-                </c:pt>
-                <c:pt idx="8">
-                  <c:v>42.9</c:v>
-                </c:pt>
-                <c:pt idx="9">
-                  <c:v>49.1</c:v>
-                </c:pt>
-                <c:pt idx="10">
-                  <c:v>49.4</c:v>
-                </c:pt>
-                <c:pt idx="11">
-                  <c:v>53.8</c:v>
-                </c:pt>
-                <c:pt idx="12">
-                  <c:v>54.1</c:v>
-                </c:pt>
-                <c:pt idx="13">
-                  <c:v>59.9</c:v>
-                </c:pt>
-              </c:numCache>
-            </c:numRef>
-          </c:val>
-          <c:smooth val="0"/>
-        </c:ser>
-        <c:dLbls>
-          <c:numFmt formatCode="#,##0" sourceLinked="0"/>
-          <c:txPr>
-            <a:bodyPr/>
-            <a:lstStyle/>
-            <a:p>
-              <a:pPr>
-                <a:defRPr b="0" i="0" strike="noStrike" sz="1200" u="none">
-                  <a:solidFill>
-                    <a:srgbClr val="000000"/>
-                  </a:solidFill>
-                  <a:latin typeface="Arial"/>
-                </a:defRPr>
-              </a:pPr>
-            </a:p>
-          </c:txPr>
-          <c:showLegendKey val="0"/>
-          <c:showVal val="0"/>
-          <c:showCatName val="0"/>
-          <c:showSerName val="0"/>
-          <c:showPercent val="0"/>
-          <c:showBubbleSize val="0"/>
-          <c:showLeaderLines val="0"/>
-        </c:dLbls>
-        <c:marker val="1"/>
-        <c:axId val="2094734554"/>
-        <c:axId val="2094734552"/>
-        <c:axId val="2094734556"/>
-      </c:lineChart>
-      <c:catAx>
-        <c:axId val="2094734554"/>
-        <c:scaling>
-          <c:orientation val="minMax"/>
-        </c:scaling>
-        <c:delete val="0"/>
-        <c:axPos val="b"/>
-        <c:numFmt formatCode="General" sourceLinked="1"/>
-        <c:majorTickMark val="out"/>
-        <c:minorTickMark val="none"/>
-        <c:tickLblPos val="low"/>
-        <c:spPr>
-          <a:ln w="12700" cap="flat">
-            <a:noFill/>
-            <a:prstDash val="solid"/>
-            <a:round/>
-          </a:ln>
-        </c:spPr>
-        <c:txPr>
-          <a:bodyPr/>
-          <a:lstStyle/>
-          <a:p>
-            <a:pPr>
-              <a:defRPr sz="1100" b="0" i="0" u="none" strike="noStrike">
-                <a:solidFill>
-                  <a:srgbClr val="5F706D"/>
-                </a:solidFill>
-                <a:latin typeface="Calibri"/>
-              </a:defRPr>
-            </a:pPr>
-            <a:endParaRPr lang="en-US"/>
-          </a:p>
-        </c:txPr>
-        <c:crossAx val="2094734552"/>
-        <c:crosses val="autoZero"/>
-        <c:auto val="1"/>
-        <c:lblAlgn val="ctr"/>
-        <c:noMultiLvlLbl val="1"/>
-      </c:catAx>
-      <c:valAx>
-        <c:axId val="2094734552"/>
-        <c:scaling>
-          <c:orientation val="minMax"/>
-          <c:max val="70"/>
-          <c:min val="0"/>
-        </c:scaling>
-        <c:delete val="0"/>
-        <c:axPos val="l"/>
-        <c:majorGridlines>
-          <c:spPr>
-            <a:ln w="12700" cap="flat">
-              <a:solidFill>
-                <a:srgbClr val="DCE4E2"/>
-              </a:solidFill>
-              <a:prstDash val="solid"/>
-              <a:round/>
-            </a:ln>
-          </c:spPr>
-        </c:majorGridlines>
-        <c:numFmt formatCode="0&quot;%&quot;" sourceLinked="0"/>
-        <c:majorTickMark val="out"/>
-        <c:minorTickMark val="none"/>
-        <c:tickLblPos val="nextTo"/>
-        <c:spPr>
-          <a:ln w="12700" cap="flat">
-            <a:noFill/>
-            <a:prstDash val="solid"/>
-            <a:round/>
-          </a:ln>
-        </c:spPr>
-        <c:txPr>
-          <a:bodyPr/>
-          <a:lstStyle/>
-          <a:p>
-            <a:pPr>
-              <a:defRPr sz="1100" b="0" i="0" u="none" strike="noStrike">
-                <a:solidFill>
-                  <a:srgbClr val="5F706D"/>
-                </a:solidFill>
-                <a:latin typeface="Calibri"/>
-              </a:defRPr>
-            </a:pPr>
-            <a:endParaRPr lang="en-US"/>
-          </a:p>
-        </c:txPr>
-        <c:crossAx val="2094734554"/>
-        <c:crosses val="autoZero"/>
-        <c:crossBetween val="between"/>
-      </c:valAx>
-      <c:spPr>
-        <a:noFill/>
-        <a:ln>
-          <a:noFill/>
-        </a:ln>
-        <a:effectLst/>
-      </c:spPr>
-    </c:plotArea>
-    <c:plotVisOnly val="1"/>
-    <c:dispBlanksAs val="span"/>
-  </c:chart>
-  <c:spPr>
-    <a:noFill/>
-    <a:ln>
-      <a:noFill/>
-    </a:ln>
-    <a:effectLst/>
-  </c:spPr>
-  <c:externalData r:id="rId1">
-    <c:autoUpdate val="0"/>
-  </c:externalData>
-</c:chartSpace>
-</file>
-
-<file path=ppt/charts/chart4.xml><?xml version="1.0" encoding="utf-8"?>
-<c:chartSpace xmlns:c="http://schemas.openxmlformats.org/drawingml/2006/chart" xmlns:a="http://schemas.openxmlformats.org/drawingml/2006/main" xmlns:r="http://schemas.openxmlformats.org/officeDocument/2006/relationships">
-  <c:date1904 val="0"/>
-  <c:roundedCorners val="1"/>
-  <c:chart>
-    <c:autoTitleDeleted val="1"/>
-    <c:plotArea>
-      <c:layout/>
       <c:lineChart>
         <c:varyColors val="0"/>
         <c:ser>
@@ -1965,7 +1383,7 @@
           <a:p>
             <a:r>
               <a:rPr lang="en-US" dirty="0"/>
-              <a:t>• 30 seconds here — set the frame and move on
+              <a:t>• 15 seconds — set the frame and move on
 • Question: does national EV production growth lead investment announcements
 • Alt-data angle: production as an early signal of where capital gets committed
 • Two parts: national (primary), state siting (stretch)
@@ -2057,7 +1475,7 @@
           <a:p>
             <a:r>
               <a:rPr lang="en-US" dirty="0"/>
-              <a:t>• Say explicitly that the primary question is gradeable on its own
+              <a:t>• ~40 seconds. Say explicitly that the primary question is gradeable on its own
 • X = monthly national EV production growth
 • Y = count and value of new manufacturing-investment announcements
 • The test is lead-lag: does X move first, and at what lag
@@ -2151,7 +1569,7 @@
           <a:p>
             <a:r>
               <a:rPr lang="en-US" dirty="0"/>
-              <a:t>• Three of four datasets landed clean — do not dwell, 60 seconds max
+              <a:t>• ~40 seconds. Three of four landed clean — point at the cards, do not narrate them
 • Production: SIAM, 40 usable months, 2023-04 to 2026-07
 • Registrations: VAHAN, 3,216 state-month rows, reconciles exactly to the national file
 • Pricing: 654 variants, weekly from Nov 2025 — thinnest and least load-bearing
@@ -2245,13 +1663,16 @@
           <a:p>
             <a:r>
               <a:rPr lang="en-US" dirty="0"/>
-              <a:t>• Lead with the growth, then immediately complicate it
-• Registrations grew about 18x from 2018 to 2025
+              <a:t>• ~65 seconds — this one slide now carries all the EDA
+• Open with scale: registrations grew about 18x from 2018 to 2025
 • Peak month was 332,544 in July 2026
-• But the mix is 62% two-wheelers, 27% three-wheelers, only 10% four-wheelers
+• Then complicate it: 62% two-wheelers, 27% three-wheelers, only 10% four-wheelers
 • The capex we care about is four-wheelers and cell manufacturing
 • So the demand signal and the capex signal may not track the same market
-• This is a real analytical risk, not a footnote</a:t>
+• Top-5 states hold 49% of demand, HHI 0.071 — enough for siting to be a fair question
+• If asked for states: UP 14.2%, Maharashtra 11.2%, Karnataka 9.2%, Tamil Nadu 8.6%
+• Lead test: +0.24 at k=0, -0.20 at k=1, +0.40 at k=2, n=39 — say plainly that is noise
+• Cut for time: the production-coverage chart (27% to 60%) — raise it only if asked</a:t>
             </a:r>
             <a:endParaRPr lang="en-US" dirty="0"/>
           </a:p>
@@ -2339,13 +1760,18 @@
           <a:p>
             <a:r>
               <a:rPr lang="en-US" dirty="0"/>
-              <a:t>• Two points: siting is a fair question, and the machinery is built
-• Top-5 states hold 49% of demand, HHI 0.071 — concentrated but not extreme
-• UP 14.2%, Maharashtra 11.2%, Karnataka 9.2%, Tamil Nadu 8.6%
-• Production coverage of registrations rose from 27% to 60%
-• Four-wheeler EVs still under-captured: ICE and EV share one nameplate in the feed
-• Lead test runs: +0.24 at k=0, -0.20 at k=1, +0.40 at k=2, n=39
-• Be honest — signs alternate, so that is noise, not a result</a:t>
+              <a:t>• ~80 seconds. This is the slide that earns credit — spend your time here
+• Success is a defensible answer, not a positive one
+• A clean null is valid only if the test could have detected a lead
+• Method: Poisson regression on monthly counts, lagged production growth
+• Baseline uses their own lag plus a time trend; placebo shuffles dates within year
+• The power study is done, not planned — that is the point to land
+• At our 16 events a moderate effect is caught just 15% of the time
+• 80% power needs about 73 events scanning six lags, about 48 if the lag is fixed
+• Fixing the lag in advance is the cheapest win we have
+• Real data at 16 events: no significant lead at any k, best p = 0.11
+• Say it plainly — that is not evidence of no lead, it is an underpowered test
+• If asked: false-positive rate checks out at 1.5-2.5%, solver validated against statsmodels</a:t>
             </a:r>
             <a:endParaRPr lang="en-US" dirty="0"/>
           </a:p>
@@ -2433,18 +1859,14 @@
           <a:p>
             <a:r>
               <a:rPr lang="en-US" dirty="0"/>
-              <a:t>• This is the slide that earns credit — spend your time here
-• Success is a defensible answer, not a positive one
-• A clean null is valid only if the test could have detected a lead
-• Method: Poisson regression on monthly counts, lagged production growth
-• Baseline uses their own lag plus a time trend; placebo shuffles dates within year
-• The power study is done, not planned — that is the point to land
-• At our 16 events a moderate effect is caught just 15% of the time
-• 80% power needs about 73 events scanning six lags, about 48 if the lag is fixed
-• Fixing the lag in advance is the cheapest win we have
-• Real data at 16 events: no significant lead at any k, best p = 0.11
-• Say it plainly — that is not evidence of no lead, it is an underpowered test
-• If asked: false-positive rate checks out at 1.5-2.5%, solver validated against statsmodels</a:t>
+              <a:t>• Steps 1 and 2 are the critical path — everything else waits on them
+• Step 1: settle what counts as an announcement (board approval, press note, commissioning)
+• Step 2: scale extraction toward 45-75 dated events
+• We are at 22 dated, 16 inside the production window
+• Step 3: build the month panel, plus the state panel for the stretch
+• Step 4: run the tests with the lag pre-registered at k=3
+• Step 5: write up, including the negative result on the investment source
+• Close on this: the modelling is not the risk, the dependent variable is</a:t>
             </a:r>
             <a:endParaRPr lang="en-US" dirty="0"/>
           </a:p>
@@ -2532,101 +1954,6 @@
           <a:p>
             <a:r>
               <a:rPr lang="en-US" dirty="0"/>
-              <a:t>• Steps 1 and 2 are the critical path — everything else waits on them
-• Step 1: settle what counts as an announcement (board approval, press note, commissioning)
-• Step 2: scale extraction toward 45-75 dated events
-• We are at 22 dated, 16 inside the production window
-• Step 3: build the month panel, plus the state panel for the stretch
-• Step 4: run the tests with the lag pre-registered at k=3
-• Step 5: write up, including the negative result on the investment source
-• Close on this: the modelling is not the risk, the dependent variable is</a:t>
-            </a:r>
-            <a:endParaRPr lang="en-US" dirty="0"/>
-          </a:p>
-        </p:txBody>
-      </p:sp>
-      <p:sp>
-        <p:nvSpPr>
-          <p:cNvPr id="4" name="Slide Number Placeholder 3"/>
-          <p:cNvSpPr>
-            <a:spLocks noGrp="1"/>
-          </p:cNvSpPr>
-          <p:nvPr>
-            <p:ph type="sldNum" sz="quarter" idx="10"/>
-          </p:nvPr>
-        </p:nvSpPr>
-        <p:spPr/>
-        <p:txBody>
-          <a:bodyPr/>
-          <a:lstStyle/>
-          <a:p>
-            <a:fld id="{F7021451-1387-4CA6-816F-3879F97B5CBC}" type="slidenum">
-              <a:rPr lang="en-US"/>
-              <a:t>7</a:t>
-            </a:fld>
-            <a:endParaRPr lang="en-US"/>
-          </a:p>
-        </p:txBody>
-      </p:sp>
-    </p:spTree>
-    <p:extLst>
-      <p:ext uri="{BB962C8B-B14F-4D97-AF65-F5344CB8AC3E}">
-        <p14:creationId xmlns:p14="http://schemas.microsoft.com/office/powerpoint/2010/main" val="1024086991"/>
-      </p:ext>
-    </p:extLst>
-  </p:cSld>
-  <p:clrMapOvr>
-    <a:masterClrMapping/>
-  </p:clrMapOvr>
-</p:notes>
-</file>
-
-<file path=ppt/notesSlides/notesSlide8.xml><?xml version="1.0" encoding="utf-8"?>
-<p:notes xmlns:a="http://schemas.openxmlformats.org/drawingml/2006/main" xmlns:r="http://schemas.openxmlformats.org/officeDocument/2006/relationships" xmlns:p="http://schemas.openxmlformats.org/presentationml/2006/main">
-  <p:cSld>
-    <p:spTree>
-      <p:nvGrpSpPr>
-        <p:cNvPr id="1" name=""/>
-        <p:cNvGrpSpPr/>
-        <p:nvPr/>
-      </p:nvGrpSpPr>
-      <p:grpSpPr>
-        <a:xfrm>
-          <a:off x="0" y="0"/>
-          <a:ext cx="0" cy="0"/>
-          <a:chOff x="0" y="0"/>
-          <a:chExt cx="0" cy="0"/>
-        </a:xfrm>
-      </p:grpSpPr>
-      <p:sp>
-        <p:nvSpPr>
-          <p:cNvPr id="2" name="Slide Image Placeholder 1"/>
-          <p:cNvSpPr>
-            <a:spLocks noGrp="1" noRot="1" noChangeAspect="1"/>
-          </p:cNvSpPr>
-          <p:nvPr>
-            <p:ph type="sldImg"/>
-          </p:nvPr>
-        </p:nvSpPr>
-        <p:spPr/>
-      </p:sp>
-      <p:sp>
-        <p:nvSpPr>
-          <p:cNvPr id="3" name="Notes Placeholder 2"/>
-          <p:cNvSpPr>
-            <a:spLocks noGrp="1"/>
-          </p:cNvSpPr>
-          <p:nvPr>
-            <p:ph type="body" idx="1"/>
-          </p:nvPr>
-        </p:nvSpPr>
-        <p:spPr/>
-        <p:txBody>
-          <a:bodyPr/>
-          <a:lstStyle/>
-          <a:p>
-            <a:r>
-              <a:rPr lang="en-US" dirty="0"/>
               <a:t>• Only pull this up if asked, or if time allows
 • Problem 1: the dependent variable does not exist in the structured source
 • Problem 2: the substitute is thin — 16 usable events against a 45-75 target
@@ -2657,7 +1984,7 @@
           <a:p>
             <a:fld id="{F7021451-1387-4CA6-816F-3879F97B5CBC}" type="slidenum">
               <a:rPr lang="en-US"/>
-              <a:t>8</a:t>
+              <a:t>7</a:t>
             </a:fld>
             <a:endParaRPr lang="en-US"/>
           </a:p>
@@ -4939,7 +4266,7 @@
                 <a:ea typeface="Cambria" pitchFamily="34" charset="-122"/>
                 <a:cs typeface="Cambria" pitchFamily="34" charset="-120"/>
               </a:rPr>
-              <a:t>The market is growing fast — and is mostly two-wheelers</a:t>
+              <a:t>Growing fast, mostly two-wheelers, and concentrated</a:t>
             </a:r>
             <a:endParaRPr lang="en-US" sz="3600" dirty="0"/>
           </a:p>
@@ -4953,7 +4280,7 @@
         </p:nvGraphicFramePr>
         <p:xfrm>
           <a:off x="640080" y="1645920"/>
-          <a:ext cx="6675120" cy="3200400"/>
+          <a:ext cx="5623560" cy="2926080"/>
         </p:xfrm>
         <a:graphic xmlns:a="http://schemas.openxmlformats.org/drawingml/2006/main">
           <a:graphicData uri="http://schemas.openxmlformats.org/drawingml/2006/chart">
@@ -4969,8 +4296,8 @@
         </p:nvSpPr>
         <p:spPr>
           <a:xfrm>
-            <a:off x="640080" y="4892040"/>
-            <a:ext cx="6675120" cy="457200"/>
+            <a:off x="640080" y="4617720"/>
+            <a:ext cx="5623560" cy="365760"/>
           </a:xfrm>
           <a:prstGeom prst="rect">
             <a:avLst/>
@@ -4994,7 +4321,7 @@
                 <a:ea typeface="Calibri" pitchFamily="34" charset="-122"/>
                 <a:cs typeface="Calibri" pitchFamily="34" charset="-120"/>
               </a:rPr>
-              <a:t>Annual EV registrations, India (full years). 2026 is at 2.20M through August alone.</a:t>
+              <a:t>Annual EV registrations, India (full years) — an 18× rise. 2026 is at 2.20M through August alone.</a:t>
             </a:r>
             <a:endParaRPr lang="en-US" sz="1050" dirty="0"/>
           </a:p>
@@ -5008,8 +4335,8 @@
         </p:nvSpPr>
         <p:spPr>
           <a:xfrm>
-            <a:off x="7635240" y="1691640"/>
-            <a:ext cx="1874520" cy="1481328"/>
+            <a:off x="6446520" y="1691640"/>
+            <a:ext cx="2423160" cy="1481328"/>
           </a:xfrm>
           <a:prstGeom prst="roundRect">
             <a:avLst>
@@ -5035,8 +4362,8 @@
         </p:nvSpPr>
         <p:spPr>
           <a:xfrm>
-            <a:off x="7662672" y="1819656"/>
-            <a:ext cx="1819656" cy="566928"/>
+            <a:off x="6473952" y="1819656"/>
+            <a:ext cx="2368296" cy="566928"/>
           </a:xfrm>
           <a:prstGeom prst="rect">
             <a:avLst/>
@@ -5074,8 +4401,8 @@
         </p:nvSpPr>
         <p:spPr>
           <a:xfrm>
-            <a:off x="7726680" y="2404872"/>
-            <a:ext cx="1691640" cy="658368"/>
+            <a:off x="6537960" y="2404872"/>
+            <a:ext cx="2240280" cy="658368"/>
           </a:xfrm>
           <a:prstGeom prst="rect">
             <a:avLst/>
@@ -5130,8 +4457,8 @@
         </p:nvSpPr>
         <p:spPr>
           <a:xfrm>
-            <a:off x="9665208" y="1691640"/>
-            <a:ext cx="1874520" cy="1481328"/>
+            <a:off x="9116568" y="1691640"/>
+            <a:ext cx="2423160" cy="1481328"/>
           </a:xfrm>
           <a:prstGeom prst="roundRect">
             <a:avLst>
@@ -5157,8 +4484,8 @@
         </p:nvSpPr>
         <p:spPr>
           <a:xfrm>
-            <a:off x="9692640" y="1819656"/>
-            <a:ext cx="1819656" cy="566928"/>
+            <a:off x="9144000" y="1819656"/>
+            <a:ext cx="2368296" cy="566928"/>
           </a:xfrm>
           <a:prstGeom prst="rect">
             <a:avLst/>
@@ -5196,8 +4523,8 @@
         </p:nvSpPr>
         <p:spPr>
           <a:xfrm>
-            <a:off x="9756648" y="2404872"/>
-            <a:ext cx="1691640" cy="658368"/>
+            <a:off x="9208008" y="2404872"/>
+            <a:ext cx="2240280" cy="658368"/>
           </a:xfrm>
           <a:prstGeom prst="rect">
             <a:avLst/>
@@ -5252,8 +4579,8 @@
         </p:nvSpPr>
         <p:spPr>
           <a:xfrm>
-            <a:off x="7635240" y="3346704"/>
-            <a:ext cx="1874520" cy="1481328"/>
+            <a:off x="6446520" y="3346704"/>
+            <a:ext cx="2423160" cy="1481328"/>
           </a:xfrm>
           <a:prstGeom prst="roundRect">
             <a:avLst>
@@ -5279,8 +4606,8 @@
         </p:nvSpPr>
         <p:spPr>
           <a:xfrm>
-            <a:off x="7662672" y="3474720"/>
-            <a:ext cx="1819656" cy="566928"/>
+            <a:off x="6473952" y="3474720"/>
+            <a:ext cx="2368296" cy="566928"/>
           </a:xfrm>
           <a:prstGeom prst="rect">
             <a:avLst/>
@@ -5318,8 +4645,8 @@
         </p:nvSpPr>
         <p:spPr>
           <a:xfrm>
-            <a:off x="7726680" y="4059936"/>
-            <a:ext cx="1691640" cy="658368"/>
+            <a:off x="6537960" y="4059936"/>
+            <a:ext cx="2240280" cy="658368"/>
           </a:xfrm>
           <a:prstGeom prst="rect">
             <a:avLst/>
@@ -5374,8 +4701,8 @@
         </p:nvSpPr>
         <p:spPr>
           <a:xfrm>
-            <a:off x="9665208" y="3346704"/>
-            <a:ext cx="1874520" cy="1481328"/>
+            <a:off x="9116568" y="3346704"/>
+            <a:ext cx="2423160" cy="1481328"/>
           </a:xfrm>
           <a:prstGeom prst="roundRect">
             <a:avLst>
@@ -5401,8 +4728,8 @@
         </p:nvSpPr>
         <p:spPr>
           <a:xfrm>
-            <a:off x="9692640" y="3474720"/>
-            <a:ext cx="1819656" cy="566928"/>
+            <a:off x="9144000" y="3474720"/>
+            <a:ext cx="2368296" cy="566928"/>
           </a:xfrm>
           <a:prstGeom prst="rect">
             <a:avLst/>
@@ -5426,7 +4753,7 @@
                 <a:ea typeface="Cambria" pitchFamily="34" charset="-122"/>
                 <a:cs typeface="Cambria" pitchFamily="34" charset="-120"/>
               </a:rPr>
-              <a:t>18×</a:t>
+              <a:t>49%</a:t>
             </a:r>
             <a:endParaRPr lang="en-US" sz="3200" dirty="0"/>
           </a:p>
@@ -5440,8 +4767,8 @@
         </p:nvSpPr>
         <p:spPr>
           <a:xfrm>
-            <a:off x="9756648" y="4059936"/>
-            <a:ext cx="1691640" cy="658368"/>
+            <a:off x="9208008" y="4059936"/>
+            <a:ext cx="2240280" cy="658368"/>
           </a:xfrm>
           <a:prstGeom prst="rect">
             <a:avLst/>
@@ -5465,7 +4792,7 @@
                 <a:ea typeface="Calibri" pitchFamily="34" charset="-122"/>
                 <a:cs typeface="Calibri" pitchFamily="34" charset="-120"/>
               </a:rPr>
-              <a:t>registration growth</a:t>
+              <a:t>of demand sits in</a:t>
             </a:r>
             <a:endParaRPr lang="en-US" sz="1050" dirty="0"/>
           </a:p>
@@ -5482,7 +4809,7 @@
                 <a:ea typeface="Calibri" pitchFamily="34" charset="-122"/>
                 <a:cs typeface="Calibri" pitchFamily="34" charset="-120"/>
               </a:rPr>
-              <a:t>2018 → 2025</a:t>
+              <a:t>the top five states</a:t>
             </a:r>
             <a:endParaRPr lang="en-US" sz="1050" dirty="0"/>
           </a:p>
@@ -5496,8 +4823,8 @@
         </p:nvSpPr>
         <p:spPr>
           <a:xfrm>
-            <a:off x="640080" y="5486400"/>
-            <a:ext cx="10881360" cy="731520"/>
+            <a:off x="640080" y="5120640"/>
+            <a:ext cx="10881360" cy="457200"/>
           </a:xfrm>
           <a:prstGeom prst="rect">
             <a:avLst/>
@@ -5535,7 +4862,60 @@
                 <a:ea typeface="Calibri" pitchFamily="34" charset="-122"/>
                 <a:cs typeface="Calibri" pitchFamily="34" charset="-120"/>
               </a:rPr>
-              <a:t>the volume is 2W/3W, but the investment announcements we care about are concentrated in 4W and cell manufacturing. The demand signal and the capex signal may not be measuring the same market.</a:t>
+              <a:t>the volume is 2W/3W, but the announcements we care about are 4W and cell manufacturing. The demand signal and the capex signal may not be measuring the same market.</a:t>
+            </a:r>
+            <a:endParaRPr lang="en-US" sz="1300" dirty="0"/>
+          </a:p>
+        </p:txBody>
+      </p:sp>
+      <p:sp>
+        <p:nvSpPr>
+          <p:cNvPr id="19" name="Text 16"/>
+          <p:cNvSpPr txBox="1"/>
+          <p:nvPr/>
+        </p:nvSpPr>
+        <p:spPr>
+          <a:xfrm>
+            <a:off x="640080" y="5650992"/>
+            <a:ext cx="10881360" cy="457200"/>
+          </a:xfrm>
+          <a:prstGeom prst="rect">
+            <a:avLst/>
+          </a:prstGeom>
+          <a:noFill/>
+          <a:ln/>
+        </p:spPr>
+        <p:txBody>
+          <a:bodyPr wrap="square" lIns="0" tIns="0" rIns="0" bIns="0" rtlCol="0" anchor="ctr"/>
+          <a:lstStyle/>
+          <a:p>
+            <a:pPr indent="0" marL="0">
+              <a:buNone/>
+            </a:pPr>
+            <a:r>
+              <a:rPr lang="en-US" sz="1300" b="1" dirty="0">
+                <a:solidFill>
+                  <a:srgbClr val="14211F"/>
+                </a:solidFill>
+                <a:latin typeface="Calibri" pitchFamily="34" charset="0"/>
+                <a:ea typeface="Calibri" pitchFamily="34" charset="-122"/>
+                <a:cs typeface="Calibri" pitchFamily="34" charset="-120"/>
+              </a:rPr>
+              <a:t>First lead test gives +0.24 at k=0, −0.20 at k=1, +0.40 at k=2. </a:t>
+            </a:r>
+            <a:pPr indent="0" marL="0">
+              <a:buNone/>
+            </a:pPr>
+            <a:r>
+              <a:rPr lang="en-US" sz="1300" dirty="0">
+                <a:solidFill>
+                  <a:srgbClr val="5F706D"/>
+                </a:solidFill>
+                <a:latin typeface="Calibri" pitchFamily="34" charset="0"/>
+                <a:ea typeface="Calibri" pitchFamily="34" charset="-122"/>
+                <a:cs typeface="Calibri" pitchFamily="34" charset="-120"/>
+              </a:rPr>
+              <a:t>Sign-alternating at n=39 — the machinery runs, but this reads as noise, not structure.</a:t>
             </a:r>
             <a:endParaRPr lang="en-US" sz="1300" dirty="0"/>
           </a:p>
@@ -5606,7 +4986,7 @@
                 <a:ea typeface="Calibri" pitchFamily="34" charset="-122"/>
                 <a:cs typeface="Calibri" pitchFamily="34" charset="-120"/>
               </a:rPr>
-              <a:t>03 · INITIAL EDA</a:t>
+              <a:t>04 · SUCCESS &amp; EVALUATION</a:t>
             </a:r>
             <a:endParaRPr lang="en-US" sz="1200" dirty="0"/>
           </a:p>
@@ -5645,21 +5025,218 @@
                 <a:ea typeface="Cambria" pitchFamily="34" charset="-122"/>
                 <a:cs typeface="Cambria" pitchFamily="34" charset="-120"/>
               </a:rPr>
-              <a:t>Demand is concentrated; the production feed is catching up</a:t>
+              <a:t>What counts as an answer — and can we detect one?</a:t>
             </a:r>
             <a:endParaRPr lang="en-US" sz="3600" dirty="0"/>
+          </a:p>
+        </p:txBody>
+      </p:sp>
+      <p:sp>
+        <p:nvSpPr>
+          <p:cNvPr id="4" name="Shape 2"/>
+          <p:cNvSpPr/>
+          <p:nvPr/>
+        </p:nvSpPr>
+        <p:spPr>
+          <a:xfrm>
+            <a:off x="640080" y="1645920"/>
+            <a:ext cx="3840480" cy="3977640"/>
+          </a:xfrm>
+          <a:prstGeom prst="roundRect">
+            <a:avLst>
+              <a:gd name="adj" fmla="val 1905"/>
+            </a:avLst>
+          </a:prstGeom>
+          <a:solidFill>
+            <a:srgbClr val="F4F8F7"/>
+          </a:solidFill>
+          <a:ln w="12700">
+            <a:solidFill>
+              <a:srgbClr val="333333"/>
+            </a:solidFill>
+            <a:prstDash val="solid"/>
+          </a:ln>
+        </p:spPr>
+      </p:sp>
+      <p:sp>
+        <p:nvSpPr>
+          <p:cNvPr id="5" name="Shape 3"/>
+          <p:cNvSpPr/>
+          <p:nvPr/>
+        </p:nvSpPr>
+        <p:spPr>
+          <a:xfrm>
+            <a:off x="914400" y="1901952"/>
+            <a:ext cx="274320" cy="274320"/>
+          </a:xfrm>
+          <a:prstGeom prst="ellipse">
+            <a:avLst/>
+          </a:prstGeom>
+          <a:solidFill>
+            <a:srgbClr val="0D9488"/>
+          </a:solidFill>
+          <a:ln w="12700">
+            <a:solidFill>
+              <a:srgbClr val="333333"/>
+            </a:solidFill>
+            <a:prstDash val="solid"/>
+          </a:ln>
+        </p:spPr>
+      </p:sp>
+      <p:sp>
+        <p:nvSpPr>
+          <p:cNvPr id="6" name="Text 4"/>
+          <p:cNvSpPr txBox="1"/>
+          <p:nvPr/>
+        </p:nvSpPr>
+        <p:spPr>
+          <a:xfrm>
+            <a:off x="914400" y="2304288"/>
+            <a:ext cx="3291840" cy="731520"/>
+          </a:xfrm>
+          <a:prstGeom prst="rect">
+            <a:avLst/>
+          </a:prstGeom>
+          <a:noFill/>
+          <a:ln/>
+        </p:spPr>
+        <p:txBody>
+          <a:bodyPr wrap="square" lIns="0" tIns="0" rIns="0" bIns="0" rtlCol="0" anchor="ctr"/>
+          <a:lstStyle/>
+          <a:p>
+            <a:pPr indent="0" marL="0">
+              <a:buNone/>
+            </a:pPr>
+            <a:r>
+              <a:rPr lang="en-US" sz="1600" b="1" dirty="0">
+                <a:solidFill>
+                  <a:srgbClr val="14211F"/>
+                </a:solidFill>
+                <a:latin typeface="Cambria" pitchFamily="34" charset="0"/>
+                <a:ea typeface="Cambria" pitchFamily="34" charset="-122"/>
+                <a:cs typeface="Cambria" pitchFamily="34" charset="-120"/>
+              </a:rPr>
+              <a:t>Success is a defensible answer, not a positive one</a:t>
+            </a:r>
+            <a:endParaRPr lang="en-US" sz="1600" dirty="0"/>
+          </a:p>
+        </p:txBody>
+      </p:sp>
+      <p:sp>
+        <p:nvSpPr>
+          <p:cNvPr id="7" name="Text 5"/>
+          <p:cNvSpPr txBox="1"/>
+          <p:nvPr/>
+        </p:nvSpPr>
+        <p:spPr>
+          <a:xfrm>
+            <a:off x="914400" y="3108960"/>
+            <a:ext cx="3291840" cy="2331720"/>
+          </a:xfrm>
+          <a:prstGeom prst="rect">
+            <a:avLst/>
+          </a:prstGeom>
+          <a:noFill/>
+          <a:ln/>
+        </p:spPr>
+        <p:txBody>
+          <a:bodyPr wrap="square" lIns="0" tIns="0" rIns="0" bIns="0" rtlCol="0" anchor="ctr"/>
+          <a:lstStyle/>
+          <a:p>
+            <a:pPr marL="342900" indent="-342900">
+              <a:spcAft>
+                <a:spcPts val="900"/>
+              </a:spcAft>
+              <a:buSzPct val="100000"/>
+              <a:buChar char="•"/>
+            </a:pPr>
+            <a:r>
+              <a:rPr lang="en-US" sz="1200" dirty="0">
+                <a:solidFill>
+                  <a:srgbClr val="5F706D"/>
+                </a:solidFill>
+                <a:latin typeface="Calibri" pitchFamily="34" charset="0"/>
+                <a:ea typeface="Calibri" pitchFamily="34" charset="-122"/>
+                <a:cs typeface="Calibri" pitchFamily="34" charset="-120"/>
+              </a:rPr>
+              <a:t>A clean "production does not lead announcements" is valid — but only if the test could have detected a lead.</a:t>
+            </a:r>
+            <a:endParaRPr lang="en-US" sz="1200" dirty="0"/>
+          </a:p>
+          <a:p>
+            <a:pPr marL="342900" indent="-342900">
+              <a:spcAft>
+                <a:spcPts val="900"/>
+              </a:spcAft>
+              <a:buSzPct val="100000"/>
+              <a:buChar char="•"/>
+            </a:pPr>
+            <a:r>
+              <a:rPr lang="en-US" sz="1200" dirty="0">
+                <a:solidFill>
+                  <a:srgbClr val="5F706D"/>
+                </a:solidFill>
+                <a:latin typeface="Calibri" pitchFamily="34" charset="0"/>
+                <a:ea typeface="Calibri" pitchFamily="34" charset="-122"/>
+                <a:cs typeface="Calibri" pitchFamily="34" charset="-120"/>
+              </a:rPr>
+              <a:t>Poisson regression on monthly announcement counts, with lagged production growth.</a:t>
+            </a:r>
+            <a:endParaRPr lang="en-US" sz="1200" dirty="0"/>
+          </a:p>
+          <a:p>
+            <a:pPr marL="342900" indent="-342900">
+              <a:spcAft>
+                <a:spcPts val="900"/>
+              </a:spcAft>
+              <a:buSzPct val="100000"/>
+              <a:buChar char="•"/>
+            </a:pPr>
+            <a:r>
+              <a:rPr lang="en-US" sz="1200" dirty="0">
+                <a:solidFill>
+                  <a:srgbClr val="5F706D"/>
+                </a:solidFill>
+                <a:latin typeface="Calibri" pitchFamily="34" charset="0"/>
+                <a:ea typeface="Calibri" pitchFamily="34" charset="-122"/>
+                <a:cs typeface="Calibri" pitchFamily="34" charset="-120"/>
+              </a:rPr>
+              <a:t>Baseline to beat: counts from their own lag plus a time trend.</a:t>
+            </a:r>
+            <a:endParaRPr lang="en-US" sz="1200" dirty="0"/>
+          </a:p>
+          <a:p>
+            <a:pPr marL="342900" indent="-342900">
+              <a:spcAft>
+                <a:spcPts val="900"/>
+              </a:spcAft>
+              <a:buSzPct val="100000"/>
+              <a:buChar char="•"/>
+            </a:pPr>
+            <a:r>
+              <a:rPr lang="en-US" sz="1200" dirty="0">
+                <a:solidFill>
+                  <a:srgbClr val="5F706D"/>
+                </a:solidFill>
+                <a:latin typeface="Calibri" pitchFamily="34" charset="0"/>
+                <a:ea typeface="Calibri" pitchFamily="34" charset="-122"/>
+                <a:cs typeface="Calibri" pitchFamily="34" charset="-120"/>
+              </a:rPr>
+              <a:t>Placebo: shuffle announcement dates within year; the lead must vanish.</a:t>
+            </a:r>
+            <a:endParaRPr lang="en-US" sz="1200" dirty="0"/>
           </a:p>
         </p:txBody>
       </p:sp>
       <p:graphicFrame>
         <p:nvGraphicFramePr>
-          <p:cNvPr id="4" name="Chart 0" descr=""/>
+          <p:cNvPr id="8" name="Chart 0" descr=""/>
           <p:cNvGraphicFramePr/>
           <p:nvPr/>
         </p:nvGraphicFramePr>
         <p:xfrm>
-          <a:off x="640080" y="1645920"/>
-          <a:ext cx="5394960" cy="3566160"/>
+          <a:off x="4709160" y="1645920"/>
+          <a:ext cx="6830568" cy="2880360"/>
         </p:xfrm>
         <a:graphic xmlns:a="http://schemas.openxmlformats.org/drawingml/2006/main">
           <a:graphicData uri="http://schemas.openxmlformats.org/drawingml/2006/chart">
@@ -5669,14 +5246,14 @@
       </p:graphicFrame>
       <p:sp>
         <p:nvSpPr>
-          <p:cNvPr id="5" name="Text 2"/>
-          <p:cNvSpPr txBox="1"/>
-          <p:nvPr/>
-        </p:nvSpPr>
-        <p:spPr>
-          <a:xfrm>
-            <a:off x="640080" y="5257800"/>
-            <a:ext cx="5394960" cy="365760"/>
+          <p:cNvPr id="9" name="Text 6"/>
+          <p:cNvSpPr txBox="1"/>
+          <p:nvPr/>
+        </p:nvSpPr>
+        <p:spPr>
+          <a:xfrm>
+            <a:off x="4709160" y="4526280"/>
+            <a:ext cx="6830568" cy="274320"/>
           </a:xfrm>
           <a:prstGeom prst="rect">
             <a:avLst/>
@@ -5700,54 +5277,104 @@
                 <a:ea typeface="Calibri" pitchFamily="34" charset="-122"/>
                 <a:cs typeface="Calibri" pitchFamily="34" charset="-120"/>
               </a:rPr>
-              <a:t>Top-5 states take 49% of national EV registrations (HHI 0.071).</a:t>
+              <a:t>Simulated power vs number of dated events, scanning lags k = 1…6. We have 16.</a:t>
             </a:r>
             <a:endParaRPr lang="en-US" sz="1050" dirty="0"/>
           </a:p>
         </p:txBody>
       </p:sp>
-      <p:graphicFrame>
-        <p:nvGraphicFramePr>
-          <p:cNvPr id="6" name="Chart 1" descr=""/>
-          <p:cNvGraphicFramePr/>
-          <p:nvPr/>
-        </p:nvGraphicFramePr>
-        <p:xfrm>
-          <a:off x="6400800" y="1645920"/>
-          <a:ext cx="5120640" cy="3566160"/>
-        </p:xfrm>
-        <a:graphic xmlns:a="http://schemas.openxmlformats.org/drawingml/2006/main">
-          <a:graphicData uri="http://schemas.openxmlformats.org/drawingml/2006/chart">
-            <c:chart xmlns:c="http://schemas.openxmlformats.org/drawingml/2006/chart" r:id="rId2"/>
-          </a:graphicData>
-        </a:graphic>
-      </p:graphicFrame>
-      <p:sp>
-        <p:nvSpPr>
-          <p:cNvPr id="7" name="Text 3"/>
-          <p:cNvSpPr txBox="1"/>
-          <p:nvPr/>
-        </p:nvSpPr>
-        <p:spPr>
-          <a:xfrm>
-            <a:off x="6400800" y="5257800"/>
-            <a:ext cx="5120640" cy="548640"/>
-          </a:xfrm>
-          <a:prstGeom prst="rect">
-            <a:avLst/>
-          </a:prstGeom>
-          <a:noFill/>
-          <a:ln/>
-        </p:spPr>
-        <p:txBody>
-          <a:bodyPr wrap="square" lIns="0" tIns="0" rIns="0" bIns="0" rtlCol="0" anchor="ctr"/>
-          <a:lstStyle/>
-          <a:p>
-            <a:pPr indent="0" marL="0">
-              <a:buNone/>
-            </a:pPr>
-            <a:r>
-              <a:rPr lang="en-US" sz="1050" i="1" dirty="0">
+      <p:sp>
+        <p:nvSpPr>
+          <p:cNvPr id="10" name="Shape 7"/>
+          <p:cNvSpPr/>
+          <p:nvPr/>
+        </p:nvSpPr>
+        <p:spPr>
+          <a:xfrm>
+            <a:off x="4709160" y="4864608"/>
+            <a:ext cx="3337560" cy="758952"/>
+          </a:xfrm>
+          <a:prstGeom prst="roundRect">
+            <a:avLst>
+              <a:gd name="adj" fmla="val 9639"/>
+            </a:avLst>
+          </a:prstGeom>
+          <a:solidFill>
+            <a:srgbClr val="F4F8F7"/>
+          </a:solidFill>
+          <a:ln w="12700">
+            <a:solidFill>
+              <a:srgbClr val="FFFFFF"/>
+            </a:solidFill>
+            <a:prstDash val="solid"/>
+          </a:ln>
+        </p:spPr>
+      </p:sp>
+      <p:sp>
+        <p:nvSpPr>
+          <p:cNvPr id="11" name="Text 8"/>
+          <p:cNvSpPr txBox="1"/>
+          <p:nvPr/>
+        </p:nvSpPr>
+        <p:spPr>
+          <a:xfrm>
+            <a:off x="4736592" y="4992624"/>
+            <a:ext cx="3282696" cy="566928"/>
+          </a:xfrm>
+          <a:prstGeom prst="rect">
+            <a:avLst/>
+          </a:prstGeom>
+          <a:noFill/>
+          <a:ln/>
+        </p:spPr>
+        <p:txBody>
+          <a:bodyPr wrap="square" lIns="0" tIns="0" rIns="0" bIns="0" rtlCol="0" anchor="ctr"/>
+          <a:lstStyle/>
+          <a:p>
+            <a:pPr algn="ctr" indent="0" marL="0">
+              <a:buNone/>
+            </a:pPr>
+            <a:r>
+              <a:rPr lang="en-US" sz="3200" b="1" dirty="0">
+                <a:solidFill>
+                  <a:srgbClr val="D94F04"/>
+                </a:solidFill>
+                <a:latin typeface="Cambria" pitchFamily="34" charset="0"/>
+                <a:ea typeface="Cambria" pitchFamily="34" charset="-122"/>
+                <a:cs typeface="Cambria" pitchFamily="34" charset="-120"/>
+              </a:rPr>
+              <a:t>~73 events</a:t>
+            </a:r>
+            <a:endParaRPr lang="en-US" sz="3200" dirty="0"/>
+          </a:p>
+        </p:txBody>
+      </p:sp>
+      <p:sp>
+        <p:nvSpPr>
+          <p:cNvPr id="12" name="Text 9"/>
+          <p:cNvSpPr txBox="1"/>
+          <p:nvPr/>
+        </p:nvSpPr>
+        <p:spPr>
+          <a:xfrm>
+            <a:off x="4800600" y="5577840"/>
+            <a:ext cx="3154680" cy="658368"/>
+          </a:xfrm>
+          <a:prstGeom prst="rect">
+            <a:avLst/>
+          </a:prstGeom>
+          <a:noFill/>
+          <a:ln/>
+        </p:spPr>
+        <p:txBody>
+          <a:bodyPr wrap="square" lIns="0" tIns="0" rIns="0" bIns="0" rtlCol="0" anchor="ctr"/>
+          <a:lstStyle/>
+          <a:p>
+            <a:pPr algn="ctr" indent="0" marL="0">
+              <a:buNone/>
+            </a:pPr>
+            <a:r>
+              <a:rPr lang="en-US" sz="1050" dirty="0">
                 <a:solidFill>
                   <a:srgbClr val="5F706D"/>
                 </a:solidFill>
@@ -5755,7 +5382,7 @@
                 <a:ea typeface="Calibri" pitchFamily="34" charset="-122"/>
                 <a:cs typeface="Calibri" pitchFamily="34" charset="-120"/>
               </a:rPr>
-              <a:t>Production coverage of registrations rose 27% → 60%. Four-wheeler EVs remain structurally under-captured.</a:t>
+              <a:t>for 80% power scanning six lags</a:t>
             </a:r>
             <a:endParaRPr lang="en-US" sz="1050" dirty="0"/>
           </a:p>
@@ -5763,52 +5390,157 @@
       </p:sp>
       <p:sp>
         <p:nvSpPr>
-          <p:cNvPr id="8" name="Text 4"/>
-          <p:cNvSpPr txBox="1"/>
-          <p:nvPr/>
-        </p:nvSpPr>
-        <p:spPr>
-          <a:xfrm>
-            <a:off x="640080" y="5852160"/>
-            <a:ext cx="10881360" cy="502920"/>
-          </a:xfrm>
-          <a:prstGeom prst="rect">
-            <a:avLst/>
-          </a:prstGeom>
-          <a:noFill/>
-          <a:ln/>
-        </p:spPr>
-        <p:txBody>
-          <a:bodyPr wrap="square" lIns="0" tIns="0" rIns="0" bIns="0" rtlCol="0" anchor="ctr"/>
-          <a:lstStyle/>
-          <a:p>
-            <a:pPr indent="0" marL="0">
-              <a:buNone/>
-            </a:pPr>
-            <a:r>
-              <a:rPr lang="en-US" sz="1300" b="1" dirty="0">
-                <a:solidFill>
-                  <a:srgbClr val="14211F"/>
+          <p:cNvPr id="13" name="Shape 10"/>
+          <p:cNvSpPr/>
+          <p:nvPr/>
+        </p:nvSpPr>
+        <p:spPr>
+          <a:xfrm>
+            <a:off x="8202168" y="4864608"/>
+            <a:ext cx="3337560" cy="758952"/>
+          </a:xfrm>
+          <a:prstGeom prst="roundRect">
+            <a:avLst>
+              <a:gd name="adj" fmla="val 9639"/>
+            </a:avLst>
+          </a:prstGeom>
+          <a:solidFill>
+            <a:srgbClr val="F4F8F7"/>
+          </a:solidFill>
+          <a:ln w="12700">
+            <a:solidFill>
+              <a:srgbClr val="FFFFFF"/>
+            </a:solidFill>
+            <a:prstDash val="solid"/>
+          </a:ln>
+        </p:spPr>
+      </p:sp>
+      <p:sp>
+        <p:nvSpPr>
+          <p:cNvPr id="14" name="Text 11"/>
+          <p:cNvSpPr txBox="1"/>
+          <p:nvPr/>
+        </p:nvSpPr>
+        <p:spPr>
+          <a:xfrm>
+            <a:off x="8229600" y="4992624"/>
+            <a:ext cx="3282696" cy="566928"/>
+          </a:xfrm>
+          <a:prstGeom prst="rect">
+            <a:avLst/>
+          </a:prstGeom>
+          <a:noFill/>
+          <a:ln/>
+        </p:spPr>
+        <p:txBody>
+          <a:bodyPr wrap="square" lIns="0" tIns="0" rIns="0" bIns="0" rtlCol="0" anchor="ctr"/>
+          <a:lstStyle/>
+          <a:p>
+            <a:pPr algn="ctr" indent="0" marL="0">
+              <a:buNone/>
+            </a:pPr>
+            <a:r>
+              <a:rPr lang="en-US" sz="3200" b="1" dirty="0">
+                <a:solidFill>
+                  <a:srgbClr val="0D9488"/>
+                </a:solidFill>
+                <a:latin typeface="Cambria" pitchFamily="34" charset="0"/>
+                <a:ea typeface="Cambria" pitchFamily="34" charset="-122"/>
+                <a:cs typeface="Cambria" pitchFamily="34" charset="-120"/>
+              </a:rPr>
+              <a:t>~48 events</a:t>
+            </a:r>
+            <a:endParaRPr lang="en-US" sz="3200" dirty="0"/>
+          </a:p>
+        </p:txBody>
+      </p:sp>
+      <p:sp>
+        <p:nvSpPr>
+          <p:cNvPr id="15" name="Text 12"/>
+          <p:cNvSpPr txBox="1"/>
+          <p:nvPr/>
+        </p:nvSpPr>
+        <p:spPr>
+          <a:xfrm>
+            <a:off x="8293608" y="5577840"/>
+            <a:ext cx="3154680" cy="658368"/>
+          </a:xfrm>
+          <a:prstGeom prst="rect">
+            <a:avLst/>
+          </a:prstGeom>
+          <a:noFill/>
+          <a:ln/>
+        </p:spPr>
+        <p:txBody>
+          <a:bodyPr wrap="square" lIns="0" tIns="0" rIns="0" bIns="0" rtlCol="0" anchor="ctr"/>
+          <a:lstStyle/>
+          <a:p>
+            <a:pPr algn="ctr" indent="0" marL="0">
+              <a:buNone/>
+            </a:pPr>
+            <a:r>
+              <a:rPr lang="en-US" sz="1050" dirty="0">
+                <a:solidFill>
+                  <a:srgbClr val="5F706D"/>
                 </a:solidFill>
                 <a:latin typeface="Calibri" pitchFamily="34" charset="0"/>
                 <a:ea typeface="Calibri" pitchFamily="34" charset="-122"/>
                 <a:cs typeface="Calibri" pitchFamily="34" charset="-120"/>
               </a:rPr>
-              <a:t>A first lead test on the proxy pair gives +0.24 at k=0, −0.20 at k=1, +0.40 at k=2. </a:t>
-            </a:r>
+              <a:t>if the lag is fixed in advance</a:t>
+            </a:r>
+            <a:endParaRPr lang="en-US" sz="1050" dirty="0"/>
+          </a:p>
+        </p:txBody>
+      </p:sp>
+      <p:sp>
+        <p:nvSpPr>
+          <p:cNvPr id="16" name="Text 13"/>
+          <p:cNvSpPr txBox="1"/>
+          <p:nvPr/>
+        </p:nvSpPr>
+        <p:spPr>
+          <a:xfrm>
+            <a:off x="640080" y="5833872"/>
+            <a:ext cx="10881360" cy="493776"/>
+          </a:xfrm>
+          <a:prstGeom prst="rect">
+            <a:avLst/>
+          </a:prstGeom>
+          <a:noFill/>
+          <a:ln/>
+        </p:spPr>
+        <p:txBody>
+          <a:bodyPr wrap="square" lIns="0" tIns="0" rIns="0" bIns="0" rtlCol="0" anchor="ctr"/>
+          <a:lstStyle/>
+          <a:p>
             <a:pPr indent="0" marL="0">
               <a:buNone/>
             </a:pPr>
             <a:r>
-              <a:rPr lang="en-US" sz="1300" dirty="0">
-                <a:solidFill>
-                  <a:srgbClr val="5F706D"/>
+              <a:rPr lang="en-US" sz="1300" b="1" dirty="0">
+                <a:solidFill>
+                  <a:srgbClr val="14211F"/>
                 </a:solidFill>
                 <a:latin typeface="Calibri" pitchFamily="34" charset="0"/>
                 <a:ea typeface="Calibri" pitchFamily="34" charset="-122"/>
                 <a:cs typeface="Calibri" pitchFamily="34" charset="-120"/>
               </a:rPr>
-              <a:t>Sign-alternating at n=39 — the machinery runs, but this reads as noise, not structure.</a:t>
+              <a:t>At our 16 events a moderate effect is caught 15% of the time. </a:t>
+            </a:r>
+            <a:pPr indent="0" marL="0">
+              <a:buNone/>
+            </a:pPr>
+            <a:r>
+              <a:rPr lang="en-US" sz="1300" dirty="0">
+                <a:solidFill>
+                  <a:srgbClr val="5F706D"/>
+                </a:solidFill>
+                <a:latin typeface="Calibri" pitchFamily="34" charset="0"/>
+                <a:ea typeface="Calibri" pitchFamily="34" charset="-122"/>
+                <a:cs typeface="Calibri" pitchFamily="34" charset="-120"/>
+              </a:rPr>
+              <a:t>Fixing the lag in advance cuts the events we need by a third — the cheapest win available.</a:t>
             </a:r>
             <a:endParaRPr lang="en-US" sz="1300" dirty="0"/>
           </a:p>
@@ -5879,7 +5611,7 @@
                 <a:ea typeface="Calibri" pitchFamily="34" charset="-122"/>
                 <a:cs typeface="Calibri" pitchFamily="34" charset="-120"/>
               </a:rPr>
-              <a:t>04 · SUCCESS &amp; EVALUATION</a:t>
+              <a:t>05 · ROADMAP</a:t>
             </a:r>
             <a:endParaRPr lang="en-US" sz="1200" dirty="0"/>
           </a:p>
@@ -5918,7 +5650,7 @@
                 <a:ea typeface="Cambria" pitchFamily="34" charset="-122"/>
                 <a:cs typeface="Cambria" pitchFamily="34" charset="-120"/>
               </a:rPr>
-              <a:t>What counts as an answer — and can we detect one?</a:t>
+              <a:t>Next steps</a:t>
             </a:r>
             <a:endParaRPr lang="en-US" sz="3600" dirty="0"/>
           </a:p>
@@ -5932,16 +5664,14 @@
         </p:nvSpPr>
         <p:spPr>
           <a:xfrm>
-            <a:off x="640080" y="1645920"/>
-            <a:ext cx="3840480" cy="3977640"/>
-          </a:xfrm>
-          <a:prstGeom prst="roundRect">
-            <a:avLst>
-              <a:gd name="adj" fmla="val 1905"/>
-            </a:avLst>
+            <a:off x="640080" y="1719072"/>
+            <a:ext cx="475488" cy="475488"/>
+          </a:xfrm>
+          <a:prstGeom prst="ellipse">
+            <a:avLst/>
           </a:prstGeom>
           <a:solidFill>
-            <a:srgbClr val="F4F8F7"/>
+            <a:srgbClr val="D94F04"/>
           </a:solidFill>
           <a:ln w="12700">
             <a:solidFill>
@@ -5953,14 +5683,273 @@
       </p:sp>
       <p:sp>
         <p:nvSpPr>
-          <p:cNvPr id="5" name="Shape 3"/>
+          <p:cNvPr id="5" name="Text 3"/>
+          <p:cNvSpPr txBox="1"/>
+          <p:nvPr/>
+        </p:nvSpPr>
+        <p:spPr>
+          <a:xfrm>
+            <a:off x="640080" y="1792224"/>
+            <a:ext cx="475488" cy="329184"/>
+          </a:xfrm>
+          <a:prstGeom prst="rect">
+            <a:avLst/>
+          </a:prstGeom>
+          <a:noFill/>
+          <a:ln/>
+        </p:spPr>
+        <p:txBody>
+          <a:bodyPr wrap="square" lIns="0" tIns="0" rIns="0" bIns="0" rtlCol="0" anchor="ctr"/>
+          <a:lstStyle/>
+          <a:p>
+            <a:pPr algn="ctr" indent="0" marL="0">
+              <a:buNone/>
+            </a:pPr>
+            <a:r>
+              <a:rPr lang="en-US" sz="1600" b="1" dirty="0">
+                <a:solidFill>
+                  <a:srgbClr val="FFFFFF"/>
+                </a:solidFill>
+                <a:latin typeface="Cambria" pitchFamily="34" charset="0"/>
+                <a:ea typeface="Cambria" pitchFamily="34" charset="-122"/>
+                <a:cs typeface="Cambria" pitchFamily="34" charset="-120"/>
+              </a:rPr>
+              <a:t>1</a:t>
+            </a:r>
+            <a:endParaRPr lang="en-US" sz="1600" dirty="0"/>
+          </a:p>
+        </p:txBody>
+      </p:sp>
+      <p:sp>
+        <p:nvSpPr>
+          <p:cNvPr id="6" name="Text 4"/>
+          <p:cNvSpPr txBox="1"/>
+          <p:nvPr/>
+        </p:nvSpPr>
+        <p:spPr>
+          <a:xfrm>
+            <a:off x="1325880" y="1709928"/>
+            <a:ext cx="3200400" cy="329184"/>
+          </a:xfrm>
+          <a:prstGeom prst="rect">
+            <a:avLst/>
+          </a:prstGeom>
+          <a:noFill/>
+          <a:ln/>
+        </p:spPr>
+        <p:txBody>
+          <a:bodyPr wrap="square" lIns="0" tIns="0" rIns="0" bIns="0" rtlCol="0" anchor="ctr"/>
+          <a:lstStyle/>
+          <a:p>
+            <a:pPr indent="0" marL="0">
+              <a:buNone/>
+            </a:pPr>
+            <a:r>
+              <a:rPr lang="en-US" sz="1600" b="1" dirty="0">
+                <a:solidFill>
+                  <a:srgbClr val="14211F"/>
+                </a:solidFill>
+                <a:latin typeface="Cambria" pitchFamily="34" charset="0"/>
+                <a:ea typeface="Cambria" pitchFamily="34" charset="-122"/>
+                <a:cs typeface="Cambria" pitchFamily="34" charset="-120"/>
+              </a:rPr>
+              <a:t>Settle the inclusion rule</a:t>
+            </a:r>
+            <a:endParaRPr lang="en-US" sz="1600" dirty="0"/>
+          </a:p>
+        </p:txBody>
+      </p:sp>
+      <p:sp>
+        <p:nvSpPr>
+          <p:cNvPr id="7" name="Text 5"/>
+          <p:cNvSpPr txBox="1"/>
+          <p:nvPr/>
+        </p:nvSpPr>
+        <p:spPr>
+          <a:xfrm>
+            <a:off x="4663440" y="1719072"/>
+            <a:ext cx="6858000" cy="566928"/>
+          </a:xfrm>
+          <a:prstGeom prst="rect">
+            <a:avLst/>
+          </a:prstGeom>
+          <a:noFill/>
+          <a:ln/>
+        </p:spPr>
+        <p:txBody>
+          <a:bodyPr wrap="square" lIns="0" tIns="0" rIns="0" bIns="0" rtlCol="0" anchor="ctr"/>
+          <a:lstStyle/>
+          <a:p>
+            <a:pPr indent="0" marL="0">
+              <a:buNone/>
+            </a:pPr>
+            <a:r>
+              <a:rPr lang="en-US" sz="1250" dirty="0">
+                <a:solidFill>
+                  <a:srgbClr val="5F706D"/>
+                </a:solidFill>
+                <a:latin typeface="Calibri" pitchFamily="34" charset="0"/>
+                <a:ea typeface="Calibri" pitchFamily="34" charset="-122"/>
+                <a:cs typeface="Calibri" pitchFamily="34" charset="-120"/>
+              </a:rPr>
+              <a:t>Decide what counts as an "announcement" — board approval, press note, or commissioning. This drives the row count more than more searching does.</a:t>
+            </a:r>
+            <a:endParaRPr lang="en-US" sz="1250" dirty="0"/>
+          </a:p>
+        </p:txBody>
+      </p:sp>
+      <p:sp>
+        <p:nvSpPr>
+          <p:cNvPr id="8" name="Shape 6"/>
           <p:cNvSpPr/>
           <p:nvPr/>
         </p:nvSpPr>
         <p:spPr>
           <a:xfrm>
-            <a:off x="914400" y="1901952"/>
-            <a:ext cx="274320" cy="274320"/>
+            <a:off x="640080" y="2587752"/>
+            <a:ext cx="475488" cy="475488"/>
+          </a:xfrm>
+          <a:prstGeom prst="ellipse">
+            <a:avLst/>
+          </a:prstGeom>
+          <a:solidFill>
+            <a:srgbClr val="D94F04"/>
+          </a:solidFill>
+          <a:ln w="12700">
+            <a:solidFill>
+              <a:srgbClr val="333333"/>
+            </a:solidFill>
+            <a:prstDash val="solid"/>
+          </a:ln>
+        </p:spPr>
+      </p:sp>
+      <p:sp>
+        <p:nvSpPr>
+          <p:cNvPr id="9" name="Text 7"/>
+          <p:cNvSpPr txBox="1"/>
+          <p:nvPr/>
+        </p:nvSpPr>
+        <p:spPr>
+          <a:xfrm>
+            <a:off x="640080" y="2660904"/>
+            <a:ext cx="475488" cy="329184"/>
+          </a:xfrm>
+          <a:prstGeom prst="rect">
+            <a:avLst/>
+          </a:prstGeom>
+          <a:noFill/>
+          <a:ln/>
+        </p:spPr>
+        <p:txBody>
+          <a:bodyPr wrap="square" lIns="0" tIns="0" rIns="0" bIns="0" rtlCol="0" anchor="ctr"/>
+          <a:lstStyle/>
+          <a:p>
+            <a:pPr algn="ctr" indent="0" marL="0">
+              <a:buNone/>
+            </a:pPr>
+            <a:r>
+              <a:rPr lang="en-US" sz="1600" b="1" dirty="0">
+                <a:solidFill>
+                  <a:srgbClr val="FFFFFF"/>
+                </a:solidFill>
+                <a:latin typeface="Cambria" pitchFamily="34" charset="0"/>
+                <a:ea typeface="Cambria" pitchFamily="34" charset="-122"/>
+                <a:cs typeface="Cambria" pitchFamily="34" charset="-120"/>
+              </a:rPr>
+              <a:t>2</a:t>
+            </a:r>
+            <a:endParaRPr lang="en-US" sz="1600" dirty="0"/>
+          </a:p>
+        </p:txBody>
+      </p:sp>
+      <p:sp>
+        <p:nvSpPr>
+          <p:cNvPr id="10" name="Text 8"/>
+          <p:cNvSpPr txBox="1"/>
+          <p:nvPr/>
+        </p:nvSpPr>
+        <p:spPr>
+          <a:xfrm>
+            <a:off x="1325880" y="2578608"/>
+            <a:ext cx="3200400" cy="329184"/>
+          </a:xfrm>
+          <a:prstGeom prst="rect">
+            <a:avLst/>
+          </a:prstGeom>
+          <a:noFill/>
+          <a:ln/>
+        </p:spPr>
+        <p:txBody>
+          <a:bodyPr wrap="square" lIns="0" tIns="0" rIns="0" bIns="0" rtlCol="0" anchor="ctr"/>
+          <a:lstStyle/>
+          <a:p>
+            <a:pPr indent="0" marL="0">
+              <a:buNone/>
+            </a:pPr>
+            <a:r>
+              <a:rPr lang="en-US" sz="1600" b="1" dirty="0">
+                <a:solidFill>
+                  <a:srgbClr val="14211F"/>
+                </a:solidFill>
+                <a:latin typeface="Cambria" pitchFamily="34" charset="0"/>
+                <a:ea typeface="Cambria" pitchFamily="34" charset="-122"/>
+                <a:cs typeface="Cambria" pitchFamily="34" charset="-120"/>
+              </a:rPr>
+              <a:t>Scale to the power target</a:t>
+            </a:r>
+            <a:endParaRPr lang="en-US" sz="1600" dirty="0"/>
+          </a:p>
+        </p:txBody>
+      </p:sp>
+      <p:sp>
+        <p:nvSpPr>
+          <p:cNvPr id="11" name="Text 9"/>
+          <p:cNvSpPr txBox="1"/>
+          <p:nvPr/>
+        </p:nvSpPr>
+        <p:spPr>
+          <a:xfrm>
+            <a:off x="4663440" y="2587752"/>
+            <a:ext cx="6858000" cy="566928"/>
+          </a:xfrm>
+          <a:prstGeom prst="rect">
+            <a:avLst/>
+          </a:prstGeom>
+          <a:noFill/>
+          <a:ln/>
+        </p:spPr>
+        <p:txBody>
+          <a:bodyPr wrap="square" lIns="0" tIns="0" rIns="0" bIns="0" rtlCol="0" anchor="ctr"/>
+          <a:lstStyle/>
+          <a:p>
+            <a:pPr indent="0" marL="0">
+              <a:buNone/>
+            </a:pPr>
+            <a:r>
+              <a:rPr lang="en-US" sz="1250" dirty="0">
+                <a:solidFill>
+                  <a:srgbClr val="5F706D"/>
+                </a:solidFill>
+                <a:latin typeface="Calibri" pitchFamily="34" charset="0"/>
+                <a:ea typeface="Calibri" pitchFamily="34" charset="-122"/>
+                <a:cs typeface="Calibri" pitchFamily="34" charset="-120"/>
+              </a:rPr>
+              <a:t>Systematic sweep of the filings corpus under that rule. We need 45–75 dated events; we have 22 dated, 16 inside the production window.</a:t>
+            </a:r>
+            <a:endParaRPr lang="en-US" sz="1250" dirty="0"/>
+          </a:p>
+        </p:txBody>
+      </p:sp>
+      <p:sp>
+        <p:nvSpPr>
+          <p:cNvPr id="12" name="Shape 10"/>
+          <p:cNvSpPr/>
+          <p:nvPr/>
+        </p:nvSpPr>
+        <p:spPr>
+          <a:xfrm>
+            <a:off x="640080" y="3456432"/>
+            <a:ext cx="475488" cy="475488"/>
           </a:xfrm>
           <a:prstGeom prst="ellipse">
             <a:avLst/>
@@ -5978,38 +5967,38 @@
       </p:sp>
       <p:sp>
         <p:nvSpPr>
-          <p:cNvPr id="6" name="Text 4"/>
-          <p:cNvSpPr txBox="1"/>
-          <p:nvPr/>
-        </p:nvSpPr>
-        <p:spPr>
-          <a:xfrm>
-            <a:off x="914400" y="2304288"/>
-            <a:ext cx="3291840" cy="731520"/>
-          </a:xfrm>
-          <a:prstGeom prst="rect">
-            <a:avLst/>
-          </a:prstGeom>
-          <a:noFill/>
-          <a:ln/>
-        </p:spPr>
-        <p:txBody>
-          <a:bodyPr wrap="square" lIns="0" tIns="0" rIns="0" bIns="0" rtlCol="0" anchor="ctr"/>
-          <a:lstStyle/>
-          <a:p>
-            <a:pPr indent="0" marL="0">
+          <p:cNvPr id="13" name="Text 11"/>
+          <p:cNvSpPr txBox="1"/>
+          <p:nvPr/>
+        </p:nvSpPr>
+        <p:spPr>
+          <a:xfrm>
+            <a:off x="640080" y="3529584"/>
+            <a:ext cx="475488" cy="329184"/>
+          </a:xfrm>
+          <a:prstGeom prst="rect">
+            <a:avLst/>
+          </a:prstGeom>
+          <a:noFill/>
+          <a:ln/>
+        </p:spPr>
+        <p:txBody>
+          <a:bodyPr wrap="square" lIns="0" tIns="0" rIns="0" bIns="0" rtlCol="0" anchor="ctr"/>
+          <a:lstStyle/>
+          <a:p>
+            <a:pPr algn="ctr" indent="0" marL="0">
               <a:buNone/>
             </a:pPr>
             <a:r>
               <a:rPr lang="en-US" sz="1600" b="1" dirty="0">
                 <a:solidFill>
-                  <a:srgbClr val="14211F"/>
+                  <a:srgbClr val="FFFFFF"/>
                 </a:solidFill>
                 <a:latin typeface="Cambria" pitchFamily="34" charset="0"/>
                 <a:ea typeface="Cambria" pitchFamily="34" charset="-122"/>
                 <a:cs typeface="Cambria" pitchFamily="34" charset="-120"/>
               </a:rPr>
-              <a:t>Success is a defensible answer, not a positive one</a:t>
+              <a:t>3</a:t>
             </a:r>
             <a:endParaRPr lang="en-US" sz="1600" dirty="0"/>
           </a:p>
@@ -6017,34 +6006,69 @@
       </p:sp>
       <p:sp>
         <p:nvSpPr>
-          <p:cNvPr id="7" name="Text 5"/>
-          <p:cNvSpPr txBox="1"/>
-          <p:nvPr/>
-        </p:nvSpPr>
-        <p:spPr>
-          <a:xfrm>
-            <a:off x="914400" y="3108960"/>
-            <a:ext cx="3291840" cy="2331720"/>
-          </a:xfrm>
-          <a:prstGeom prst="rect">
-            <a:avLst/>
-          </a:prstGeom>
-          <a:noFill/>
-          <a:ln/>
-        </p:spPr>
-        <p:txBody>
-          <a:bodyPr wrap="square" lIns="0" tIns="0" rIns="0" bIns="0" rtlCol="0" anchor="ctr"/>
-          <a:lstStyle/>
-          <a:p>
-            <a:pPr marL="342900" indent="-342900">
-              <a:spcAft>
-                <a:spcPts val="900"/>
-              </a:spcAft>
-              <a:buSzPct val="100000"/>
-              <a:buChar char="•"/>
-            </a:pPr>
-            <a:r>
-              <a:rPr lang="en-US" sz="1200" dirty="0">
+          <p:cNvPr id="14" name="Text 12"/>
+          <p:cNvSpPr txBox="1"/>
+          <p:nvPr/>
+        </p:nvSpPr>
+        <p:spPr>
+          <a:xfrm>
+            <a:off x="1325880" y="3447288"/>
+            <a:ext cx="3200400" cy="329184"/>
+          </a:xfrm>
+          <a:prstGeom prst="rect">
+            <a:avLst/>
+          </a:prstGeom>
+          <a:noFill/>
+          <a:ln/>
+        </p:spPr>
+        <p:txBody>
+          <a:bodyPr wrap="square" lIns="0" tIns="0" rIns="0" bIns="0" rtlCol="0" anchor="ctr"/>
+          <a:lstStyle/>
+          <a:p>
+            <a:pPr indent="0" marL="0">
+              <a:buNone/>
+            </a:pPr>
+            <a:r>
+              <a:rPr lang="en-US" sz="1600" b="1" dirty="0">
+                <a:solidFill>
+                  <a:srgbClr val="14211F"/>
+                </a:solidFill>
+                <a:latin typeface="Cambria" pitchFamily="34" charset="0"/>
+                <a:ea typeface="Cambria" pitchFamily="34" charset="-122"/>
+                <a:cs typeface="Cambria" pitchFamily="34" charset="-120"/>
+              </a:rPr>
+              <a:t>Build the panel</a:t>
+            </a:r>
+            <a:endParaRPr lang="en-US" sz="1600" dirty="0"/>
+          </a:p>
+        </p:txBody>
+      </p:sp>
+      <p:sp>
+        <p:nvSpPr>
+          <p:cNvPr id="15" name="Text 13"/>
+          <p:cNvSpPr txBox="1"/>
+          <p:nvPr/>
+        </p:nvSpPr>
+        <p:spPr>
+          <a:xfrm>
+            <a:off x="4663440" y="3456432"/>
+            <a:ext cx="6858000" cy="566928"/>
+          </a:xfrm>
+          <a:prstGeom prst="rect">
+            <a:avLst/>
+          </a:prstGeom>
+          <a:noFill/>
+          <a:ln/>
+        </p:spPr>
+        <p:txBody>
+          <a:bodyPr wrap="square" lIns="0" tIns="0" rIns="0" bIns="0" rtlCol="0" anchor="ctr"/>
+          <a:lstStyle/>
+          <a:p>
+            <a:pPr indent="0" marL="0">
+              <a:buNone/>
+            </a:pPr>
+            <a:r>
+              <a:rPr lang="en-US" sz="1250" dirty="0">
                 <a:solidFill>
                   <a:srgbClr val="5F706D"/>
                 </a:solidFill>
@@ -6052,20 +6076,141 @@
                 <a:ea typeface="Calibri" pitchFamily="34" charset="-122"/>
                 <a:cs typeface="Calibri" pitchFamily="34" charset="-120"/>
               </a:rPr>
-              <a:t>A clean "production does not lead announcements" is valid — but only if the test could have detected a lead.</a:t>
-            </a:r>
-            <a:endParaRPr lang="en-US" sz="1200" dirty="0"/>
-          </a:p>
-          <a:p>
-            <a:pPr marL="342900" indent="-342900">
-              <a:spcAft>
-                <a:spcPts val="900"/>
-              </a:spcAft>
-              <a:buSzPct val="100000"/>
-              <a:buChar char="•"/>
-            </a:pPr>
-            <a:r>
-              <a:rPr lang="en-US" sz="1200" dirty="0">
+              <a:t>Join production growth, registrations and announcements on month; state panel for the siting extension.</a:t>
+            </a:r>
+            <a:endParaRPr lang="en-US" sz="1250" dirty="0"/>
+          </a:p>
+        </p:txBody>
+      </p:sp>
+      <p:sp>
+        <p:nvSpPr>
+          <p:cNvPr id="16" name="Shape 14"/>
+          <p:cNvSpPr/>
+          <p:nvPr/>
+        </p:nvSpPr>
+        <p:spPr>
+          <a:xfrm>
+            <a:off x="640080" y="4325112"/>
+            <a:ext cx="475488" cy="475488"/>
+          </a:xfrm>
+          <a:prstGeom prst="ellipse">
+            <a:avLst/>
+          </a:prstGeom>
+          <a:solidFill>
+            <a:srgbClr val="0D9488"/>
+          </a:solidFill>
+          <a:ln w="12700">
+            <a:solidFill>
+              <a:srgbClr val="333333"/>
+            </a:solidFill>
+            <a:prstDash val="solid"/>
+          </a:ln>
+        </p:spPr>
+      </p:sp>
+      <p:sp>
+        <p:nvSpPr>
+          <p:cNvPr id="17" name="Text 15"/>
+          <p:cNvSpPr txBox="1"/>
+          <p:nvPr/>
+        </p:nvSpPr>
+        <p:spPr>
+          <a:xfrm>
+            <a:off x="640080" y="4398264"/>
+            <a:ext cx="475488" cy="329184"/>
+          </a:xfrm>
+          <a:prstGeom prst="rect">
+            <a:avLst/>
+          </a:prstGeom>
+          <a:noFill/>
+          <a:ln/>
+        </p:spPr>
+        <p:txBody>
+          <a:bodyPr wrap="square" lIns="0" tIns="0" rIns="0" bIns="0" rtlCol="0" anchor="ctr"/>
+          <a:lstStyle/>
+          <a:p>
+            <a:pPr algn="ctr" indent="0" marL="0">
+              <a:buNone/>
+            </a:pPr>
+            <a:r>
+              <a:rPr lang="en-US" sz="1600" b="1" dirty="0">
+                <a:solidFill>
+                  <a:srgbClr val="FFFFFF"/>
+                </a:solidFill>
+                <a:latin typeface="Cambria" pitchFamily="34" charset="0"/>
+                <a:ea typeface="Cambria" pitchFamily="34" charset="-122"/>
+                <a:cs typeface="Cambria" pitchFamily="34" charset="-120"/>
+              </a:rPr>
+              <a:t>4</a:t>
+            </a:r>
+            <a:endParaRPr lang="en-US" sz="1600" dirty="0"/>
+          </a:p>
+        </p:txBody>
+      </p:sp>
+      <p:sp>
+        <p:nvSpPr>
+          <p:cNvPr id="18" name="Text 16"/>
+          <p:cNvSpPr txBox="1"/>
+          <p:nvPr/>
+        </p:nvSpPr>
+        <p:spPr>
+          <a:xfrm>
+            <a:off x="1325880" y="4315968"/>
+            <a:ext cx="3200400" cy="329184"/>
+          </a:xfrm>
+          <a:prstGeom prst="rect">
+            <a:avLst/>
+          </a:prstGeom>
+          <a:noFill/>
+          <a:ln/>
+        </p:spPr>
+        <p:txBody>
+          <a:bodyPr wrap="square" lIns="0" tIns="0" rIns="0" bIns="0" rtlCol="0" anchor="ctr"/>
+          <a:lstStyle/>
+          <a:p>
+            <a:pPr indent="0" marL="0">
+              <a:buNone/>
+            </a:pPr>
+            <a:r>
+              <a:rPr lang="en-US" sz="1600" b="1" dirty="0">
+                <a:solidFill>
+                  <a:srgbClr val="14211F"/>
+                </a:solidFill>
+                <a:latin typeface="Cambria" pitchFamily="34" charset="0"/>
+                <a:ea typeface="Cambria" pitchFamily="34" charset="-122"/>
+                <a:cs typeface="Cambria" pitchFamily="34" charset="-120"/>
+              </a:rPr>
+              <a:t>Run the tests</a:t>
+            </a:r>
+            <a:endParaRPr lang="en-US" sz="1600" dirty="0"/>
+          </a:p>
+        </p:txBody>
+      </p:sp>
+      <p:sp>
+        <p:nvSpPr>
+          <p:cNvPr id="19" name="Text 17"/>
+          <p:cNvSpPr txBox="1"/>
+          <p:nvPr/>
+        </p:nvSpPr>
+        <p:spPr>
+          <a:xfrm>
+            <a:off x="4663440" y="4325112"/>
+            <a:ext cx="6858000" cy="566928"/>
+          </a:xfrm>
+          <a:prstGeom prst="rect">
+            <a:avLst/>
+          </a:prstGeom>
+          <a:noFill/>
+          <a:ln/>
+        </p:spPr>
+        <p:txBody>
+          <a:bodyPr wrap="square" lIns="0" tIns="0" rIns="0" bIns="0" rtlCol="0" anchor="ctr"/>
+          <a:lstStyle/>
+          <a:p>
+            <a:pPr indent="0" marL="0">
+              <a:buNone/>
+            </a:pPr>
+            <a:r>
+              <a:rPr lang="en-US" sz="1250" dirty="0">
                 <a:solidFill>
                   <a:srgbClr val="5F706D"/>
                 </a:solidFill>
@@ -6073,20 +6218,141 @@
                 <a:ea typeface="Calibri" pitchFamily="34" charset="-122"/>
                 <a:cs typeface="Calibri" pitchFamily="34" charset="-120"/>
               </a:rPr>
-              <a:t>Poisson regression on monthly announcement counts, with lagged production growth.</a:t>
-            </a:r>
-            <a:endParaRPr lang="en-US" sz="1200" dirty="0"/>
-          </a:p>
-          <a:p>
-            <a:pPr marL="342900" indent="-342900">
-              <a:spcAft>
-                <a:spcPts val="900"/>
-              </a:spcAft>
-              <a:buSzPct val="100000"/>
-              <a:buChar char="•"/>
-            </a:pPr>
-            <a:r>
-              <a:rPr lang="en-US" sz="1200" dirty="0">
+              <a:t>Lag pre-registered at k=3 rather than scanned, with the baseline and placebo checks. Achieved power beside every coefficient.</a:t>
+            </a:r>
+            <a:endParaRPr lang="en-US" sz="1250" dirty="0"/>
+          </a:p>
+        </p:txBody>
+      </p:sp>
+      <p:sp>
+        <p:nvSpPr>
+          <p:cNvPr id="20" name="Shape 18"/>
+          <p:cNvSpPr/>
+          <p:nvPr/>
+        </p:nvSpPr>
+        <p:spPr>
+          <a:xfrm>
+            <a:off x="640080" y="5193792"/>
+            <a:ext cx="475488" cy="475488"/>
+          </a:xfrm>
+          <a:prstGeom prst="ellipse">
+            <a:avLst/>
+          </a:prstGeom>
+          <a:solidFill>
+            <a:srgbClr val="0D9488"/>
+          </a:solidFill>
+          <a:ln w="12700">
+            <a:solidFill>
+              <a:srgbClr val="333333"/>
+            </a:solidFill>
+            <a:prstDash val="solid"/>
+          </a:ln>
+        </p:spPr>
+      </p:sp>
+      <p:sp>
+        <p:nvSpPr>
+          <p:cNvPr id="21" name="Text 19"/>
+          <p:cNvSpPr txBox="1"/>
+          <p:nvPr/>
+        </p:nvSpPr>
+        <p:spPr>
+          <a:xfrm>
+            <a:off x="640080" y="5266944"/>
+            <a:ext cx="475488" cy="329184"/>
+          </a:xfrm>
+          <a:prstGeom prst="rect">
+            <a:avLst/>
+          </a:prstGeom>
+          <a:noFill/>
+          <a:ln/>
+        </p:spPr>
+        <p:txBody>
+          <a:bodyPr wrap="square" lIns="0" tIns="0" rIns="0" bIns="0" rtlCol="0" anchor="ctr"/>
+          <a:lstStyle/>
+          <a:p>
+            <a:pPr algn="ctr" indent="0" marL="0">
+              <a:buNone/>
+            </a:pPr>
+            <a:r>
+              <a:rPr lang="en-US" sz="1600" b="1" dirty="0">
+                <a:solidFill>
+                  <a:srgbClr val="FFFFFF"/>
+                </a:solidFill>
+                <a:latin typeface="Cambria" pitchFamily="34" charset="0"/>
+                <a:ea typeface="Cambria" pitchFamily="34" charset="-122"/>
+                <a:cs typeface="Cambria" pitchFamily="34" charset="-120"/>
+              </a:rPr>
+              <a:t>5</a:t>
+            </a:r>
+            <a:endParaRPr lang="en-US" sz="1600" dirty="0"/>
+          </a:p>
+        </p:txBody>
+      </p:sp>
+      <p:sp>
+        <p:nvSpPr>
+          <p:cNvPr id="22" name="Text 20"/>
+          <p:cNvSpPr txBox="1"/>
+          <p:nvPr/>
+        </p:nvSpPr>
+        <p:spPr>
+          <a:xfrm>
+            <a:off x="1325880" y="5184648"/>
+            <a:ext cx="3200400" cy="329184"/>
+          </a:xfrm>
+          <a:prstGeom prst="rect">
+            <a:avLst/>
+          </a:prstGeom>
+          <a:noFill/>
+          <a:ln/>
+        </p:spPr>
+        <p:txBody>
+          <a:bodyPr wrap="square" lIns="0" tIns="0" rIns="0" bIns="0" rtlCol="0" anchor="ctr"/>
+          <a:lstStyle/>
+          <a:p>
+            <a:pPr indent="0" marL="0">
+              <a:buNone/>
+            </a:pPr>
+            <a:r>
+              <a:rPr lang="en-US" sz="1600" b="1" dirty="0">
+                <a:solidFill>
+                  <a:srgbClr val="14211F"/>
+                </a:solidFill>
+                <a:latin typeface="Cambria" pitchFamily="34" charset="0"/>
+                <a:ea typeface="Cambria" pitchFamily="34" charset="-122"/>
+                <a:cs typeface="Cambria" pitchFamily="34" charset="-120"/>
+              </a:rPr>
+              <a:t>Write up</a:t>
+            </a:r>
+            <a:endParaRPr lang="en-US" sz="1600" dirty="0"/>
+          </a:p>
+        </p:txBody>
+      </p:sp>
+      <p:sp>
+        <p:nvSpPr>
+          <p:cNvPr id="23" name="Text 21"/>
+          <p:cNvSpPr txBox="1"/>
+          <p:nvPr/>
+        </p:nvSpPr>
+        <p:spPr>
+          <a:xfrm>
+            <a:off x="4663440" y="5193792"/>
+            <a:ext cx="6858000" cy="566928"/>
+          </a:xfrm>
+          <a:prstGeom prst="rect">
+            <a:avLst/>
+          </a:prstGeom>
+          <a:noFill/>
+          <a:ln/>
+        </p:spPr>
+        <p:txBody>
+          <a:bodyPr wrap="square" lIns="0" tIns="0" rIns="0" bIns="0" rtlCol="0" anchor="ctr"/>
+          <a:lstStyle/>
+          <a:p>
+            <a:pPr indent="0" marL="0">
+              <a:buNone/>
+            </a:pPr>
+            <a:r>
+              <a:rPr lang="en-US" sz="1250" dirty="0">
                 <a:solidFill>
                   <a:srgbClr val="5F706D"/>
                 </a:solidFill>
@@ -6094,348 +6360,48 @@
                 <a:ea typeface="Calibri" pitchFamily="34" charset="-122"/>
                 <a:cs typeface="Calibri" pitchFamily="34" charset="-120"/>
               </a:rPr>
-              <a:t>Baseline to beat: counts from their own lag plus a time trend.</a:t>
-            </a:r>
-            <a:endParaRPr lang="en-US" sz="1200" dirty="0"/>
-          </a:p>
-          <a:p>
-            <a:pPr marL="342900" indent="-342900">
-              <a:spcAft>
-                <a:spcPts val="900"/>
-              </a:spcAft>
-              <a:buSzPct val="100000"/>
-              <a:buChar char="•"/>
-            </a:pPr>
-            <a:r>
-              <a:rPr lang="en-US" sz="1200" dirty="0">
-                <a:solidFill>
-                  <a:srgbClr val="5F706D"/>
+              <a:t>Including the negative result on the investment source, which is a finding about alt-data coverage in its own right.</a:t>
+            </a:r>
+            <a:endParaRPr lang="en-US" sz="1250" dirty="0"/>
+          </a:p>
+        </p:txBody>
+      </p:sp>
+      <p:sp>
+        <p:nvSpPr>
+          <p:cNvPr id="24" name="Text 22"/>
+          <p:cNvSpPr txBox="1"/>
+          <p:nvPr/>
+        </p:nvSpPr>
+        <p:spPr>
+          <a:xfrm>
+            <a:off x="640080" y="5989320"/>
+            <a:ext cx="10881360" cy="365760"/>
+          </a:xfrm>
+          <a:prstGeom prst="rect">
+            <a:avLst/>
+          </a:prstGeom>
+          <a:noFill/>
+          <a:ln/>
+        </p:spPr>
+        <p:txBody>
+          <a:bodyPr wrap="square" lIns="0" tIns="0" rIns="0" bIns="0" rtlCol="0" anchor="ctr"/>
+          <a:lstStyle/>
+          <a:p>
+            <a:pPr indent="0" marL="0">
+              <a:buNone/>
+            </a:pPr>
+            <a:r>
+              <a:rPr lang="en-US" sz="1200" b="1" dirty="0">
+                <a:solidFill>
+                  <a:srgbClr val="D94F04"/>
                 </a:solidFill>
                 <a:latin typeface="Calibri" pitchFamily="34" charset="0"/>
                 <a:ea typeface="Calibri" pitchFamily="34" charset="-122"/>
                 <a:cs typeface="Calibri" pitchFamily="34" charset="-120"/>
               </a:rPr>
-              <a:t>Placebo: shuffle announcement dates within year; the lead must vanish.</a:t>
+              <a:t>~35 seconds. Steps 1 and 2 are the critical path. Everything downstream is blocked on how many dated events we can defensibly assemble.</a:t>
             </a:r>
             <a:endParaRPr lang="en-US" sz="1200" dirty="0"/>
-          </a:p>
-        </p:txBody>
-      </p:sp>
-      <p:graphicFrame>
-        <p:nvGraphicFramePr>
-          <p:cNvPr id="8" name="Chart 0" descr=""/>
-          <p:cNvGraphicFramePr/>
-          <p:nvPr/>
-        </p:nvGraphicFramePr>
-        <p:xfrm>
-          <a:off x="4709160" y="1645920"/>
-          <a:ext cx="6830568" cy="2880360"/>
-        </p:xfrm>
-        <a:graphic xmlns:a="http://schemas.openxmlformats.org/drawingml/2006/main">
-          <a:graphicData uri="http://schemas.openxmlformats.org/drawingml/2006/chart">
-            <c:chart xmlns:c="http://schemas.openxmlformats.org/drawingml/2006/chart" r:id="rId1"/>
-          </a:graphicData>
-        </a:graphic>
-      </p:graphicFrame>
-      <p:sp>
-        <p:nvSpPr>
-          <p:cNvPr id="9" name="Text 6"/>
-          <p:cNvSpPr txBox="1"/>
-          <p:nvPr/>
-        </p:nvSpPr>
-        <p:spPr>
-          <a:xfrm>
-            <a:off x="4709160" y="4526280"/>
-            <a:ext cx="6830568" cy="274320"/>
-          </a:xfrm>
-          <a:prstGeom prst="rect">
-            <a:avLst/>
-          </a:prstGeom>
-          <a:noFill/>
-          <a:ln/>
-        </p:spPr>
-        <p:txBody>
-          <a:bodyPr wrap="square" lIns="0" tIns="0" rIns="0" bIns="0" rtlCol="0" anchor="ctr"/>
-          <a:lstStyle/>
-          <a:p>
-            <a:pPr indent="0" marL="0">
-              <a:buNone/>
-            </a:pPr>
-            <a:r>
-              <a:rPr lang="en-US" sz="1050" i="1" dirty="0">
-                <a:solidFill>
-                  <a:srgbClr val="5F706D"/>
-                </a:solidFill>
-                <a:latin typeface="Calibri" pitchFamily="34" charset="0"/>
-                <a:ea typeface="Calibri" pitchFamily="34" charset="-122"/>
-                <a:cs typeface="Calibri" pitchFamily="34" charset="-120"/>
-              </a:rPr>
-              <a:t>Simulated power vs number of dated events, scanning lags k = 1…6. We have 16.</a:t>
-            </a:r>
-            <a:endParaRPr lang="en-US" sz="1050" dirty="0"/>
-          </a:p>
-        </p:txBody>
-      </p:sp>
-      <p:sp>
-        <p:nvSpPr>
-          <p:cNvPr id="10" name="Shape 7"/>
-          <p:cNvSpPr/>
-          <p:nvPr/>
-        </p:nvSpPr>
-        <p:spPr>
-          <a:xfrm>
-            <a:off x="4709160" y="4864608"/>
-            <a:ext cx="3337560" cy="758952"/>
-          </a:xfrm>
-          <a:prstGeom prst="roundRect">
-            <a:avLst>
-              <a:gd name="adj" fmla="val 9639"/>
-            </a:avLst>
-          </a:prstGeom>
-          <a:solidFill>
-            <a:srgbClr val="F4F8F7"/>
-          </a:solidFill>
-          <a:ln w="12700">
-            <a:solidFill>
-              <a:srgbClr val="FFFFFF"/>
-            </a:solidFill>
-            <a:prstDash val="solid"/>
-          </a:ln>
-        </p:spPr>
-      </p:sp>
-      <p:sp>
-        <p:nvSpPr>
-          <p:cNvPr id="11" name="Text 8"/>
-          <p:cNvSpPr txBox="1"/>
-          <p:nvPr/>
-        </p:nvSpPr>
-        <p:spPr>
-          <a:xfrm>
-            <a:off x="4736592" y="4992624"/>
-            <a:ext cx="3282696" cy="566928"/>
-          </a:xfrm>
-          <a:prstGeom prst="rect">
-            <a:avLst/>
-          </a:prstGeom>
-          <a:noFill/>
-          <a:ln/>
-        </p:spPr>
-        <p:txBody>
-          <a:bodyPr wrap="square" lIns="0" tIns="0" rIns="0" bIns="0" rtlCol="0" anchor="ctr"/>
-          <a:lstStyle/>
-          <a:p>
-            <a:pPr algn="ctr" indent="0" marL="0">
-              <a:buNone/>
-            </a:pPr>
-            <a:r>
-              <a:rPr lang="en-US" sz="3200" b="1" dirty="0">
-                <a:solidFill>
-                  <a:srgbClr val="D94F04"/>
-                </a:solidFill>
-                <a:latin typeface="Cambria" pitchFamily="34" charset="0"/>
-                <a:ea typeface="Cambria" pitchFamily="34" charset="-122"/>
-                <a:cs typeface="Cambria" pitchFamily="34" charset="-120"/>
-              </a:rPr>
-              <a:t>~73 events</a:t>
-            </a:r>
-            <a:endParaRPr lang="en-US" sz="3200" dirty="0"/>
-          </a:p>
-        </p:txBody>
-      </p:sp>
-      <p:sp>
-        <p:nvSpPr>
-          <p:cNvPr id="12" name="Text 9"/>
-          <p:cNvSpPr txBox="1"/>
-          <p:nvPr/>
-        </p:nvSpPr>
-        <p:spPr>
-          <a:xfrm>
-            <a:off x="4800600" y="5577840"/>
-            <a:ext cx="3154680" cy="658368"/>
-          </a:xfrm>
-          <a:prstGeom prst="rect">
-            <a:avLst/>
-          </a:prstGeom>
-          <a:noFill/>
-          <a:ln/>
-        </p:spPr>
-        <p:txBody>
-          <a:bodyPr wrap="square" lIns="0" tIns="0" rIns="0" bIns="0" rtlCol="0" anchor="ctr"/>
-          <a:lstStyle/>
-          <a:p>
-            <a:pPr algn="ctr" indent="0" marL="0">
-              <a:buNone/>
-            </a:pPr>
-            <a:r>
-              <a:rPr lang="en-US" sz="1050" dirty="0">
-                <a:solidFill>
-                  <a:srgbClr val="5F706D"/>
-                </a:solidFill>
-                <a:latin typeface="Calibri" pitchFamily="34" charset="0"/>
-                <a:ea typeface="Calibri" pitchFamily="34" charset="-122"/>
-                <a:cs typeface="Calibri" pitchFamily="34" charset="-120"/>
-              </a:rPr>
-              <a:t>for 80% power scanning six lags</a:t>
-            </a:r>
-            <a:endParaRPr lang="en-US" sz="1050" dirty="0"/>
-          </a:p>
-        </p:txBody>
-      </p:sp>
-      <p:sp>
-        <p:nvSpPr>
-          <p:cNvPr id="13" name="Shape 10"/>
-          <p:cNvSpPr/>
-          <p:nvPr/>
-        </p:nvSpPr>
-        <p:spPr>
-          <a:xfrm>
-            <a:off x="8202168" y="4864608"/>
-            <a:ext cx="3337560" cy="758952"/>
-          </a:xfrm>
-          <a:prstGeom prst="roundRect">
-            <a:avLst>
-              <a:gd name="adj" fmla="val 9639"/>
-            </a:avLst>
-          </a:prstGeom>
-          <a:solidFill>
-            <a:srgbClr val="F4F8F7"/>
-          </a:solidFill>
-          <a:ln w="12700">
-            <a:solidFill>
-              <a:srgbClr val="FFFFFF"/>
-            </a:solidFill>
-            <a:prstDash val="solid"/>
-          </a:ln>
-        </p:spPr>
-      </p:sp>
-      <p:sp>
-        <p:nvSpPr>
-          <p:cNvPr id="14" name="Text 11"/>
-          <p:cNvSpPr txBox="1"/>
-          <p:nvPr/>
-        </p:nvSpPr>
-        <p:spPr>
-          <a:xfrm>
-            <a:off x="8229600" y="4992624"/>
-            <a:ext cx="3282696" cy="566928"/>
-          </a:xfrm>
-          <a:prstGeom prst="rect">
-            <a:avLst/>
-          </a:prstGeom>
-          <a:noFill/>
-          <a:ln/>
-        </p:spPr>
-        <p:txBody>
-          <a:bodyPr wrap="square" lIns="0" tIns="0" rIns="0" bIns="0" rtlCol="0" anchor="ctr"/>
-          <a:lstStyle/>
-          <a:p>
-            <a:pPr algn="ctr" indent="0" marL="0">
-              <a:buNone/>
-            </a:pPr>
-            <a:r>
-              <a:rPr lang="en-US" sz="3200" b="1" dirty="0">
-                <a:solidFill>
-                  <a:srgbClr val="0D9488"/>
-                </a:solidFill>
-                <a:latin typeface="Cambria" pitchFamily="34" charset="0"/>
-                <a:ea typeface="Cambria" pitchFamily="34" charset="-122"/>
-                <a:cs typeface="Cambria" pitchFamily="34" charset="-120"/>
-              </a:rPr>
-              <a:t>~48 events</a:t>
-            </a:r>
-            <a:endParaRPr lang="en-US" sz="3200" dirty="0"/>
-          </a:p>
-        </p:txBody>
-      </p:sp>
-      <p:sp>
-        <p:nvSpPr>
-          <p:cNvPr id="15" name="Text 12"/>
-          <p:cNvSpPr txBox="1"/>
-          <p:nvPr/>
-        </p:nvSpPr>
-        <p:spPr>
-          <a:xfrm>
-            <a:off x="8293608" y="5577840"/>
-            <a:ext cx="3154680" cy="658368"/>
-          </a:xfrm>
-          <a:prstGeom prst="rect">
-            <a:avLst/>
-          </a:prstGeom>
-          <a:noFill/>
-          <a:ln/>
-        </p:spPr>
-        <p:txBody>
-          <a:bodyPr wrap="square" lIns="0" tIns="0" rIns="0" bIns="0" rtlCol="0" anchor="ctr"/>
-          <a:lstStyle/>
-          <a:p>
-            <a:pPr algn="ctr" indent="0" marL="0">
-              <a:buNone/>
-            </a:pPr>
-            <a:r>
-              <a:rPr lang="en-US" sz="1050" dirty="0">
-                <a:solidFill>
-                  <a:srgbClr val="5F706D"/>
-                </a:solidFill>
-                <a:latin typeface="Calibri" pitchFamily="34" charset="0"/>
-                <a:ea typeface="Calibri" pitchFamily="34" charset="-122"/>
-                <a:cs typeface="Calibri" pitchFamily="34" charset="-120"/>
-              </a:rPr>
-              <a:t>if the lag is fixed in advance</a:t>
-            </a:r>
-            <a:endParaRPr lang="en-US" sz="1050" dirty="0"/>
-          </a:p>
-        </p:txBody>
-      </p:sp>
-      <p:sp>
-        <p:nvSpPr>
-          <p:cNvPr id="16" name="Text 13"/>
-          <p:cNvSpPr txBox="1"/>
-          <p:nvPr/>
-        </p:nvSpPr>
-        <p:spPr>
-          <a:xfrm>
-            <a:off x="640080" y="5833872"/>
-            <a:ext cx="10881360" cy="493776"/>
-          </a:xfrm>
-          <a:prstGeom prst="rect">
-            <a:avLst/>
-          </a:prstGeom>
-          <a:noFill/>
-          <a:ln/>
-        </p:spPr>
-        <p:txBody>
-          <a:bodyPr wrap="square" lIns="0" tIns="0" rIns="0" bIns="0" rtlCol="0" anchor="ctr"/>
-          <a:lstStyle/>
-          <a:p>
-            <a:pPr indent="0" marL="0">
-              <a:buNone/>
-            </a:pPr>
-            <a:r>
-              <a:rPr lang="en-US" sz="1300" b="1" dirty="0">
-                <a:solidFill>
-                  <a:srgbClr val="14211F"/>
-                </a:solidFill>
-                <a:latin typeface="Calibri" pitchFamily="34" charset="0"/>
-                <a:ea typeface="Calibri" pitchFamily="34" charset="-122"/>
-                <a:cs typeface="Calibri" pitchFamily="34" charset="-120"/>
-              </a:rPr>
-              <a:t>At our 16 events a moderate effect is caught 15% of the time. </a:t>
-            </a:r>
-            <a:pPr indent="0" marL="0">
-              <a:buNone/>
-            </a:pPr>
-            <a:r>
-              <a:rPr lang="en-US" sz="1300" dirty="0">
-                <a:solidFill>
-                  <a:srgbClr val="5F706D"/>
-                </a:solidFill>
-                <a:latin typeface="Calibri" pitchFamily="34" charset="0"/>
-                <a:ea typeface="Calibri" pitchFamily="34" charset="-122"/>
-                <a:cs typeface="Calibri" pitchFamily="34" charset="-120"/>
-              </a:rPr>
-              <a:t>Fixing the lag in advance cuts the events we need by a third — the cheapest win available.</a:t>
-            </a:r>
-            <a:endParaRPr lang="en-US" sz="1300" dirty="0"/>
           </a:p>
         </p:txBody>
       </p:sp>
@@ -6450,865 +6416,6 @@
 <file path=ppt/slides/slide7.xml><?xml version="1.0" encoding="utf-8"?>
 <p:sld xmlns:a="http://schemas.openxmlformats.org/drawingml/2006/main" xmlns:r="http://schemas.openxmlformats.org/officeDocument/2006/relationships" xmlns:p="http://schemas.openxmlformats.org/presentationml/2006/main">
   <p:cSld name="Slide 7">
-    <p:bg>
-      <p:bgPr>
-        <a:solidFill>
-          <a:srgbClr val="FFFFFF"/>
-        </a:solidFill>
-      </p:bgPr>
-    </p:bg>
-    <p:spTree>
-      <p:nvGrpSpPr>
-        <p:cNvPr id="1" name=""/>
-        <p:cNvGrpSpPr/>
-        <p:nvPr/>
-      </p:nvGrpSpPr>
-      <p:grpSpPr>
-        <a:xfrm>
-          <a:off x="0" y="0"/>
-          <a:ext cx="0" cy="0"/>
-          <a:chOff x="0" y="0"/>
-          <a:chExt cx="0" cy="0"/>
-        </a:xfrm>
-      </p:grpSpPr>
-      <p:sp>
-        <p:nvSpPr>
-          <p:cNvPr id="2" name="Text 0"/>
-          <p:cNvSpPr txBox="1"/>
-          <p:nvPr/>
-        </p:nvSpPr>
-        <p:spPr>
-          <a:xfrm>
-            <a:off x="640080" y="457200"/>
-            <a:ext cx="10881360" cy="256032"/>
-          </a:xfrm>
-          <a:prstGeom prst="rect">
-            <a:avLst/>
-          </a:prstGeom>
-          <a:noFill/>
-          <a:ln/>
-        </p:spPr>
-        <p:txBody>
-          <a:bodyPr wrap="square" lIns="0" tIns="0" rIns="0" bIns="0" rtlCol="0" anchor="ctr"/>
-          <a:lstStyle/>
-          <a:p>
-            <a:pPr indent="0" marL="0">
-              <a:buNone/>
-            </a:pPr>
-            <a:r>
-              <a:rPr lang="en-US" sz="1200" b="1" spc="160" kern="0" dirty="0">
-                <a:solidFill>
-                  <a:srgbClr val="0D9488"/>
-                </a:solidFill>
-                <a:latin typeface="Calibri" pitchFamily="34" charset="0"/>
-                <a:ea typeface="Calibri" pitchFamily="34" charset="-122"/>
-                <a:cs typeface="Calibri" pitchFamily="34" charset="-120"/>
-              </a:rPr>
-              <a:t>05 · ROADMAP</a:t>
-            </a:r>
-            <a:endParaRPr lang="en-US" sz="1200" dirty="0"/>
-          </a:p>
-        </p:txBody>
-      </p:sp>
-      <p:sp>
-        <p:nvSpPr>
-          <p:cNvPr id="3" name="Text 1"/>
-          <p:cNvSpPr txBox="1"/>
-          <p:nvPr/>
-        </p:nvSpPr>
-        <p:spPr>
-          <a:xfrm>
-            <a:off x="640080" y="749808"/>
-            <a:ext cx="10881360" cy="658368"/>
-          </a:xfrm>
-          <a:prstGeom prst="rect">
-            <a:avLst/>
-          </a:prstGeom>
-          <a:noFill/>
-          <a:ln/>
-        </p:spPr>
-        <p:txBody>
-          <a:bodyPr wrap="square" lIns="0" tIns="0" rIns="0" bIns="0" rtlCol="0" anchor="ctr"/>
-          <a:lstStyle/>
-          <a:p>
-            <a:pPr indent="0" marL="0">
-              <a:buNone/>
-            </a:pPr>
-            <a:r>
-              <a:rPr lang="en-US" sz="3600" b="1" dirty="0">
-                <a:solidFill>
-                  <a:srgbClr val="14211F"/>
-                </a:solidFill>
-                <a:latin typeface="Cambria" pitchFamily="34" charset="0"/>
-                <a:ea typeface="Cambria" pitchFamily="34" charset="-122"/>
-                <a:cs typeface="Cambria" pitchFamily="34" charset="-120"/>
-              </a:rPr>
-              <a:t>Next steps</a:t>
-            </a:r>
-            <a:endParaRPr lang="en-US" sz="3600" dirty="0"/>
-          </a:p>
-        </p:txBody>
-      </p:sp>
-      <p:sp>
-        <p:nvSpPr>
-          <p:cNvPr id="4" name="Shape 2"/>
-          <p:cNvSpPr/>
-          <p:nvPr/>
-        </p:nvSpPr>
-        <p:spPr>
-          <a:xfrm>
-            <a:off x="640080" y="1719072"/>
-            <a:ext cx="475488" cy="475488"/>
-          </a:xfrm>
-          <a:prstGeom prst="ellipse">
-            <a:avLst/>
-          </a:prstGeom>
-          <a:solidFill>
-            <a:srgbClr val="D94F04"/>
-          </a:solidFill>
-          <a:ln w="12700">
-            <a:solidFill>
-              <a:srgbClr val="333333"/>
-            </a:solidFill>
-            <a:prstDash val="solid"/>
-          </a:ln>
-        </p:spPr>
-      </p:sp>
-      <p:sp>
-        <p:nvSpPr>
-          <p:cNvPr id="5" name="Text 3"/>
-          <p:cNvSpPr txBox="1"/>
-          <p:nvPr/>
-        </p:nvSpPr>
-        <p:spPr>
-          <a:xfrm>
-            <a:off x="640080" y="1792224"/>
-            <a:ext cx="475488" cy="329184"/>
-          </a:xfrm>
-          <a:prstGeom prst="rect">
-            <a:avLst/>
-          </a:prstGeom>
-          <a:noFill/>
-          <a:ln/>
-        </p:spPr>
-        <p:txBody>
-          <a:bodyPr wrap="square" lIns="0" tIns="0" rIns="0" bIns="0" rtlCol="0" anchor="ctr"/>
-          <a:lstStyle/>
-          <a:p>
-            <a:pPr algn="ctr" indent="0" marL="0">
-              <a:buNone/>
-            </a:pPr>
-            <a:r>
-              <a:rPr lang="en-US" sz="1600" b="1" dirty="0">
-                <a:solidFill>
-                  <a:srgbClr val="FFFFFF"/>
-                </a:solidFill>
-                <a:latin typeface="Cambria" pitchFamily="34" charset="0"/>
-                <a:ea typeface="Cambria" pitchFamily="34" charset="-122"/>
-                <a:cs typeface="Cambria" pitchFamily="34" charset="-120"/>
-              </a:rPr>
-              <a:t>1</a:t>
-            </a:r>
-            <a:endParaRPr lang="en-US" sz="1600" dirty="0"/>
-          </a:p>
-        </p:txBody>
-      </p:sp>
-      <p:sp>
-        <p:nvSpPr>
-          <p:cNvPr id="6" name="Text 4"/>
-          <p:cNvSpPr txBox="1"/>
-          <p:nvPr/>
-        </p:nvSpPr>
-        <p:spPr>
-          <a:xfrm>
-            <a:off x="1325880" y="1709928"/>
-            <a:ext cx="3200400" cy="329184"/>
-          </a:xfrm>
-          <a:prstGeom prst="rect">
-            <a:avLst/>
-          </a:prstGeom>
-          <a:noFill/>
-          <a:ln/>
-        </p:spPr>
-        <p:txBody>
-          <a:bodyPr wrap="square" lIns="0" tIns="0" rIns="0" bIns="0" rtlCol="0" anchor="ctr"/>
-          <a:lstStyle/>
-          <a:p>
-            <a:pPr indent="0" marL="0">
-              <a:buNone/>
-            </a:pPr>
-            <a:r>
-              <a:rPr lang="en-US" sz="1600" b="1" dirty="0">
-                <a:solidFill>
-                  <a:srgbClr val="14211F"/>
-                </a:solidFill>
-                <a:latin typeface="Cambria" pitchFamily="34" charset="0"/>
-                <a:ea typeface="Cambria" pitchFamily="34" charset="-122"/>
-                <a:cs typeface="Cambria" pitchFamily="34" charset="-120"/>
-              </a:rPr>
-              <a:t>Settle the inclusion rule</a:t>
-            </a:r>
-            <a:endParaRPr lang="en-US" sz="1600" dirty="0"/>
-          </a:p>
-        </p:txBody>
-      </p:sp>
-      <p:sp>
-        <p:nvSpPr>
-          <p:cNvPr id="7" name="Text 5"/>
-          <p:cNvSpPr txBox="1"/>
-          <p:nvPr/>
-        </p:nvSpPr>
-        <p:spPr>
-          <a:xfrm>
-            <a:off x="4663440" y="1719072"/>
-            <a:ext cx="6858000" cy="566928"/>
-          </a:xfrm>
-          <a:prstGeom prst="rect">
-            <a:avLst/>
-          </a:prstGeom>
-          <a:noFill/>
-          <a:ln/>
-        </p:spPr>
-        <p:txBody>
-          <a:bodyPr wrap="square" lIns="0" tIns="0" rIns="0" bIns="0" rtlCol="0" anchor="ctr"/>
-          <a:lstStyle/>
-          <a:p>
-            <a:pPr indent="0" marL="0">
-              <a:buNone/>
-            </a:pPr>
-            <a:r>
-              <a:rPr lang="en-US" sz="1250" dirty="0">
-                <a:solidFill>
-                  <a:srgbClr val="5F706D"/>
-                </a:solidFill>
-                <a:latin typeface="Calibri" pitchFamily="34" charset="0"/>
-                <a:ea typeface="Calibri" pitchFamily="34" charset="-122"/>
-                <a:cs typeface="Calibri" pitchFamily="34" charset="-120"/>
-              </a:rPr>
-              <a:t>Decide what counts as an "announcement" — board approval, press note, or commissioning. This drives the row count more than more searching does.</a:t>
-            </a:r>
-            <a:endParaRPr lang="en-US" sz="1250" dirty="0"/>
-          </a:p>
-        </p:txBody>
-      </p:sp>
-      <p:sp>
-        <p:nvSpPr>
-          <p:cNvPr id="8" name="Shape 6"/>
-          <p:cNvSpPr/>
-          <p:nvPr/>
-        </p:nvSpPr>
-        <p:spPr>
-          <a:xfrm>
-            <a:off x="640080" y="2587752"/>
-            <a:ext cx="475488" cy="475488"/>
-          </a:xfrm>
-          <a:prstGeom prst="ellipse">
-            <a:avLst/>
-          </a:prstGeom>
-          <a:solidFill>
-            <a:srgbClr val="D94F04"/>
-          </a:solidFill>
-          <a:ln w="12700">
-            <a:solidFill>
-              <a:srgbClr val="333333"/>
-            </a:solidFill>
-            <a:prstDash val="solid"/>
-          </a:ln>
-        </p:spPr>
-      </p:sp>
-      <p:sp>
-        <p:nvSpPr>
-          <p:cNvPr id="9" name="Text 7"/>
-          <p:cNvSpPr txBox="1"/>
-          <p:nvPr/>
-        </p:nvSpPr>
-        <p:spPr>
-          <a:xfrm>
-            <a:off x="640080" y="2660904"/>
-            <a:ext cx="475488" cy="329184"/>
-          </a:xfrm>
-          <a:prstGeom prst="rect">
-            <a:avLst/>
-          </a:prstGeom>
-          <a:noFill/>
-          <a:ln/>
-        </p:spPr>
-        <p:txBody>
-          <a:bodyPr wrap="square" lIns="0" tIns="0" rIns="0" bIns="0" rtlCol="0" anchor="ctr"/>
-          <a:lstStyle/>
-          <a:p>
-            <a:pPr algn="ctr" indent="0" marL="0">
-              <a:buNone/>
-            </a:pPr>
-            <a:r>
-              <a:rPr lang="en-US" sz="1600" b="1" dirty="0">
-                <a:solidFill>
-                  <a:srgbClr val="FFFFFF"/>
-                </a:solidFill>
-                <a:latin typeface="Cambria" pitchFamily="34" charset="0"/>
-                <a:ea typeface="Cambria" pitchFamily="34" charset="-122"/>
-                <a:cs typeface="Cambria" pitchFamily="34" charset="-120"/>
-              </a:rPr>
-              <a:t>2</a:t>
-            </a:r>
-            <a:endParaRPr lang="en-US" sz="1600" dirty="0"/>
-          </a:p>
-        </p:txBody>
-      </p:sp>
-      <p:sp>
-        <p:nvSpPr>
-          <p:cNvPr id="10" name="Text 8"/>
-          <p:cNvSpPr txBox="1"/>
-          <p:nvPr/>
-        </p:nvSpPr>
-        <p:spPr>
-          <a:xfrm>
-            <a:off x="1325880" y="2578608"/>
-            <a:ext cx="3200400" cy="329184"/>
-          </a:xfrm>
-          <a:prstGeom prst="rect">
-            <a:avLst/>
-          </a:prstGeom>
-          <a:noFill/>
-          <a:ln/>
-        </p:spPr>
-        <p:txBody>
-          <a:bodyPr wrap="square" lIns="0" tIns="0" rIns="0" bIns="0" rtlCol="0" anchor="ctr"/>
-          <a:lstStyle/>
-          <a:p>
-            <a:pPr indent="0" marL="0">
-              <a:buNone/>
-            </a:pPr>
-            <a:r>
-              <a:rPr lang="en-US" sz="1600" b="1" dirty="0">
-                <a:solidFill>
-                  <a:srgbClr val="14211F"/>
-                </a:solidFill>
-                <a:latin typeface="Cambria" pitchFamily="34" charset="0"/>
-                <a:ea typeface="Cambria" pitchFamily="34" charset="-122"/>
-                <a:cs typeface="Cambria" pitchFamily="34" charset="-120"/>
-              </a:rPr>
-              <a:t>Scale to the power target</a:t>
-            </a:r>
-            <a:endParaRPr lang="en-US" sz="1600" dirty="0"/>
-          </a:p>
-        </p:txBody>
-      </p:sp>
-      <p:sp>
-        <p:nvSpPr>
-          <p:cNvPr id="11" name="Text 9"/>
-          <p:cNvSpPr txBox="1"/>
-          <p:nvPr/>
-        </p:nvSpPr>
-        <p:spPr>
-          <a:xfrm>
-            <a:off x="4663440" y="2587752"/>
-            <a:ext cx="6858000" cy="566928"/>
-          </a:xfrm>
-          <a:prstGeom prst="rect">
-            <a:avLst/>
-          </a:prstGeom>
-          <a:noFill/>
-          <a:ln/>
-        </p:spPr>
-        <p:txBody>
-          <a:bodyPr wrap="square" lIns="0" tIns="0" rIns="0" bIns="0" rtlCol="0" anchor="ctr"/>
-          <a:lstStyle/>
-          <a:p>
-            <a:pPr indent="0" marL="0">
-              <a:buNone/>
-            </a:pPr>
-            <a:r>
-              <a:rPr lang="en-US" sz="1250" dirty="0">
-                <a:solidFill>
-                  <a:srgbClr val="5F706D"/>
-                </a:solidFill>
-                <a:latin typeface="Calibri" pitchFamily="34" charset="0"/>
-                <a:ea typeface="Calibri" pitchFamily="34" charset="-122"/>
-                <a:cs typeface="Calibri" pitchFamily="34" charset="-120"/>
-              </a:rPr>
-              <a:t>Systematic sweep of the filings corpus under that rule. We need 45–75 dated events; we have 22 dated, 16 inside the production window.</a:t>
-            </a:r>
-            <a:endParaRPr lang="en-US" sz="1250" dirty="0"/>
-          </a:p>
-        </p:txBody>
-      </p:sp>
-      <p:sp>
-        <p:nvSpPr>
-          <p:cNvPr id="12" name="Shape 10"/>
-          <p:cNvSpPr/>
-          <p:nvPr/>
-        </p:nvSpPr>
-        <p:spPr>
-          <a:xfrm>
-            <a:off x="640080" y="3456432"/>
-            <a:ext cx="475488" cy="475488"/>
-          </a:xfrm>
-          <a:prstGeom prst="ellipse">
-            <a:avLst/>
-          </a:prstGeom>
-          <a:solidFill>
-            <a:srgbClr val="0D9488"/>
-          </a:solidFill>
-          <a:ln w="12700">
-            <a:solidFill>
-              <a:srgbClr val="333333"/>
-            </a:solidFill>
-            <a:prstDash val="solid"/>
-          </a:ln>
-        </p:spPr>
-      </p:sp>
-      <p:sp>
-        <p:nvSpPr>
-          <p:cNvPr id="13" name="Text 11"/>
-          <p:cNvSpPr txBox="1"/>
-          <p:nvPr/>
-        </p:nvSpPr>
-        <p:spPr>
-          <a:xfrm>
-            <a:off x="640080" y="3529584"/>
-            <a:ext cx="475488" cy="329184"/>
-          </a:xfrm>
-          <a:prstGeom prst="rect">
-            <a:avLst/>
-          </a:prstGeom>
-          <a:noFill/>
-          <a:ln/>
-        </p:spPr>
-        <p:txBody>
-          <a:bodyPr wrap="square" lIns="0" tIns="0" rIns="0" bIns="0" rtlCol="0" anchor="ctr"/>
-          <a:lstStyle/>
-          <a:p>
-            <a:pPr algn="ctr" indent="0" marL="0">
-              <a:buNone/>
-            </a:pPr>
-            <a:r>
-              <a:rPr lang="en-US" sz="1600" b="1" dirty="0">
-                <a:solidFill>
-                  <a:srgbClr val="FFFFFF"/>
-                </a:solidFill>
-                <a:latin typeface="Cambria" pitchFamily="34" charset="0"/>
-                <a:ea typeface="Cambria" pitchFamily="34" charset="-122"/>
-                <a:cs typeface="Cambria" pitchFamily="34" charset="-120"/>
-              </a:rPr>
-              <a:t>3</a:t>
-            </a:r>
-            <a:endParaRPr lang="en-US" sz="1600" dirty="0"/>
-          </a:p>
-        </p:txBody>
-      </p:sp>
-      <p:sp>
-        <p:nvSpPr>
-          <p:cNvPr id="14" name="Text 12"/>
-          <p:cNvSpPr txBox="1"/>
-          <p:nvPr/>
-        </p:nvSpPr>
-        <p:spPr>
-          <a:xfrm>
-            <a:off x="1325880" y="3447288"/>
-            <a:ext cx="3200400" cy="329184"/>
-          </a:xfrm>
-          <a:prstGeom prst="rect">
-            <a:avLst/>
-          </a:prstGeom>
-          <a:noFill/>
-          <a:ln/>
-        </p:spPr>
-        <p:txBody>
-          <a:bodyPr wrap="square" lIns="0" tIns="0" rIns="0" bIns="0" rtlCol="0" anchor="ctr"/>
-          <a:lstStyle/>
-          <a:p>
-            <a:pPr indent="0" marL="0">
-              <a:buNone/>
-            </a:pPr>
-            <a:r>
-              <a:rPr lang="en-US" sz="1600" b="1" dirty="0">
-                <a:solidFill>
-                  <a:srgbClr val="14211F"/>
-                </a:solidFill>
-                <a:latin typeface="Cambria" pitchFamily="34" charset="0"/>
-                <a:ea typeface="Cambria" pitchFamily="34" charset="-122"/>
-                <a:cs typeface="Cambria" pitchFamily="34" charset="-120"/>
-              </a:rPr>
-              <a:t>Build the panel</a:t>
-            </a:r>
-            <a:endParaRPr lang="en-US" sz="1600" dirty="0"/>
-          </a:p>
-        </p:txBody>
-      </p:sp>
-      <p:sp>
-        <p:nvSpPr>
-          <p:cNvPr id="15" name="Text 13"/>
-          <p:cNvSpPr txBox="1"/>
-          <p:nvPr/>
-        </p:nvSpPr>
-        <p:spPr>
-          <a:xfrm>
-            <a:off x="4663440" y="3456432"/>
-            <a:ext cx="6858000" cy="566928"/>
-          </a:xfrm>
-          <a:prstGeom prst="rect">
-            <a:avLst/>
-          </a:prstGeom>
-          <a:noFill/>
-          <a:ln/>
-        </p:spPr>
-        <p:txBody>
-          <a:bodyPr wrap="square" lIns="0" tIns="0" rIns="0" bIns="0" rtlCol="0" anchor="ctr"/>
-          <a:lstStyle/>
-          <a:p>
-            <a:pPr indent="0" marL="0">
-              <a:buNone/>
-            </a:pPr>
-            <a:r>
-              <a:rPr lang="en-US" sz="1250" dirty="0">
-                <a:solidFill>
-                  <a:srgbClr val="5F706D"/>
-                </a:solidFill>
-                <a:latin typeface="Calibri" pitchFamily="34" charset="0"/>
-                <a:ea typeface="Calibri" pitchFamily="34" charset="-122"/>
-                <a:cs typeface="Calibri" pitchFamily="34" charset="-120"/>
-              </a:rPr>
-              <a:t>Join production growth, registrations and announcements on month; state panel for the siting extension.</a:t>
-            </a:r>
-            <a:endParaRPr lang="en-US" sz="1250" dirty="0"/>
-          </a:p>
-        </p:txBody>
-      </p:sp>
-      <p:sp>
-        <p:nvSpPr>
-          <p:cNvPr id="16" name="Shape 14"/>
-          <p:cNvSpPr/>
-          <p:nvPr/>
-        </p:nvSpPr>
-        <p:spPr>
-          <a:xfrm>
-            <a:off x="640080" y="4325112"/>
-            <a:ext cx="475488" cy="475488"/>
-          </a:xfrm>
-          <a:prstGeom prst="ellipse">
-            <a:avLst/>
-          </a:prstGeom>
-          <a:solidFill>
-            <a:srgbClr val="0D9488"/>
-          </a:solidFill>
-          <a:ln w="12700">
-            <a:solidFill>
-              <a:srgbClr val="333333"/>
-            </a:solidFill>
-            <a:prstDash val="solid"/>
-          </a:ln>
-        </p:spPr>
-      </p:sp>
-      <p:sp>
-        <p:nvSpPr>
-          <p:cNvPr id="17" name="Text 15"/>
-          <p:cNvSpPr txBox="1"/>
-          <p:nvPr/>
-        </p:nvSpPr>
-        <p:spPr>
-          <a:xfrm>
-            <a:off x="640080" y="4398264"/>
-            <a:ext cx="475488" cy="329184"/>
-          </a:xfrm>
-          <a:prstGeom prst="rect">
-            <a:avLst/>
-          </a:prstGeom>
-          <a:noFill/>
-          <a:ln/>
-        </p:spPr>
-        <p:txBody>
-          <a:bodyPr wrap="square" lIns="0" tIns="0" rIns="0" bIns="0" rtlCol="0" anchor="ctr"/>
-          <a:lstStyle/>
-          <a:p>
-            <a:pPr algn="ctr" indent="0" marL="0">
-              <a:buNone/>
-            </a:pPr>
-            <a:r>
-              <a:rPr lang="en-US" sz="1600" b="1" dirty="0">
-                <a:solidFill>
-                  <a:srgbClr val="FFFFFF"/>
-                </a:solidFill>
-                <a:latin typeface="Cambria" pitchFamily="34" charset="0"/>
-                <a:ea typeface="Cambria" pitchFamily="34" charset="-122"/>
-                <a:cs typeface="Cambria" pitchFamily="34" charset="-120"/>
-              </a:rPr>
-              <a:t>4</a:t>
-            </a:r>
-            <a:endParaRPr lang="en-US" sz="1600" dirty="0"/>
-          </a:p>
-        </p:txBody>
-      </p:sp>
-      <p:sp>
-        <p:nvSpPr>
-          <p:cNvPr id="18" name="Text 16"/>
-          <p:cNvSpPr txBox="1"/>
-          <p:nvPr/>
-        </p:nvSpPr>
-        <p:spPr>
-          <a:xfrm>
-            <a:off x="1325880" y="4315968"/>
-            <a:ext cx="3200400" cy="329184"/>
-          </a:xfrm>
-          <a:prstGeom prst="rect">
-            <a:avLst/>
-          </a:prstGeom>
-          <a:noFill/>
-          <a:ln/>
-        </p:spPr>
-        <p:txBody>
-          <a:bodyPr wrap="square" lIns="0" tIns="0" rIns="0" bIns="0" rtlCol="0" anchor="ctr"/>
-          <a:lstStyle/>
-          <a:p>
-            <a:pPr indent="0" marL="0">
-              <a:buNone/>
-            </a:pPr>
-            <a:r>
-              <a:rPr lang="en-US" sz="1600" b="1" dirty="0">
-                <a:solidFill>
-                  <a:srgbClr val="14211F"/>
-                </a:solidFill>
-                <a:latin typeface="Cambria" pitchFamily="34" charset="0"/>
-                <a:ea typeface="Cambria" pitchFamily="34" charset="-122"/>
-                <a:cs typeface="Cambria" pitchFamily="34" charset="-120"/>
-              </a:rPr>
-              <a:t>Run the tests</a:t>
-            </a:r>
-            <a:endParaRPr lang="en-US" sz="1600" dirty="0"/>
-          </a:p>
-        </p:txBody>
-      </p:sp>
-      <p:sp>
-        <p:nvSpPr>
-          <p:cNvPr id="19" name="Text 17"/>
-          <p:cNvSpPr txBox="1"/>
-          <p:nvPr/>
-        </p:nvSpPr>
-        <p:spPr>
-          <a:xfrm>
-            <a:off x="4663440" y="4325112"/>
-            <a:ext cx="6858000" cy="566928"/>
-          </a:xfrm>
-          <a:prstGeom prst="rect">
-            <a:avLst/>
-          </a:prstGeom>
-          <a:noFill/>
-          <a:ln/>
-        </p:spPr>
-        <p:txBody>
-          <a:bodyPr wrap="square" lIns="0" tIns="0" rIns="0" bIns="0" rtlCol="0" anchor="ctr"/>
-          <a:lstStyle/>
-          <a:p>
-            <a:pPr indent="0" marL="0">
-              <a:buNone/>
-            </a:pPr>
-            <a:r>
-              <a:rPr lang="en-US" sz="1250" dirty="0">
-                <a:solidFill>
-                  <a:srgbClr val="5F706D"/>
-                </a:solidFill>
-                <a:latin typeface="Calibri" pitchFamily="34" charset="0"/>
-                <a:ea typeface="Calibri" pitchFamily="34" charset="-122"/>
-                <a:cs typeface="Calibri" pitchFamily="34" charset="-120"/>
-              </a:rPr>
-              <a:t>Lag pre-registered at k=3 rather than scanned, with the baseline and placebo checks. Achieved power beside every coefficient.</a:t>
-            </a:r>
-            <a:endParaRPr lang="en-US" sz="1250" dirty="0"/>
-          </a:p>
-        </p:txBody>
-      </p:sp>
-      <p:sp>
-        <p:nvSpPr>
-          <p:cNvPr id="20" name="Shape 18"/>
-          <p:cNvSpPr/>
-          <p:nvPr/>
-        </p:nvSpPr>
-        <p:spPr>
-          <a:xfrm>
-            <a:off x="640080" y="5193792"/>
-            <a:ext cx="475488" cy="475488"/>
-          </a:xfrm>
-          <a:prstGeom prst="ellipse">
-            <a:avLst/>
-          </a:prstGeom>
-          <a:solidFill>
-            <a:srgbClr val="0D9488"/>
-          </a:solidFill>
-          <a:ln w="12700">
-            <a:solidFill>
-              <a:srgbClr val="333333"/>
-            </a:solidFill>
-            <a:prstDash val="solid"/>
-          </a:ln>
-        </p:spPr>
-      </p:sp>
-      <p:sp>
-        <p:nvSpPr>
-          <p:cNvPr id="21" name="Text 19"/>
-          <p:cNvSpPr txBox="1"/>
-          <p:nvPr/>
-        </p:nvSpPr>
-        <p:spPr>
-          <a:xfrm>
-            <a:off x="640080" y="5266944"/>
-            <a:ext cx="475488" cy="329184"/>
-          </a:xfrm>
-          <a:prstGeom prst="rect">
-            <a:avLst/>
-          </a:prstGeom>
-          <a:noFill/>
-          <a:ln/>
-        </p:spPr>
-        <p:txBody>
-          <a:bodyPr wrap="square" lIns="0" tIns="0" rIns="0" bIns="0" rtlCol="0" anchor="ctr"/>
-          <a:lstStyle/>
-          <a:p>
-            <a:pPr algn="ctr" indent="0" marL="0">
-              <a:buNone/>
-            </a:pPr>
-            <a:r>
-              <a:rPr lang="en-US" sz="1600" b="1" dirty="0">
-                <a:solidFill>
-                  <a:srgbClr val="FFFFFF"/>
-                </a:solidFill>
-                <a:latin typeface="Cambria" pitchFamily="34" charset="0"/>
-                <a:ea typeface="Cambria" pitchFamily="34" charset="-122"/>
-                <a:cs typeface="Cambria" pitchFamily="34" charset="-120"/>
-              </a:rPr>
-              <a:t>5</a:t>
-            </a:r>
-            <a:endParaRPr lang="en-US" sz="1600" dirty="0"/>
-          </a:p>
-        </p:txBody>
-      </p:sp>
-      <p:sp>
-        <p:nvSpPr>
-          <p:cNvPr id="22" name="Text 20"/>
-          <p:cNvSpPr txBox="1"/>
-          <p:nvPr/>
-        </p:nvSpPr>
-        <p:spPr>
-          <a:xfrm>
-            <a:off x="1325880" y="5184648"/>
-            <a:ext cx="3200400" cy="329184"/>
-          </a:xfrm>
-          <a:prstGeom prst="rect">
-            <a:avLst/>
-          </a:prstGeom>
-          <a:noFill/>
-          <a:ln/>
-        </p:spPr>
-        <p:txBody>
-          <a:bodyPr wrap="square" lIns="0" tIns="0" rIns="0" bIns="0" rtlCol="0" anchor="ctr"/>
-          <a:lstStyle/>
-          <a:p>
-            <a:pPr indent="0" marL="0">
-              <a:buNone/>
-            </a:pPr>
-            <a:r>
-              <a:rPr lang="en-US" sz="1600" b="1" dirty="0">
-                <a:solidFill>
-                  <a:srgbClr val="14211F"/>
-                </a:solidFill>
-                <a:latin typeface="Cambria" pitchFamily="34" charset="0"/>
-                <a:ea typeface="Cambria" pitchFamily="34" charset="-122"/>
-                <a:cs typeface="Cambria" pitchFamily="34" charset="-120"/>
-              </a:rPr>
-              <a:t>Write up</a:t>
-            </a:r>
-            <a:endParaRPr lang="en-US" sz="1600" dirty="0"/>
-          </a:p>
-        </p:txBody>
-      </p:sp>
-      <p:sp>
-        <p:nvSpPr>
-          <p:cNvPr id="23" name="Text 21"/>
-          <p:cNvSpPr txBox="1"/>
-          <p:nvPr/>
-        </p:nvSpPr>
-        <p:spPr>
-          <a:xfrm>
-            <a:off x="4663440" y="5193792"/>
-            <a:ext cx="6858000" cy="566928"/>
-          </a:xfrm>
-          <a:prstGeom prst="rect">
-            <a:avLst/>
-          </a:prstGeom>
-          <a:noFill/>
-          <a:ln/>
-        </p:spPr>
-        <p:txBody>
-          <a:bodyPr wrap="square" lIns="0" tIns="0" rIns="0" bIns="0" rtlCol="0" anchor="ctr"/>
-          <a:lstStyle/>
-          <a:p>
-            <a:pPr indent="0" marL="0">
-              <a:buNone/>
-            </a:pPr>
-            <a:r>
-              <a:rPr lang="en-US" sz="1250" dirty="0">
-                <a:solidFill>
-                  <a:srgbClr val="5F706D"/>
-                </a:solidFill>
-                <a:latin typeface="Calibri" pitchFamily="34" charset="0"/>
-                <a:ea typeface="Calibri" pitchFamily="34" charset="-122"/>
-                <a:cs typeface="Calibri" pitchFamily="34" charset="-120"/>
-              </a:rPr>
-              <a:t>Including the negative result on the investment source, which is a finding about alt-data coverage in its own right.</a:t>
-            </a:r>
-            <a:endParaRPr lang="en-US" sz="1250" dirty="0"/>
-          </a:p>
-        </p:txBody>
-      </p:sp>
-      <p:sp>
-        <p:nvSpPr>
-          <p:cNvPr id="24" name="Text 22"/>
-          <p:cNvSpPr txBox="1"/>
-          <p:nvPr/>
-        </p:nvSpPr>
-        <p:spPr>
-          <a:xfrm>
-            <a:off x="640080" y="5989320"/>
-            <a:ext cx="10881360" cy="365760"/>
-          </a:xfrm>
-          <a:prstGeom prst="rect">
-            <a:avLst/>
-          </a:prstGeom>
-          <a:noFill/>
-          <a:ln/>
-        </p:spPr>
-        <p:txBody>
-          <a:bodyPr wrap="square" lIns="0" tIns="0" rIns="0" bIns="0" rtlCol="0" anchor="ctr"/>
-          <a:lstStyle/>
-          <a:p>
-            <a:pPr indent="0" marL="0">
-              <a:buNone/>
-            </a:pPr>
-            <a:r>
-              <a:rPr lang="en-US" sz="1200" b="1" dirty="0">
-                <a:solidFill>
-                  <a:srgbClr val="D94F04"/>
-                </a:solidFill>
-                <a:latin typeface="Calibri" pitchFamily="34" charset="0"/>
-                <a:ea typeface="Calibri" pitchFamily="34" charset="-122"/>
-                <a:cs typeface="Calibri" pitchFamily="34" charset="-120"/>
-              </a:rPr>
-              <a:t>Steps 1 and 2 are the critical path. Everything downstream is blocked on how many dated events we can defensibly assemble.</a:t>
-            </a:r>
-            <a:endParaRPr lang="en-US" sz="1200" dirty="0"/>
-          </a:p>
-        </p:txBody>
-      </p:sp>
-    </p:spTree>
-  </p:cSld>
-  <p:clrMapOvr>
-    <a:masterClrMapping/>
-  </p:clrMapOvr>
-</p:sld>
-</file>
-
-<file path=ppt/slides/slide8.xml><?xml version="1.0" encoding="utf-8"?>
-<p:sld xmlns:a="http://schemas.openxmlformats.org/drawingml/2006/main" xmlns:r="http://schemas.openxmlformats.org/officeDocument/2006/relationships" xmlns:p="http://schemas.openxmlformats.org/presentationml/2006/main">
-  <p:cSld name="Slide 8">
     <p:bg>
       <p:bgPr>
         <a:solidFill>

--- a/presentations/ev-investment-update.pptx
+++ b/presentations/ev-investment-update.pptx
@@ -4,6 +4,9 @@
   <p:sldMasterIdLst>
     <p:sldMasterId id="2147483648" r:id="rId1"/>
   </p:sldMasterIdLst>
+  <p:notesMasterIdLst>
+    <p:notesMasterId r:id="rId9"/>
+  </p:notesMasterIdLst>
   <p:sldIdLst>
     <p:sldId id="256" r:id="rId2"/>
     <p:sldId id="257" r:id="rId3"/>
@@ -13,9 +16,6 @@
     <p:sldId id="261" r:id="rId7"/>
     <p:sldId id="262" r:id="rId8"/>
   </p:sldIdLst>
-  <p:notesMasterIdLst>
-    <p:notesMasterId r:id="rId9"/>
-  </p:notesMasterIdLst>
   <p:sldSz cx="12192000" cy="6858000"/>
   <p:notesSz cx="6858000" cy="12192000"/>
   <p:defaultTextStyle>
@@ -110,18 +110,26 @@
       </a:defRPr>
     </a:lvl9pPr>
   </p:defaultTextStyle>
+  <p:extLst>
+    <p:ext uri="{EFAFB233-063F-42B5-8137-9DF3F51BA10A}">
+      <p15:sldGuideLst xmlns:p15="http://schemas.microsoft.com/office/powerpoint/2012/main"/>
+    </p:ext>
+  </p:extLst>
 </p:presentation>
 </file>
 
 <file path=ppt/charts/chart1.xml><?xml version="1.0" encoding="utf-8"?>
-<c:chartSpace xmlns:c="http://schemas.openxmlformats.org/drawingml/2006/chart" xmlns:a="http://schemas.openxmlformats.org/drawingml/2006/main" xmlns:r="http://schemas.openxmlformats.org/officeDocument/2006/relationships">
+<c:chartSpace xmlns:c="http://schemas.openxmlformats.org/drawingml/2006/chart" xmlns:a="http://schemas.openxmlformats.org/drawingml/2006/main" xmlns:r="http://schemas.openxmlformats.org/officeDocument/2006/relationships" xmlns:c16r2="http://schemas.microsoft.com/office/drawing/2015/06/chart">
   <c:date1904 val="0"/>
+  <c:lang val="en-US"/>
   <c:roundedCorners val="1"/>
+  <c:style val="2"/>
   <c:chart>
     <c:autoTitleDeleted val="1"/>
     <c:plotArea>
       <c:layout/>
       <c:lineChart>
+        <c:grouping val="standard"/>
         <c:varyColors val="0"/>
         <c:ser>
           <c:idx val="0"/>
@@ -138,9 +146,6 @@
             </c:strRef>
           </c:tx>
           <c:spPr>
-            <a:solidFill>
-              <a:srgbClr val="0D9488"/>
-            </a:solidFill>
             <a:ln w="38100" cap="flat">
               <a:solidFill>
                 <a:srgbClr val="0D9488"/>
@@ -150,31 +155,6 @@
             </a:ln>
             <a:effectLst/>
           </c:spPr>
-          <c:invertIfNegative val="0"/>
-          <c:dLbls>
-            <c:numFmt formatCode="#,##0" sourceLinked="0"/>
-            <c:txPr>
-              <a:bodyPr/>
-              <a:lstStyle/>
-              <a:p>
-                <a:pPr>
-                  <a:defRPr b="0" i="0" strike="noStrike" sz="1200" u="none">
-                    <a:solidFill>
-                      <a:srgbClr val="000000"/>
-                    </a:solidFill>
-                    <a:latin typeface="Arial"/>
-                  </a:defRPr>
-                </a:pPr>
-              </a:p>
-            </c:txPr>
-            <c:showLegendKey val="0"/>
-            <c:showVal val="0"/>
-            <c:showCatName val="0"/>
-            <c:showSerName val="0"/>
-            <c:showPercent val="0"/>
-            <c:showBubbleSize val="0"/>
-            <c:showLeaderLines val="0"/>
-          </c:dLbls>
           <c:marker>
             <c:symbol val="circle"/>
             <c:size val="6"/>
@@ -193,38 +173,36 @@
             </c:spPr>
           </c:marker>
           <c:cat>
-            <c:multiLvlStrRef>
+            <c:strRef>
               <c:f>Sheet1!$A$2:$A$9</c:f>
-              <c:multiLvlStrCache>
+              <c:strCache>
                 <c:ptCount val="8"/>
-                <c:lvl>
-                  <c:pt idx="0">
-                    <c:v>2018</c:v>
-                  </c:pt>
-                  <c:pt idx="1">
-                    <c:v>2019</c:v>
-                  </c:pt>
-                  <c:pt idx="2">
-                    <c:v>2020</c:v>
-                  </c:pt>
-                  <c:pt idx="3">
-                    <c:v>2021</c:v>
-                  </c:pt>
-                  <c:pt idx="4">
-                    <c:v>2022</c:v>
-                  </c:pt>
-                  <c:pt idx="5">
-                    <c:v>2023</c:v>
-                  </c:pt>
-                  <c:pt idx="6">
-                    <c:v>2024</c:v>
-                  </c:pt>
-                  <c:pt idx="7">
-                    <c:v>2025</c:v>
-                  </c:pt>
-                </c:lvl>
-              </c:multiLvlStrCache>
-            </c:multiLvlStrRef>
+                <c:pt idx="0">
+                  <c:v>2018</c:v>
+                </c:pt>
+                <c:pt idx="1">
+                  <c:v>2019</c:v>
+                </c:pt>
+                <c:pt idx="2">
+                  <c:v>2020</c:v>
+                </c:pt>
+                <c:pt idx="3">
+                  <c:v>2021</c:v>
+                </c:pt>
+                <c:pt idx="4">
+                  <c:v>2022</c:v>
+                </c:pt>
+                <c:pt idx="5">
+                  <c:v>2023</c:v>
+                </c:pt>
+                <c:pt idx="6">
+                  <c:v>2024</c:v>
+                </c:pt>
+                <c:pt idx="7">
+                  <c:v>2025</c:v>
+                </c:pt>
+              </c:strCache>
+            </c:strRef>
           </c:cat>
           <c:val>
             <c:numRef>
@@ -260,35 +238,24 @@
             </c:numRef>
           </c:val>
           <c:smooth val="0"/>
+          <c:extLst>
+            <c:ext xmlns:c16="http://schemas.microsoft.com/office/drawing/2014/chart" uri="{C3380CC4-5D6E-409C-BE32-E72D297353CC}">
+              <c16:uniqueId val="{00000000-954D-E94E-9616-6099DF74D2F9}"/>
+            </c:ext>
+          </c:extLst>
         </c:ser>
         <c:dLbls>
-          <c:numFmt formatCode="#,##0" sourceLinked="0"/>
-          <c:txPr>
-            <a:bodyPr/>
-            <a:lstStyle/>
-            <a:p>
-              <a:pPr>
-                <a:defRPr b="0" i="0" strike="noStrike" sz="1200" u="none">
-                  <a:solidFill>
-                    <a:srgbClr val="000000"/>
-                  </a:solidFill>
-                  <a:latin typeface="Arial"/>
-                </a:defRPr>
-              </a:pPr>
-            </a:p>
-          </c:txPr>
           <c:showLegendKey val="0"/>
           <c:showVal val="0"/>
           <c:showCatName val="0"/>
           <c:showSerName val="0"/>
           <c:showPercent val="0"/>
           <c:showBubbleSize val="0"/>
-          <c:showLeaderLines val="0"/>
         </c:dLbls>
         <c:marker val="1"/>
+        <c:smooth val="0"/>
         <c:axId val="2094734554"/>
         <c:axId val="2094734552"/>
-        <c:axId val="2094734556"/>
       </c:lineChart>
       <c:catAx>
         <c:axId val="2094734554"/>
@@ -327,6 +294,7 @@
         <c:crosses val="autoZero"/>
         <c:auto val="1"/>
         <c:lblAlgn val="ctr"/>
+        <c:lblOffset val="100"/>
         <c:noMultiLvlLbl val="1"/>
       </c:catAx>
       <c:valAx>
@@ -388,6 +356,7 @@
     </c:plotArea>
     <c:plotVisOnly val="1"/>
     <c:dispBlanksAs val="span"/>
+    <c:showDLblsOverMax val="1"/>
   </c:chart>
   <c:spPr>
     <a:noFill/>
@@ -403,14 +372,17 @@
 </file>
 
 <file path=ppt/charts/chart2.xml><?xml version="1.0" encoding="utf-8"?>
-<c:chartSpace xmlns:c="http://schemas.openxmlformats.org/drawingml/2006/chart" xmlns:a="http://schemas.openxmlformats.org/drawingml/2006/main" xmlns:r="http://schemas.openxmlformats.org/officeDocument/2006/relationships">
+<c:chartSpace xmlns:c="http://schemas.openxmlformats.org/drawingml/2006/chart" xmlns:a="http://schemas.openxmlformats.org/drawingml/2006/main" xmlns:r="http://schemas.openxmlformats.org/officeDocument/2006/relationships" xmlns:c16r2="http://schemas.microsoft.com/office/drawing/2015/06/chart">
   <c:date1904 val="0"/>
+  <c:lang val="en-US"/>
   <c:roundedCorners val="1"/>
+  <c:style val="2"/>
   <c:chart>
     <c:autoTitleDeleted val="1"/>
     <c:plotArea>
       <c:layout/>
       <c:lineChart>
+        <c:grouping val="standard"/>
         <c:varyColors val="0"/>
         <c:ser>
           <c:idx val="0"/>
@@ -427,9 +399,6 @@
             </c:strRef>
           </c:tx>
           <c:spPr>
-            <a:solidFill>
-              <a:srgbClr val="0D9488"/>
-            </a:solidFill>
             <a:ln w="38100" cap="flat">
               <a:solidFill>
                 <a:srgbClr val="0D9488"/>
@@ -439,31 +408,6 @@
             </a:ln>
             <a:effectLst/>
           </c:spPr>
-          <c:invertIfNegative val="0"/>
-          <c:dLbls>
-            <c:numFmt formatCode="#,##0" sourceLinked="0"/>
-            <c:txPr>
-              <a:bodyPr/>
-              <a:lstStyle/>
-              <a:p>
-                <a:pPr>
-                  <a:defRPr b="0" i="0" strike="noStrike" sz="1200" u="none">
-                    <a:solidFill>
-                      <a:srgbClr val="000000"/>
-                    </a:solidFill>
-                    <a:latin typeface="Arial"/>
-                  </a:defRPr>
-                </a:pPr>
-              </a:p>
-            </c:txPr>
-            <c:showLegendKey val="0"/>
-            <c:showVal val="0"/>
-            <c:showCatName val="0"/>
-            <c:showSerName val="0"/>
-            <c:showPercent val="0"/>
-            <c:showBubbleSize val="0"/>
-            <c:showLeaderLines val="0"/>
-          </c:dLbls>
           <c:marker>
             <c:symbol val="circle"/>
             <c:size val="6"/>
@@ -482,38 +426,36 @@
             </c:spPr>
           </c:marker>
           <c:cat>
-            <c:multiLvlStrRef>
+            <c:strRef>
               <c:f>Sheet1!$A$2:$A$9</c:f>
-              <c:multiLvlStrCache>
+              <c:strCache>
                 <c:ptCount val="8"/>
-                <c:lvl>
-                  <c:pt idx="0">
-                    <c:v>16</c:v>
-                  </c:pt>
-                  <c:pt idx="1">
-                    <c:v>25</c:v>
-                  </c:pt>
-                  <c:pt idx="2">
-                    <c:v>35</c:v>
-                  </c:pt>
-                  <c:pt idx="3">
-                    <c:v>50</c:v>
-                  </c:pt>
-                  <c:pt idx="4">
-                    <c:v>65</c:v>
-                  </c:pt>
-                  <c:pt idx="5">
-                    <c:v>80</c:v>
-                  </c:pt>
-                  <c:pt idx="6">
-                    <c:v>100</c:v>
-                  </c:pt>
-                  <c:pt idx="7">
-                    <c:v>120</c:v>
-                  </c:pt>
-                </c:lvl>
-              </c:multiLvlStrCache>
-            </c:multiLvlStrRef>
+                <c:pt idx="0">
+                  <c:v>16</c:v>
+                </c:pt>
+                <c:pt idx="1">
+                  <c:v>25</c:v>
+                </c:pt>
+                <c:pt idx="2">
+                  <c:v>35</c:v>
+                </c:pt>
+                <c:pt idx="3">
+                  <c:v>50</c:v>
+                </c:pt>
+                <c:pt idx="4">
+                  <c:v>65</c:v>
+                </c:pt>
+                <c:pt idx="5">
+                  <c:v>80</c:v>
+                </c:pt>
+                <c:pt idx="6">
+                  <c:v>100</c:v>
+                </c:pt>
+                <c:pt idx="7">
+                  <c:v>120</c:v>
+                </c:pt>
+              </c:strCache>
+            </c:strRef>
           </c:cat>
           <c:val>
             <c:numRef>
@@ -549,6 +491,11 @@
             </c:numRef>
           </c:val>
           <c:smooth val="0"/>
+          <c:extLst>
+            <c:ext xmlns:c16="http://schemas.microsoft.com/office/drawing/2014/chart" uri="{C3380CC4-5D6E-409C-BE32-E72D297353CC}">
+              <c16:uniqueId val="{00000000-69EB-1F4B-9D3F-01292CE35708}"/>
+            </c:ext>
+          </c:extLst>
         </c:ser>
         <c:ser>
           <c:idx val="1"/>
@@ -565,9 +512,6 @@
             </c:strRef>
           </c:tx>
           <c:spPr>
-            <a:solidFill>
-              <a:srgbClr val="D94F04"/>
-            </a:solidFill>
             <a:ln w="38100" cap="flat">
               <a:solidFill>
                 <a:srgbClr val="D94F04"/>
@@ -577,31 +521,6 @@
             </a:ln>
             <a:effectLst/>
           </c:spPr>
-          <c:invertIfNegative val="0"/>
-          <c:dLbls>
-            <c:numFmt formatCode="#,##0" sourceLinked="0"/>
-            <c:txPr>
-              <a:bodyPr/>
-              <a:lstStyle/>
-              <a:p>
-                <a:pPr>
-                  <a:defRPr b="0" i="0" strike="noStrike" sz="1200" u="none">
-                    <a:solidFill>
-                      <a:srgbClr val="000000"/>
-                    </a:solidFill>
-                    <a:latin typeface="Arial"/>
-                  </a:defRPr>
-                </a:pPr>
-              </a:p>
-            </c:txPr>
-            <c:showLegendKey val="0"/>
-            <c:showVal val="0"/>
-            <c:showCatName val="0"/>
-            <c:showSerName val="0"/>
-            <c:showPercent val="0"/>
-            <c:showBubbleSize val="0"/>
-            <c:showLeaderLines val="0"/>
-          </c:dLbls>
           <c:marker>
             <c:symbol val="circle"/>
             <c:size val="6"/>
@@ -620,38 +539,36 @@
             </c:spPr>
           </c:marker>
           <c:cat>
-            <c:multiLvlStrRef>
+            <c:strRef>
               <c:f>Sheet1!$A$2:$A$9</c:f>
-              <c:multiLvlStrCache>
+              <c:strCache>
                 <c:ptCount val="8"/>
-                <c:lvl>
-                  <c:pt idx="0">
-                    <c:v>16</c:v>
-                  </c:pt>
-                  <c:pt idx="1">
-                    <c:v>25</c:v>
-                  </c:pt>
-                  <c:pt idx="2">
-                    <c:v>35</c:v>
-                  </c:pt>
-                  <c:pt idx="3">
-                    <c:v>50</c:v>
-                  </c:pt>
-                  <c:pt idx="4">
-                    <c:v>65</c:v>
-                  </c:pt>
-                  <c:pt idx="5">
-                    <c:v>80</c:v>
-                  </c:pt>
-                  <c:pt idx="6">
-                    <c:v>100</c:v>
-                  </c:pt>
-                  <c:pt idx="7">
-                    <c:v>120</c:v>
-                  </c:pt>
-                </c:lvl>
-              </c:multiLvlStrCache>
-            </c:multiLvlStrRef>
+                <c:pt idx="0">
+                  <c:v>16</c:v>
+                </c:pt>
+                <c:pt idx="1">
+                  <c:v>25</c:v>
+                </c:pt>
+                <c:pt idx="2">
+                  <c:v>35</c:v>
+                </c:pt>
+                <c:pt idx="3">
+                  <c:v>50</c:v>
+                </c:pt>
+                <c:pt idx="4">
+                  <c:v>65</c:v>
+                </c:pt>
+                <c:pt idx="5">
+                  <c:v>80</c:v>
+                </c:pt>
+                <c:pt idx="6">
+                  <c:v>100</c:v>
+                </c:pt>
+                <c:pt idx="7">
+                  <c:v>120</c:v>
+                </c:pt>
+              </c:strCache>
+            </c:strRef>
           </c:cat>
           <c:val>
             <c:numRef>
@@ -687,6 +604,11 @@
             </c:numRef>
           </c:val>
           <c:smooth val="0"/>
+          <c:extLst>
+            <c:ext xmlns:c16="http://schemas.microsoft.com/office/drawing/2014/chart" uri="{C3380CC4-5D6E-409C-BE32-E72D297353CC}">
+              <c16:uniqueId val="{00000001-69EB-1F4B-9D3F-01292CE35708}"/>
+            </c:ext>
+          </c:extLst>
         </c:ser>
         <c:ser>
           <c:idx val="2"/>
@@ -703,9 +625,6 @@
             </c:strRef>
           </c:tx>
           <c:spPr>
-            <a:solidFill>
-              <a:srgbClr val="7048C4"/>
-            </a:solidFill>
             <a:ln w="38100" cap="flat">
               <a:solidFill>
                 <a:srgbClr val="7048C4"/>
@@ -715,31 +634,6 @@
             </a:ln>
             <a:effectLst/>
           </c:spPr>
-          <c:invertIfNegative val="0"/>
-          <c:dLbls>
-            <c:numFmt formatCode="#,##0" sourceLinked="0"/>
-            <c:txPr>
-              <a:bodyPr/>
-              <a:lstStyle/>
-              <a:p>
-                <a:pPr>
-                  <a:defRPr b="0" i="0" strike="noStrike" sz="1200" u="none">
-                    <a:solidFill>
-                      <a:srgbClr val="000000"/>
-                    </a:solidFill>
-                    <a:latin typeface="Arial"/>
-                  </a:defRPr>
-                </a:pPr>
-              </a:p>
-            </c:txPr>
-            <c:showLegendKey val="0"/>
-            <c:showVal val="0"/>
-            <c:showCatName val="0"/>
-            <c:showSerName val="0"/>
-            <c:showPercent val="0"/>
-            <c:showBubbleSize val="0"/>
-            <c:showLeaderLines val="0"/>
-          </c:dLbls>
           <c:marker>
             <c:symbol val="circle"/>
             <c:size val="6"/>
@@ -758,38 +652,36 @@
             </c:spPr>
           </c:marker>
           <c:cat>
-            <c:multiLvlStrRef>
+            <c:strRef>
               <c:f>Sheet1!$A$2:$A$9</c:f>
-              <c:multiLvlStrCache>
+              <c:strCache>
                 <c:ptCount val="8"/>
-                <c:lvl>
-                  <c:pt idx="0">
-                    <c:v>16</c:v>
-                  </c:pt>
-                  <c:pt idx="1">
-                    <c:v>25</c:v>
-                  </c:pt>
-                  <c:pt idx="2">
-                    <c:v>35</c:v>
-                  </c:pt>
-                  <c:pt idx="3">
-                    <c:v>50</c:v>
-                  </c:pt>
-                  <c:pt idx="4">
-                    <c:v>65</c:v>
-                  </c:pt>
-                  <c:pt idx="5">
-                    <c:v>80</c:v>
-                  </c:pt>
-                  <c:pt idx="6">
-                    <c:v>100</c:v>
-                  </c:pt>
-                  <c:pt idx="7">
-                    <c:v>120</c:v>
-                  </c:pt>
-                </c:lvl>
-              </c:multiLvlStrCache>
-            </c:multiLvlStrRef>
+                <c:pt idx="0">
+                  <c:v>16</c:v>
+                </c:pt>
+                <c:pt idx="1">
+                  <c:v>25</c:v>
+                </c:pt>
+                <c:pt idx="2">
+                  <c:v>35</c:v>
+                </c:pt>
+                <c:pt idx="3">
+                  <c:v>50</c:v>
+                </c:pt>
+                <c:pt idx="4">
+                  <c:v>65</c:v>
+                </c:pt>
+                <c:pt idx="5">
+                  <c:v>80</c:v>
+                </c:pt>
+                <c:pt idx="6">
+                  <c:v>100</c:v>
+                </c:pt>
+                <c:pt idx="7">
+                  <c:v>120</c:v>
+                </c:pt>
+              </c:strCache>
+            </c:strRef>
           </c:cat>
           <c:val>
             <c:numRef>
@@ -825,35 +717,24 @@
             </c:numRef>
           </c:val>
           <c:smooth val="0"/>
+          <c:extLst>
+            <c:ext xmlns:c16="http://schemas.microsoft.com/office/drawing/2014/chart" uri="{C3380CC4-5D6E-409C-BE32-E72D297353CC}">
+              <c16:uniqueId val="{00000002-69EB-1F4B-9D3F-01292CE35708}"/>
+            </c:ext>
+          </c:extLst>
         </c:ser>
         <c:dLbls>
-          <c:numFmt formatCode="#,##0" sourceLinked="0"/>
-          <c:txPr>
-            <a:bodyPr/>
-            <a:lstStyle/>
-            <a:p>
-              <a:pPr>
-                <a:defRPr b="0" i="0" strike="noStrike" sz="1200" u="none">
-                  <a:solidFill>
-                    <a:srgbClr val="000000"/>
-                  </a:solidFill>
-                  <a:latin typeface="Arial"/>
-                </a:defRPr>
-              </a:pPr>
-            </a:p>
-          </c:txPr>
           <c:showLegendKey val="0"/>
           <c:showVal val="0"/>
           <c:showCatName val="0"/>
           <c:showSerName val="0"/>
           <c:showPercent val="0"/>
           <c:showBubbleSize val="0"/>
-          <c:showLeaderLines val="0"/>
         </c:dLbls>
         <c:marker val="1"/>
+        <c:smooth val="0"/>
         <c:axId val="2094734554"/>
         <c:axId val="2094734552"/>
-        <c:axId val="2094734556"/>
       </c:lineChart>
       <c:catAx>
         <c:axId val="2094734554"/>
@@ -892,6 +773,7 @@
         <c:crosses val="autoZero"/>
         <c:auto val="1"/>
         <c:lblAlgn val="ctr"/>
+        <c:lblOffset val="100"/>
         <c:noMultiLvlLbl val="1"/>
       </c:catAx>
       <c:valAx>
@@ -974,6 +856,7 @@
     </c:legend>
     <c:plotVisOnly val="1"/>
     <c:dispBlanksAs val="span"/>
+    <c:showDLblsOverMax val="1"/>
   </c:chart>
   <c:spPr>
     <a:noFill/>
@@ -1010,234 +893,10 @@
           <a:chExt cx="0" cy="0"/>
         </a:xfrm>
       </p:grpSpPr>
-      <p:sp>
-        <p:nvSpPr>
-          <p:cNvPr id="2" name="Header Placeholder 1"/>
-          <p:cNvSpPr>
-            <a:spLocks noGrp="1"/>
-          </p:cNvSpPr>
-          <p:nvPr>
-            <p:ph type="hdr" sz="quarter"/>
-          </p:nvPr>
-        </p:nvSpPr>
-        <p:spPr>
-          <a:xfrm>
-            <a:off x="0" y="0"/>
-            <a:ext cx="2971800" cy="458788"/>
-          </a:xfrm>
-          <a:prstGeom prst="rect">
-            <a:avLst/>
-          </a:prstGeom>
-        </p:spPr>
-        <p:txBody>
-          <a:bodyPr vert="horz" lIns="91440" tIns="45720" rIns="91440" bIns="45720" rtlCol="0"/>
-          <a:lstStyle>
-            <a:lvl1pPr algn="l">
-              <a:defRPr sz="1200"/>
-            </a:lvl1pPr>
-          </a:lstStyle>
-          <a:p>
-            <a:endParaRPr lang="en-US"/>
-          </a:p>
-        </p:txBody>
-      </p:sp>
-      <p:sp>
-        <p:nvSpPr>
-          <p:cNvPr id="3" name="Date Placeholder 2"/>
-          <p:cNvSpPr>
-            <a:spLocks noGrp="1"/>
-          </p:cNvSpPr>
-          <p:nvPr>
-            <p:ph type="dt" idx="1"/>
-          </p:nvPr>
-        </p:nvSpPr>
-        <p:spPr>
-          <a:xfrm>
-            <a:off x="3884613" y="0"/>
-            <a:ext cx="2971800" cy="458788"/>
-          </a:xfrm>
-          <a:prstGeom prst="rect">
-            <a:avLst/>
-          </a:prstGeom>
-        </p:spPr>
-        <p:txBody>
-          <a:bodyPr vert="horz" lIns="91440" tIns="45720" rIns="91440" bIns="45720" rtlCol="0"/>
-          <a:lstStyle>
-            <a:lvl1pPr algn="r">
-              <a:defRPr sz="1200"/>
-            </a:lvl1pPr>
-          </a:lstStyle>
-          <a:p>
-            <a:fld id="{5282F153-3F37-0F45-9E97-73ACFA13230C}" type="datetimeFigureOut">
-              <a:rPr lang="en-US"/>
-              <a:t>7/23/19</a:t>
-            </a:fld>
-            <a:endParaRPr lang="en-US"/>
-          </a:p>
-        </p:txBody>
-      </p:sp>
-      <p:sp>
-        <p:nvSpPr>
-          <p:cNvPr id="4" name="Slide Image Placeholder 3"/>
-          <p:cNvSpPr>
-            <a:spLocks noGrp="1" noRot="1" noChangeAspect="1"/>
-          </p:cNvSpPr>
-          <p:nvPr>
-            <p:ph type="sldImg" idx="2"/>
-          </p:nvPr>
-        </p:nvSpPr>
-        <p:spPr>
-          <a:xfrm>
-            <a:off x="685800" y="1143000"/>
-            <a:ext cx="5486400" cy="3086100"/>
-          </a:xfrm>
-          <a:prstGeom prst="rect">
-            <a:avLst/>
-          </a:prstGeom>
-          <a:noFill/>
-          <a:ln w="12700">
-            <a:solidFill>
-              <a:prstClr val="black"/>
-            </a:solidFill>
-          </a:ln>
-        </p:spPr>
-        <p:txBody>
-          <a:bodyPr vert="horz" lIns="91440" tIns="45720" rIns="91440" bIns="45720" rtlCol="0" anchor="ctr"/>
-          <a:lstStyle/>
-          <a:p>
-            <a:endParaRPr lang="en-US"/>
-          </a:p>
-        </p:txBody>
-      </p:sp>
-      <p:sp>
-        <p:nvSpPr>
-          <p:cNvPr id="5" name="Notes Placeholder 4"/>
-          <p:cNvSpPr>
-            <a:spLocks noGrp="1"/>
-          </p:cNvSpPr>
-          <p:nvPr>
-            <p:ph type="body" sz="quarter" idx="3"/>
-          </p:nvPr>
-        </p:nvSpPr>
-        <p:spPr>
-          <a:xfrm>
-            <a:off x="685800" y="4400550"/>
-            <a:ext cx="5486400" cy="3600450"/>
-          </a:xfrm>
-          <a:prstGeom prst="rect">
-            <a:avLst/>
-          </a:prstGeom>
-        </p:spPr>
-        <p:txBody>
-          <a:bodyPr vert="horz" lIns="91440" tIns="45720" rIns="91440" bIns="45720" rtlCol="0"/>
-          <a:lstStyle/>
-          <a:p>
-            <a:pPr lvl="0"/>
-            <a:r>
-              <a:rPr lang="en-US"/>
-              <a:t>Click to edit Master text styles</a:t>
-            </a:r>
-          </a:p>
-          <a:p>
-            <a:pPr lvl="1"/>
-            <a:r>
-              <a:rPr lang="en-US"/>
-              <a:t>Second level</a:t>
-            </a:r>
-          </a:p>
-          <a:p>
-            <a:pPr lvl="2"/>
-            <a:r>
-              <a:rPr lang="en-US"/>
-              <a:t>Third level</a:t>
-            </a:r>
-          </a:p>
-          <a:p>
-            <a:pPr lvl="3"/>
-            <a:r>
-              <a:rPr lang="en-US"/>
-              <a:t>Fourth level</a:t>
-            </a:r>
-          </a:p>
-          <a:p>
-            <a:pPr lvl="4"/>
-            <a:r>
-              <a:rPr lang="en-US"/>
-              <a:t>Fifth level</a:t>
-            </a:r>
-          </a:p>
-        </p:txBody>
-      </p:sp>
-      <p:sp>
-        <p:nvSpPr>
-          <p:cNvPr id="6" name="Footer Placeholder 5"/>
-          <p:cNvSpPr>
-            <a:spLocks noGrp="1"/>
-          </p:cNvSpPr>
-          <p:nvPr>
-            <p:ph type="ftr" sz="quarter" idx="4"/>
-          </p:nvPr>
-        </p:nvSpPr>
-        <p:spPr>
-          <a:xfrm>
-            <a:off x="0" y="8685213"/>
-            <a:ext cx="2971800" cy="458787"/>
-          </a:xfrm>
-          <a:prstGeom prst="rect">
-            <a:avLst/>
-          </a:prstGeom>
-        </p:spPr>
-        <p:txBody>
-          <a:bodyPr vert="horz" lIns="91440" tIns="45720" rIns="91440" bIns="45720" rtlCol="0" anchor="b"/>
-          <a:lstStyle>
-            <a:lvl1pPr algn="l">
-              <a:defRPr sz="1200"/>
-            </a:lvl1pPr>
-          </a:lstStyle>
-          <a:p>
-            <a:endParaRPr lang="en-US"/>
-          </a:p>
-        </p:txBody>
-      </p:sp>
-      <p:sp>
-        <p:nvSpPr>
-          <p:cNvPr id="7" name="Slide Number Placeholder 6"/>
-          <p:cNvSpPr>
-            <a:spLocks noGrp="1"/>
-          </p:cNvSpPr>
-          <p:nvPr>
-            <p:ph type="sldNum" sz="quarter" idx="5"/>
-          </p:nvPr>
-        </p:nvSpPr>
-        <p:spPr>
-          <a:xfrm>
-            <a:off x="3884613" y="8685213"/>
-            <a:ext cx="2971800" cy="458787"/>
-          </a:xfrm>
-          <a:prstGeom prst="rect">
-            <a:avLst/>
-          </a:prstGeom>
-        </p:spPr>
-        <p:txBody>
-          <a:bodyPr vert="horz" lIns="91440" tIns="45720" rIns="91440" bIns="45720" rtlCol="0" anchor="b"/>
-          <a:lstStyle>
-            <a:lvl1pPr algn="r">
-              <a:defRPr sz="1200"/>
-            </a:lvl1pPr>
-          </a:lstStyle>
-          <a:p>
-            <a:fld id="{CE5E9CC1-C706-0F49-92D6-E571CC5EEA8F}" type="slidenum">
-              <a:rPr lang="en-US"/>
-              <a:t>‹#›</a:t>
-            </a:fld>
-            <a:endParaRPr lang="en-US"/>
-          </a:p>
-        </p:txBody>
-      </p:sp>
     </p:spTree>
     <p:extLst>
       <p:ext uri="{BB962C8B-B14F-4D97-AF65-F5344CB8AC3E}">
-        <p14:creationId xmlns:p14="http://schemas.microsoft.com/office/powerpoint/2010/main" val="1024086991"/>
+        <p14:creationId xmlns:p14="http://schemas.microsoft.com/office/powerpoint/2010/main" val="3557321841"/>
       </p:ext>
     </p:extLst>
   </p:cSld>
@@ -1389,7 +1048,6 @@
 • Two parts: national (primary), state siting (stretch)
 • All data via the Thurro connector, India only</a:t>
             </a:r>
-            <a:endParaRPr lang="en-US" dirty="0"/>
           </a:p>
         </p:txBody>
       </p:sp>
@@ -1483,7 +1141,6 @@
 • Honest caveat: siting may be incentive-driven, as the US IRA wave suggests
 • So the project does not fail if the stretch answer is that incentives decide</a:t>
             </a:r>
-            <a:endParaRPr lang="en-US" dirty="0"/>
           </a:p>
         </p:txBody>
       </p:sp>
@@ -1577,7 +1234,6 @@
 • Do not read the orange detail aloud — point at it, defer to the backup slide
 • Substitute: 34 events hand-coded from exchange filings</a:t>
             </a:r>
-            <a:endParaRPr lang="en-US" dirty="0"/>
           </a:p>
         </p:txBody>
       </p:sp>
@@ -1674,7 +1330,6 @@
 • Lead test: +0.24 at k=0, -0.20 at k=1, +0.40 at k=2, n=39 — say plainly that is noise
 • Cut for time: the production-coverage chart (27% to 60%) — raise it only if asked</a:t>
             </a:r>
-            <a:endParaRPr lang="en-US" dirty="0"/>
           </a:p>
         </p:txBody>
       </p:sp>
@@ -1773,7 +1428,6 @@
 • Say it plainly — that is not evidence of no lead, it is an underpowered test
 • If asked: false-positive rate checks out at 1.5-2.5%, solver validated against statsmodels</a:t>
             </a:r>
-            <a:endParaRPr lang="en-US" dirty="0"/>
           </a:p>
         </p:txBody>
       </p:sp>
@@ -1868,7 +1522,6 @@
 • Step 5: write up, including the negative result on the investment source
 • Close on this: the modelling is not the risk, the dependent variable is</a:t>
             </a:r>
-            <a:endParaRPr lang="en-US" dirty="0"/>
           </a:p>
         </p:txBody>
       </p:sp>
@@ -1963,7 +1616,6 @@
 • Q1 (a better capex feed) is highest value if the answer is yes
 • Fallback if events stay well short of 45-75: pre-register the lag, or pivot to the state panel</a:t>
             </a:r>
-            <a:endParaRPr lang="en-US" dirty="0"/>
           </a:p>
         </p:txBody>
       </p:sp>
@@ -2036,6 +1688,11 @@
 <file path=ppt/slideMasters/slideMaster1.xml><?xml version="1.0" encoding="utf-8"?>
 <p:sldMaster xmlns:a="http://schemas.openxmlformats.org/drawingml/2006/main" xmlns:r="http://schemas.openxmlformats.org/officeDocument/2006/relationships" xmlns:p="http://schemas.openxmlformats.org/presentationml/2006/main">
   <p:cSld>
+    <p:bg>
+      <p:bgRef idx="1001">
+        <a:schemeClr val="bg1"/>
+      </p:bgRef>
+    </p:bg>
     <p:spTree>
       <p:nvGrpSpPr>
         <p:cNvPr id="1" name=""/>
@@ -2318,6 +1975,7 @@
         <a:solidFill>
           <a:srgbClr val="0B3B38"/>
         </a:solidFill>
+        <a:effectLst/>
       </p:bgPr>
     </p:bg>
     <p:spTree>
@@ -2358,6 +2016,13 @@
             <a:prstDash val="solid"/>
           </a:ln>
         </p:spPr>
+        <p:txBody>
+          <a:bodyPr/>
+          <a:lstStyle/>
+          <a:p>
+            <a:endParaRPr lang="en-US"/>
+          </a:p>
+        </p:txBody>
       </p:sp>
       <p:sp>
         <p:nvSpPr>
@@ -2383,6 +2048,13 @@
             <a:prstDash val="solid"/>
           </a:ln>
         </p:spPr>
+        <p:txBody>
+          <a:bodyPr/>
+          <a:lstStyle/>
+          <a:p>
+            <a:endParaRPr lang="en-US"/>
+          </a:p>
+        </p:txBody>
       </p:sp>
       <p:sp>
         <p:nvSpPr>
@@ -2405,11 +2077,11 @@
           <a:bodyPr wrap="square" lIns="0" tIns="0" rIns="0" bIns="0" rtlCol="0" anchor="ctr"/>
           <a:lstStyle/>
           <a:p>
-            <a:pPr indent="0" marL="0">
-              <a:buNone/>
-            </a:pPr>
-            <a:r>
-              <a:rPr lang="en-US" sz="1200" b="1" spc="180" kern="0" dirty="0">
+            <a:pPr marL="0" indent="0">
+              <a:buNone/>
+            </a:pPr>
+            <a:r>
+              <a:rPr lang="en-US" sz="1200" b="1" kern="0" spc="180" dirty="0">
                 <a:solidFill>
                   <a:srgbClr val="6FD8CB"/>
                 </a:solidFill>
@@ -2444,7 +2116,7 @@
           <a:bodyPr wrap="square" lIns="0" tIns="0" rIns="0" bIns="0" rtlCol="0" anchor="ctr"/>
           <a:lstStyle/>
           <a:p>
-            <a:pPr indent="0" marL="0">
+            <a:pPr marL="0" indent="0">
               <a:lnSpc>
                 <a:spcPts val="5200"/>
               </a:lnSpc>
@@ -2464,7 +2136,7 @@
             <a:endParaRPr lang="en-US" sz="4600" dirty="0"/>
           </a:p>
           <a:p>
-            <a:pPr indent="0" marL="0">
+            <a:pPr marL="0" indent="0">
               <a:lnSpc>
                 <a:spcPts val="5200"/>
               </a:lnSpc>
@@ -2506,7 +2178,7 @@
           <a:bodyPr wrap="square" lIns="0" tIns="0" rIns="0" bIns="0" rtlCol="0" anchor="ctr"/>
           <a:lstStyle/>
           <a:p>
-            <a:pPr indent="0" marL="0">
+            <a:pPr marL="0" indent="0">
               <a:buNone/>
             </a:pPr>
             <a:r>
@@ -2545,7 +2217,7 @@
           <a:bodyPr wrap="square" lIns="0" tIns="0" rIns="0" bIns="0" rtlCol="0" anchor="ctr"/>
           <a:lstStyle/>
           <a:p>
-            <a:pPr indent="0" marL="0">
+            <a:pPr marL="0" indent="0">
               <a:buNone/>
             </a:pPr>
             <a:r>
@@ -2557,7 +2229,62 @@
                 <a:ea typeface="Calibri" pitchFamily="34" charset="-122"/>
                 <a:cs typeface="Calibri" pitchFamily="34" charset="-120"/>
               </a:rPr>
-              <a:t>Haydn Stucker  ·  Duke Pratt School of Engineering  ·  Data: Thurro connector (India)</a:t>
+              <a:t>Colby, </a:t>
+            </a:r>
+            <a:r>
+              <a:rPr lang="en-US" sz="1200" dirty="0" err="1">
+                <a:solidFill>
+                  <a:srgbClr val="8FB4AF"/>
+                </a:solidFill>
+                <a:latin typeface="Calibri" pitchFamily="34" charset="0"/>
+                <a:ea typeface="Calibri" pitchFamily="34" charset="-122"/>
+                <a:cs typeface="Calibri" pitchFamily="34" charset="-120"/>
+              </a:rPr>
+              <a:t>Xianyu</a:t>
+            </a:r>
+            <a:r>
+              <a:rPr lang="en-US" sz="1200" dirty="0">
+                <a:solidFill>
+                  <a:srgbClr val="8FB4AF"/>
+                </a:solidFill>
+                <a:latin typeface="Calibri" pitchFamily="34" charset="0"/>
+                <a:ea typeface="Calibri" pitchFamily="34" charset="-122"/>
+                <a:cs typeface="Calibri" pitchFamily="34" charset="-120"/>
+              </a:rPr>
+              <a:t>, </a:t>
+            </a:r>
+            <a:r>
+              <a:rPr lang="en-US" sz="1200" dirty="0" err="1">
+                <a:solidFill>
+                  <a:srgbClr val="8FB4AF"/>
+                </a:solidFill>
+                <a:latin typeface="Calibri" pitchFamily="34" charset="0"/>
+                <a:ea typeface="Calibri" pitchFamily="34" charset="-122"/>
+                <a:cs typeface="Calibri" pitchFamily="34" charset="-120"/>
+              </a:rPr>
+              <a:t>Keming</a:t>
+            </a:r>
+            <a:r>
+              <a:rPr lang="en-US" sz="1200">
+                <a:solidFill>
+                  <a:srgbClr val="8FB4AF"/>
+                </a:solidFill>
+                <a:latin typeface="Calibri" pitchFamily="34" charset="0"/>
+                <a:ea typeface="Calibri" pitchFamily="34" charset="-122"/>
+                <a:cs typeface="Calibri" pitchFamily="34" charset="-120"/>
+              </a:rPr>
+              <a:t>, Haydn ·  </a:t>
+            </a:r>
+            <a:r>
+              <a:rPr lang="en-US" sz="1200" dirty="0">
+                <a:solidFill>
+                  <a:srgbClr val="8FB4AF"/>
+                </a:solidFill>
+                <a:latin typeface="Calibri" pitchFamily="34" charset="0"/>
+                <a:ea typeface="Calibri" pitchFamily="34" charset="-122"/>
+                <a:cs typeface="Calibri" pitchFamily="34" charset="-120"/>
+              </a:rPr>
+              <a:t>Duke Pratt School of Engineering  ·  Data: Thurro connector (India)</a:t>
             </a:r>
             <a:endParaRPr lang="en-US" sz="1200" dirty="0"/>
           </a:p>
@@ -2579,6 +2306,7 @@
         <a:solidFill>
           <a:srgbClr val="FFFFFF"/>
         </a:solidFill>
+        <a:effectLst/>
       </p:bgPr>
     </p:bg>
     <p:spTree>
@@ -2616,11 +2344,11 @@
           <a:bodyPr wrap="square" lIns="0" tIns="0" rIns="0" bIns="0" rtlCol="0" anchor="ctr"/>
           <a:lstStyle/>
           <a:p>
-            <a:pPr indent="0" marL="0">
-              <a:buNone/>
-            </a:pPr>
-            <a:r>
-              <a:rPr lang="en-US" sz="1200" b="1" spc="160" kern="0" dirty="0">
+            <a:pPr marL="0" indent="0">
+              <a:buNone/>
+            </a:pPr>
+            <a:r>
+              <a:rPr lang="en-US" sz="1200" b="1" kern="0" spc="160" dirty="0">
                 <a:solidFill>
                   <a:srgbClr val="0D9488"/>
                 </a:solidFill>
@@ -2655,7 +2383,7 @@
           <a:bodyPr wrap="square" lIns="0" tIns="0" rIns="0" bIns="0" rtlCol="0" anchor="ctr"/>
           <a:lstStyle/>
           <a:p>
-            <a:pPr indent="0" marL="0">
+            <a:pPr marL="0" indent="0">
               <a:buNone/>
             </a:pPr>
             <a:r>
@@ -2694,7 +2422,7 @@
           <a:bodyPr wrap="square" lIns="0" tIns="0" rIns="0" bIns="0" rtlCol="0" anchor="ctr"/>
           <a:lstStyle/>
           <a:p>
-            <a:pPr indent="0" marL="0">
+            <a:pPr marL="0" indent="0">
               <a:buNone/>
             </a:pPr>
             <a:r>
@@ -2738,6 +2466,13 @@
             <a:prstDash val="solid"/>
           </a:ln>
         </p:spPr>
+        <p:txBody>
+          <a:bodyPr/>
+          <a:lstStyle/>
+          <a:p>
+            <a:endParaRPr lang="en-US"/>
+          </a:p>
+        </p:txBody>
       </p:sp>
       <p:sp>
         <p:nvSpPr>
@@ -2763,6 +2498,13 @@
             <a:prstDash val="solid"/>
           </a:ln>
         </p:spPr>
+        <p:txBody>
+          <a:bodyPr/>
+          <a:lstStyle/>
+          <a:p>
+            <a:endParaRPr lang="en-US"/>
+          </a:p>
+        </p:txBody>
       </p:sp>
       <p:sp>
         <p:nvSpPr>
@@ -2785,11 +2527,11 @@
           <a:bodyPr wrap="square" lIns="0" tIns="0" rIns="0" bIns="0" rtlCol="0" anchor="ctr"/>
           <a:lstStyle/>
           <a:p>
-            <a:pPr indent="0" marL="0">
-              <a:buNone/>
-            </a:pPr>
-            <a:r>
-              <a:rPr lang="en-US" sz="1100" b="1" spc="140" kern="0" dirty="0">
+            <a:pPr marL="0" indent="0">
+              <a:buNone/>
+            </a:pPr>
+            <a:r>
+              <a:rPr lang="en-US" sz="1100" b="1" kern="0" spc="140" dirty="0">
                 <a:solidFill>
                   <a:srgbClr val="0D9488"/>
                 </a:solidFill>
@@ -2824,7 +2566,7 @@
           <a:bodyPr wrap="square" lIns="0" tIns="0" rIns="0" bIns="0" rtlCol="0" anchor="ctr"/>
           <a:lstStyle/>
           <a:p>
-            <a:pPr algn="r" indent="0" marL="0">
+            <a:pPr marL="0" indent="0" algn="r">
               <a:buNone/>
             </a:pPr>
             <a:r>
@@ -2863,7 +2605,7 @@
           <a:bodyPr wrap="square" lIns="0" tIns="0" rIns="0" bIns="0" rtlCol="0" anchor="ctr"/>
           <a:lstStyle/>
           <a:p>
-            <a:pPr indent="0" marL="0">
+            <a:pPr marL="0" indent="0">
               <a:buNone/>
             </a:pPr>
             <a:r>
@@ -2902,7 +2644,7 @@
           <a:bodyPr wrap="square" lIns="0" tIns="0" rIns="0" bIns="0" rtlCol="0" anchor="ctr"/>
           <a:lstStyle/>
           <a:p>
-            <a:pPr indent="0" marL="0">
+            <a:pPr marL="0" indent="0">
               <a:buNone/>
             </a:pPr>
             <a:r>
@@ -2946,6 +2688,13 @@
             <a:prstDash val="solid"/>
           </a:ln>
         </p:spPr>
+        <p:txBody>
+          <a:bodyPr/>
+          <a:lstStyle/>
+          <a:p>
+            <a:endParaRPr lang="en-US"/>
+          </a:p>
+        </p:txBody>
       </p:sp>
       <p:sp>
         <p:nvSpPr>
@@ -2971,6 +2720,13 @@
             <a:prstDash val="solid"/>
           </a:ln>
         </p:spPr>
+        <p:txBody>
+          <a:bodyPr/>
+          <a:lstStyle/>
+          <a:p>
+            <a:endParaRPr lang="en-US"/>
+          </a:p>
+        </p:txBody>
       </p:sp>
       <p:sp>
         <p:nvSpPr>
@@ -2993,11 +2749,11 @@
           <a:bodyPr wrap="square" lIns="0" tIns="0" rIns="0" bIns="0" rtlCol="0" anchor="ctr"/>
           <a:lstStyle/>
           <a:p>
-            <a:pPr indent="0" marL="0">
-              <a:buNone/>
-            </a:pPr>
-            <a:r>
-              <a:rPr lang="en-US" sz="1100" b="1" spc="140" kern="0" dirty="0">
+            <a:pPr marL="0" indent="0">
+              <a:buNone/>
+            </a:pPr>
+            <a:r>
+              <a:rPr lang="en-US" sz="1100" b="1" kern="0" spc="140" dirty="0">
                 <a:solidFill>
                   <a:srgbClr val="7048C4"/>
                 </a:solidFill>
@@ -3032,7 +2788,7 @@
           <a:bodyPr wrap="square" lIns="0" tIns="0" rIns="0" bIns="0" rtlCol="0" anchor="ctr"/>
           <a:lstStyle/>
           <a:p>
-            <a:pPr algn="r" indent="0" marL="0">
+            <a:pPr marL="0" indent="0" algn="r">
               <a:buNone/>
             </a:pPr>
             <a:r>
@@ -3071,7 +2827,7 @@
           <a:bodyPr wrap="square" lIns="0" tIns="0" rIns="0" bIns="0" rtlCol="0" anchor="ctr"/>
           <a:lstStyle/>
           <a:p>
-            <a:pPr indent="0" marL="0">
+            <a:pPr marL="0" indent="0">
               <a:buNone/>
             </a:pPr>
             <a:r>
@@ -3110,7 +2866,7 @@
           <a:bodyPr wrap="square" lIns="0" tIns="0" rIns="0" bIns="0" rtlCol="0" anchor="ctr"/>
           <a:lstStyle/>
           <a:p>
-            <a:pPr indent="0" marL="0">
+            <a:pPr marL="0" indent="0">
               <a:buNone/>
             </a:pPr>
             <a:r>
@@ -3149,7 +2905,7 @@
           <a:bodyPr wrap="square" lIns="0" tIns="0" rIns="0" bIns="0" rtlCol="0" anchor="ctr"/>
           <a:lstStyle/>
           <a:p>
-            <a:pPr indent="0" marL="0">
+            <a:pPr marL="0" indent="0">
               <a:buNone/>
             </a:pPr>
             <a:r>
@@ -3183,6 +2939,7 @@
         <a:solidFill>
           <a:srgbClr val="FFFFFF"/>
         </a:solidFill>
+        <a:effectLst/>
       </p:bgPr>
     </p:bg>
     <p:spTree>
@@ -3220,11 +2977,11 @@
           <a:bodyPr wrap="square" lIns="0" tIns="0" rIns="0" bIns="0" rtlCol="0" anchor="ctr"/>
           <a:lstStyle/>
           <a:p>
-            <a:pPr indent="0" marL="0">
-              <a:buNone/>
-            </a:pPr>
-            <a:r>
-              <a:rPr lang="en-US" sz="1200" b="1" spc="160" kern="0" dirty="0">
+            <a:pPr marL="0" indent="0">
+              <a:buNone/>
+            </a:pPr>
+            <a:r>
+              <a:rPr lang="en-US" sz="1200" b="1" kern="0" spc="160" dirty="0">
                 <a:solidFill>
                   <a:srgbClr val="0D9488"/>
                 </a:solidFill>
@@ -3259,7 +3016,7 @@
           <a:bodyPr wrap="square" lIns="0" tIns="0" rIns="0" bIns="0" rtlCol="0" anchor="ctr"/>
           <a:lstStyle/>
           <a:p>
-            <a:pPr indent="0" marL="0">
+            <a:pPr marL="0" indent="0">
               <a:buNone/>
             </a:pPr>
             <a:r>
@@ -3303,6 +3060,13 @@
             <a:prstDash val="solid"/>
           </a:ln>
         </p:spPr>
+        <p:txBody>
+          <a:bodyPr/>
+          <a:lstStyle/>
+          <a:p>
+            <a:endParaRPr lang="en-US"/>
+          </a:p>
+        </p:txBody>
       </p:sp>
       <p:sp>
         <p:nvSpPr>
@@ -3328,6 +3092,13 @@
             <a:prstDash val="solid"/>
           </a:ln>
         </p:spPr>
+        <p:txBody>
+          <a:bodyPr/>
+          <a:lstStyle/>
+          <a:p>
+            <a:endParaRPr lang="en-US"/>
+          </a:p>
+        </p:txBody>
       </p:sp>
       <p:sp>
         <p:nvSpPr>
@@ -3350,11 +3121,11 @@
           <a:bodyPr wrap="square" lIns="0" tIns="0" rIns="0" bIns="0" rtlCol="0" anchor="ctr"/>
           <a:lstStyle/>
           <a:p>
-            <a:pPr indent="0" marL="0">
-              <a:buNone/>
-            </a:pPr>
-            <a:r>
-              <a:rPr lang="en-US" sz="900" b="1" spc="120" kern="0" dirty="0">
+            <a:pPr marL="0" indent="0">
+              <a:buNone/>
+            </a:pPr>
+            <a:r>
+              <a:rPr lang="en-US" sz="900" b="1" kern="0" spc="120" dirty="0">
                 <a:solidFill>
                   <a:srgbClr val="0D9488"/>
                 </a:solidFill>
@@ -3389,7 +3160,7 @@
           <a:bodyPr wrap="square" lIns="0" tIns="0" rIns="0" bIns="0" rtlCol="0" anchor="ctr"/>
           <a:lstStyle/>
           <a:p>
-            <a:pPr indent="0" marL="0">
+            <a:pPr marL="0" indent="0">
               <a:buNone/>
             </a:pPr>
             <a:r>
@@ -3428,7 +3199,7 @@
           <a:bodyPr wrap="square" lIns="0" tIns="0" rIns="0" bIns="0" rtlCol="0" anchor="ctr"/>
           <a:lstStyle/>
           <a:p>
-            <a:pPr indent="0" marL="0">
+            <a:pPr marL="0" indent="0">
               <a:buNone/>
             </a:pPr>
             <a:r>
@@ -3467,7 +3238,7 @@
           <a:bodyPr wrap="square" lIns="0" tIns="0" rIns="0" bIns="0" rtlCol="0" anchor="ctr"/>
           <a:lstStyle/>
           <a:p>
-            <a:pPr indent="0" marL="0">
+            <a:pPr marL="0" indent="0">
               <a:buNone/>
             </a:pPr>
             <a:r>
@@ -3511,6 +3282,13 @@
             <a:prstDash val="solid"/>
           </a:ln>
         </p:spPr>
+        <p:txBody>
+          <a:bodyPr/>
+          <a:lstStyle/>
+          <a:p>
+            <a:endParaRPr lang="en-US"/>
+          </a:p>
+        </p:txBody>
       </p:sp>
       <p:sp>
         <p:nvSpPr>
@@ -3536,6 +3314,13 @@
             <a:prstDash val="solid"/>
           </a:ln>
         </p:spPr>
+        <p:txBody>
+          <a:bodyPr/>
+          <a:lstStyle/>
+          <a:p>
+            <a:endParaRPr lang="en-US"/>
+          </a:p>
+        </p:txBody>
       </p:sp>
       <p:sp>
         <p:nvSpPr>
@@ -3558,11 +3343,11 @@
           <a:bodyPr wrap="square" lIns="0" tIns="0" rIns="0" bIns="0" rtlCol="0" anchor="ctr"/>
           <a:lstStyle/>
           <a:p>
-            <a:pPr indent="0" marL="0">
-              <a:buNone/>
-            </a:pPr>
-            <a:r>
-              <a:rPr lang="en-US" sz="900" b="1" spc="120" kern="0" dirty="0">
+            <a:pPr marL="0" indent="0">
+              <a:buNone/>
+            </a:pPr>
+            <a:r>
+              <a:rPr lang="en-US" sz="900" b="1" kern="0" spc="120" dirty="0">
                 <a:solidFill>
                   <a:srgbClr val="0D9488"/>
                 </a:solidFill>
@@ -3597,7 +3382,7 @@
           <a:bodyPr wrap="square" lIns="0" tIns="0" rIns="0" bIns="0" rtlCol="0" anchor="ctr"/>
           <a:lstStyle/>
           <a:p>
-            <a:pPr indent="0" marL="0">
+            <a:pPr marL="0" indent="0">
               <a:buNone/>
             </a:pPr>
             <a:r>
@@ -3636,7 +3421,7 @@
           <a:bodyPr wrap="square" lIns="0" tIns="0" rIns="0" bIns="0" rtlCol="0" anchor="ctr"/>
           <a:lstStyle/>
           <a:p>
-            <a:pPr indent="0" marL="0">
+            <a:pPr marL="0" indent="0">
               <a:buNone/>
             </a:pPr>
             <a:r>
@@ -3675,7 +3460,7 @@
           <a:bodyPr wrap="square" lIns="0" tIns="0" rIns="0" bIns="0" rtlCol="0" anchor="ctr"/>
           <a:lstStyle/>
           <a:p>
-            <a:pPr indent="0" marL="0">
+            <a:pPr marL="0" indent="0">
               <a:buNone/>
             </a:pPr>
             <a:r>
@@ -3719,6 +3504,13 @@
             <a:prstDash val="solid"/>
           </a:ln>
         </p:spPr>
+        <p:txBody>
+          <a:bodyPr/>
+          <a:lstStyle/>
+          <a:p>
+            <a:endParaRPr lang="en-US"/>
+          </a:p>
+        </p:txBody>
       </p:sp>
       <p:sp>
         <p:nvSpPr>
@@ -3744,6 +3536,13 @@
             <a:prstDash val="solid"/>
           </a:ln>
         </p:spPr>
+        <p:txBody>
+          <a:bodyPr/>
+          <a:lstStyle/>
+          <a:p>
+            <a:endParaRPr lang="en-US"/>
+          </a:p>
+        </p:txBody>
       </p:sp>
       <p:sp>
         <p:nvSpPr>
@@ -3766,11 +3565,11 @@
           <a:bodyPr wrap="square" lIns="0" tIns="0" rIns="0" bIns="0" rtlCol="0" anchor="ctr"/>
           <a:lstStyle/>
           <a:p>
-            <a:pPr indent="0" marL="0">
-              <a:buNone/>
-            </a:pPr>
-            <a:r>
-              <a:rPr lang="en-US" sz="900" b="1" spc="120" kern="0" dirty="0">
+            <a:pPr marL="0" indent="0">
+              <a:buNone/>
+            </a:pPr>
+            <a:r>
+              <a:rPr lang="en-US" sz="900" b="1" kern="0" spc="120" dirty="0">
                 <a:solidFill>
                   <a:srgbClr val="0D9488"/>
                 </a:solidFill>
@@ -3805,7 +3604,7 @@
           <a:bodyPr wrap="square" lIns="0" tIns="0" rIns="0" bIns="0" rtlCol="0" anchor="ctr"/>
           <a:lstStyle/>
           <a:p>
-            <a:pPr indent="0" marL="0">
+            <a:pPr marL="0" indent="0">
               <a:buNone/>
             </a:pPr>
             <a:r>
@@ -3844,7 +3643,7 @@
           <a:bodyPr wrap="square" lIns="0" tIns="0" rIns="0" bIns="0" rtlCol="0" anchor="ctr"/>
           <a:lstStyle/>
           <a:p>
-            <a:pPr indent="0" marL="0">
+            <a:pPr marL="0" indent="0">
               <a:buNone/>
             </a:pPr>
             <a:r>
@@ -3883,7 +3682,7 @@
           <a:bodyPr wrap="square" lIns="0" tIns="0" rIns="0" bIns="0" rtlCol="0" anchor="ctr"/>
           <a:lstStyle/>
           <a:p>
-            <a:pPr indent="0" marL="0">
+            <a:pPr marL="0" indent="0">
               <a:buNone/>
             </a:pPr>
             <a:r>
@@ -3927,6 +3726,13 @@
             <a:prstDash val="solid"/>
           </a:ln>
         </p:spPr>
+        <p:txBody>
+          <a:bodyPr/>
+          <a:lstStyle/>
+          <a:p>
+            <a:endParaRPr lang="en-US"/>
+          </a:p>
+        </p:txBody>
       </p:sp>
       <p:sp>
         <p:nvSpPr>
@@ -3952,6 +3758,13 @@
             <a:prstDash val="solid"/>
           </a:ln>
         </p:spPr>
+        <p:txBody>
+          <a:bodyPr/>
+          <a:lstStyle/>
+          <a:p>
+            <a:endParaRPr lang="en-US"/>
+          </a:p>
+        </p:txBody>
       </p:sp>
       <p:sp>
         <p:nvSpPr>
@@ -3974,11 +3787,11 @@
           <a:bodyPr wrap="square" lIns="0" tIns="0" rIns="0" bIns="0" rtlCol="0" anchor="ctr"/>
           <a:lstStyle/>
           <a:p>
-            <a:pPr indent="0" marL="0">
-              <a:buNone/>
-            </a:pPr>
-            <a:r>
-              <a:rPr lang="en-US" sz="900" b="1" spc="120" kern="0" dirty="0">
+            <a:pPr marL="0" indent="0">
+              <a:buNone/>
+            </a:pPr>
+            <a:r>
+              <a:rPr lang="en-US" sz="900" b="1" kern="0" spc="120" dirty="0">
                 <a:solidFill>
                   <a:srgbClr val="D94F04"/>
                 </a:solidFill>
@@ -4013,7 +3826,7 @@
           <a:bodyPr wrap="square" lIns="0" tIns="0" rIns="0" bIns="0" rtlCol="0" anchor="ctr"/>
           <a:lstStyle/>
           <a:p>
-            <a:pPr indent="0" marL="0">
+            <a:pPr marL="0" indent="0">
               <a:buNone/>
             </a:pPr>
             <a:r>
@@ -4052,7 +3865,7 @@
           <a:bodyPr wrap="square" lIns="0" tIns="0" rIns="0" bIns="0" rtlCol="0" anchor="ctr"/>
           <a:lstStyle/>
           <a:p>
-            <a:pPr indent="0" marL="0">
+            <a:pPr marL="0" indent="0">
               <a:buNone/>
             </a:pPr>
             <a:r>
@@ -4091,7 +3904,7 @@
           <a:bodyPr wrap="square" lIns="0" tIns="0" rIns="0" bIns="0" rtlCol="0" anchor="ctr"/>
           <a:lstStyle/>
           <a:p>
-            <a:pPr indent="0" marL="0">
+            <a:pPr marL="0" indent="0">
               <a:buNone/>
             </a:pPr>
             <a:r>
@@ -4130,7 +3943,7 @@
           <a:bodyPr wrap="square" lIns="0" tIns="0" rIns="0" bIns="0" rtlCol="0" anchor="ctr"/>
           <a:lstStyle/>
           <a:p>
-            <a:pPr indent="0" marL="0">
+            <a:pPr marL="0" indent="0">
               <a:buNone/>
             </a:pPr>
             <a:r>
@@ -4144,9 +3957,6 @@
               </a:rPr>
               <a:t>The fourth dataset was meant to be the dependent variable. </a:t>
             </a:r>
-            <a:pPr indent="0" marL="0">
-              <a:buNone/>
-            </a:pPr>
             <a:r>
               <a:rPr lang="en-US" sz="1300" dirty="0">
                 <a:solidFill>
@@ -4178,6 +3988,7 @@
         <a:solidFill>
           <a:srgbClr val="FFFFFF"/>
         </a:solidFill>
+        <a:effectLst/>
       </p:bgPr>
     </p:bg>
     <p:spTree>
@@ -4215,11 +4026,11 @@
           <a:bodyPr wrap="square" lIns="0" tIns="0" rIns="0" bIns="0" rtlCol="0" anchor="ctr"/>
           <a:lstStyle/>
           <a:p>
-            <a:pPr indent="0" marL="0">
-              <a:buNone/>
-            </a:pPr>
-            <a:r>
-              <a:rPr lang="en-US" sz="1200" b="1" spc="160" kern="0" dirty="0">
+            <a:pPr marL="0" indent="0">
+              <a:buNone/>
+            </a:pPr>
+            <a:r>
+              <a:rPr lang="en-US" sz="1200" b="1" kern="0" spc="160" dirty="0">
                 <a:solidFill>
                   <a:srgbClr val="0D9488"/>
                 </a:solidFill>
@@ -4254,7 +4065,7 @@
           <a:bodyPr wrap="square" lIns="0" tIns="0" rIns="0" bIns="0" rtlCol="0" anchor="ctr"/>
           <a:lstStyle/>
           <a:p>
-            <a:pPr indent="0" marL="0">
+            <a:pPr marL="0" indent="0">
               <a:buNone/>
             </a:pPr>
             <a:r>
@@ -4274,7 +4085,7 @@
       </p:sp>
       <p:graphicFrame>
         <p:nvGraphicFramePr>
-          <p:cNvPr id="4" name="Chart 0" descr=""/>
+          <p:cNvPr id="4" name="Chart 0"/>
           <p:cNvGraphicFramePr/>
           <p:nvPr/>
         </p:nvGraphicFramePr>
@@ -4282,9 +4093,9 @@
           <a:off x="640080" y="1645920"/>
           <a:ext cx="5623560" cy="2926080"/>
         </p:xfrm>
-        <a:graphic xmlns:a="http://schemas.openxmlformats.org/drawingml/2006/main">
+        <a:graphic>
           <a:graphicData uri="http://schemas.openxmlformats.org/drawingml/2006/chart">
-            <c:chart xmlns:c="http://schemas.openxmlformats.org/drawingml/2006/chart" r:id="rId1"/>
+            <c:chart xmlns:c="http://schemas.openxmlformats.org/drawingml/2006/chart" xmlns:r="http://schemas.openxmlformats.org/officeDocument/2006/relationships" r:id="rId3"/>
           </a:graphicData>
         </a:graphic>
       </p:graphicFrame>
@@ -4309,7 +4120,7 @@
           <a:bodyPr wrap="square" lIns="0" tIns="0" rIns="0" bIns="0" rtlCol="0" anchor="ctr"/>
           <a:lstStyle/>
           <a:p>
-            <a:pPr indent="0" marL="0">
+            <a:pPr marL="0" indent="0">
               <a:buNone/>
             </a:pPr>
             <a:r>
@@ -4353,6 +4164,13 @@
             <a:prstDash val="solid"/>
           </a:ln>
         </p:spPr>
+        <p:txBody>
+          <a:bodyPr/>
+          <a:lstStyle/>
+          <a:p>
+            <a:endParaRPr lang="en-US"/>
+          </a:p>
+        </p:txBody>
       </p:sp>
       <p:sp>
         <p:nvSpPr>
@@ -4375,7 +4193,7 @@
           <a:bodyPr wrap="square" lIns="0" tIns="0" rIns="0" bIns="0" rtlCol="0" anchor="ctr"/>
           <a:lstStyle/>
           <a:p>
-            <a:pPr algn="ctr" indent="0" marL="0">
+            <a:pPr marL="0" indent="0" algn="ctr">
               <a:buNone/>
             </a:pPr>
             <a:r>
@@ -4414,7 +4232,7 @@
           <a:bodyPr wrap="square" lIns="0" tIns="0" rIns="0" bIns="0" rtlCol="0" anchor="ctr"/>
           <a:lstStyle/>
           <a:p>
-            <a:pPr algn="ctr" indent="0" marL="0">
+            <a:pPr marL="0" indent="0" algn="ctr">
               <a:buNone/>
             </a:pPr>
             <a:r>
@@ -4431,7 +4249,7 @@
             <a:endParaRPr lang="en-US" sz="1050" dirty="0"/>
           </a:p>
           <a:p>
-            <a:pPr algn="ctr" indent="0" marL="0">
+            <a:pPr marL="0" indent="0" algn="ctr">
               <a:buNone/>
             </a:pPr>
             <a:r>
@@ -4475,6 +4293,13 @@
             <a:prstDash val="solid"/>
           </a:ln>
         </p:spPr>
+        <p:txBody>
+          <a:bodyPr/>
+          <a:lstStyle/>
+          <a:p>
+            <a:endParaRPr lang="en-US"/>
+          </a:p>
+        </p:txBody>
       </p:sp>
       <p:sp>
         <p:nvSpPr>
@@ -4497,7 +4322,7 @@
           <a:bodyPr wrap="square" lIns="0" tIns="0" rIns="0" bIns="0" rtlCol="0" anchor="ctr"/>
           <a:lstStyle/>
           <a:p>
-            <a:pPr algn="ctr" indent="0" marL="0">
+            <a:pPr marL="0" indent="0" algn="ctr">
               <a:buNone/>
             </a:pPr>
             <a:r>
@@ -4536,7 +4361,7 @@
           <a:bodyPr wrap="square" lIns="0" tIns="0" rIns="0" bIns="0" rtlCol="0" anchor="ctr"/>
           <a:lstStyle/>
           <a:p>
-            <a:pPr algn="ctr" indent="0" marL="0">
+            <a:pPr marL="0" indent="0" algn="ctr">
               <a:buNone/>
             </a:pPr>
             <a:r>
@@ -4553,7 +4378,7 @@
             <a:endParaRPr lang="en-US" sz="1050" dirty="0"/>
           </a:p>
           <a:p>
-            <a:pPr algn="ctr" indent="0" marL="0">
+            <a:pPr marL="0" indent="0" algn="ctr">
               <a:buNone/>
             </a:pPr>
             <a:r>
@@ -4597,6 +4422,13 @@
             <a:prstDash val="solid"/>
           </a:ln>
         </p:spPr>
+        <p:txBody>
+          <a:bodyPr/>
+          <a:lstStyle/>
+          <a:p>
+            <a:endParaRPr lang="en-US"/>
+          </a:p>
+        </p:txBody>
       </p:sp>
       <p:sp>
         <p:nvSpPr>
@@ -4619,7 +4451,7 @@
           <a:bodyPr wrap="square" lIns="0" tIns="0" rIns="0" bIns="0" rtlCol="0" anchor="ctr"/>
           <a:lstStyle/>
           <a:p>
-            <a:pPr algn="ctr" indent="0" marL="0">
+            <a:pPr marL="0" indent="0" algn="ctr">
               <a:buNone/>
             </a:pPr>
             <a:r>
@@ -4658,7 +4490,7 @@
           <a:bodyPr wrap="square" lIns="0" tIns="0" rIns="0" bIns="0" rtlCol="0" anchor="ctr"/>
           <a:lstStyle/>
           <a:p>
-            <a:pPr algn="ctr" indent="0" marL="0">
+            <a:pPr marL="0" indent="0" algn="ctr">
               <a:buNone/>
             </a:pPr>
             <a:r>
@@ -4675,7 +4507,7 @@
             <a:endParaRPr lang="en-US" sz="1050" dirty="0"/>
           </a:p>
           <a:p>
-            <a:pPr algn="ctr" indent="0" marL="0">
+            <a:pPr marL="0" indent="0" algn="ctr">
               <a:buNone/>
             </a:pPr>
             <a:r>
@@ -4719,6 +4551,13 @@
             <a:prstDash val="solid"/>
           </a:ln>
         </p:spPr>
+        <p:txBody>
+          <a:bodyPr/>
+          <a:lstStyle/>
+          <a:p>
+            <a:endParaRPr lang="en-US"/>
+          </a:p>
+        </p:txBody>
       </p:sp>
       <p:sp>
         <p:nvSpPr>
@@ -4741,7 +4580,7 @@
           <a:bodyPr wrap="square" lIns="0" tIns="0" rIns="0" bIns="0" rtlCol="0" anchor="ctr"/>
           <a:lstStyle/>
           <a:p>
-            <a:pPr algn="ctr" indent="0" marL="0">
+            <a:pPr marL="0" indent="0" algn="ctr">
               <a:buNone/>
             </a:pPr>
             <a:r>
@@ -4780,7 +4619,7 @@
           <a:bodyPr wrap="square" lIns="0" tIns="0" rIns="0" bIns="0" rtlCol="0" anchor="ctr"/>
           <a:lstStyle/>
           <a:p>
-            <a:pPr algn="ctr" indent="0" marL="0">
+            <a:pPr marL="0" indent="0" algn="ctr">
               <a:buNone/>
             </a:pPr>
             <a:r>
@@ -4797,7 +4636,7 @@
             <a:endParaRPr lang="en-US" sz="1050" dirty="0"/>
           </a:p>
           <a:p>
-            <a:pPr algn="ctr" indent="0" marL="0">
+            <a:pPr marL="0" indent="0" algn="ctr">
               <a:buNone/>
             </a:pPr>
             <a:r>
@@ -4836,7 +4675,7 @@
           <a:bodyPr wrap="square" lIns="0" tIns="0" rIns="0" bIns="0" rtlCol="0" anchor="ctr"/>
           <a:lstStyle/>
           <a:p>
-            <a:pPr indent="0" marL="0">
+            <a:pPr marL="0" indent="0">
               <a:buNone/>
             </a:pPr>
             <a:r>
@@ -4850,9 +4689,6 @@
               </a:rPr>
               <a:t>Why this matters:  </a:t>
             </a:r>
-            <a:pPr indent="0" marL="0">
-              <a:buNone/>
-            </a:pPr>
             <a:r>
               <a:rPr lang="en-US" sz="1300" dirty="0">
                 <a:solidFill>
@@ -4889,7 +4725,7 @@
           <a:bodyPr wrap="square" lIns="0" tIns="0" rIns="0" bIns="0" rtlCol="0" anchor="ctr"/>
           <a:lstStyle/>
           <a:p>
-            <a:pPr indent="0" marL="0">
+            <a:pPr marL="0" indent="0">
               <a:buNone/>
             </a:pPr>
             <a:r>
@@ -4903,9 +4739,6 @@
               </a:rPr>
               <a:t>First lead test gives +0.24 at k=0, −0.20 at k=1, +0.40 at k=2. </a:t>
             </a:r>
-            <a:pPr indent="0" marL="0">
-              <a:buNone/>
-            </a:pPr>
             <a:r>
               <a:rPr lang="en-US" sz="1300" dirty="0">
                 <a:solidFill>
@@ -4937,6 +4770,7 @@
         <a:solidFill>
           <a:srgbClr val="FFFFFF"/>
         </a:solidFill>
+        <a:effectLst/>
       </p:bgPr>
     </p:bg>
     <p:spTree>
@@ -4974,11 +4808,11 @@
           <a:bodyPr wrap="square" lIns="0" tIns="0" rIns="0" bIns="0" rtlCol="0" anchor="ctr"/>
           <a:lstStyle/>
           <a:p>
-            <a:pPr indent="0" marL="0">
-              <a:buNone/>
-            </a:pPr>
-            <a:r>
-              <a:rPr lang="en-US" sz="1200" b="1" spc="160" kern="0" dirty="0">
+            <a:pPr marL="0" indent="0">
+              <a:buNone/>
+            </a:pPr>
+            <a:r>
+              <a:rPr lang="en-US" sz="1200" b="1" kern="0" spc="160" dirty="0">
                 <a:solidFill>
                   <a:srgbClr val="0D9488"/>
                 </a:solidFill>
@@ -5013,7 +4847,7 @@
           <a:bodyPr wrap="square" lIns="0" tIns="0" rIns="0" bIns="0" rtlCol="0" anchor="ctr"/>
           <a:lstStyle/>
           <a:p>
-            <a:pPr indent="0" marL="0">
+            <a:pPr marL="0" indent="0">
               <a:buNone/>
             </a:pPr>
             <a:r>
@@ -5057,6 +4891,13 @@
             <a:prstDash val="solid"/>
           </a:ln>
         </p:spPr>
+        <p:txBody>
+          <a:bodyPr/>
+          <a:lstStyle/>
+          <a:p>
+            <a:endParaRPr lang="en-US"/>
+          </a:p>
+        </p:txBody>
       </p:sp>
       <p:sp>
         <p:nvSpPr>
@@ -5082,6 +4923,13 @@
             <a:prstDash val="solid"/>
           </a:ln>
         </p:spPr>
+        <p:txBody>
+          <a:bodyPr/>
+          <a:lstStyle/>
+          <a:p>
+            <a:endParaRPr lang="en-US"/>
+          </a:p>
+        </p:txBody>
       </p:sp>
       <p:sp>
         <p:nvSpPr>
@@ -5104,7 +4952,7 @@
           <a:bodyPr wrap="square" lIns="0" tIns="0" rIns="0" bIns="0" rtlCol="0" anchor="ctr"/>
           <a:lstStyle/>
           <a:p>
-            <a:pPr indent="0" marL="0">
+            <a:pPr marL="0" indent="0">
               <a:buNone/>
             </a:pPr>
             <a:r>
@@ -5230,7 +5078,7 @@
       </p:sp>
       <p:graphicFrame>
         <p:nvGraphicFramePr>
-          <p:cNvPr id="8" name="Chart 0" descr=""/>
+          <p:cNvPr id="8" name="Chart 0"/>
           <p:cNvGraphicFramePr/>
           <p:nvPr/>
         </p:nvGraphicFramePr>
@@ -5238,9 +5086,9 @@
           <a:off x="4709160" y="1645920"/>
           <a:ext cx="6830568" cy="2880360"/>
         </p:xfrm>
-        <a:graphic xmlns:a="http://schemas.openxmlformats.org/drawingml/2006/main">
+        <a:graphic>
           <a:graphicData uri="http://schemas.openxmlformats.org/drawingml/2006/chart">
-            <c:chart xmlns:c="http://schemas.openxmlformats.org/drawingml/2006/chart" r:id="rId1"/>
+            <c:chart xmlns:c="http://schemas.openxmlformats.org/drawingml/2006/chart" xmlns:r="http://schemas.openxmlformats.org/officeDocument/2006/relationships" r:id="rId3"/>
           </a:graphicData>
         </a:graphic>
       </p:graphicFrame>
@@ -5265,7 +5113,7 @@
           <a:bodyPr wrap="square" lIns="0" tIns="0" rIns="0" bIns="0" rtlCol="0" anchor="ctr"/>
           <a:lstStyle/>
           <a:p>
-            <a:pPr indent="0" marL="0">
+            <a:pPr marL="0" indent="0">
               <a:buNone/>
             </a:pPr>
             <a:r>
@@ -5309,6 +5157,13 @@
             <a:prstDash val="solid"/>
           </a:ln>
         </p:spPr>
+        <p:txBody>
+          <a:bodyPr/>
+          <a:lstStyle/>
+          <a:p>
+            <a:endParaRPr lang="en-US"/>
+          </a:p>
+        </p:txBody>
       </p:sp>
       <p:sp>
         <p:nvSpPr>
@@ -5331,7 +5186,7 @@
           <a:bodyPr wrap="square" lIns="0" tIns="0" rIns="0" bIns="0" rtlCol="0" anchor="ctr"/>
           <a:lstStyle/>
           <a:p>
-            <a:pPr algn="ctr" indent="0" marL="0">
+            <a:pPr marL="0" indent="0" algn="ctr">
               <a:buNone/>
             </a:pPr>
             <a:r>
@@ -5370,7 +5225,7 @@
           <a:bodyPr wrap="square" lIns="0" tIns="0" rIns="0" bIns="0" rtlCol="0" anchor="ctr"/>
           <a:lstStyle/>
           <a:p>
-            <a:pPr algn="ctr" indent="0" marL="0">
+            <a:pPr marL="0" indent="0" algn="ctr">
               <a:buNone/>
             </a:pPr>
             <a:r>
@@ -5414,6 +5269,13 @@
             <a:prstDash val="solid"/>
           </a:ln>
         </p:spPr>
+        <p:txBody>
+          <a:bodyPr/>
+          <a:lstStyle/>
+          <a:p>
+            <a:endParaRPr lang="en-US"/>
+          </a:p>
+        </p:txBody>
       </p:sp>
       <p:sp>
         <p:nvSpPr>
@@ -5436,7 +5298,7 @@
           <a:bodyPr wrap="square" lIns="0" tIns="0" rIns="0" bIns="0" rtlCol="0" anchor="ctr"/>
           <a:lstStyle/>
           <a:p>
-            <a:pPr algn="ctr" indent="0" marL="0">
+            <a:pPr marL="0" indent="0" algn="ctr">
               <a:buNone/>
             </a:pPr>
             <a:r>
@@ -5475,7 +5337,7 @@
           <a:bodyPr wrap="square" lIns="0" tIns="0" rIns="0" bIns="0" rtlCol="0" anchor="ctr"/>
           <a:lstStyle/>
           <a:p>
-            <a:pPr algn="ctr" indent="0" marL="0">
+            <a:pPr marL="0" indent="0" algn="ctr">
               <a:buNone/>
             </a:pPr>
             <a:r>
@@ -5514,7 +5376,7 @@
           <a:bodyPr wrap="square" lIns="0" tIns="0" rIns="0" bIns="0" rtlCol="0" anchor="ctr"/>
           <a:lstStyle/>
           <a:p>
-            <a:pPr indent="0" marL="0">
+            <a:pPr marL="0" indent="0">
               <a:buNone/>
             </a:pPr>
             <a:r>
@@ -5528,9 +5390,6 @@
               </a:rPr>
               <a:t>At our 16 events a moderate effect is caught 15% of the time. </a:t>
             </a:r>
-            <a:pPr indent="0" marL="0">
-              <a:buNone/>
-            </a:pPr>
             <a:r>
               <a:rPr lang="en-US" sz="1300" dirty="0">
                 <a:solidFill>
@@ -5562,6 +5421,7 @@
         <a:solidFill>
           <a:srgbClr val="FFFFFF"/>
         </a:solidFill>
+        <a:effectLst/>
       </p:bgPr>
     </p:bg>
     <p:spTree>
@@ -5599,11 +5459,11 @@
           <a:bodyPr wrap="square" lIns="0" tIns="0" rIns="0" bIns="0" rtlCol="0" anchor="ctr"/>
           <a:lstStyle/>
           <a:p>
-            <a:pPr indent="0" marL="0">
-              <a:buNone/>
-            </a:pPr>
-            <a:r>
-              <a:rPr lang="en-US" sz="1200" b="1" spc="160" kern="0" dirty="0">
+            <a:pPr marL="0" indent="0">
+              <a:buNone/>
+            </a:pPr>
+            <a:r>
+              <a:rPr lang="en-US" sz="1200" b="1" kern="0" spc="160" dirty="0">
                 <a:solidFill>
                   <a:srgbClr val="0D9488"/>
                 </a:solidFill>
@@ -5638,7 +5498,7 @@
           <a:bodyPr wrap="square" lIns="0" tIns="0" rIns="0" bIns="0" rtlCol="0" anchor="ctr"/>
           <a:lstStyle/>
           <a:p>
-            <a:pPr indent="0" marL="0">
+            <a:pPr marL="0" indent="0">
               <a:buNone/>
             </a:pPr>
             <a:r>
@@ -5680,6 +5540,13 @@
             <a:prstDash val="solid"/>
           </a:ln>
         </p:spPr>
+        <p:txBody>
+          <a:bodyPr/>
+          <a:lstStyle/>
+          <a:p>
+            <a:endParaRPr lang="en-US"/>
+          </a:p>
+        </p:txBody>
       </p:sp>
       <p:sp>
         <p:nvSpPr>
@@ -5702,7 +5569,7 @@
           <a:bodyPr wrap="square" lIns="0" tIns="0" rIns="0" bIns="0" rtlCol="0" anchor="ctr"/>
           <a:lstStyle/>
           <a:p>
-            <a:pPr algn="ctr" indent="0" marL="0">
+            <a:pPr marL="0" indent="0" algn="ctr">
               <a:buNone/>
             </a:pPr>
             <a:r>
@@ -5741,7 +5608,7 @@
           <a:bodyPr wrap="square" lIns="0" tIns="0" rIns="0" bIns="0" rtlCol="0" anchor="ctr"/>
           <a:lstStyle/>
           <a:p>
-            <a:pPr indent="0" marL="0">
+            <a:pPr marL="0" indent="0">
               <a:buNone/>
             </a:pPr>
             <a:r>
@@ -5780,7 +5647,7 @@
           <a:bodyPr wrap="square" lIns="0" tIns="0" rIns="0" bIns="0" rtlCol="0" anchor="ctr"/>
           <a:lstStyle/>
           <a:p>
-            <a:pPr indent="0" marL="0">
+            <a:pPr marL="0" indent="0">
               <a:buNone/>
             </a:pPr>
             <a:r>
@@ -5822,6 +5689,13 @@
             <a:prstDash val="solid"/>
           </a:ln>
         </p:spPr>
+        <p:txBody>
+          <a:bodyPr/>
+          <a:lstStyle/>
+          <a:p>
+            <a:endParaRPr lang="en-US"/>
+          </a:p>
+        </p:txBody>
       </p:sp>
       <p:sp>
         <p:nvSpPr>
@@ -5844,7 +5718,7 @@
           <a:bodyPr wrap="square" lIns="0" tIns="0" rIns="0" bIns="0" rtlCol="0" anchor="ctr"/>
           <a:lstStyle/>
           <a:p>
-            <a:pPr algn="ctr" indent="0" marL="0">
+            <a:pPr marL="0" indent="0" algn="ctr">
               <a:buNone/>
             </a:pPr>
             <a:r>
@@ -5883,7 +5757,7 @@
           <a:bodyPr wrap="square" lIns="0" tIns="0" rIns="0" bIns="0" rtlCol="0" anchor="ctr"/>
           <a:lstStyle/>
           <a:p>
-            <a:pPr indent="0" marL="0">
+            <a:pPr marL="0" indent="0">
               <a:buNone/>
             </a:pPr>
             <a:r>
@@ -5922,7 +5796,7 @@
           <a:bodyPr wrap="square" lIns="0" tIns="0" rIns="0" bIns="0" rtlCol="0" anchor="ctr"/>
           <a:lstStyle/>
           <a:p>
-            <a:pPr indent="0" marL="0">
+            <a:pPr marL="0" indent="0">
               <a:buNone/>
             </a:pPr>
             <a:r>
@@ -5964,6 +5838,13 @@
             <a:prstDash val="solid"/>
           </a:ln>
         </p:spPr>
+        <p:txBody>
+          <a:bodyPr/>
+          <a:lstStyle/>
+          <a:p>
+            <a:endParaRPr lang="en-US"/>
+          </a:p>
+        </p:txBody>
       </p:sp>
       <p:sp>
         <p:nvSpPr>
@@ -5986,7 +5867,7 @@
           <a:bodyPr wrap="square" lIns="0" tIns="0" rIns="0" bIns="0" rtlCol="0" anchor="ctr"/>
           <a:lstStyle/>
           <a:p>
-            <a:pPr algn="ctr" indent="0" marL="0">
+            <a:pPr marL="0" indent="0" algn="ctr">
               <a:buNone/>
             </a:pPr>
             <a:r>
@@ -6025,7 +5906,7 @@
           <a:bodyPr wrap="square" lIns="0" tIns="0" rIns="0" bIns="0" rtlCol="0" anchor="ctr"/>
           <a:lstStyle/>
           <a:p>
-            <a:pPr indent="0" marL="0">
+            <a:pPr marL="0" indent="0">
               <a:buNone/>
             </a:pPr>
             <a:r>
@@ -6064,7 +5945,7 @@
           <a:bodyPr wrap="square" lIns="0" tIns="0" rIns="0" bIns="0" rtlCol="0" anchor="ctr"/>
           <a:lstStyle/>
           <a:p>
-            <a:pPr indent="0" marL="0">
+            <a:pPr marL="0" indent="0">
               <a:buNone/>
             </a:pPr>
             <a:r>
@@ -6106,6 +5987,13 @@
             <a:prstDash val="solid"/>
           </a:ln>
         </p:spPr>
+        <p:txBody>
+          <a:bodyPr/>
+          <a:lstStyle/>
+          <a:p>
+            <a:endParaRPr lang="en-US"/>
+          </a:p>
+        </p:txBody>
       </p:sp>
       <p:sp>
         <p:nvSpPr>
@@ -6128,7 +6016,7 @@
           <a:bodyPr wrap="square" lIns="0" tIns="0" rIns="0" bIns="0" rtlCol="0" anchor="ctr"/>
           <a:lstStyle/>
           <a:p>
-            <a:pPr algn="ctr" indent="0" marL="0">
+            <a:pPr marL="0" indent="0" algn="ctr">
               <a:buNone/>
             </a:pPr>
             <a:r>
@@ -6167,7 +6055,7 @@
           <a:bodyPr wrap="square" lIns="0" tIns="0" rIns="0" bIns="0" rtlCol="0" anchor="ctr"/>
           <a:lstStyle/>
           <a:p>
-            <a:pPr indent="0" marL="0">
+            <a:pPr marL="0" indent="0">
               <a:buNone/>
             </a:pPr>
             <a:r>
@@ -6206,7 +6094,7 @@
           <a:bodyPr wrap="square" lIns="0" tIns="0" rIns="0" bIns="0" rtlCol="0" anchor="ctr"/>
           <a:lstStyle/>
           <a:p>
-            <a:pPr indent="0" marL="0">
+            <a:pPr marL="0" indent="0">
               <a:buNone/>
             </a:pPr>
             <a:r>
@@ -6248,6 +6136,13 @@
             <a:prstDash val="solid"/>
           </a:ln>
         </p:spPr>
+        <p:txBody>
+          <a:bodyPr/>
+          <a:lstStyle/>
+          <a:p>
+            <a:endParaRPr lang="en-US"/>
+          </a:p>
+        </p:txBody>
       </p:sp>
       <p:sp>
         <p:nvSpPr>
@@ -6270,7 +6165,7 @@
           <a:bodyPr wrap="square" lIns="0" tIns="0" rIns="0" bIns="0" rtlCol="0" anchor="ctr"/>
           <a:lstStyle/>
           <a:p>
-            <a:pPr algn="ctr" indent="0" marL="0">
+            <a:pPr marL="0" indent="0" algn="ctr">
               <a:buNone/>
             </a:pPr>
             <a:r>
@@ -6309,7 +6204,7 @@
           <a:bodyPr wrap="square" lIns="0" tIns="0" rIns="0" bIns="0" rtlCol="0" anchor="ctr"/>
           <a:lstStyle/>
           <a:p>
-            <a:pPr indent="0" marL="0">
+            <a:pPr marL="0" indent="0">
               <a:buNone/>
             </a:pPr>
             <a:r>
@@ -6348,7 +6243,7 @@
           <a:bodyPr wrap="square" lIns="0" tIns="0" rIns="0" bIns="0" rtlCol="0" anchor="ctr"/>
           <a:lstStyle/>
           <a:p>
-            <a:pPr indent="0" marL="0">
+            <a:pPr marL="0" indent="0">
               <a:buNone/>
             </a:pPr>
             <a:r>
@@ -6363,45 +6258,6 @@
               <a:t>Including the negative result on the investment source, which is a finding about alt-data coverage in its own right.</a:t>
             </a:r>
             <a:endParaRPr lang="en-US" sz="1250" dirty="0"/>
-          </a:p>
-        </p:txBody>
-      </p:sp>
-      <p:sp>
-        <p:nvSpPr>
-          <p:cNvPr id="24" name="Text 22"/>
-          <p:cNvSpPr txBox="1"/>
-          <p:nvPr/>
-        </p:nvSpPr>
-        <p:spPr>
-          <a:xfrm>
-            <a:off x="640080" y="5989320"/>
-            <a:ext cx="10881360" cy="365760"/>
-          </a:xfrm>
-          <a:prstGeom prst="rect">
-            <a:avLst/>
-          </a:prstGeom>
-          <a:noFill/>
-          <a:ln/>
-        </p:spPr>
-        <p:txBody>
-          <a:bodyPr wrap="square" lIns="0" tIns="0" rIns="0" bIns="0" rtlCol="0" anchor="ctr"/>
-          <a:lstStyle/>
-          <a:p>
-            <a:pPr indent="0" marL="0">
-              <a:buNone/>
-            </a:pPr>
-            <a:r>
-              <a:rPr lang="en-US" sz="1200" b="1" dirty="0">
-                <a:solidFill>
-                  <a:srgbClr val="D94F04"/>
-                </a:solidFill>
-                <a:latin typeface="Calibri" pitchFamily="34" charset="0"/>
-                <a:ea typeface="Calibri" pitchFamily="34" charset="-122"/>
-                <a:cs typeface="Calibri" pitchFamily="34" charset="-120"/>
-              </a:rPr>
-              <a:t>~35 seconds. Steps 1 and 2 are the critical path. Everything downstream is blocked on how many dated events we can defensibly assemble.</a:t>
-            </a:r>
-            <a:endParaRPr lang="en-US" sz="1200" dirty="0"/>
           </a:p>
         </p:txBody>
       </p:sp>
@@ -6421,6 +6277,7 @@
         <a:solidFill>
           <a:srgbClr val="0B3B38"/>
         </a:solidFill>
+        <a:effectLst/>
       </p:bgPr>
     </p:bg>
     <p:spTree>
@@ -6461,6 +6318,13 @@
             <a:prstDash val="solid"/>
           </a:ln>
         </p:spPr>
+        <p:txBody>
+          <a:bodyPr/>
+          <a:lstStyle/>
+          <a:p>
+            <a:endParaRPr lang="en-US"/>
+          </a:p>
+        </p:txBody>
       </p:sp>
       <p:sp>
         <p:nvSpPr>
@@ -6483,11 +6347,11 @@
           <a:bodyPr wrap="square" lIns="0" tIns="0" rIns="0" bIns="0" rtlCol="0" anchor="ctr"/>
           <a:lstStyle/>
           <a:p>
-            <a:pPr indent="0" marL="0">
-              <a:buNone/>
-            </a:pPr>
-            <a:r>
-              <a:rPr lang="en-US" sz="1200" b="1" spc="160" kern="0" dirty="0">
+            <a:pPr marL="0" indent="0">
+              <a:buNone/>
+            </a:pPr>
+            <a:r>
+              <a:rPr lang="en-US" sz="1200" b="1" kern="0" spc="160" dirty="0">
                 <a:solidFill>
                   <a:srgbClr val="F0A98A"/>
                 </a:solidFill>
@@ -6522,7 +6386,7 @@
           <a:bodyPr wrap="square" lIns="0" tIns="0" rIns="0" bIns="0" rtlCol="0" anchor="ctr"/>
           <a:lstStyle/>
           <a:p>
-            <a:pPr indent="0" marL="0">
+            <a:pPr marL="0" indent="0">
               <a:buNone/>
             </a:pPr>
             <a:r>
@@ -6566,6 +6430,13 @@
             <a:prstDash val="solid"/>
           </a:ln>
         </p:spPr>
+        <p:txBody>
+          <a:bodyPr/>
+          <a:lstStyle/>
+          <a:p>
+            <a:endParaRPr lang="en-US"/>
+          </a:p>
+        </p:txBody>
       </p:sp>
       <p:sp>
         <p:nvSpPr>
@@ -6588,7 +6459,7 @@
           <a:bodyPr wrap="square" lIns="0" tIns="0" rIns="0" bIns="0" rtlCol="0" anchor="ctr"/>
           <a:lstStyle/>
           <a:p>
-            <a:pPr indent="0" marL="0">
+            <a:pPr marL="0" indent="0">
               <a:buNone/>
             </a:pPr>
             <a:r>
@@ -6627,7 +6498,7 @@
           <a:bodyPr wrap="square" lIns="0" tIns="0" rIns="0" bIns="0" rtlCol="0" anchor="ctr"/>
           <a:lstStyle/>
           <a:p>
-            <a:pPr indent="0" marL="0">
+            <a:pPr marL="0" indent="0">
               <a:buNone/>
             </a:pPr>
             <a:r>
@@ -6671,6 +6542,13 @@
             <a:prstDash val="solid"/>
           </a:ln>
         </p:spPr>
+        <p:txBody>
+          <a:bodyPr/>
+          <a:lstStyle/>
+          <a:p>
+            <a:endParaRPr lang="en-US"/>
+          </a:p>
+        </p:txBody>
       </p:sp>
       <p:sp>
         <p:nvSpPr>
@@ -6693,7 +6571,7 @@
           <a:bodyPr wrap="square" lIns="0" tIns="0" rIns="0" bIns="0" rtlCol="0" anchor="ctr"/>
           <a:lstStyle/>
           <a:p>
-            <a:pPr indent="0" marL="0">
+            <a:pPr marL="0" indent="0">
               <a:buNone/>
             </a:pPr>
             <a:r>
@@ -6732,7 +6610,7 @@
           <a:bodyPr wrap="square" lIns="0" tIns="0" rIns="0" bIns="0" rtlCol="0" anchor="ctr"/>
           <a:lstStyle/>
           <a:p>
-            <a:pPr indent="0" marL="0">
+            <a:pPr marL="0" indent="0">
               <a:buNone/>
             </a:pPr>
             <a:r>
@@ -6776,6 +6654,13 @@
             <a:prstDash val="solid"/>
           </a:ln>
         </p:spPr>
+        <p:txBody>
+          <a:bodyPr/>
+          <a:lstStyle/>
+          <a:p>
+            <a:endParaRPr lang="en-US"/>
+          </a:p>
+        </p:txBody>
       </p:sp>
       <p:sp>
         <p:nvSpPr>
@@ -6798,7 +6683,7 @@
           <a:bodyPr wrap="square" lIns="0" tIns="0" rIns="0" bIns="0" rtlCol="0" anchor="ctr"/>
           <a:lstStyle/>
           <a:p>
-            <a:pPr indent="0" marL="0">
+            <a:pPr marL="0" indent="0">
               <a:buNone/>
             </a:pPr>
             <a:r>
@@ -6837,7 +6722,7 @@
           <a:bodyPr wrap="square" lIns="0" tIns="0" rIns="0" bIns="0" rtlCol="0" anchor="ctr"/>
           <a:lstStyle/>
           <a:p>
-            <a:pPr indent="0" marL="0">
+            <a:pPr marL="0" indent="0">
               <a:buNone/>
             </a:pPr>
             <a:r>
@@ -6881,6 +6766,13 @@
             <a:prstDash val="solid"/>
           </a:ln>
         </p:spPr>
+        <p:txBody>
+          <a:bodyPr/>
+          <a:lstStyle/>
+          <a:p>
+            <a:endParaRPr lang="en-US"/>
+          </a:p>
+        </p:txBody>
       </p:sp>
       <p:sp>
         <p:nvSpPr>
@@ -6903,11 +6795,11 @@
           <a:bodyPr wrap="square" lIns="0" tIns="0" rIns="0" bIns="0" rtlCol="0" anchor="ctr"/>
           <a:lstStyle/>
           <a:p>
-            <a:pPr indent="0" marL="0">
-              <a:buNone/>
-            </a:pPr>
-            <a:r>
-              <a:rPr lang="en-US" sz="1050" b="1" spc="120" kern="0" dirty="0">
+            <a:pPr marL="0" indent="0">
+              <a:buNone/>
+            </a:pPr>
+            <a:r>
+              <a:rPr lang="en-US" sz="1050" b="1" kern="0" spc="120" dirty="0">
                 <a:solidFill>
                   <a:srgbClr val="D94F04"/>
                 </a:solidFill>
@@ -7048,7 +6940,7 @@
           <a:bodyPr wrap="square" lIns="0" tIns="0" rIns="0" bIns="0" rtlCol="0" anchor="ctr"/>
           <a:lstStyle/>
           <a:p>
-            <a:pPr indent="0" marL="0">
+            <a:pPr marL="0" indent="0">
               <a:buNone/>
             </a:pPr>
             <a:r>
@@ -7087,7 +6979,7 @@
           <a:bodyPr wrap="square" lIns="0" tIns="0" rIns="0" bIns="0" rtlCol="0" anchor="ctr"/>
           <a:lstStyle/>
           <a:p>
-            <a:pPr algn="r" indent="0" marL="0">
+            <a:pPr marL="0" indent="0" algn="r">
               <a:buNone/>
             </a:pPr>
             <a:r>
@@ -7406,4 +7298,319 @@
     </a:ext>
   </a:extLst>
 </a:theme>
+</file>
+
+<file path=ppt/theme/theme2.xml><?xml version="1.0" encoding="utf-8"?>
+<a:theme xmlns:a="http://schemas.openxmlformats.org/drawingml/2006/main" name="Office Theme">
+  <a:themeElements>
+    <a:clrScheme name="Office">
+      <a:dk1>
+        <a:sysClr val="windowText" lastClr="000000"/>
+      </a:dk1>
+      <a:lt1>
+        <a:sysClr val="window" lastClr="FFFFFF"/>
+      </a:lt1>
+      <a:dk2>
+        <a:srgbClr val="0E2841"/>
+      </a:dk2>
+      <a:lt2>
+        <a:srgbClr val="E8E8E8"/>
+      </a:lt2>
+      <a:accent1>
+        <a:srgbClr val="156082"/>
+      </a:accent1>
+      <a:accent2>
+        <a:srgbClr val="E97132"/>
+      </a:accent2>
+      <a:accent3>
+        <a:srgbClr val="196B24"/>
+      </a:accent3>
+      <a:accent4>
+        <a:srgbClr val="0F9ED5"/>
+      </a:accent4>
+      <a:accent5>
+        <a:srgbClr val="A02B93"/>
+      </a:accent5>
+      <a:accent6>
+        <a:srgbClr val="4EA72E"/>
+      </a:accent6>
+      <a:hlink>
+        <a:srgbClr val="467886"/>
+      </a:hlink>
+      <a:folHlink>
+        <a:srgbClr val="96607D"/>
+      </a:folHlink>
+    </a:clrScheme>
+    <a:fontScheme name="Office">
+      <a:majorFont>
+        <a:latin typeface="Aptos Display" panose="02110004020202020204"/>
+        <a:ea typeface=""/>
+        <a:cs typeface=""/>
+        <a:font script="Jpan" typeface="游ゴシック Light"/>
+        <a:font script="Hang" typeface="맑은 고딕"/>
+        <a:font script="Hans" typeface="等线 Light"/>
+        <a:font script="Hant" typeface="新細明體"/>
+        <a:font script="Arab" typeface="Times New Roman"/>
+        <a:font script="Hebr" typeface="Times New Roman"/>
+        <a:font script="Thai" typeface="Angsana New"/>
+        <a:font script="Ethi" typeface="Nyala"/>
+        <a:font script="Beng" typeface="Vrinda"/>
+        <a:font script="Gujr" typeface="Shruti"/>
+        <a:font script="Khmr" typeface="MoolBoran"/>
+        <a:font script="Knda" typeface="Tunga"/>
+        <a:font script="Guru" typeface="Raavi"/>
+        <a:font script="Cans" typeface="Euphemia"/>
+        <a:font script="Cher" typeface="Plantagenet Cherokee"/>
+        <a:font script="Yiii" typeface="Microsoft Yi Baiti"/>
+        <a:font script="Tibt" typeface="Microsoft Himalaya"/>
+        <a:font script="Thaa" typeface="MV Boli"/>
+        <a:font script="Deva" typeface="Mangal"/>
+        <a:font script="Telu" typeface="Gautami"/>
+        <a:font script="Taml" typeface="Latha"/>
+        <a:font script="Syrc" typeface="Estrangelo Edessa"/>
+        <a:font script="Orya" typeface="Kalinga"/>
+        <a:font script="Mlym" typeface="Kartika"/>
+        <a:font script="Laoo" typeface="DokChampa"/>
+        <a:font script="Sinh" typeface="Iskoola Pota"/>
+        <a:font script="Mong" typeface="Mongolian Baiti"/>
+        <a:font script="Viet" typeface="Times New Roman"/>
+        <a:font script="Uigh" typeface="Microsoft Uighur"/>
+        <a:font script="Geor" typeface="Sylfaen"/>
+        <a:font script="Armn" typeface="Arial"/>
+        <a:font script="Bugi" typeface="Leelawadee UI"/>
+        <a:font script="Bopo" typeface="Microsoft JhengHei"/>
+        <a:font script="Java" typeface="Javanese Text"/>
+        <a:font script="Lisu" typeface="Segoe UI"/>
+        <a:font script="Mymr" typeface="Myanmar Text"/>
+        <a:font script="Nkoo" typeface="Ebrima"/>
+        <a:font script="Olck" typeface="Nirmala UI"/>
+        <a:font script="Osma" typeface="Ebrima"/>
+        <a:font script="Phag" typeface="Phagspa"/>
+        <a:font script="Syrn" typeface="Estrangelo Edessa"/>
+        <a:font script="Syrj" typeface="Estrangelo Edessa"/>
+        <a:font script="Syre" typeface="Estrangelo Edessa"/>
+        <a:font script="Sora" typeface="Nirmala UI"/>
+        <a:font script="Tale" typeface="Microsoft Tai Le"/>
+        <a:font script="Talu" typeface="Microsoft New Tai Lue"/>
+        <a:font script="Tfng" typeface="Ebrima"/>
+      </a:majorFont>
+      <a:minorFont>
+        <a:latin typeface="Aptos" panose="02110004020202020204"/>
+        <a:ea typeface=""/>
+        <a:cs typeface=""/>
+        <a:font script="Jpan" typeface="游ゴシック"/>
+        <a:font script="Hang" typeface="맑은 고딕"/>
+        <a:font script="Hans" typeface="等线"/>
+        <a:font script="Hant" typeface="新細明體"/>
+        <a:font script="Arab" typeface="Arial"/>
+        <a:font script="Hebr" typeface="Arial"/>
+        <a:font script="Thai" typeface="Cordia New"/>
+        <a:font script="Ethi" typeface="Nyala"/>
+        <a:font script="Beng" typeface="Vrinda"/>
+        <a:font script="Gujr" typeface="Shruti"/>
+        <a:font script="Khmr" typeface="DaunPenh"/>
+        <a:font script="Knda" typeface="Tunga"/>
+        <a:font script="Guru" typeface="Raavi"/>
+        <a:font script="Cans" typeface="Euphemia"/>
+        <a:font script="Cher" typeface="Plantagenet Cherokee"/>
+        <a:font script="Yiii" typeface="Microsoft Yi Baiti"/>
+        <a:font script="Tibt" typeface="Microsoft Himalaya"/>
+        <a:font script="Thaa" typeface="MV Boli"/>
+        <a:font script="Deva" typeface="Mangal"/>
+        <a:font script="Telu" typeface="Gautami"/>
+        <a:font script="Taml" typeface="Latha"/>
+        <a:font script="Syrc" typeface="Estrangelo Edessa"/>
+        <a:font script="Orya" typeface="Kalinga"/>
+        <a:font script="Mlym" typeface="Kartika"/>
+        <a:font script="Laoo" typeface="DokChampa"/>
+        <a:font script="Sinh" typeface="Iskoola Pota"/>
+        <a:font script="Mong" typeface="Mongolian Baiti"/>
+        <a:font script="Viet" typeface="Arial"/>
+        <a:font script="Uigh" typeface="Microsoft Uighur"/>
+        <a:font script="Geor" typeface="Sylfaen"/>
+        <a:font script="Armn" typeface="Arial"/>
+        <a:font script="Bugi" typeface="Leelawadee UI"/>
+        <a:font script="Bopo" typeface="Microsoft JhengHei"/>
+        <a:font script="Java" typeface="Javanese Text"/>
+        <a:font script="Lisu" typeface="Segoe UI"/>
+        <a:font script="Mymr" typeface="Myanmar Text"/>
+        <a:font script="Nkoo" typeface="Ebrima"/>
+        <a:font script="Olck" typeface="Nirmala UI"/>
+        <a:font script="Osma" typeface="Ebrima"/>
+        <a:font script="Phag" typeface="Phagspa"/>
+        <a:font script="Syrn" typeface="Estrangelo Edessa"/>
+        <a:font script="Syrj" typeface="Estrangelo Edessa"/>
+        <a:font script="Syre" typeface="Estrangelo Edessa"/>
+        <a:font script="Sora" typeface="Nirmala UI"/>
+        <a:font script="Tale" typeface="Microsoft Tai Le"/>
+        <a:font script="Talu" typeface="Microsoft New Tai Lue"/>
+        <a:font script="Tfng" typeface="Ebrima"/>
+      </a:minorFont>
+    </a:fontScheme>
+    <a:fmtScheme name="Office">
+      <a:fillStyleLst>
+        <a:solidFill>
+          <a:schemeClr val="phClr"/>
+        </a:solidFill>
+        <a:gradFill rotWithShape="1">
+          <a:gsLst>
+            <a:gs pos="0">
+              <a:schemeClr val="phClr">
+                <a:lumMod val="110000"/>
+                <a:satMod val="105000"/>
+                <a:tint val="67000"/>
+              </a:schemeClr>
+            </a:gs>
+            <a:gs pos="50000">
+              <a:schemeClr val="phClr">
+                <a:lumMod val="105000"/>
+                <a:satMod val="103000"/>
+                <a:tint val="73000"/>
+              </a:schemeClr>
+            </a:gs>
+            <a:gs pos="100000">
+              <a:schemeClr val="phClr">
+                <a:lumMod val="105000"/>
+                <a:satMod val="109000"/>
+                <a:tint val="81000"/>
+              </a:schemeClr>
+            </a:gs>
+          </a:gsLst>
+          <a:lin ang="5400000" scaled="0"/>
+        </a:gradFill>
+        <a:gradFill rotWithShape="1">
+          <a:gsLst>
+            <a:gs pos="0">
+              <a:schemeClr val="phClr">
+                <a:satMod val="103000"/>
+                <a:lumMod val="102000"/>
+                <a:tint val="94000"/>
+              </a:schemeClr>
+            </a:gs>
+            <a:gs pos="50000">
+              <a:schemeClr val="phClr">
+                <a:satMod val="110000"/>
+                <a:lumMod val="100000"/>
+                <a:shade val="100000"/>
+              </a:schemeClr>
+            </a:gs>
+            <a:gs pos="100000">
+              <a:schemeClr val="phClr">
+                <a:lumMod val="99000"/>
+                <a:satMod val="120000"/>
+                <a:shade val="78000"/>
+              </a:schemeClr>
+            </a:gs>
+          </a:gsLst>
+          <a:lin ang="5400000" scaled="0"/>
+        </a:gradFill>
+      </a:fillStyleLst>
+      <a:lnStyleLst>
+        <a:ln w="12700" cap="flat" cmpd="sng" algn="ctr">
+          <a:solidFill>
+            <a:schemeClr val="phClr"/>
+          </a:solidFill>
+          <a:prstDash val="solid"/>
+          <a:miter lim="800000"/>
+        </a:ln>
+        <a:ln w="19050" cap="flat" cmpd="sng" algn="ctr">
+          <a:solidFill>
+            <a:schemeClr val="phClr"/>
+          </a:solidFill>
+          <a:prstDash val="solid"/>
+          <a:miter lim="800000"/>
+        </a:ln>
+        <a:ln w="25400" cap="flat" cmpd="sng" algn="ctr">
+          <a:solidFill>
+            <a:schemeClr val="phClr"/>
+          </a:solidFill>
+          <a:prstDash val="solid"/>
+          <a:miter lim="800000"/>
+        </a:ln>
+      </a:lnStyleLst>
+      <a:effectStyleLst>
+        <a:effectStyle>
+          <a:effectLst/>
+        </a:effectStyle>
+        <a:effectStyle>
+          <a:effectLst/>
+        </a:effectStyle>
+        <a:effectStyle>
+          <a:effectLst>
+            <a:outerShdw blurRad="57150" dist="19050" dir="5400000" algn="ctr" rotWithShape="0">
+              <a:srgbClr val="000000">
+                <a:alpha val="63000"/>
+              </a:srgbClr>
+            </a:outerShdw>
+          </a:effectLst>
+        </a:effectStyle>
+      </a:effectStyleLst>
+      <a:bgFillStyleLst>
+        <a:solidFill>
+          <a:schemeClr val="phClr"/>
+        </a:solidFill>
+        <a:solidFill>
+          <a:schemeClr val="phClr">
+            <a:tint val="95000"/>
+            <a:satMod val="170000"/>
+          </a:schemeClr>
+        </a:solidFill>
+        <a:gradFill rotWithShape="1">
+          <a:gsLst>
+            <a:gs pos="0">
+              <a:schemeClr val="phClr">
+                <a:tint val="93000"/>
+                <a:satMod val="150000"/>
+                <a:shade val="98000"/>
+                <a:lumMod val="102000"/>
+              </a:schemeClr>
+            </a:gs>
+            <a:gs pos="50000">
+              <a:schemeClr val="phClr">
+                <a:tint val="98000"/>
+                <a:satMod val="130000"/>
+                <a:shade val="90000"/>
+                <a:lumMod val="103000"/>
+              </a:schemeClr>
+            </a:gs>
+            <a:gs pos="100000">
+              <a:schemeClr val="phClr">
+                <a:shade val="63000"/>
+                <a:satMod val="120000"/>
+              </a:schemeClr>
+            </a:gs>
+          </a:gsLst>
+          <a:lin ang="5400000" scaled="0"/>
+        </a:gradFill>
+      </a:bgFillStyleLst>
+    </a:fmtScheme>
+  </a:themeElements>
+  <a:objectDefaults>
+    <a:lnDef>
+      <a:spPr/>
+      <a:bodyPr/>
+      <a:lstStyle/>
+      <a:style>
+        <a:lnRef idx="2">
+          <a:schemeClr val="accent1"/>
+        </a:lnRef>
+        <a:fillRef idx="0">
+          <a:schemeClr val="accent1"/>
+        </a:fillRef>
+        <a:effectRef idx="1">
+          <a:schemeClr val="accent1"/>
+        </a:effectRef>
+        <a:fontRef idx="minor">
+          <a:schemeClr val="tx1"/>
+        </a:fontRef>
+      </a:style>
+    </a:lnDef>
+  </a:objectDefaults>
+  <a:extraClrSchemeLst/>
+  <a:extLst>
+    <a:ext uri="{05A4C25C-085E-4340-85A3-A5531E510DB2}">
+      <thm15:themeFamily xmlns:thm15="http://schemas.microsoft.com/office/thememl/2012/main" name="Office Theme" id="{2E142A2C-CD16-42D6-873A-C26D2A0506FA}" vid="{1BDDFF52-6CD6-40A5-AB3C-68EB2F1E4D0A}"/>
+    </a:ext>
+  </a:extLst>
+</a:theme>
 </file>
--- a/presentations/ev-investment-update.pptx
+++ b/presentations/ev-investment-update.pptx
@@ -4,9 +4,6 @@
   <p:sldMasterIdLst>
     <p:sldMasterId id="2147483648" r:id="rId1"/>
   </p:sldMasterIdLst>
-  <p:notesMasterIdLst>
-    <p:notesMasterId r:id="rId9"/>
-  </p:notesMasterIdLst>
   <p:sldIdLst>
     <p:sldId id="256" r:id="rId2"/>
     <p:sldId id="257" r:id="rId3"/>
@@ -16,6 +13,9 @@
     <p:sldId id="261" r:id="rId7"/>
     <p:sldId id="262" r:id="rId8"/>
   </p:sldIdLst>
+  <p:notesMasterIdLst>
+    <p:notesMasterId r:id="rId9"/>
+  </p:notesMasterIdLst>
   <p:sldSz cx="12192000" cy="6858000"/>
   <p:notesSz cx="6858000" cy="12192000"/>
   <p:defaultTextStyle>
@@ -110,26 +110,18 @@
       </a:defRPr>
     </a:lvl9pPr>
   </p:defaultTextStyle>
-  <p:extLst>
-    <p:ext uri="{EFAFB233-063F-42B5-8137-9DF3F51BA10A}">
-      <p15:sldGuideLst xmlns:p15="http://schemas.microsoft.com/office/powerpoint/2012/main"/>
-    </p:ext>
-  </p:extLst>
 </p:presentation>
 </file>
 
 <file path=ppt/charts/chart1.xml><?xml version="1.0" encoding="utf-8"?>
-<c:chartSpace xmlns:c="http://schemas.openxmlformats.org/drawingml/2006/chart" xmlns:a="http://schemas.openxmlformats.org/drawingml/2006/main" xmlns:r="http://schemas.openxmlformats.org/officeDocument/2006/relationships" xmlns:c16r2="http://schemas.microsoft.com/office/drawing/2015/06/chart">
+<c:chartSpace xmlns:c="http://schemas.openxmlformats.org/drawingml/2006/chart" xmlns:a="http://schemas.openxmlformats.org/drawingml/2006/main" xmlns:r="http://schemas.openxmlformats.org/officeDocument/2006/relationships">
   <c:date1904 val="0"/>
-  <c:lang val="en-US"/>
   <c:roundedCorners val="1"/>
-  <c:style val="2"/>
   <c:chart>
     <c:autoTitleDeleted val="1"/>
     <c:plotArea>
       <c:layout/>
       <c:lineChart>
-        <c:grouping val="standard"/>
         <c:varyColors val="0"/>
         <c:ser>
           <c:idx val="0"/>
@@ -146,6 +138,9 @@
             </c:strRef>
           </c:tx>
           <c:spPr>
+            <a:solidFill>
+              <a:srgbClr val="0D9488"/>
+            </a:solidFill>
             <a:ln w="38100" cap="flat">
               <a:solidFill>
                 <a:srgbClr val="0D9488"/>
@@ -155,6 +150,31 @@
             </a:ln>
             <a:effectLst/>
           </c:spPr>
+          <c:invertIfNegative val="0"/>
+          <c:dLbls>
+            <c:numFmt formatCode="#,##0" sourceLinked="0"/>
+            <c:txPr>
+              <a:bodyPr/>
+              <a:lstStyle/>
+              <a:p>
+                <a:pPr>
+                  <a:defRPr b="0" i="0" strike="noStrike" sz="1200" u="none">
+                    <a:solidFill>
+                      <a:srgbClr val="000000"/>
+                    </a:solidFill>
+                    <a:latin typeface="Arial"/>
+                  </a:defRPr>
+                </a:pPr>
+              </a:p>
+            </c:txPr>
+            <c:showLegendKey val="0"/>
+            <c:showVal val="0"/>
+            <c:showCatName val="0"/>
+            <c:showSerName val="0"/>
+            <c:showPercent val="0"/>
+            <c:showBubbleSize val="0"/>
+            <c:showLeaderLines val="0"/>
+          </c:dLbls>
           <c:marker>
             <c:symbol val="circle"/>
             <c:size val="6"/>
@@ -173,36 +193,38 @@
             </c:spPr>
           </c:marker>
           <c:cat>
-            <c:strRef>
+            <c:multiLvlStrRef>
               <c:f>Sheet1!$A$2:$A$9</c:f>
-              <c:strCache>
+              <c:multiLvlStrCache>
                 <c:ptCount val="8"/>
-                <c:pt idx="0">
-                  <c:v>2018</c:v>
-                </c:pt>
-                <c:pt idx="1">
-                  <c:v>2019</c:v>
-                </c:pt>
-                <c:pt idx="2">
-                  <c:v>2020</c:v>
-                </c:pt>
-                <c:pt idx="3">
-                  <c:v>2021</c:v>
-                </c:pt>
-                <c:pt idx="4">
-                  <c:v>2022</c:v>
-                </c:pt>
-                <c:pt idx="5">
-                  <c:v>2023</c:v>
-                </c:pt>
-                <c:pt idx="6">
-                  <c:v>2024</c:v>
-                </c:pt>
-                <c:pt idx="7">
-                  <c:v>2025</c:v>
-                </c:pt>
-              </c:strCache>
-            </c:strRef>
+                <c:lvl>
+                  <c:pt idx="0">
+                    <c:v>2018</c:v>
+                  </c:pt>
+                  <c:pt idx="1">
+                    <c:v>2019</c:v>
+                  </c:pt>
+                  <c:pt idx="2">
+                    <c:v>2020</c:v>
+                  </c:pt>
+                  <c:pt idx="3">
+                    <c:v>2021</c:v>
+                  </c:pt>
+                  <c:pt idx="4">
+                    <c:v>2022</c:v>
+                  </c:pt>
+                  <c:pt idx="5">
+                    <c:v>2023</c:v>
+                  </c:pt>
+                  <c:pt idx="6">
+                    <c:v>2024</c:v>
+                  </c:pt>
+                  <c:pt idx="7">
+                    <c:v>2025</c:v>
+                  </c:pt>
+                </c:lvl>
+              </c:multiLvlStrCache>
+            </c:multiLvlStrRef>
           </c:cat>
           <c:val>
             <c:numRef>
@@ -238,24 +260,35 @@
             </c:numRef>
           </c:val>
           <c:smooth val="0"/>
-          <c:extLst>
-            <c:ext xmlns:c16="http://schemas.microsoft.com/office/drawing/2014/chart" uri="{C3380CC4-5D6E-409C-BE32-E72D297353CC}">
-              <c16:uniqueId val="{00000000-954D-E94E-9616-6099DF74D2F9}"/>
-            </c:ext>
-          </c:extLst>
         </c:ser>
         <c:dLbls>
+          <c:numFmt formatCode="#,##0" sourceLinked="0"/>
+          <c:txPr>
+            <a:bodyPr/>
+            <a:lstStyle/>
+            <a:p>
+              <a:pPr>
+                <a:defRPr b="0" i="0" strike="noStrike" sz="1200" u="none">
+                  <a:solidFill>
+                    <a:srgbClr val="000000"/>
+                  </a:solidFill>
+                  <a:latin typeface="Arial"/>
+                </a:defRPr>
+              </a:pPr>
+            </a:p>
+          </c:txPr>
           <c:showLegendKey val="0"/>
           <c:showVal val="0"/>
           <c:showCatName val="0"/>
           <c:showSerName val="0"/>
           <c:showPercent val="0"/>
           <c:showBubbleSize val="0"/>
+          <c:showLeaderLines val="0"/>
         </c:dLbls>
         <c:marker val="1"/>
-        <c:smooth val="0"/>
         <c:axId val="2094734554"/>
         <c:axId val="2094734552"/>
+        <c:axId val="2094734556"/>
       </c:lineChart>
       <c:catAx>
         <c:axId val="2094734554"/>
@@ -294,7 +327,6 @@
         <c:crosses val="autoZero"/>
         <c:auto val="1"/>
         <c:lblAlgn val="ctr"/>
-        <c:lblOffset val="100"/>
         <c:noMultiLvlLbl val="1"/>
       </c:catAx>
       <c:valAx>
@@ -356,7 +388,6 @@
     </c:plotArea>
     <c:plotVisOnly val="1"/>
     <c:dispBlanksAs val="span"/>
-    <c:showDLblsOverMax val="1"/>
   </c:chart>
   <c:spPr>
     <a:noFill/>
@@ -372,17 +403,14 @@
 </file>
 
 <file path=ppt/charts/chart2.xml><?xml version="1.0" encoding="utf-8"?>
-<c:chartSpace xmlns:c="http://schemas.openxmlformats.org/drawingml/2006/chart" xmlns:a="http://schemas.openxmlformats.org/drawingml/2006/main" xmlns:r="http://schemas.openxmlformats.org/officeDocument/2006/relationships" xmlns:c16r2="http://schemas.microsoft.com/office/drawing/2015/06/chart">
+<c:chartSpace xmlns:c="http://schemas.openxmlformats.org/drawingml/2006/chart" xmlns:a="http://schemas.openxmlformats.org/drawingml/2006/main" xmlns:r="http://schemas.openxmlformats.org/officeDocument/2006/relationships">
   <c:date1904 val="0"/>
-  <c:lang val="en-US"/>
   <c:roundedCorners val="1"/>
-  <c:style val="2"/>
   <c:chart>
     <c:autoTitleDeleted val="1"/>
     <c:plotArea>
       <c:layout/>
       <c:lineChart>
-        <c:grouping val="standard"/>
         <c:varyColors val="0"/>
         <c:ser>
           <c:idx val="0"/>
@@ -399,6 +427,9 @@
             </c:strRef>
           </c:tx>
           <c:spPr>
+            <a:solidFill>
+              <a:srgbClr val="0D9488"/>
+            </a:solidFill>
             <a:ln w="38100" cap="flat">
               <a:solidFill>
                 <a:srgbClr val="0D9488"/>
@@ -408,6 +439,31 @@
             </a:ln>
             <a:effectLst/>
           </c:spPr>
+          <c:invertIfNegative val="0"/>
+          <c:dLbls>
+            <c:numFmt formatCode="#,##0" sourceLinked="0"/>
+            <c:txPr>
+              <a:bodyPr/>
+              <a:lstStyle/>
+              <a:p>
+                <a:pPr>
+                  <a:defRPr b="0" i="0" strike="noStrike" sz="1200" u="none">
+                    <a:solidFill>
+                      <a:srgbClr val="000000"/>
+                    </a:solidFill>
+                    <a:latin typeface="Arial"/>
+                  </a:defRPr>
+                </a:pPr>
+              </a:p>
+            </c:txPr>
+            <c:showLegendKey val="0"/>
+            <c:showVal val="0"/>
+            <c:showCatName val="0"/>
+            <c:showSerName val="0"/>
+            <c:showPercent val="0"/>
+            <c:showBubbleSize val="0"/>
+            <c:showLeaderLines val="0"/>
+          </c:dLbls>
           <c:marker>
             <c:symbol val="circle"/>
             <c:size val="6"/>
@@ -426,36 +482,38 @@
             </c:spPr>
           </c:marker>
           <c:cat>
-            <c:strRef>
+            <c:multiLvlStrRef>
               <c:f>Sheet1!$A$2:$A$9</c:f>
-              <c:strCache>
+              <c:multiLvlStrCache>
                 <c:ptCount val="8"/>
-                <c:pt idx="0">
-                  <c:v>16</c:v>
-                </c:pt>
-                <c:pt idx="1">
-                  <c:v>25</c:v>
-                </c:pt>
-                <c:pt idx="2">
-                  <c:v>35</c:v>
-                </c:pt>
-                <c:pt idx="3">
-                  <c:v>50</c:v>
-                </c:pt>
-                <c:pt idx="4">
-                  <c:v>65</c:v>
-                </c:pt>
-                <c:pt idx="5">
-                  <c:v>80</c:v>
-                </c:pt>
-                <c:pt idx="6">
-                  <c:v>100</c:v>
-                </c:pt>
-                <c:pt idx="7">
-                  <c:v>120</c:v>
-                </c:pt>
-              </c:strCache>
-            </c:strRef>
+                <c:lvl>
+                  <c:pt idx="0">
+                    <c:v>16</c:v>
+                  </c:pt>
+                  <c:pt idx="1">
+                    <c:v>25</c:v>
+                  </c:pt>
+                  <c:pt idx="2">
+                    <c:v>35</c:v>
+                  </c:pt>
+                  <c:pt idx="3">
+                    <c:v>50</c:v>
+                  </c:pt>
+                  <c:pt idx="4">
+                    <c:v>65</c:v>
+                  </c:pt>
+                  <c:pt idx="5">
+                    <c:v>80</c:v>
+                  </c:pt>
+                  <c:pt idx="6">
+                    <c:v>100</c:v>
+                  </c:pt>
+                  <c:pt idx="7">
+                    <c:v>120</c:v>
+                  </c:pt>
+                </c:lvl>
+              </c:multiLvlStrCache>
+            </c:multiLvlStrRef>
           </c:cat>
           <c:val>
             <c:numRef>
@@ -491,11 +549,6 @@
             </c:numRef>
           </c:val>
           <c:smooth val="0"/>
-          <c:extLst>
-            <c:ext xmlns:c16="http://schemas.microsoft.com/office/drawing/2014/chart" uri="{C3380CC4-5D6E-409C-BE32-E72D297353CC}">
-              <c16:uniqueId val="{00000000-69EB-1F4B-9D3F-01292CE35708}"/>
-            </c:ext>
-          </c:extLst>
         </c:ser>
         <c:ser>
           <c:idx val="1"/>
@@ -512,6 +565,9 @@
             </c:strRef>
           </c:tx>
           <c:spPr>
+            <a:solidFill>
+              <a:srgbClr val="D94F04"/>
+            </a:solidFill>
             <a:ln w="38100" cap="flat">
               <a:solidFill>
                 <a:srgbClr val="D94F04"/>
@@ -521,6 +577,31 @@
             </a:ln>
             <a:effectLst/>
           </c:spPr>
+          <c:invertIfNegative val="0"/>
+          <c:dLbls>
+            <c:numFmt formatCode="#,##0" sourceLinked="0"/>
+            <c:txPr>
+              <a:bodyPr/>
+              <a:lstStyle/>
+              <a:p>
+                <a:pPr>
+                  <a:defRPr b="0" i="0" strike="noStrike" sz="1200" u="none">
+                    <a:solidFill>
+                      <a:srgbClr val="000000"/>
+                    </a:solidFill>
+                    <a:latin typeface="Arial"/>
+                  </a:defRPr>
+                </a:pPr>
+              </a:p>
+            </c:txPr>
+            <c:showLegendKey val="0"/>
+            <c:showVal val="0"/>
+            <c:showCatName val="0"/>
+            <c:showSerName val="0"/>
+            <c:showPercent val="0"/>
+            <c:showBubbleSize val="0"/>
+            <c:showLeaderLines val="0"/>
+          </c:dLbls>
           <c:marker>
             <c:symbol val="circle"/>
             <c:size val="6"/>
@@ -539,36 +620,38 @@
             </c:spPr>
           </c:marker>
           <c:cat>
-            <c:strRef>
+            <c:multiLvlStrRef>
               <c:f>Sheet1!$A$2:$A$9</c:f>
-              <c:strCache>
+              <c:multiLvlStrCache>
                 <c:ptCount val="8"/>
-                <c:pt idx="0">
-                  <c:v>16</c:v>
-                </c:pt>
-                <c:pt idx="1">
-                  <c:v>25</c:v>
-                </c:pt>
-                <c:pt idx="2">
-                  <c:v>35</c:v>
-                </c:pt>
-                <c:pt idx="3">
-                  <c:v>50</c:v>
-                </c:pt>
-                <c:pt idx="4">
-                  <c:v>65</c:v>
-                </c:pt>
-                <c:pt idx="5">
-                  <c:v>80</c:v>
-                </c:pt>
-                <c:pt idx="6">
-                  <c:v>100</c:v>
-                </c:pt>
-                <c:pt idx="7">
-                  <c:v>120</c:v>
-                </c:pt>
-              </c:strCache>
-            </c:strRef>
+                <c:lvl>
+                  <c:pt idx="0">
+                    <c:v>16</c:v>
+                  </c:pt>
+                  <c:pt idx="1">
+                    <c:v>25</c:v>
+                  </c:pt>
+                  <c:pt idx="2">
+                    <c:v>35</c:v>
+                  </c:pt>
+                  <c:pt idx="3">
+                    <c:v>50</c:v>
+                  </c:pt>
+                  <c:pt idx="4">
+                    <c:v>65</c:v>
+                  </c:pt>
+                  <c:pt idx="5">
+                    <c:v>80</c:v>
+                  </c:pt>
+                  <c:pt idx="6">
+                    <c:v>100</c:v>
+                  </c:pt>
+                  <c:pt idx="7">
+                    <c:v>120</c:v>
+                  </c:pt>
+                </c:lvl>
+              </c:multiLvlStrCache>
+            </c:multiLvlStrRef>
           </c:cat>
           <c:val>
             <c:numRef>
@@ -604,11 +687,6 @@
             </c:numRef>
           </c:val>
           <c:smooth val="0"/>
-          <c:extLst>
-            <c:ext xmlns:c16="http://schemas.microsoft.com/office/drawing/2014/chart" uri="{C3380CC4-5D6E-409C-BE32-E72D297353CC}">
-              <c16:uniqueId val="{00000001-69EB-1F4B-9D3F-01292CE35708}"/>
-            </c:ext>
-          </c:extLst>
         </c:ser>
         <c:ser>
           <c:idx val="2"/>
@@ -625,6 +703,9 @@
             </c:strRef>
           </c:tx>
           <c:spPr>
+            <a:solidFill>
+              <a:srgbClr val="7048C4"/>
+            </a:solidFill>
             <a:ln w="38100" cap="flat">
               <a:solidFill>
                 <a:srgbClr val="7048C4"/>
@@ -634,6 +715,31 @@
             </a:ln>
             <a:effectLst/>
           </c:spPr>
+          <c:invertIfNegative val="0"/>
+          <c:dLbls>
+            <c:numFmt formatCode="#,##0" sourceLinked="0"/>
+            <c:txPr>
+              <a:bodyPr/>
+              <a:lstStyle/>
+              <a:p>
+                <a:pPr>
+                  <a:defRPr b="0" i="0" strike="noStrike" sz="1200" u="none">
+                    <a:solidFill>
+                      <a:srgbClr val="000000"/>
+                    </a:solidFill>
+                    <a:latin typeface="Arial"/>
+                  </a:defRPr>
+                </a:pPr>
+              </a:p>
+            </c:txPr>
+            <c:showLegendKey val="0"/>
+            <c:showVal val="0"/>
+            <c:showCatName val="0"/>
+            <c:showSerName val="0"/>
+            <c:showPercent val="0"/>
+            <c:showBubbleSize val="0"/>
+            <c:showLeaderLines val="0"/>
+          </c:dLbls>
           <c:marker>
             <c:symbol val="circle"/>
             <c:size val="6"/>
@@ -652,36 +758,38 @@
             </c:spPr>
           </c:marker>
           <c:cat>
-            <c:strRef>
+            <c:multiLvlStrRef>
               <c:f>Sheet1!$A$2:$A$9</c:f>
-              <c:strCache>
+              <c:multiLvlStrCache>
                 <c:ptCount val="8"/>
-                <c:pt idx="0">
-                  <c:v>16</c:v>
-                </c:pt>
-                <c:pt idx="1">
-                  <c:v>25</c:v>
-                </c:pt>
-                <c:pt idx="2">
-                  <c:v>35</c:v>
-                </c:pt>
-                <c:pt idx="3">
-                  <c:v>50</c:v>
-                </c:pt>
-                <c:pt idx="4">
-                  <c:v>65</c:v>
-                </c:pt>
-                <c:pt idx="5">
-                  <c:v>80</c:v>
-                </c:pt>
-                <c:pt idx="6">
-                  <c:v>100</c:v>
-                </c:pt>
-                <c:pt idx="7">
-                  <c:v>120</c:v>
-                </c:pt>
-              </c:strCache>
-            </c:strRef>
+                <c:lvl>
+                  <c:pt idx="0">
+                    <c:v>16</c:v>
+                  </c:pt>
+                  <c:pt idx="1">
+                    <c:v>25</c:v>
+                  </c:pt>
+                  <c:pt idx="2">
+                    <c:v>35</c:v>
+                  </c:pt>
+                  <c:pt idx="3">
+                    <c:v>50</c:v>
+                  </c:pt>
+                  <c:pt idx="4">
+                    <c:v>65</c:v>
+                  </c:pt>
+                  <c:pt idx="5">
+                    <c:v>80</c:v>
+                  </c:pt>
+                  <c:pt idx="6">
+                    <c:v>100</c:v>
+                  </c:pt>
+                  <c:pt idx="7">
+                    <c:v>120</c:v>
+                  </c:pt>
+                </c:lvl>
+              </c:multiLvlStrCache>
+            </c:multiLvlStrRef>
           </c:cat>
           <c:val>
             <c:numRef>
@@ -717,24 +825,35 @@
             </c:numRef>
           </c:val>
           <c:smooth val="0"/>
-          <c:extLst>
-            <c:ext xmlns:c16="http://schemas.microsoft.com/office/drawing/2014/chart" uri="{C3380CC4-5D6E-409C-BE32-E72D297353CC}">
-              <c16:uniqueId val="{00000002-69EB-1F4B-9D3F-01292CE35708}"/>
-            </c:ext>
-          </c:extLst>
         </c:ser>
         <c:dLbls>
+          <c:numFmt formatCode="#,##0" sourceLinked="0"/>
+          <c:txPr>
+            <a:bodyPr/>
+            <a:lstStyle/>
+            <a:p>
+              <a:pPr>
+                <a:defRPr b="0" i="0" strike="noStrike" sz="1200" u="none">
+                  <a:solidFill>
+                    <a:srgbClr val="000000"/>
+                  </a:solidFill>
+                  <a:latin typeface="Arial"/>
+                </a:defRPr>
+              </a:pPr>
+            </a:p>
+          </c:txPr>
           <c:showLegendKey val="0"/>
           <c:showVal val="0"/>
           <c:showCatName val="0"/>
           <c:showSerName val="0"/>
           <c:showPercent val="0"/>
           <c:showBubbleSize val="0"/>
+          <c:showLeaderLines val="0"/>
         </c:dLbls>
         <c:marker val="1"/>
-        <c:smooth val="0"/>
         <c:axId val="2094734554"/>
         <c:axId val="2094734552"/>
+        <c:axId val="2094734556"/>
       </c:lineChart>
       <c:catAx>
         <c:axId val="2094734554"/>
@@ -773,7 +892,6 @@
         <c:crosses val="autoZero"/>
         <c:auto val="1"/>
         <c:lblAlgn val="ctr"/>
-        <c:lblOffset val="100"/>
         <c:noMultiLvlLbl val="1"/>
       </c:catAx>
       <c:valAx>
@@ -856,7 +974,6 @@
     </c:legend>
     <c:plotVisOnly val="1"/>
     <c:dispBlanksAs val="span"/>
-    <c:showDLblsOverMax val="1"/>
   </c:chart>
   <c:spPr>
     <a:noFill/>
@@ -893,10 +1010,234 @@
           <a:chExt cx="0" cy="0"/>
         </a:xfrm>
       </p:grpSpPr>
+      <p:sp>
+        <p:nvSpPr>
+          <p:cNvPr id="2" name="Header Placeholder 1"/>
+          <p:cNvSpPr>
+            <a:spLocks noGrp="1"/>
+          </p:cNvSpPr>
+          <p:nvPr>
+            <p:ph type="hdr" sz="quarter"/>
+          </p:nvPr>
+        </p:nvSpPr>
+        <p:spPr>
+          <a:xfrm>
+            <a:off x="0" y="0"/>
+            <a:ext cx="2971800" cy="458788"/>
+          </a:xfrm>
+          <a:prstGeom prst="rect">
+            <a:avLst/>
+          </a:prstGeom>
+        </p:spPr>
+        <p:txBody>
+          <a:bodyPr vert="horz" lIns="91440" tIns="45720" rIns="91440" bIns="45720" rtlCol="0"/>
+          <a:lstStyle>
+            <a:lvl1pPr algn="l">
+              <a:defRPr sz="1200"/>
+            </a:lvl1pPr>
+          </a:lstStyle>
+          <a:p>
+            <a:endParaRPr lang="en-US"/>
+          </a:p>
+        </p:txBody>
+      </p:sp>
+      <p:sp>
+        <p:nvSpPr>
+          <p:cNvPr id="3" name="Date Placeholder 2"/>
+          <p:cNvSpPr>
+            <a:spLocks noGrp="1"/>
+          </p:cNvSpPr>
+          <p:nvPr>
+            <p:ph type="dt" idx="1"/>
+          </p:nvPr>
+        </p:nvSpPr>
+        <p:spPr>
+          <a:xfrm>
+            <a:off x="3884613" y="0"/>
+            <a:ext cx="2971800" cy="458788"/>
+          </a:xfrm>
+          <a:prstGeom prst="rect">
+            <a:avLst/>
+          </a:prstGeom>
+        </p:spPr>
+        <p:txBody>
+          <a:bodyPr vert="horz" lIns="91440" tIns="45720" rIns="91440" bIns="45720" rtlCol="0"/>
+          <a:lstStyle>
+            <a:lvl1pPr algn="r">
+              <a:defRPr sz="1200"/>
+            </a:lvl1pPr>
+          </a:lstStyle>
+          <a:p>
+            <a:fld id="{5282F153-3F37-0F45-9E97-73ACFA13230C}" type="datetimeFigureOut">
+              <a:rPr lang="en-US"/>
+              <a:t>7/23/19</a:t>
+            </a:fld>
+            <a:endParaRPr lang="en-US"/>
+          </a:p>
+        </p:txBody>
+      </p:sp>
+      <p:sp>
+        <p:nvSpPr>
+          <p:cNvPr id="4" name="Slide Image Placeholder 3"/>
+          <p:cNvSpPr>
+            <a:spLocks noGrp="1" noRot="1" noChangeAspect="1"/>
+          </p:cNvSpPr>
+          <p:nvPr>
+            <p:ph type="sldImg" idx="2"/>
+          </p:nvPr>
+        </p:nvSpPr>
+        <p:spPr>
+          <a:xfrm>
+            <a:off x="685800" y="1143000"/>
+            <a:ext cx="5486400" cy="3086100"/>
+          </a:xfrm>
+          <a:prstGeom prst="rect">
+            <a:avLst/>
+          </a:prstGeom>
+          <a:noFill/>
+          <a:ln w="12700">
+            <a:solidFill>
+              <a:prstClr val="black"/>
+            </a:solidFill>
+          </a:ln>
+        </p:spPr>
+        <p:txBody>
+          <a:bodyPr vert="horz" lIns="91440" tIns="45720" rIns="91440" bIns="45720" rtlCol="0" anchor="ctr"/>
+          <a:lstStyle/>
+          <a:p>
+            <a:endParaRPr lang="en-US"/>
+          </a:p>
+        </p:txBody>
+      </p:sp>
+      <p:sp>
+        <p:nvSpPr>
+          <p:cNvPr id="5" name="Notes Placeholder 4"/>
+          <p:cNvSpPr>
+            <a:spLocks noGrp="1"/>
+          </p:cNvSpPr>
+          <p:nvPr>
+            <p:ph type="body" sz="quarter" idx="3"/>
+          </p:nvPr>
+        </p:nvSpPr>
+        <p:spPr>
+          <a:xfrm>
+            <a:off x="685800" y="4400550"/>
+            <a:ext cx="5486400" cy="3600450"/>
+          </a:xfrm>
+          <a:prstGeom prst="rect">
+            <a:avLst/>
+          </a:prstGeom>
+        </p:spPr>
+        <p:txBody>
+          <a:bodyPr vert="horz" lIns="91440" tIns="45720" rIns="91440" bIns="45720" rtlCol="0"/>
+          <a:lstStyle/>
+          <a:p>
+            <a:pPr lvl="0"/>
+            <a:r>
+              <a:rPr lang="en-US"/>
+              <a:t>Click to edit Master text styles</a:t>
+            </a:r>
+          </a:p>
+          <a:p>
+            <a:pPr lvl="1"/>
+            <a:r>
+              <a:rPr lang="en-US"/>
+              <a:t>Second level</a:t>
+            </a:r>
+          </a:p>
+          <a:p>
+            <a:pPr lvl="2"/>
+            <a:r>
+              <a:rPr lang="en-US"/>
+              <a:t>Third level</a:t>
+            </a:r>
+          </a:p>
+          <a:p>
+            <a:pPr lvl="3"/>
+            <a:r>
+              <a:rPr lang="en-US"/>
+              <a:t>Fourth level</a:t>
+            </a:r>
+          </a:p>
+          <a:p>
+            <a:pPr lvl="4"/>
+            <a:r>
+              <a:rPr lang="en-US"/>
+              <a:t>Fifth level</a:t>
+            </a:r>
+          </a:p>
+        </p:txBody>
+      </p:sp>
+      <p:sp>
+        <p:nvSpPr>
+          <p:cNvPr id="6" name="Footer Placeholder 5"/>
+          <p:cNvSpPr>
+            <a:spLocks noGrp="1"/>
+          </p:cNvSpPr>
+          <p:nvPr>
+            <p:ph type="ftr" sz="quarter" idx="4"/>
+          </p:nvPr>
+        </p:nvSpPr>
+        <p:spPr>
+          <a:xfrm>
+            <a:off x="0" y="8685213"/>
+            <a:ext cx="2971800" cy="458787"/>
+          </a:xfrm>
+          <a:prstGeom prst="rect">
+            <a:avLst/>
+          </a:prstGeom>
+        </p:spPr>
+        <p:txBody>
+          <a:bodyPr vert="horz" lIns="91440" tIns="45720" rIns="91440" bIns="45720" rtlCol="0" anchor="b"/>
+          <a:lstStyle>
+            <a:lvl1pPr algn="l">
+              <a:defRPr sz="1200"/>
+            </a:lvl1pPr>
+          </a:lstStyle>
+          <a:p>
+            <a:endParaRPr lang="en-US"/>
+          </a:p>
+        </p:txBody>
+      </p:sp>
+      <p:sp>
+        <p:nvSpPr>
+          <p:cNvPr id="7" name="Slide Number Placeholder 6"/>
+          <p:cNvSpPr>
+            <a:spLocks noGrp="1"/>
+          </p:cNvSpPr>
+          <p:nvPr>
+            <p:ph type="sldNum" sz="quarter" idx="5"/>
+          </p:nvPr>
+        </p:nvSpPr>
+        <p:spPr>
+          <a:xfrm>
+            <a:off x="3884613" y="8685213"/>
+            <a:ext cx="2971800" cy="458787"/>
+          </a:xfrm>
+          <a:prstGeom prst="rect">
+            <a:avLst/>
+          </a:prstGeom>
+        </p:spPr>
+        <p:txBody>
+          <a:bodyPr vert="horz" lIns="91440" tIns="45720" rIns="91440" bIns="45720" rtlCol="0" anchor="b"/>
+          <a:lstStyle>
+            <a:lvl1pPr algn="r">
+              <a:defRPr sz="1200"/>
+            </a:lvl1pPr>
+          </a:lstStyle>
+          <a:p>
+            <a:fld id="{CE5E9CC1-C706-0F49-92D6-E571CC5EEA8F}" type="slidenum">
+              <a:rPr lang="en-US"/>
+              <a:t>‹#›</a:t>
+            </a:fld>
+            <a:endParaRPr lang="en-US"/>
+          </a:p>
+        </p:txBody>
+      </p:sp>
     </p:spTree>
     <p:extLst>
       <p:ext uri="{BB962C8B-B14F-4D97-AF65-F5344CB8AC3E}">
-        <p14:creationId xmlns:p14="http://schemas.microsoft.com/office/powerpoint/2010/main" val="3557321841"/>
+        <p14:creationId xmlns:p14="http://schemas.microsoft.com/office/powerpoint/2010/main" val="1024086991"/>
       </p:ext>
     </p:extLst>
   </p:cSld>
@@ -1048,6 +1389,7 @@
 • Two parts: national (primary), state siting (stretch)
 • All data via the Thurro connector, India only</a:t>
             </a:r>
+            <a:endParaRPr lang="en-US" dirty="0"/>
           </a:p>
         </p:txBody>
       </p:sp>
@@ -1141,6 +1483,7 @@
 • Honest caveat: siting may be incentive-driven, as the US IRA wave suggests
 • So the project does not fail if the stretch answer is that incentives decide</a:t>
             </a:r>
+            <a:endParaRPr lang="en-US" dirty="0"/>
           </a:p>
         </p:txBody>
       </p:sp>
@@ -1234,6 +1577,7 @@
 • Do not read the orange detail aloud — point at it, defer to the backup slide
 • Substitute: 34 events hand-coded from exchange filings</a:t>
             </a:r>
+            <a:endParaRPr lang="en-US" dirty="0"/>
           </a:p>
         </p:txBody>
       </p:sp>
@@ -1330,6 +1674,7 @@
 • Lead test: +0.24 at k=0, -0.20 at k=1, +0.40 at k=2, n=39 — say plainly that is noise
 • Cut for time: the production-coverage chart (27% to 60%) — raise it only if asked</a:t>
             </a:r>
+            <a:endParaRPr lang="en-US" dirty="0"/>
           </a:p>
         </p:txBody>
       </p:sp>
@@ -1428,6 +1773,7 @@
 • Say it plainly — that is not evidence of no lead, it is an underpowered test
 • If asked: false-positive rate checks out at 1.5-2.5%, solver validated against statsmodels</a:t>
             </a:r>
+            <a:endParaRPr lang="en-US" dirty="0"/>
           </a:p>
         </p:txBody>
       </p:sp>
@@ -1513,7 +1859,7 @@
           <a:p>
             <a:r>
               <a:rPr lang="en-US" dirty="0"/>
-              <a:t>• Steps 1 and 2 are the critical path — everything else waits on them
+              <a:t>• ~35 seconds. Steps 1 and 2 are the critical path — everything else waits on them
 • Step 1: settle what counts as an announcement (board approval, press note, commissioning)
 • Step 2: scale extraction toward 45-75 dated events
 • We are at 22 dated, 16 inside the production window
@@ -1522,6 +1868,7 @@
 • Step 5: write up, including the negative result on the investment source
 • Close on this: the modelling is not the risk, the dependent variable is</a:t>
             </a:r>
+            <a:endParaRPr lang="en-US" dirty="0"/>
           </a:p>
         </p:txBody>
       </p:sp>
@@ -1616,6 +1963,7 @@
 • Q1 (a better capex feed) is highest value if the answer is yes
 • Fallback if events stay well short of 45-75: pre-register the lag, or pivot to the state panel</a:t>
             </a:r>
+            <a:endParaRPr lang="en-US" dirty="0"/>
           </a:p>
         </p:txBody>
       </p:sp>
@@ -1688,11 +2036,6 @@
 <file path=ppt/slideMasters/slideMaster1.xml><?xml version="1.0" encoding="utf-8"?>
 <p:sldMaster xmlns:a="http://schemas.openxmlformats.org/drawingml/2006/main" xmlns:r="http://schemas.openxmlformats.org/officeDocument/2006/relationships" xmlns:p="http://schemas.openxmlformats.org/presentationml/2006/main">
   <p:cSld>
-    <p:bg>
-      <p:bgRef idx="1001">
-        <a:schemeClr val="bg1"/>
-      </p:bgRef>
-    </p:bg>
     <p:spTree>
       <p:nvGrpSpPr>
         <p:cNvPr id="1" name=""/>
@@ -1975,7 +2318,6 @@
         <a:solidFill>
           <a:srgbClr val="0B3B38"/>
         </a:solidFill>
-        <a:effectLst/>
       </p:bgPr>
     </p:bg>
     <p:spTree>
@@ -2016,13 +2358,6 @@
             <a:prstDash val="solid"/>
           </a:ln>
         </p:spPr>
-        <p:txBody>
-          <a:bodyPr/>
-          <a:lstStyle/>
-          <a:p>
-            <a:endParaRPr lang="en-US"/>
-          </a:p>
-        </p:txBody>
       </p:sp>
       <p:sp>
         <p:nvSpPr>
@@ -2048,13 +2383,6 @@
             <a:prstDash val="solid"/>
           </a:ln>
         </p:spPr>
-        <p:txBody>
-          <a:bodyPr/>
-          <a:lstStyle/>
-          <a:p>
-            <a:endParaRPr lang="en-US"/>
-          </a:p>
-        </p:txBody>
       </p:sp>
       <p:sp>
         <p:nvSpPr>
@@ -2077,11 +2405,11 @@
           <a:bodyPr wrap="square" lIns="0" tIns="0" rIns="0" bIns="0" rtlCol="0" anchor="ctr"/>
           <a:lstStyle/>
           <a:p>
-            <a:pPr marL="0" indent="0">
-              <a:buNone/>
-            </a:pPr>
-            <a:r>
-              <a:rPr lang="en-US" sz="1200" b="1" kern="0" spc="180" dirty="0">
+            <a:pPr indent="0" marL="0">
+              <a:buNone/>
+            </a:pPr>
+            <a:r>
+              <a:rPr lang="en-US" sz="1200" b="1" spc="180" kern="0" dirty="0">
                 <a:solidFill>
                   <a:srgbClr val="6FD8CB"/>
                 </a:solidFill>
@@ -2116,7 +2444,7 @@
           <a:bodyPr wrap="square" lIns="0" tIns="0" rIns="0" bIns="0" rtlCol="0" anchor="ctr"/>
           <a:lstStyle/>
           <a:p>
-            <a:pPr marL="0" indent="0">
+            <a:pPr indent="0" marL="0">
               <a:lnSpc>
                 <a:spcPts val="5200"/>
               </a:lnSpc>
@@ -2136,7 +2464,7 @@
             <a:endParaRPr lang="en-US" sz="4600" dirty="0"/>
           </a:p>
           <a:p>
-            <a:pPr marL="0" indent="0">
+            <a:pPr indent="0" marL="0">
               <a:lnSpc>
                 <a:spcPts val="5200"/>
               </a:lnSpc>
@@ -2178,7 +2506,7 @@
           <a:bodyPr wrap="square" lIns="0" tIns="0" rIns="0" bIns="0" rtlCol="0" anchor="ctr"/>
           <a:lstStyle/>
           <a:p>
-            <a:pPr marL="0" indent="0">
+            <a:pPr indent="0" marL="0">
               <a:buNone/>
             </a:pPr>
             <a:r>
@@ -2217,7 +2545,7 @@
           <a:bodyPr wrap="square" lIns="0" tIns="0" rIns="0" bIns="0" rtlCol="0" anchor="ctr"/>
           <a:lstStyle/>
           <a:p>
-            <a:pPr marL="0" indent="0">
+            <a:pPr indent="0" marL="0">
               <a:buNone/>
             </a:pPr>
             <a:r>
@@ -2229,62 +2557,7 @@
                 <a:ea typeface="Calibri" pitchFamily="34" charset="-122"/>
                 <a:cs typeface="Calibri" pitchFamily="34" charset="-120"/>
               </a:rPr>
-              <a:t>Colby, </a:t>
-            </a:r>
-            <a:r>
-              <a:rPr lang="en-US" sz="1200" dirty="0" err="1">
-                <a:solidFill>
-                  <a:srgbClr val="8FB4AF"/>
-                </a:solidFill>
-                <a:latin typeface="Calibri" pitchFamily="34" charset="0"/>
-                <a:ea typeface="Calibri" pitchFamily="34" charset="-122"/>
-                <a:cs typeface="Calibri" pitchFamily="34" charset="-120"/>
-              </a:rPr>
-              <a:t>Xianyu</a:t>
-            </a:r>
-            <a:r>
-              <a:rPr lang="en-US" sz="1200" dirty="0">
-                <a:solidFill>
-                  <a:srgbClr val="8FB4AF"/>
-                </a:solidFill>
-                <a:latin typeface="Calibri" pitchFamily="34" charset="0"/>
-                <a:ea typeface="Calibri" pitchFamily="34" charset="-122"/>
-                <a:cs typeface="Calibri" pitchFamily="34" charset="-120"/>
-              </a:rPr>
-              <a:t>, </a:t>
-            </a:r>
-            <a:r>
-              <a:rPr lang="en-US" sz="1200" dirty="0" err="1">
-                <a:solidFill>
-                  <a:srgbClr val="8FB4AF"/>
-                </a:solidFill>
-                <a:latin typeface="Calibri" pitchFamily="34" charset="0"/>
-                <a:ea typeface="Calibri" pitchFamily="34" charset="-122"/>
-                <a:cs typeface="Calibri" pitchFamily="34" charset="-120"/>
-              </a:rPr>
-              <a:t>Keming</a:t>
-            </a:r>
-            <a:r>
-              <a:rPr lang="en-US" sz="1200">
-                <a:solidFill>
-                  <a:srgbClr val="8FB4AF"/>
-                </a:solidFill>
-                <a:latin typeface="Calibri" pitchFamily="34" charset="0"/>
-                <a:ea typeface="Calibri" pitchFamily="34" charset="-122"/>
-                <a:cs typeface="Calibri" pitchFamily="34" charset="-120"/>
-              </a:rPr>
-              <a:t>, Haydn ·  </a:t>
-            </a:r>
-            <a:r>
-              <a:rPr lang="en-US" sz="1200" dirty="0">
-                <a:solidFill>
-                  <a:srgbClr val="8FB4AF"/>
-                </a:solidFill>
-                <a:latin typeface="Calibri" pitchFamily="34" charset="0"/>
-                <a:ea typeface="Calibri" pitchFamily="34" charset="-122"/>
-                <a:cs typeface="Calibri" pitchFamily="34" charset="-120"/>
-              </a:rPr>
-              <a:t>Duke Pratt School of Engineering  ·  Data: Thurro connector (India)</a:t>
+              <a:t>Colby, Xianyu, Keming, Haydn ·  Duke Pratt School of Engineering  ·  Data: Thurro connector (India)</a:t>
             </a:r>
             <a:endParaRPr lang="en-US" sz="1200" dirty="0"/>
           </a:p>
@@ -2306,7 +2579,6 @@
         <a:solidFill>
           <a:srgbClr val="FFFFFF"/>
         </a:solidFill>
-        <a:effectLst/>
       </p:bgPr>
     </p:bg>
     <p:spTree>
@@ -2344,11 +2616,11 @@
           <a:bodyPr wrap="square" lIns="0" tIns="0" rIns="0" bIns="0" rtlCol="0" anchor="ctr"/>
           <a:lstStyle/>
           <a:p>
-            <a:pPr marL="0" indent="0">
-              <a:buNone/>
-            </a:pPr>
-            <a:r>
-              <a:rPr lang="en-US" sz="1200" b="1" kern="0" spc="160" dirty="0">
+            <a:pPr indent="0" marL="0">
+              <a:buNone/>
+            </a:pPr>
+            <a:r>
+              <a:rPr lang="en-US" sz="1200" b="1" spc="160" kern="0" dirty="0">
                 <a:solidFill>
                   <a:srgbClr val="0D9488"/>
                 </a:solidFill>
@@ -2383,7 +2655,7 @@
           <a:bodyPr wrap="square" lIns="0" tIns="0" rIns="0" bIns="0" rtlCol="0" anchor="ctr"/>
           <a:lstStyle/>
           <a:p>
-            <a:pPr marL="0" indent="0">
+            <a:pPr indent="0" marL="0">
               <a:buNone/>
             </a:pPr>
             <a:r>
@@ -2422,7 +2694,7 @@
           <a:bodyPr wrap="square" lIns="0" tIns="0" rIns="0" bIns="0" rtlCol="0" anchor="ctr"/>
           <a:lstStyle/>
           <a:p>
-            <a:pPr marL="0" indent="0">
+            <a:pPr indent="0" marL="0">
               <a:buNone/>
             </a:pPr>
             <a:r>
@@ -2466,13 +2738,6 @@
             <a:prstDash val="solid"/>
           </a:ln>
         </p:spPr>
-        <p:txBody>
-          <a:bodyPr/>
-          <a:lstStyle/>
-          <a:p>
-            <a:endParaRPr lang="en-US"/>
-          </a:p>
-        </p:txBody>
       </p:sp>
       <p:sp>
         <p:nvSpPr>
@@ -2498,13 +2763,6 @@
             <a:prstDash val="solid"/>
           </a:ln>
         </p:spPr>
-        <p:txBody>
-          <a:bodyPr/>
-          <a:lstStyle/>
-          <a:p>
-            <a:endParaRPr lang="en-US"/>
-          </a:p>
-        </p:txBody>
       </p:sp>
       <p:sp>
         <p:nvSpPr>
@@ -2527,11 +2785,11 @@
           <a:bodyPr wrap="square" lIns="0" tIns="0" rIns="0" bIns="0" rtlCol="0" anchor="ctr"/>
           <a:lstStyle/>
           <a:p>
-            <a:pPr marL="0" indent="0">
-              <a:buNone/>
-            </a:pPr>
-            <a:r>
-              <a:rPr lang="en-US" sz="1100" b="1" kern="0" spc="140" dirty="0">
+            <a:pPr indent="0" marL="0">
+              <a:buNone/>
+            </a:pPr>
+            <a:r>
+              <a:rPr lang="en-US" sz="1100" b="1" spc="140" kern="0" dirty="0">
                 <a:solidFill>
                   <a:srgbClr val="0D9488"/>
                 </a:solidFill>
@@ -2566,7 +2824,7 @@
           <a:bodyPr wrap="square" lIns="0" tIns="0" rIns="0" bIns="0" rtlCol="0" anchor="ctr"/>
           <a:lstStyle/>
           <a:p>
-            <a:pPr marL="0" indent="0" algn="r">
+            <a:pPr algn="r" indent="0" marL="0">
               <a:buNone/>
             </a:pPr>
             <a:r>
@@ -2605,7 +2863,7 @@
           <a:bodyPr wrap="square" lIns="0" tIns="0" rIns="0" bIns="0" rtlCol="0" anchor="ctr"/>
           <a:lstStyle/>
           <a:p>
-            <a:pPr marL="0" indent="0">
+            <a:pPr indent="0" marL="0">
               <a:buNone/>
             </a:pPr>
             <a:r>
@@ -2644,7 +2902,7 @@
           <a:bodyPr wrap="square" lIns="0" tIns="0" rIns="0" bIns="0" rtlCol="0" anchor="ctr"/>
           <a:lstStyle/>
           <a:p>
-            <a:pPr marL="0" indent="0">
+            <a:pPr indent="0" marL="0">
               <a:buNone/>
             </a:pPr>
             <a:r>
@@ -2688,13 +2946,6 @@
             <a:prstDash val="solid"/>
           </a:ln>
         </p:spPr>
-        <p:txBody>
-          <a:bodyPr/>
-          <a:lstStyle/>
-          <a:p>
-            <a:endParaRPr lang="en-US"/>
-          </a:p>
-        </p:txBody>
       </p:sp>
       <p:sp>
         <p:nvSpPr>
@@ -2720,13 +2971,6 @@
             <a:prstDash val="solid"/>
           </a:ln>
         </p:spPr>
-        <p:txBody>
-          <a:bodyPr/>
-          <a:lstStyle/>
-          <a:p>
-            <a:endParaRPr lang="en-US"/>
-          </a:p>
-        </p:txBody>
       </p:sp>
       <p:sp>
         <p:nvSpPr>
@@ -2749,11 +2993,11 @@
           <a:bodyPr wrap="square" lIns="0" tIns="0" rIns="0" bIns="0" rtlCol="0" anchor="ctr"/>
           <a:lstStyle/>
           <a:p>
-            <a:pPr marL="0" indent="0">
-              <a:buNone/>
-            </a:pPr>
-            <a:r>
-              <a:rPr lang="en-US" sz="1100" b="1" kern="0" spc="140" dirty="0">
+            <a:pPr indent="0" marL="0">
+              <a:buNone/>
+            </a:pPr>
+            <a:r>
+              <a:rPr lang="en-US" sz="1100" b="1" spc="140" kern="0" dirty="0">
                 <a:solidFill>
                   <a:srgbClr val="7048C4"/>
                 </a:solidFill>
@@ -2788,7 +3032,7 @@
           <a:bodyPr wrap="square" lIns="0" tIns="0" rIns="0" bIns="0" rtlCol="0" anchor="ctr"/>
           <a:lstStyle/>
           <a:p>
-            <a:pPr marL="0" indent="0" algn="r">
+            <a:pPr algn="r" indent="0" marL="0">
               <a:buNone/>
             </a:pPr>
             <a:r>
@@ -2827,7 +3071,7 @@
           <a:bodyPr wrap="square" lIns="0" tIns="0" rIns="0" bIns="0" rtlCol="0" anchor="ctr"/>
           <a:lstStyle/>
           <a:p>
-            <a:pPr marL="0" indent="0">
+            <a:pPr indent="0" marL="0">
               <a:buNone/>
             </a:pPr>
             <a:r>
@@ -2866,7 +3110,7 @@
           <a:bodyPr wrap="square" lIns="0" tIns="0" rIns="0" bIns="0" rtlCol="0" anchor="ctr"/>
           <a:lstStyle/>
           <a:p>
-            <a:pPr marL="0" indent="0">
+            <a:pPr indent="0" marL="0">
               <a:buNone/>
             </a:pPr>
             <a:r>
@@ -2905,7 +3149,7 @@
           <a:bodyPr wrap="square" lIns="0" tIns="0" rIns="0" bIns="0" rtlCol="0" anchor="ctr"/>
           <a:lstStyle/>
           <a:p>
-            <a:pPr marL="0" indent="0">
+            <a:pPr indent="0" marL="0">
               <a:buNone/>
             </a:pPr>
             <a:r>
@@ -2939,7 +3183,6 @@
         <a:solidFill>
           <a:srgbClr val="FFFFFF"/>
         </a:solidFill>
-        <a:effectLst/>
       </p:bgPr>
     </p:bg>
     <p:spTree>
@@ -2977,11 +3220,11 @@
           <a:bodyPr wrap="square" lIns="0" tIns="0" rIns="0" bIns="0" rtlCol="0" anchor="ctr"/>
           <a:lstStyle/>
           <a:p>
-            <a:pPr marL="0" indent="0">
-              <a:buNone/>
-            </a:pPr>
-            <a:r>
-              <a:rPr lang="en-US" sz="1200" b="1" kern="0" spc="160" dirty="0">
+            <a:pPr indent="0" marL="0">
+              <a:buNone/>
+            </a:pPr>
+            <a:r>
+              <a:rPr lang="en-US" sz="1200" b="1" spc="160" kern="0" dirty="0">
                 <a:solidFill>
                   <a:srgbClr val="0D9488"/>
                 </a:solidFill>
@@ -3016,7 +3259,7 @@
           <a:bodyPr wrap="square" lIns="0" tIns="0" rIns="0" bIns="0" rtlCol="0" anchor="ctr"/>
           <a:lstStyle/>
           <a:p>
-            <a:pPr marL="0" indent="0">
+            <a:pPr indent="0" marL="0">
               <a:buNone/>
             </a:pPr>
             <a:r>
@@ -3060,13 +3303,6 @@
             <a:prstDash val="solid"/>
           </a:ln>
         </p:spPr>
-        <p:txBody>
-          <a:bodyPr/>
-          <a:lstStyle/>
-          <a:p>
-            <a:endParaRPr lang="en-US"/>
-          </a:p>
-        </p:txBody>
       </p:sp>
       <p:sp>
         <p:nvSpPr>
@@ -3092,13 +3328,6 @@
             <a:prstDash val="solid"/>
           </a:ln>
         </p:spPr>
-        <p:txBody>
-          <a:bodyPr/>
-          <a:lstStyle/>
-          <a:p>
-            <a:endParaRPr lang="en-US"/>
-          </a:p>
-        </p:txBody>
       </p:sp>
       <p:sp>
         <p:nvSpPr>
@@ -3121,11 +3350,11 @@
           <a:bodyPr wrap="square" lIns="0" tIns="0" rIns="0" bIns="0" rtlCol="0" anchor="ctr"/>
           <a:lstStyle/>
           <a:p>
-            <a:pPr marL="0" indent="0">
-              <a:buNone/>
-            </a:pPr>
-            <a:r>
-              <a:rPr lang="en-US" sz="900" b="1" kern="0" spc="120" dirty="0">
+            <a:pPr indent="0" marL="0">
+              <a:buNone/>
+            </a:pPr>
+            <a:r>
+              <a:rPr lang="en-US" sz="900" b="1" spc="120" kern="0" dirty="0">
                 <a:solidFill>
                   <a:srgbClr val="0D9488"/>
                 </a:solidFill>
@@ -3160,7 +3389,7 @@
           <a:bodyPr wrap="square" lIns="0" tIns="0" rIns="0" bIns="0" rtlCol="0" anchor="ctr"/>
           <a:lstStyle/>
           <a:p>
-            <a:pPr marL="0" indent="0">
+            <a:pPr indent="0" marL="0">
               <a:buNone/>
             </a:pPr>
             <a:r>
@@ -3199,7 +3428,7 @@
           <a:bodyPr wrap="square" lIns="0" tIns="0" rIns="0" bIns="0" rtlCol="0" anchor="ctr"/>
           <a:lstStyle/>
           <a:p>
-            <a:pPr marL="0" indent="0">
+            <a:pPr indent="0" marL="0">
               <a:buNone/>
             </a:pPr>
             <a:r>
@@ -3238,7 +3467,7 @@
           <a:bodyPr wrap="square" lIns="0" tIns="0" rIns="0" bIns="0" rtlCol="0" anchor="ctr"/>
           <a:lstStyle/>
           <a:p>
-            <a:pPr marL="0" indent="0">
+            <a:pPr indent="0" marL="0">
               <a:buNone/>
             </a:pPr>
             <a:r>
@@ -3282,13 +3511,6 @@
             <a:prstDash val="solid"/>
           </a:ln>
         </p:spPr>
-        <p:txBody>
-          <a:bodyPr/>
-          <a:lstStyle/>
-          <a:p>
-            <a:endParaRPr lang="en-US"/>
-          </a:p>
-        </p:txBody>
       </p:sp>
       <p:sp>
         <p:nvSpPr>
@@ -3314,13 +3536,6 @@
             <a:prstDash val="solid"/>
           </a:ln>
         </p:spPr>
-        <p:txBody>
-          <a:bodyPr/>
-          <a:lstStyle/>
-          <a:p>
-            <a:endParaRPr lang="en-US"/>
-          </a:p>
-        </p:txBody>
       </p:sp>
       <p:sp>
         <p:nvSpPr>
@@ -3343,11 +3558,11 @@
           <a:bodyPr wrap="square" lIns="0" tIns="0" rIns="0" bIns="0" rtlCol="0" anchor="ctr"/>
           <a:lstStyle/>
           <a:p>
-            <a:pPr marL="0" indent="0">
-              <a:buNone/>
-            </a:pPr>
-            <a:r>
-              <a:rPr lang="en-US" sz="900" b="1" kern="0" spc="120" dirty="0">
+            <a:pPr indent="0" marL="0">
+              <a:buNone/>
+            </a:pPr>
+            <a:r>
+              <a:rPr lang="en-US" sz="900" b="1" spc="120" kern="0" dirty="0">
                 <a:solidFill>
                   <a:srgbClr val="0D9488"/>
                 </a:solidFill>
@@ -3382,7 +3597,7 @@
           <a:bodyPr wrap="square" lIns="0" tIns="0" rIns="0" bIns="0" rtlCol="0" anchor="ctr"/>
           <a:lstStyle/>
           <a:p>
-            <a:pPr marL="0" indent="0">
+            <a:pPr indent="0" marL="0">
               <a:buNone/>
             </a:pPr>
             <a:r>
@@ -3421,7 +3636,7 @@
           <a:bodyPr wrap="square" lIns="0" tIns="0" rIns="0" bIns="0" rtlCol="0" anchor="ctr"/>
           <a:lstStyle/>
           <a:p>
-            <a:pPr marL="0" indent="0">
+            <a:pPr indent="0" marL="0">
               <a:buNone/>
             </a:pPr>
             <a:r>
@@ -3460,7 +3675,7 @@
           <a:bodyPr wrap="square" lIns="0" tIns="0" rIns="0" bIns="0" rtlCol="0" anchor="ctr"/>
           <a:lstStyle/>
           <a:p>
-            <a:pPr marL="0" indent="0">
+            <a:pPr indent="0" marL="0">
               <a:buNone/>
             </a:pPr>
             <a:r>
@@ -3504,13 +3719,6 @@
             <a:prstDash val="solid"/>
           </a:ln>
         </p:spPr>
-        <p:txBody>
-          <a:bodyPr/>
-          <a:lstStyle/>
-          <a:p>
-            <a:endParaRPr lang="en-US"/>
-          </a:p>
-        </p:txBody>
       </p:sp>
       <p:sp>
         <p:nvSpPr>
@@ -3536,13 +3744,6 @@
             <a:prstDash val="solid"/>
           </a:ln>
         </p:spPr>
-        <p:txBody>
-          <a:bodyPr/>
-          <a:lstStyle/>
-          <a:p>
-            <a:endParaRPr lang="en-US"/>
-          </a:p>
-        </p:txBody>
       </p:sp>
       <p:sp>
         <p:nvSpPr>
@@ -3565,11 +3766,11 @@
           <a:bodyPr wrap="square" lIns="0" tIns="0" rIns="0" bIns="0" rtlCol="0" anchor="ctr"/>
           <a:lstStyle/>
           <a:p>
-            <a:pPr marL="0" indent="0">
-              <a:buNone/>
-            </a:pPr>
-            <a:r>
-              <a:rPr lang="en-US" sz="900" b="1" kern="0" spc="120" dirty="0">
+            <a:pPr indent="0" marL="0">
+              <a:buNone/>
+            </a:pPr>
+            <a:r>
+              <a:rPr lang="en-US" sz="900" b="1" spc="120" kern="0" dirty="0">
                 <a:solidFill>
                   <a:srgbClr val="0D9488"/>
                 </a:solidFill>
@@ -3604,7 +3805,7 @@
           <a:bodyPr wrap="square" lIns="0" tIns="0" rIns="0" bIns="0" rtlCol="0" anchor="ctr"/>
           <a:lstStyle/>
           <a:p>
-            <a:pPr marL="0" indent="0">
+            <a:pPr indent="0" marL="0">
               <a:buNone/>
             </a:pPr>
             <a:r>
@@ -3643,7 +3844,7 @@
           <a:bodyPr wrap="square" lIns="0" tIns="0" rIns="0" bIns="0" rtlCol="0" anchor="ctr"/>
           <a:lstStyle/>
           <a:p>
-            <a:pPr marL="0" indent="0">
+            <a:pPr indent="0" marL="0">
               <a:buNone/>
             </a:pPr>
             <a:r>
@@ -3682,7 +3883,7 @@
           <a:bodyPr wrap="square" lIns="0" tIns="0" rIns="0" bIns="0" rtlCol="0" anchor="ctr"/>
           <a:lstStyle/>
           <a:p>
-            <a:pPr marL="0" indent="0">
+            <a:pPr indent="0" marL="0">
               <a:buNone/>
             </a:pPr>
             <a:r>
@@ -3726,13 +3927,6 @@
             <a:prstDash val="solid"/>
           </a:ln>
         </p:spPr>
-        <p:txBody>
-          <a:bodyPr/>
-          <a:lstStyle/>
-          <a:p>
-            <a:endParaRPr lang="en-US"/>
-          </a:p>
-        </p:txBody>
       </p:sp>
       <p:sp>
         <p:nvSpPr>
@@ -3758,13 +3952,6 @@
             <a:prstDash val="solid"/>
           </a:ln>
         </p:spPr>
-        <p:txBody>
-          <a:bodyPr/>
-          <a:lstStyle/>
-          <a:p>
-            <a:endParaRPr lang="en-US"/>
-          </a:p>
-        </p:txBody>
       </p:sp>
       <p:sp>
         <p:nvSpPr>
@@ -3787,11 +3974,11 @@
           <a:bodyPr wrap="square" lIns="0" tIns="0" rIns="0" bIns="0" rtlCol="0" anchor="ctr"/>
           <a:lstStyle/>
           <a:p>
-            <a:pPr marL="0" indent="0">
-              <a:buNone/>
-            </a:pPr>
-            <a:r>
-              <a:rPr lang="en-US" sz="900" b="1" kern="0" spc="120" dirty="0">
+            <a:pPr indent="0" marL="0">
+              <a:buNone/>
+            </a:pPr>
+            <a:r>
+              <a:rPr lang="en-US" sz="900" b="1" spc="120" kern="0" dirty="0">
                 <a:solidFill>
                   <a:srgbClr val="D94F04"/>
                 </a:solidFill>
@@ -3826,7 +4013,7 @@
           <a:bodyPr wrap="square" lIns="0" tIns="0" rIns="0" bIns="0" rtlCol="0" anchor="ctr"/>
           <a:lstStyle/>
           <a:p>
-            <a:pPr marL="0" indent="0">
+            <a:pPr indent="0" marL="0">
               <a:buNone/>
             </a:pPr>
             <a:r>
@@ -3865,7 +4052,7 @@
           <a:bodyPr wrap="square" lIns="0" tIns="0" rIns="0" bIns="0" rtlCol="0" anchor="ctr"/>
           <a:lstStyle/>
           <a:p>
-            <a:pPr marL="0" indent="0">
+            <a:pPr indent="0" marL="0">
               <a:buNone/>
             </a:pPr>
             <a:r>
@@ -3904,7 +4091,7 @@
           <a:bodyPr wrap="square" lIns="0" tIns="0" rIns="0" bIns="0" rtlCol="0" anchor="ctr"/>
           <a:lstStyle/>
           <a:p>
-            <a:pPr marL="0" indent="0">
+            <a:pPr indent="0" marL="0">
               <a:buNone/>
             </a:pPr>
             <a:r>
@@ -3943,7 +4130,7 @@
           <a:bodyPr wrap="square" lIns="0" tIns="0" rIns="0" bIns="0" rtlCol="0" anchor="ctr"/>
           <a:lstStyle/>
           <a:p>
-            <a:pPr marL="0" indent="0">
+            <a:pPr indent="0" marL="0">
               <a:buNone/>
             </a:pPr>
             <a:r>
@@ -3957,6 +4144,9 @@
               </a:rPr>
               <a:t>The fourth dataset was meant to be the dependent variable. </a:t>
             </a:r>
+            <a:pPr indent="0" marL="0">
+              <a:buNone/>
+            </a:pPr>
             <a:r>
               <a:rPr lang="en-US" sz="1300" dirty="0">
                 <a:solidFill>
@@ -3988,7 +4178,6 @@
         <a:solidFill>
           <a:srgbClr val="FFFFFF"/>
         </a:solidFill>
-        <a:effectLst/>
       </p:bgPr>
     </p:bg>
     <p:spTree>
@@ -4026,11 +4215,11 @@
           <a:bodyPr wrap="square" lIns="0" tIns="0" rIns="0" bIns="0" rtlCol="0" anchor="ctr"/>
           <a:lstStyle/>
           <a:p>
-            <a:pPr marL="0" indent="0">
-              <a:buNone/>
-            </a:pPr>
-            <a:r>
-              <a:rPr lang="en-US" sz="1200" b="1" kern="0" spc="160" dirty="0">
+            <a:pPr indent="0" marL="0">
+              <a:buNone/>
+            </a:pPr>
+            <a:r>
+              <a:rPr lang="en-US" sz="1200" b="1" spc="160" kern="0" dirty="0">
                 <a:solidFill>
                   <a:srgbClr val="0D9488"/>
                 </a:solidFill>
@@ -4065,7 +4254,7 @@
           <a:bodyPr wrap="square" lIns="0" tIns="0" rIns="0" bIns="0" rtlCol="0" anchor="ctr"/>
           <a:lstStyle/>
           <a:p>
-            <a:pPr marL="0" indent="0">
+            <a:pPr indent="0" marL="0">
               <a:buNone/>
             </a:pPr>
             <a:r>
@@ -4085,7 +4274,7 @@
       </p:sp>
       <p:graphicFrame>
         <p:nvGraphicFramePr>
-          <p:cNvPr id="4" name="Chart 0"/>
+          <p:cNvPr id="4" name="Chart 0" descr=""/>
           <p:cNvGraphicFramePr/>
           <p:nvPr/>
         </p:nvGraphicFramePr>
@@ -4093,9 +4282,9 @@
           <a:off x="640080" y="1645920"/>
           <a:ext cx="5623560" cy="2926080"/>
         </p:xfrm>
-        <a:graphic>
+        <a:graphic xmlns:a="http://schemas.openxmlformats.org/drawingml/2006/main">
           <a:graphicData uri="http://schemas.openxmlformats.org/drawingml/2006/chart">
-            <c:chart xmlns:c="http://schemas.openxmlformats.org/drawingml/2006/chart" xmlns:r="http://schemas.openxmlformats.org/officeDocument/2006/relationships" r:id="rId3"/>
+            <c:chart xmlns:c="http://schemas.openxmlformats.org/drawingml/2006/chart" r:id="rId1"/>
           </a:graphicData>
         </a:graphic>
       </p:graphicFrame>
@@ -4120,7 +4309,7 @@
           <a:bodyPr wrap="square" lIns="0" tIns="0" rIns="0" bIns="0" rtlCol="0" anchor="ctr"/>
           <a:lstStyle/>
           <a:p>
-            <a:pPr marL="0" indent="0">
+            <a:pPr indent="0" marL="0">
               <a:buNone/>
             </a:pPr>
             <a:r>
@@ -4164,13 +4353,6 @@
             <a:prstDash val="solid"/>
           </a:ln>
         </p:spPr>
-        <p:txBody>
-          <a:bodyPr/>
-          <a:lstStyle/>
-          <a:p>
-            <a:endParaRPr lang="en-US"/>
-          </a:p>
-        </p:txBody>
       </p:sp>
       <p:sp>
         <p:nvSpPr>
@@ -4193,7 +4375,7 @@
           <a:bodyPr wrap="square" lIns="0" tIns="0" rIns="0" bIns="0" rtlCol="0" anchor="ctr"/>
           <a:lstStyle/>
           <a:p>
-            <a:pPr marL="0" indent="0" algn="ctr">
+            <a:pPr algn="ctr" indent="0" marL="0">
               <a:buNone/>
             </a:pPr>
             <a:r>
@@ -4232,7 +4414,7 @@
           <a:bodyPr wrap="square" lIns="0" tIns="0" rIns="0" bIns="0" rtlCol="0" anchor="ctr"/>
           <a:lstStyle/>
           <a:p>
-            <a:pPr marL="0" indent="0" algn="ctr">
+            <a:pPr algn="ctr" indent="0" marL="0">
               <a:buNone/>
             </a:pPr>
             <a:r>
@@ -4249,7 +4431,7 @@
             <a:endParaRPr lang="en-US" sz="1050" dirty="0"/>
           </a:p>
           <a:p>
-            <a:pPr marL="0" indent="0" algn="ctr">
+            <a:pPr algn="ctr" indent="0" marL="0">
               <a:buNone/>
             </a:pPr>
             <a:r>
@@ -4293,13 +4475,6 @@
             <a:prstDash val="solid"/>
           </a:ln>
         </p:spPr>
-        <p:txBody>
-          <a:bodyPr/>
-          <a:lstStyle/>
-          <a:p>
-            <a:endParaRPr lang="en-US"/>
-          </a:p>
-        </p:txBody>
       </p:sp>
       <p:sp>
         <p:nvSpPr>
@@ -4322,7 +4497,7 @@
           <a:bodyPr wrap="square" lIns="0" tIns="0" rIns="0" bIns="0" rtlCol="0" anchor="ctr"/>
           <a:lstStyle/>
           <a:p>
-            <a:pPr marL="0" indent="0" algn="ctr">
+            <a:pPr algn="ctr" indent="0" marL="0">
               <a:buNone/>
             </a:pPr>
             <a:r>
@@ -4361,7 +4536,7 @@
           <a:bodyPr wrap="square" lIns="0" tIns="0" rIns="0" bIns="0" rtlCol="0" anchor="ctr"/>
           <a:lstStyle/>
           <a:p>
-            <a:pPr marL="0" indent="0" algn="ctr">
+            <a:pPr algn="ctr" indent="0" marL="0">
               <a:buNone/>
             </a:pPr>
             <a:r>
@@ -4378,7 +4553,7 @@
             <a:endParaRPr lang="en-US" sz="1050" dirty="0"/>
           </a:p>
           <a:p>
-            <a:pPr marL="0" indent="0" algn="ctr">
+            <a:pPr algn="ctr" indent="0" marL="0">
               <a:buNone/>
             </a:pPr>
             <a:r>
@@ -4422,13 +4597,6 @@
             <a:prstDash val="solid"/>
           </a:ln>
         </p:spPr>
-        <p:txBody>
-          <a:bodyPr/>
-          <a:lstStyle/>
-          <a:p>
-            <a:endParaRPr lang="en-US"/>
-          </a:p>
-        </p:txBody>
       </p:sp>
       <p:sp>
         <p:nvSpPr>
@@ -4451,7 +4619,7 @@
           <a:bodyPr wrap="square" lIns="0" tIns="0" rIns="0" bIns="0" rtlCol="0" anchor="ctr"/>
           <a:lstStyle/>
           <a:p>
-            <a:pPr marL="0" indent="0" algn="ctr">
+            <a:pPr algn="ctr" indent="0" marL="0">
               <a:buNone/>
             </a:pPr>
             <a:r>
@@ -4490,7 +4658,7 @@
           <a:bodyPr wrap="square" lIns="0" tIns="0" rIns="0" bIns="0" rtlCol="0" anchor="ctr"/>
           <a:lstStyle/>
           <a:p>
-            <a:pPr marL="0" indent="0" algn="ctr">
+            <a:pPr algn="ctr" indent="0" marL="0">
               <a:buNone/>
             </a:pPr>
             <a:r>
@@ -4507,7 +4675,7 @@
             <a:endParaRPr lang="en-US" sz="1050" dirty="0"/>
           </a:p>
           <a:p>
-            <a:pPr marL="0" indent="0" algn="ctr">
+            <a:pPr algn="ctr" indent="0" marL="0">
               <a:buNone/>
             </a:pPr>
             <a:r>
@@ -4551,13 +4719,6 @@
             <a:prstDash val="solid"/>
           </a:ln>
         </p:spPr>
-        <p:txBody>
-          <a:bodyPr/>
-          <a:lstStyle/>
-          <a:p>
-            <a:endParaRPr lang="en-US"/>
-          </a:p>
-        </p:txBody>
       </p:sp>
       <p:sp>
         <p:nvSpPr>
@@ -4580,7 +4741,7 @@
           <a:bodyPr wrap="square" lIns="0" tIns="0" rIns="0" bIns="0" rtlCol="0" anchor="ctr"/>
           <a:lstStyle/>
           <a:p>
-            <a:pPr marL="0" indent="0" algn="ctr">
+            <a:pPr algn="ctr" indent="0" marL="0">
               <a:buNone/>
             </a:pPr>
             <a:r>
@@ -4619,7 +4780,7 @@
           <a:bodyPr wrap="square" lIns="0" tIns="0" rIns="0" bIns="0" rtlCol="0" anchor="ctr"/>
           <a:lstStyle/>
           <a:p>
-            <a:pPr marL="0" indent="0" algn="ctr">
+            <a:pPr algn="ctr" indent="0" marL="0">
               <a:buNone/>
             </a:pPr>
             <a:r>
@@ -4636,7 +4797,7 @@
             <a:endParaRPr lang="en-US" sz="1050" dirty="0"/>
           </a:p>
           <a:p>
-            <a:pPr marL="0" indent="0" algn="ctr">
+            <a:pPr algn="ctr" indent="0" marL="0">
               <a:buNone/>
             </a:pPr>
             <a:r>
@@ -4675,7 +4836,7 @@
           <a:bodyPr wrap="square" lIns="0" tIns="0" rIns="0" bIns="0" rtlCol="0" anchor="ctr"/>
           <a:lstStyle/>
           <a:p>
-            <a:pPr marL="0" indent="0">
+            <a:pPr indent="0" marL="0">
               <a:buNone/>
             </a:pPr>
             <a:r>
@@ -4689,6 +4850,9 @@
               </a:rPr>
               <a:t>Why this matters:  </a:t>
             </a:r>
+            <a:pPr indent="0" marL="0">
+              <a:buNone/>
+            </a:pPr>
             <a:r>
               <a:rPr lang="en-US" sz="1300" dirty="0">
                 <a:solidFill>
@@ -4725,7 +4889,7 @@
           <a:bodyPr wrap="square" lIns="0" tIns="0" rIns="0" bIns="0" rtlCol="0" anchor="ctr"/>
           <a:lstStyle/>
           <a:p>
-            <a:pPr marL="0" indent="0">
+            <a:pPr indent="0" marL="0">
               <a:buNone/>
             </a:pPr>
             <a:r>
@@ -4739,6 +4903,9 @@
               </a:rPr>
               <a:t>First lead test gives +0.24 at k=0, −0.20 at k=1, +0.40 at k=2. </a:t>
             </a:r>
+            <a:pPr indent="0" marL="0">
+              <a:buNone/>
+            </a:pPr>
             <a:r>
               <a:rPr lang="en-US" sz="1300" dirty="0">
                 <a:solidFill>
@@ -4770,7 +4937,6 @@
         <a:solidFill>
           <a:srgbClr val="FFFFFF"/>
         </a:solidFill>
-        <a:effectLst/>
       </p:bgPr>
     </p:bg>
     <p:spTree>
@@ -4808,11 +4974,11 @@
           <a:bodyPr wrap="square" lIns="0" tIns="0" rIns="0" bIns="0" rtlCol="0" anchor="ctr"/>
           <a:lstStyle/>
           <a:p>
-            <a:pPr marL="0" indent="0">
-              <a:buNone/>
-            </a:pPr>
-            <a:r>
-              <a:rPr lang="en-US" sz="1200" b="1" kern="0" spc="160" dirty="0">
+            <a:pPr indent="0" marL="0">
+              <a:buNone/>
+            </a:pPr>
+            <a:r>
+              <a:rPr lang="en-US" sz="1200" b="1" spc="160" kern="0" dirty="0">
                 <a:solidFill>
                   <a:srgbClr val="0D9488"/>
                 </a:solidFill>
@@ -4847,7 +5013,7 @@
           <a:bodyPr wrap="square" lIns="0" tIns="0" rIns="0" bIns="0" rtlCol="0" anchor="ctr"/>
           <a:lstStyle/>
           <a:p>
-            <a:pPr marL="0" indent="0">
+            <a:pPr indent="0" marL="0">
               <a:buNone/>
             </a:pPr>
             <a:r>
@@ -4891,13 +5057,6 @@
             <a:prstDash val="solid"/>
           </a:ln>
         </p:spPr>
-        <p:txBody>
-          <a:bodyPr/>
-          <a:lstStyle/>
-          <a:p>
-            <a:endParaRPr lang="en-US"/>
-          </a:p>
-        </p:txBody>
       </p:sp>
       <p:sp>
         <p:nvSpPr>
@@ -4923,13 +5082,6 @@
             <a:prstDash val="solid"/>
           </a:ln>
         </p:spPr>
-        <p:txBody>
-          <a:bodyPr/>
-          <a:lstStyle/>
-          <a:p>
-            <a:endParaRPr lang="en-US"/>
-          </a:p>
-        </p:txBody>
       </p:sp>
       <p:sp>
         <p:nvSpPr>
@@ -4952,7 +5104,7 @@
           <a:bodyPr wrap="square" lIns="0" tIns="0" rIns="0" bIns="0" rtlCol="0" anchor="ctr"/>
           <a:lstStyle/>
           <a:p>
-            <a:pPr marL="0" indent="0">
+            <a:pPr indent="0" marL="0">
               <a:buNone/>
             </a:pPr>
             <a:r>
@@ -5078,7 +5230,7 @@
       </p:sp>
       <p:graphicFrame>
         <p:nvGraphicFramePr>
-          <p:cNvPr id="8" name="Chart 0"/>
+          <p:cNvPr id="8" name="Chart 0" descr=""/>
           <p:cNvGraphicFramePr/>
           <p:nvPr/>
         </p:nvGraphicFramePr>
@@ -5086,9 +5238,9 @@
           <a:off x="4709160" y="1645920"/>
           <a:ext cx="6830568" cy="2880360"/>
         </p:xfrm>
-        <a:graphic>
+        <a:graphic xmlns:a="http://schemas.openxmlformats.org/drawingml/2006/main">
           <a:graphicData uri="http://schemas.openxmlformats.org/drawingml/2006/chart">
-            <c:chart xmlns:c="http://schemas.openxmlformats.org/drawingml/2006/chart" xmlns:r="http://schemas.openxmlformats.org/officeDocument/2006/relationships" r:id="rId3"/>
+            <c:chart xmlns:c="http://schemas.openxmlformats.org/drawingml/2006/chart" r:id="rId1"/>
           </a:graphicData>
         </a:graphic>
       </p:graphicFrame>
@@ -5113,7 +5265,7 @@
           <a:bodyPr wrap="square" lIns="0" tIns="0" rIns="0" bIns="0" rtlCol="0" anchor="ctr"/>
           <a:lstStyle/>
           <a:p>
-            <a:pPr marL="0" indent="0">
+            <a:pPr indent="0" marL="0">
               <a:buNone/>
             </a:pPr>
             <a:r>
@@ -5157,13 +5309,6 @@
             <a:prstDash val="solid"/>
           </a:ln>
         </p:spPr>
-        <p:txBody>
-          <a:bodyPr/>
-          <a:lstStyle/>
-          <a:p>
-            <a:endParaRPr lang="en-US"/>
-          </a:p>
-        </p:txBody>
       </p:sp>
       <p:sp>
         <p:nvSpPr>
@@ -5186,7 +5331,7 @@
           <a:bodyPr wrap="square" lIns="0" tIns="0" rIns="0" bIns="0" rtlCol="0" anchor="ctr"/>
           <a:lstStyle/>
           <a:p>
-            <a:pPr marL="0" indent="0" algn="ctr">
+            <a:pPr algn="ctr" indent="0" marL="0">
               <a:buNone/>
             </a:pPr>
             <a:r>
@@ -5225,7 +5370,7 @@
           <a:bodyPr wrap="square" lIns="0" tIns="0" rIns="0" bIns="0" rtlCol="0" anchor="ctr"/>
           <a:lstStyle/>
           <a:p>
-            <a:pPr marL="0" indent="0" algn="ctr">
+            <a:pPr algn="ctr" indent="0" marL="0">
               <a:buNone/>
             </a:pPr>
             <a:r>
@@ -5269,13 +5414,6 @@
             <a:prstDash val="solid"/>
           </a:ln>
         </p:spPr>
-        <p:txBody>
-          <a:bodyPr/>
-          <a:lstStyle/>
-          <a:p>
-            <a:endParaRPr lang="en-US"/>
-          </a:p>
-        </p:txBody>
       </p:sp>
       <p:sp>
         <p:nvSpPr>
@@ -5298,7 +5436,7 @@
           <a:bodyPr wrap="square" lIns="0" tIns="0" rIns="0" bIns="0" rtlCol="0" anchor="ctr"/>
           <a:lstStyle/>
           <a:p>
-            <a:pPr marL="0" indent="0" algn="ctr">
+            <a:pPr algn="ctr" indent="0" marL="0">
               <a:buNone/>
             </a:pPr>
             <a:r>
@@ -5337,7 +5475,7 @@
           <a:bodyPr wrap="square" lIns="0" tIns="0" rIns="0" bIns="0" rtlCol="0" anchor="ctr"/>
           <a:lstStyle/>
           <a:p>
-            <a:pPr marL="0" indent="0" algn="ctr">
+            <a:pPr algn="ctr" indent="0" marL="0">
               <a:buNone/>
             </a:pPr>
             <a:r>
@@ -5376,7 +5514,7 @@
           <a:bodyPr wrap="square" lIns="0" tIns="0" rIns="0" bIns="0" rtlCol="0" anchor="ctr"/>
           <a:lstStyle/>
           <a:p>
-            <a:pPr marL="0" indent="0">
+            <a:pPr indent="0" marL="0">
               <a:buNone/>
             </a:pPr>
             <a:r>
@@ -5390,6 +5528,9 @@
               </a:rPr>
               <a:t>At our 16 events a moderate effect is caught 15% of the time. </a:t>
             </a:r>
+            <a:pPr indent="0" marL="0">
+              <a:buNone/>
+            </a:pPr>
             <a:r>
               <a:rPr lang="en-US" sz="1300" dirty="0">
                 <a:solidFill>
@@ -5421,7 +5562,6 @@
         <a:solidFill>
           <a:srgbClr val="FFFFFF"/>
         </a:solidFill>
-        <a:effectLst/>
       </p:bgPr>
     </p:bg>
     <p:spTree>
@@ -5459,11 +5599,11 @@
           <a:bodyPr wrap="square" lIns="0" tIns="0" rIns="0" bIns="0" rtlCol="0" anchor="ctr"/>
           <a:lstStyle/>
           <a:p>
-            <a:pPr marL="0" indent="0">
-              <a:buNone/>
-            </a:pPr>
-            <a:r>
-              <a:rPr lang="en-US" sz="1200" b="1" kern="0" spc="160" dirty="0">
+            <a:pPr indent="0" marL="0">
+              <a:buNone/>
+            </a:pPr>
+            <a:r>
+              <a:rPr lang="en-US" sz="1200" b="1" spc="160" kern="0" dirty="0">
                 <a:solidFill>
                   <a:srgbClr val="0D9488"/>
                 </a:solidFill>
@@ -5498,7 +5638,7 @@
           <a:bodyPr wrap="square" lIns="0" tIns="0" rIns="0" bIns="0" rtlCol="0" anchor="ctr"/>
           <a:lstStyle/>
           <a:p>
-            <a:pPr marL="0" indent="0">
+            <a:pPr indent="0" marL="0">
               <a:buNone/>
             </a:pPr>
             <a:r>
@@ -5540,13 +5680,6 @@
             <a:prstDash val="solid"/>
           </a:ln>
         </p:spPr>
-        <p:txBody>
-          <a:bodyPr/>
-          <a:lstStyle/>
-          <a:p>
-            <a:endParaRPr lang="en-US"/>
-          </a:p>
-        </p:txBody>
       </p:sp>
       <p:sp>
         <p:nvSpPr>
@@ -5569,7 +5702,7 @@
           <a:bodyPr wrap="square" lIns="0" tIns="0" rIns="0" bIns="0" rtlCol="0" anchor="ctr"/>
           <a:lstStyle/>
           <a:p>
-            <a:pPr marL="0" indent="0" algn="ctr">
+            <a:pPr algn="ctr" indent="0" marL="0">
               <a:buNone/>
             </a:pPr>
             <a:r>
@@ -5608,7 +5741,7 @@
           <a:bodyPr wrap="square" lIns="0" tIns="0" rIns="0" bIns="0" rtlCol="0" anchor="ctr"/>
           <a:lstStyle/>
           <a:p>
-            <a:pPr marL="0" indent="0">
+            <a:pPr indent="0" marL="0">
               <a:buNone/>
             </a:pPr>
             <a:r>
@@ -5647,7 +5780,7 @@
           <a:bodyPr wrap="square" lIns="0" tIns="0" rIns="0" bIns="0" rtlCol="0" anchor="ctr"/>
           <a:lstStyle/>
           <a:p>
-            <a:pPr marL="0" indent="0">
+            <a:pPr indent="0" marL="0">
               <a:buNone/>
             </a:pPr>
             <a:r>
@@ -5689,13 +5822,6 @@
             <a:prstDash val="solid"/>
           </a:ln>
         </p:spPr>
-        <p:txBody>
-          <a:bodyPr/>
-          <a:lstStyle/>
-          <a:p>
-            <a:endParaRPr lang="en-US"/>
-          </a:p>
-        </p:txBody>
       </p:sp>
       <p:sp>
         <p:nvSpPr>
@@ -5718,7 +5844,7 @@
           <a:bodyPr wrap="square" lIns="0" tIns="0" rIns="0" bIns="0" rtlCol="0" anchor="ctr"/>
           <a:lstStyle/>
           <a:p>
-            <a:pPr marL="0" indent="0" algn="ctr">
+            <a:pPr algn="ctr" indent="0" marL="0">
               <a:buNone/>
             </a:pPr>
             <a:r>
@@ -5757,7 +5883,7 @@
           <a:bodyPr wrap="square" lIns="0" tIns="0" rIns="0" bIns="0" rtlCol="0" anchor="ctr"/>
           <a:lstStyle/>
           <a:p>
-            <a:pPr marL="0" indent="0">
+            <a:pPr indent="0" marL="0">
               <a:buNone/>
             </a:pPr>
             <a:r>
@@ -5796,7 +5922,7 @@
           <a:bodyPr wrap="square" lIns="0" tIns="0" rIns="0" bIns="0" rtlCol="0" anchor="ctr"/>
           <a:lstStyle/>
           <a:p>
-            <a:pPr marL="0" indent="0">
+            <a:pPr indent="0" marL="0">
               <a:buNone/>
             </a:pPr>
             <a:r>
@@ -5838,13 +5964,6 @@
             <a:prstDash val="solid"/>
           </a:ln>
         </p:spPr>
-        <p:txBody>
-          <a:bodyPr/>
-          <a:lstStyle/>
-          <a:p>
-            <a:endParaRPr lang="en-US"/>
-          </a:p>
-        </p:txBody>
       </p:sp>
       <p:sp>
         <p:nvSpPr>
@@ -5867,7 +5986,7 @@
           <a:bodyPr wrap="square" lIns="0" tIns="0" rIns="0" bIns="0" rtlCol="0" anchor="ctr"/>
           <a:lstStyle/>
           <a:p>
-            <a:pPr marL="0" indent="0" algn="ctr">
+            <a:pPr algn="ctr" indent="0" marL="0">
               <a:buNone/>
             </a:pPr>
             <a:r>
@@ -5906,7 +6025,7 @@
           <a:bodyPr wrap="square" lIns="0" tIns="0" rIns="0" bIns="0" rtlCol="0" anchor="ctr"/>
           <a:lstStyle/>
           <a:p>
-            <a:pPr marL="0" indent="0">
+            <a:pPr indent="0" marL="0">
               <a:buNone/>
             </a:pPr>
             <a:r>
@@ -5945,7 +6064,7 @@
           <a:bodyPr wrap="square" lIns="0" tIns="0" rIns="0" bIns="0" rtlCol="0" anchor="ctr"/>
           <a:lstStyle/>
           <a:p>
-            <a:pPr marL="0" indent="0">
+            <a:pPr indent="0" marL="0">
               <a:buNone/>
             </a:pPr>
             <a:r>
@@ -5987,13 +6106,6 @@
             <a:prstDash val="solid"/>
           </a:ln>
         </p:spPr>
-        <p:txBody>
-          <a:bodyPr/>
-          <a:lstStyle/>
-          <a:p>
-            <a:endParaRPr lang="en-US"/>
-          </a:p>
-        </p:txBody>
       </p:sp>
       <p:sp>
         <p:nvSpPr>
@@ -6016,7 +6128,7 @@
           <a:bodyPr wrap="square" lIns="0" tIns="0" rIns="0" bIns="0" rtlCol="0" anchor="ctr"/>
           <a:lstStyle/>
           <a:p>
-            <a:pPr marL="0" indent="0" algn="ctr">
+            <a:pPr algn="ctr" indent="0" marL="0">
               <a:buNone/>
             </a:pPr>
             <a:r>
@@ -6055,7 +6167,7 @@
           <a:bodyPr wrap="square" lIns="0" tIns="0" rIns="0" bIns="0" rtlCol="0" anchor="ctr"/>
           <a:lstStyle/>
           <a:p>
-            <a:pPr marL="0" indent="0">
+            <a:pPr indent="0" marL="0">
               <a:buNone/>
             </a:pPr>
             <a:r>
@@ -6094,7 +6206,7 @@
           <a:bodyPr wrap="square" lIns="0" tIns="0" rIns="0" bIns="0" rtlCol="0" anchor="ctr"/>
           <a:lstStyle/>
           <a:p>
-            <a:pPr marL="0" indent="0">
+            <a:pPr indent="0" marL="0">
               <a:buNone/>
             </a:pPr>
             <a:r>
@@ -6136,13 +6248,6 @@
             <a:prstDash val="solid"/>
           </a:ln>
         </p:spPr>
-        <p:txBody>
-          <a:bodyPr/>
-          <a:lstStyle/>
-          <a:p>
-            <a:endParaRPr lang="en-US"/>
-          </a:p>
-        </p:txBody>
       </p:sp>
       <p:sp>
         <p:nvSpPr>
@@ -6165,7 +6270,7 @@
           <a:bodyPr wrap="square" lIns="0" tIns="0" rIns="0" bIns="0" rtlCol="0" anchor="ctr"/>
           <a:lstStyle/>
           <a:p>
-            <a:pPr marL="0" indent="0" algn="ctr">
+            <a:pPr algn="ctr" indent="0" marL="0">
               <a:buNone/>
             </a:pPr>
             <a:r>
@@ -6204,7 +6309,7 @@
           <a:bodyPr wrap="square" lIns="0" tIns="0" rIns="0" bIns="0" rtlCol="0" anchor="ctr"/>
           <a:lstStyle/>
           <a:p>
-            <a:pPr marL="0" indent="0">
+            <a:pPr indent="0" marL="0">
               <a:buNone/>
             </a:pPr>
             <a:r>
@@ -6243,7 +6348,7 @@
           <a:bodyPr wrap="square" lIns="0" tIns="0" rIns="0" bIns="0" rtlCol="0" anchor="ctr"/>
           <a:lstStyle/>
           <a:p>
-            <a:pPr marL="0" indent="0">
+            <a:pPr indent="0" marL="0">
               <a:buNone/>
             </a:pPr>
             <a:r>
@@ -6277,7 +6382,6 @@
         <a:solidFill>
           <a:srgbClr val="0B3B38"/>
         </a:solidFill>
-        <a:effectLst/>
       </p:bgPr>
     </p:bg>
     <p:spTree>
@@ -6318,13 +6422,6 @@
             <a:prstDash val="solid"/>
           </a:ln>
         </p:spPr>
-        <p:txBody>
-          <a:bodyPr/>
-          <a:lstStyle/>
-          <a:p>
-            <a:endParaRPr lang="en-US"/>
-          </a:p>
-        </p:txBody>
       </p:sp>
       <p:sp>
         <p:nvSpPr>
@@ -6347,11 +6444,11 @@
           <a:bodyPr wrap="square" lIns="0" tIns="0" rIns="0" bIns="0" rtlCol="0" anchor="ctr"/>
           <a:lstStyle/>
           <a:p>
-            <a:pPr marL="0" indent="0">
-              <a:buNone/>
-            </a:pPr>
-            <a:r>
-              <a:rPr lang="en-US" sz="1200" b="1" kern="0" spc="160" dirty="0">
+            <a:pPr indent="0" marL="0">
+              <a:buNone/>
+            </a:pPr>
+            <a:r>
+              <a:rPr lang="en-US" sz="1200" b="1" spc="160" kern="0" dirty="0">
                 <a:solidFill>
                   <a:srgbClr val="F0A98A"/>
                 </a:solidFill>
@@ -6386,7 +6483,7 @@
           <a:bodyPr wrap="square" lIns="0" tIns="0" rIns="0" bIns="0" rtlCol="0" anchor="ctr"/>
           <a:lstStyle/>
           <a:p>
-            <a:pPr marL="0" indent="0">
+            <a:pPr indent="0" marL="0">
               <a:buNone/>
             </a:pPr>
             <a:r>
@@ -6430,13 +6527,6 @@
             <a:prstDash val="solid"/>
           </a:ln>
         </p:spPr>
-        <p:txBody>
-          <a:bodyPr/>
-          <a:lstStyle/>
-          <a:p>
-            <a:endParaRPr lang="en-US"/>
-          </a:p>
-        </p:txBody>
       </p:sp>
       <p:sp>
         <p:nvSpPr>
@@ -6459,7 +6549,7 @@
           <a:bodyPr wrap="square" lIns="0" tIns="0" rIns="0" bIns="0" rtlCol="0" anchor="ctr"/>
           <a:lstStyle/>
           <a:p>
-            <a:pPr marL="0" indent="0">
+            <a:pPr indent="0" marL="0">
               <a:buNone/>
             </a:pPr>
             <a:r>
@@ -6498,7 +6588,7 @@
           <a:bodyPr wrap="square" lIns="0" tIns="0" rIns="0" bIns="0" rtlCol="0" anchor="ctr"/>
           <a:lstStyle/>
           <a:p>
-            <a:pPr marL="0" indent="0">
+            <a:pPr indent="0" marL="0">
               <a:buNone/>
             </a:pPr>
             <a:r>
@@ -6542,13 +6632,6 @@
             <a:prstDash val="solid"/>
           </a:ln>
         </p:spPr>
-        <p:txBody>
-          <a:bodyPr/>
-          <a:lstStyle/>
-          <a:p>
-            <a:endParaRPr lang="en-US"/>
-          </a:p>
-        </p:txBody>
       </p:sp>
       <p:sp>
         <p:nvSpPr>
@@ -6571,7 +6654,7 @@
           <a:bodyPr wrap="square" lIns="0" tIns="0" rIns="0" bIns="0" rtlCol="0" anchor="ctr"/>
           <a:lstStyle/>
           <a:p>
-            <a:pPr marL="0" indent="0">
+            <a:pPr indent="0" marL="0">
               <a:buNone/>
             </a:pPr>
             <a:r>
@@ -6610,7 +6693,7 @@
           <a:bodyPr wrap="square" lIns="0" tIns="0" rIns="0" bIns="0" rtlCol="0" anchor="ctr"/>
           <a:lstStyle/>
           <a:p>
-            <a:pPr marL="0" indent="0">
+            <a:pPr indent="0" marL="0">
               <a:buNone/>
             </a:pPr>
             <a:r>
@@ -6654,13 +6737,6 @@
             <a:prstDash val="solid"/>
           </a:ln>
         </p:spPr>
-        <p:txBody>
-          <a:bodyPr/>
-          <a:lstStyle/>
-          <a:p>
-            <a:endParaRPr lang="en-US"/>
-          </a:p>
-        </p:txBody>
       </p:sp>
       <p:sp>
         <p:nvSpPr>
@@ -6683,7 +6759,7 @@
           <a:bodyPr wrap="square" lIns="0" tIns="0" rIns="0" bIns="0" rtlCol="0" anchor="ctr"/>
           <a:lstStyle/>
           <a:p>
-            <a:pPr marL="0" indent="0">
+            <a:pPr indent="0" marL="0">
               <a:buNone/>
             </a:pPr>
             <a:r>
@@ -6722,7 +6798,7 @@
           <a:bodyPr wrap="square" lIns="0" tIns="0" rIns="0" bIns="0" rtlCol="0" anchor="ctr"/>
           <a:lstStyle/>
           <a:p>
-            <a:pPr marL="0" indent="0">
+            <a:pPr indent="0" marL="0">
               <a:buNone/>
             </a:pPr>
             <a:r>
@@ -6766,13 +6842,6 @@
             <a:prstDash val="solid"/>
           </a:ln>
         </p:spPr>
-        <p:txBody>
-          <a:bodyPr/>
-          <a:lstStyle/>
-          <a:p>
-            <a:endParaRPr lang="en-US"/>
-          </a:p>
-        </p:txBody>
       </p:sp>
       <p:sp>
         <p:nvSpPr>
@@ -6795,11 +6864,11 @@
           <a:bodyPr wrap="square" lIns="0" tIns="0" rIns="0" bIns="0" rtlCol="0" anchor="ctr"/>
           <a:lstStyle/>
           <a:p>
-            <a:pPr marL="0" indent="0">
-              <a:buNone/>
-            </a:pPr>
-            <a:r>
-              <a:rPr lang="en-US" sz="1050" b="1" kern="0" spc="120" dirty="0">
+            <a:pPr indent="0" marL="0">
+              <a:buNone/>
+            </a:pPr>
+            <a:r>
+              <a:rPr lang="en-US" sz="1050" b="1" spc="120" kern="0" dirty="0">
                 <a:solidFill>
                   <a:srgbClr val="D94F04"/>
                 </a:solidFill>
@@ -6940,7 +7009,7 @@
           <a:bodyPr wrap="square" lIns="0" tIns="0" rIns="0" bIns="0" rtlCol="0" anchor="ctr"/>
           <a:lstStyle/>
           <a:p>
-            <a:pPr marL="0" indent="0">
+            <a:pPr indent="0" marL="0">
               <a:buNone/>
             </a:pPr>
             <a:r>
@@ -6979,7 +7048,7 @@
           <a:bodyPr wrap="square" lIns="0" tIns="0" rIns="0" bIns="0" rtlCol="0" anchor="ctr"/>
           <a:lstStyle/>
           <a:p>
-            <a:pPr marL="0" indent="0" algn="r">
+            <a:pPr algn="r" indent="0" marL="0">
               <a:buNone/>
             </a:pPr>
             <a:r>
@@ -7298,319 +7367,4 @@
     </a:ext>
   </a:extLst>
 </a:theme>
-</file>
-
-<file path=ppt/theme/theme2.xml><?xml version="1.0" encoding="utf-8"?>
-<a:theme xmlns:a="http://schemas.openxmlformats.org/drawingml/2006/main" name="Office Theme">
-  <a:themeElements>
-    <a:clrScheme name="Office">
-      <a:dk1>
-        <a:sysClr val="windowText" lastClr="000000"/>
-      </a:dk1>
-      <a:lt1>
-        <a:sysClr val="window" lastClr="FFFFFF"/>
-      </a:lt1>
-      <a:dk2>
-        <a:srgbClr val="0E2841"/>
-      </a:dk2>
-      <a:lt2>
-        <a:srgbClr val="E8E8E8"/>
-      </a:lt2>
-      <a:accent1>
-        <a:srgbClr val="156082"/>
-      </a:accent1>
-      <a:accent2>
-        <a:srgbClr val="E97132"/>
-      </a:accent2>
-      <a:accent3>
-        <a:srgbClr val="196B24"/>
-      </a:accent3>
-      <a:accent4>
-        <a:srgbClr val="0F9ED5"/>
-      </a:accent4>
-      <a:accent5>
-        <a:srgbClr val="A02B93"/>
-      </a:accent5>
-      <a:accent6>
-        <a:srgbClr val="4EA72E"/>
-      </a:accent6>
-      <a:hlink>
-        <a:srgbClr val="467886"/>
-      </a:hlink>
-      <a:folHlink>
-        <a:srgbClr val="96607D"/>
-      </a:folHlink>
-    </a:clrScheme>
-    <a:fontScheme name="Office">
-      <a:majorFont>
-        <a:latin typeface="Aptos Display" panose="02110004020202020204"/>
-        <a:ea typeface=""/>
-        <a:cs typeface=""/>
-        <a:font script="Jpan" typeface="游ゴシック Light"/>
-        <a:font script="Hang" typeface="맑은 고딕"/>
-        <a:font script="Hans" typeface="等线 Light"/>
-        <a:font script="Hant" typeface="新細明體"/>
-        <a:font script="Arab" typeface="Times New Roman"/>
-        <a:font script="Hebr" typeface="Times New Roman"/>
-        <a:font script="Thai" typeface="Angsana New"/>
-        <a:font script="Ethi" typeface="Nyala"/>
-        <a:font script="Beng" typeface="Vrinda"/>
-        <a:font script="Gujr" typeface="Shruti"/>
-        <a:font script="Khmr" typeface="MoolBoran"/>
-        <a:font script="Knda" typeface="Tunga"/>
-        <a:font script="Guru" typeface="Raavi"/>
-        <a:font script="Cans" typeface="Euphemia"/>
-        <a:font script="Cher" typeface="Plantagenet Cherokee"/>
-        <a:font script="Yiii" typeface="Microsoft Yi Baiti"/>
-        <a:font script="Tibt" typeface="Microsoft Himalaya"/>
-        <a:font script="Thaa" typeface="MV Boli"/>
-        <a:font script="Deva" typeface="Mangal"/>
-        <a:font script="Telu" typeface="Gautami"/>
-        <a:font script="Taml" typeface="Latha"/>
-        <a:font script="Syrc" typeface="Estrangelo Edessa"/>
-        <a:font script="Orya" typeface="Kalinga"/>
-        <a:font script="Mlym" typeface="Kartika"/>
-        <a:font script="Laoo" typeface="DokChampa"/>
-        <a:font script="Sinh" typeface="Iskoola Pota"/>
-        <a:font script="Mong" typeface="Mongolian Baiti"/>
-        <a:font script="Viet" typeface="Times New Roman"/>
-        <a:font script="Uigh" typeface="Microsoft Uighur"/>
-        <a:font script="Geor" typeface="Sylfaen"/>
-        <a:font script="Armn" typeface="Arial"/>
-        <a:font script="Bugi" typeface="Leelawadee UI"/>
-        <a:font script="Bopo" typeface="Microsoft JhengHei"/>
-        <a:font script="Java" typeface="Javanese Text"/>
-        <a:font script="Lisu" typeface="Segoe UI"/>
-        <a:font script="Mymr" typeface="Myanmar Text"/>
-        <a:font script="Nkoo" typeface="Ebrima"/>
-        <a:font script="Olck" typeface="Nirmala UI"/>
-        <a:font script="Osma" typeface="Ebrima"/>
-        <a:font script="Phag" typeface="Phagspa"/>
-        <a:font script="Syrn" typeface="Estrangelo Edessa"/>
-        <a:font script="Syrj" typeface="Estrangelo Edessa"/>
-        <a:font script="Syre" typeface="Estrangelo Edessa"/>
-        <a:font script="Sora" typeface="Nirmala UI"/>
-        <a:font script="Tale" typeface="Microsoft Tai Le"/>
-        <a:font script="Talu" typeface="Microsoft New Tai Lue"/>
-        <a:font script="Tfng" typeface="Ebrima"/>
-      </a:majorFont>
-      <a:minorFont>
-        <a:latin typeface="Aptos" panose="02110004020202020204"/>
-        <a:ea typeface=""/>
-        <a:cs typeface=""/>
-        <a:font script="Jpan" typeface="游ゴシック"/>
-        <a:font script="Hang" typeface="맑은 고딕"/>
-        <a:font script="Hans" typeface="等线"/>
-        <a:font script="Hant" typeface="新細明體"/>
-        <a:font script="Arab" typeface="Arial"/>
-        <a:font script="Hebr" typeface="Arial"/>
-        <a:font script="Thai" typeface="Cordia New"/>
-        <a:font script="Ethi" typeface="Nyala"/>
-        <a:font script="Beng" typeface="Vrinda"/>
-        <a:font script="Gujr" typeface="Shruti"/>
-        <a:font script="Khmr" typeface="DaunPenh"/>
-        <a:font script="Knda" typeface="Tunga"/>
-        <a:font script="Guru" typeface="Raavi"/>
-        <a:font script="Cans" typeface="Euphemia"/>
-        <a:font script="Cher" typeface="Plantagenet Cherokee"/>
-        <a:font script="Yiii" typeface="Microsoft Yi Baiti"/>
-        <a:font script="Tibt" typeface="Microsoft Himalaya"/>
-        <a:font script="Thaa" typeface="MV Boli"/>
-        <a:font script="Deva" typeface="Mangal"/>
-        <a:font script="Telu" typeface="Gautami"/>
-        <a:font script="Taml" typeface="Latha"/>
-        <a:font script="Syrc" typeface="Estrangelo Edessa"/>
-        <a:font script="Orya" typeface="Kalinga"/>
-        <a:font script="Mlym" typeface="Kartika"/>
-        <a:font script="Laoo" typeface="DokChampa"/>
-        <a:font script="Sinh" typeface="Iskoola Pota"/>
-        <a:font script="Mong" typeface="Mongolian Baiti"/>
-        <a:font script="Viet" typeface="Arial"/>
-        <a:font script="Uigh" typeface="Microsoft Uighur"/>
-        <a:font script="Geor" typeface="Sylfaen"/>
-        <a:font script="Armn" typeface="Arial"/>
-        <a:font script="Bugi" typeface="Leelawadee UI"/>
-        <a:font script="Bopo" typeface="Microsoft JhengHei"/>
-        <a:font script="Java" typeface="Javanese Text"/>
-        <a:font script="Lisu" typeface="Segoe UI"/>
-        <a:font script="Mymr" typeface="Myanmar Text"/>
-        <a:font script="Nkoo" typeface="Ebrima"/>
-        <a:font script="Olck" typeface="Nirmala UI"/>
-        <a:font script="Osma" typeface="Ebrima"/>
-        <a:font script="Phag" typeface="Phagspa"/>
-        <a:font script="Syrn" typeface="Estrangelo Edessa"/>
-        <a:font script="Syrj" typeface="Estrangelo Edessa"/>
-        <a:font script="Syre" typeface="Estrangelo Edessa"/>
-        <a:font script="Sora" typeface="Nirmala UI"/>
-        <a:font script="Tale" typeface="Microsoft Tai Le"/>
-        <a:font script="Talu" typeface="Microsoft New Tai Lue"/>
-        <a:font script="Tfng" typeface="Ebrima"/>
-      </a:minorFont>
-    </a:fontScheme>
-    <a:fmtScheme name="Office">
-      <a:fillStyleLst>
-        <a:solidFill>
-          <a:schemeClr val="phClr"/>
-        </a:solidFill>
-        <a:gradFill rotWithShape="1">
-          <a:gsLst>
-            <a:gs pos="0">
-              <a:schemeClr val="phClr">
-                <a:lumMod val="110000"/>
-                <a:satMod val="105000"/>
-                <a:tint val="67000"/>
-              </a:schemeClr>
-            </a:gs>
-            <a:gs pos="50000">
-              <a:schemeClr val="phClr">
-                <a:lumMod val="105000"/>
-                <a:satMod val="103000"/>
-                <a:tint val="73000"/>
-              </a:schemeClr>
-            </a:gs>
-            <a:gs pos="100000">
-              <a:schemeClr val="phClr">
-                <a:lumMod val="105000"/>
-                <a:satMod val="109000"/>
-                <a:tint val="81000"/>
-              </a:schemeClr>
-            </a:gs>
-          </a:gsLst>
-          <a:lin ang="5400000" scaled="0"/>
-        </a:gradFill>
-        <a:gradFill rotWithShape="1">
-          <a:gsLst>
-            <a:gs pos="0">
-              <a:schemeClr val="phClr">
-                <a:satMod val="103000"/>
-                <a:lumMod val="102000"/>
-                <a:tint val="94000"/>
-              </a:schemeClr>
-            </a:gs>
-            <a:gs pos="50000">
-              <a:schemeClr val="phClr">
-                <a:satMod val="110000"/>
-                <a:lumMod val="100000"/>
-                <a:shade val="100000"/>
-              </a:schemeClr>
-            </a:gs>
-            <a:gs pos="100000">
-              <a:schemeClr val="phClr">
-                <a:lumMod val="99000"/>
-                <a:satMod val="120000"/>
-                <a:shade val="78000"/>
-              </a:schemeClr>
-            </a:gs>
-          </a:gsLst>
-          <a:lin ang="5400000" scaled="0"/>
-        </a:gradFill>
-      </a:fillStyleLst>
-      <a:lnStyleLst>
-        <a:ln w="12700" cap="flat" cmpd="sng" algn="ctr">
-          <a:solidFill>
-            <a:schemeClr val="phClr"/>
-          </a:solidFill>
-          <a:prstDash val="solid"/>
-          <a:miter lim="800000"/>
-        </a:ln>
-        <a:ln w="19050" cap="flat" cmpd="sng" algn="ctr">
-          <a:solidFill>
-            <a:schemeClr val="phClr"/>
-          </a:solidFill>
-          <a:prstDash val="solid"/>
-          <a:miter lim="800000"/>
-        </a:ln>
-        <a:ln w="25400" cap="flat" cmpd="sng" algn="ctr">
-          <a:solidFill>
-            <a:schemeClr val="phClr"/>
-          </a:solidFill>
-          <a:prstDash val="solid"/>
-          <a:miter lim="800000"/>
-        </a:ln>
-      </a:lnStyleLst>
-      <a:effectStyleLst>
-        <a:effectStyle>
-          <a:effectLst/>
-        </a:effectStyle>
-        <a:effectStyle>
-          <a:effectLst/>
-        </a:effectStyle>
-        <a:effectStyle>
-          <a:effectLst>
-            <a:outerShdw blurRad="57150" dist="19050" dir="5400000" algn="ctr" rotWithShape="0">
-              <a:srgbClr val="000000">
-                <a:alpha val="63000"/>
-              </a:srgbClr>
-            </a:outerShdw>
-          </a:effectLst>
-        </a:effectStyle>
-      </a:effectStyleLst>
-      <a:bgFillStyleLst>
-        <a:solidFill>
-          <a:schemeClr val="phClr"/>
-        </a:solidFill>
-        <a:solidFill>
-          <a:schemeClr val="phClr">
-            <a:tint val="95000"/>
-            <a:satMod val="170000"/>
-          </a:schemeClr>
-        </a:solidFill>
-        <a:gradFill rotWithShape="1">
-          <a:gsLst>
-            <a:gs pos="0">
-              <a:schemeClr val="phClr">
-                <a:tint val="93000"/>
-                <a:satMod val="150000"/>
-                <a:shade val="98000"/>
-                <a:lumMod val="102000"/>
-              </a:schemeClr>
-            </a:gs>
-            <a:gs pos="50000">
-              <a:schemeClr val="phClr">
-                <a:tint val="98000"/>
-                <a:satMod val="130000"/>
-                <a:shade val="90000"/>
-                <a:lumMod val="103000"/>
-              </a:schemeClr>
-            </a:gs>
-            <a:gs pos="100000">
-              <a:schemeClr val="phClr">
-                <a:shade val="63000"/>
-                <a:satMod val="120000"/>
-              </a:schemeClr>
-            </a:gs>
-          </a:gsLst>
-          <a:lin ang="5400000" scaled="0"/>
-        </a:gradFill>
-      </a:bgFillStyleLst>
-    </a:fmtScheme>
-  </a:themeElements>
-  <a:objectDefaults>
-    <a:lnDef>
-      <a:spPr/>
-      <a:bodyPr/>
-      <a:lstStyle/>
-      <a:style>
-        <a:lnRef idx="2">
-          <a:schemeClr val="accent1"/>
-        </a:lnRef>
-        <a:fillRef idx="0">
-          <a:schemeClr val="accent1"/>
-        </a:fillRef>
-        <a:effectRef idx="1">
-          <a:schemeClr val="accent1"/>
-        </a:effectRef>
-        <a:fontRef idx="minor">
-          <a:schemeClr val="tx1"/>
-        </a:fontRef>
-      </a:style>
-    </a:lnDef>
-  </a:objectDefaults>
-  <a:extraClrSchemeLst/>
-  <a:extLst>
-    <a:ext uri="{05A4C25C-085E-4340-85A3-A5531E510DB2}">
-      <thm15:themeFamily xmlns:thm15="http://schemas.microsoft.com/office/thememl/2012/main" name="Office Theme" id="{2E142A2C-CD16-42D6-873A-C26D2A0506FA}" vid="{1BDDFF52-6CD6-40A5-AB3C-68EB2F1E4D0A}"/>
-    </a:ext>
-  </a:extLst>
-</a:theme>
 </file>
--- a/presentations/ev-investment-update.pptx
+++ b/presentations/ev-investment-update.pptx
@@ -4,6 +4,9 @@
   <p:sldMasterIdLst>
     <p:sldMasterId id="2147483648" r:id="rId1"/>
   </p:sldMasterIdLst>
+  <p:notesMasterIdLst>
+    <p:notesMasterId r:id="rId9"/>
+  </p:notesMasterIdLst>
   <p:sldIdLst>
     <p:sldId id="256" r:id="rId2"/>
     <p:sldId id="257" r:id="rId3"/>
@@ -13,9 +16,6 @@
     <p:sldId id="261" r:id="rId7"/>
     <p:sldId id="262" r:id="rId8"/>
   </p:sldIdLst>
-  <p:notesMasterIdLst>
-    <p:notesMasterId r:id="rId9"/>
-  </p:notesMasterIdLst>
   <p:sldSz cx="12192000" cy="6858000"/>
   <p:notesSz cx="6858000" cy="12192000"/>
   <p:defaultTextStyle>
@@ -110,18 +110,26 @@
       </a:defRPr>
     </a:lvl9pPr>
   </p:defaultTextStyle>
+  <p:extLst>
+    <p:ext uri="{EFAFB233-063F-42B5-8137-9DF3F51BA10A}">
+      <p15:sldGuideLst xmlns:p15="http://schemas.microsoft.com/office/powerpoint/2012/main"/>
+    </p:ext>
+  </p:extLst>
 </p:presentation>
 </file>
 
 <file path=ppt/charts/chart1.xml><?xml version="1.0" encoding="utf-8"?>
-<c:chartSpace xmlns:c="http://schemas.openxmlformats.org/drawingml/2006/chart" xmlns:a="http://schemas.openxmlformats.org/drawingml/2006/main" xmlns:r="http://schemas.openxmlformats.org/officeDocument/2006/relationships">
+<c:chartSpace xmlns:c="http://schemas.openxmlformats.org/drawingml/2006/chart" xmlns:a="http://schemas.openxmlformats.org/drawingml/2006/main" xmlns:r="http://schemas.openxmlformats.org/officeDocument/2006/relationships" xmlns:c16r2="http://schemas.microsoft.com/office/drawing/2015/06/chart">
   <c:date1904 val="0"/>
+  <c:lang val="en-US"/>
   <c:roundedCorners val="1"/>
+  <c:style val="2"/>
   <c:chart>
     <c:autoTitleDeleted val="1"/>
     <c:plotArea>
       <c:layout/>
       <c:lineChart>
+        <c:grouping val="standard"/>
         <c:varyColors val="0"/>
         <c:ser>
           <c:idx val="0"/>
@@ -138,9 +146,6 @@
             </c:strRef>
           </c:tx>
           <c:spPr>
-            <a:solidFill>
-              <a:srgbClr val="0D9488"/>
-            </a:solidFill>
             <a:ln w="38100" cap="flat">
               <a:solidFill>
                 <a:srgbClr val="0D9488"/>
@@ -150,31 +155,6 @@
             </a:ln>
             <a:effectLst/>
           </c:spPr>
-          <c:invertIfNegative val="0"/>
-          <c:dLbls>
-            <c:numFmt formatCode="#,##0" sourceLinked="0"/>
-            <c:txPr>
-              <a:bodyPr/>
-              <a:lstStyle/>
-              <a:p>
-                <a:pPr>
-                  <a:defRPr b="0" i="0" strike="noStrike" sz="1200" u="none">
-                    <a:solidFill>
-                      <a:srgbClr val="000000"/>
-                    </a:solidFill>
-                    <a:latin typeface="Arial"/>
-                  </a:defRPr>
-                </a:pPr>
-              </a:p>
-            </c:txPr>
-            <c:showLegendKey val="0"/>
-            <c:showVal val="0"/>
-            <c:showCatName val="0"/>
-            <c:showSerName val="0"/>
-            <c:showPercent val="0"/>
-            <c:showBubbleSize val="0"/>
-            <c:showLeaderLines val="0"/>
-          </c:dLbls>
           <c:marker>
             <c:symbol val="circle"/>
             <c:size val="6"/>
@@ -193,38 +173,36 @@
             </c:spPr>
           </c:marker>
           <c:cat>
-            <c:multiLvlStrRef>
+            <c:strRef>
               <c:f>Sheet1!$A$2:$A$9</c:f>
-              <c:multiLvlStrCache>
+              <c:strCache>
                 <c:ptCount val="8"/>
-                <c:lvl>
-                  <c:pt idx="0">
-                    <c:v>2018</c:v>
-                  </c:pt>
-                  <c:pt idx="1">
-                    <c:v>2019</c:v>
-                  </c:pt>
-                  <c:pt idx="2">
-                    <c:v>2020</c:v>
-                  </c:pt>
-                  <c:pt idx="3">
-                    <c:v>2021</c:v>
-                  </c:pt>
-                  <c:pt idx="4">
-                    <c:v>2022</c:v>
-                  </c:pt>
-                  <c:pt idx="5">
-                    <c:v>2023</c:v>
-                  </c:pt>
-                  <c:pt idx="6">
-                    <c:v>2024</c:v>
-                  </c:pt>
-                  <c:pt idx="7">
-                    <c:v>2025</c:v>
-                  </c:pt>
-                </c:lvl>
-              </c:multiLvlStrCache>
-            </c:multiLvlStrRef>
+                <c:pt idx="0">
+                  <c:v>2018</c:v>
+                </c:pt>
+                <c:pt idx="1">
+                  <c:v>2019</c:v>
+                </c:pt>
+                <c:pt idx="2">
+                  <c:v>2020</c:v>
+                </c:pt>
+                <c:pt idx="3">
+                  <c:v>2021</c:v>
+                </c:pt>
+                <c:pt idx="4">
+                  <c:v>2022</c:v>
+                </c:pt>
+                <c:pt idx="5">
+                  <c:v>2023</c:v>
+                </c:pt>
+                <c:pt idx="6">
+                  <c:v>2024</c:v>
+                </c:pt>
+                <c:pt idx="7">
+                  <c:v>2025</c:v>
+                </c:pt>
+              </c:strCache>
+            </c:strRef>
           </c:cat>
           <c:val>
             <c:numRef>
@@ -260,35 +238,24 @@
             </c:numRef>
           </c:val>
           <c:smooth val="0"/>
+          <c:extLst>
+            <c:ext xmlns:c16="http://schemas.microsoft.com/office/drawing/2014/chart" uri="{C3380CC4-5D6E-409C-BE32-E72D297353CC}">
+              <c16:uniqueId val="{00000000-BC00-2149-8C07-F82659B523A3}"/>
+            </c:ext>
+          </c:extLst>
         </c:ser>
         <c:dLbls>
-          <c:numFmt formatCode="#,##0" sourceLinked="0"/>
-          <c:txPr>
-            <a:bodyPr/>
-            <a:lstStyle/>
-            <a:p>
-              <a:pPr>
-                <a:defRPr b="0" i="0" strike="noStrike" sz="1200" u="none">
-                  <a:solidFill>
-                    <a:srgbClr val="000000"/>
-                  </a:solidFill>
-                  <a:latin typeface="Arial"/>
-                </a:defRPr>
-              </a:pPr>
-            </a:p>
-          </c:txPr>
           <c:showLegendKey val="0"/>
           <c:showVal val="0"/>
           <c:showCatName val="0"/>
           <c:showSerName val="0"/>
           <c:showPercent val="0"/>
           <c:showBubbleSize val="0"/>
-          <c:showLeaderLines val="0"/>
         </c:dLbls>
         <c:marker val="1"/>
+        <c:smooth val="0"/>
         <c:axId val="2094734554"/>
         <c:axId val="2094734552"/>
-        <c:axId val="2094734556"/>
       </c:lineChart>
       <c:catAx>
         <c:axId val="2094734554"/>
@@ -327,6 +294,7 @@
         <c:crosses val="autoZero"/>
         <c:auto val="1"/>
         <c:lblAlgn val="ctr"/>
+        <c:lblOffset val="100"/>
         <c:noMultiLvlLbl val="1"/>
       </c:catAx>
       <c:valAx>
@@ -388,6 +356,7 @@
     </c:plotArea>
     <c:plotVisOnly val="1"/>
     <c:dispBlanksAs val="span"/>
+    <c:showDLblsOverMax val="1"/>
   </c:chart>
   <c:spPr>
     <a:noFill/>
@@ -403,14 +372,17 @@
 </file>
 
 <file path=ppt/charts/chart2.xml><?xml version="1.0" encoding="utf-8"?>
-<c:chartSpace xmlns:c="http://schemas.openxmlformats.org/drawingml/2006/chart" xmlns:a="http://schemas.openxmlformats.org/drawingml/2006/main" xmlns:r="http://schemas.openxmlformats.org/officeDocument/2006/relationships">
+<c:chartSpace xmlns:c="http://schemas.openxmlformats.org/drawingml/2006/chart" xmlns:a="http://schemas.openxmlformats.org/drawingml/2006/main" xmlns:r="http://schemas.openxmlformats.org/officeDocument/2006/relationships" xmlns:c16r2="http://schemas.microsoft.com/office/drawing/2015/06/chart">
   <c:date1904 val="0"/>
+  <c:lang val="en-US"/>
   <c:roundedCorners val="1"/>
+  <c:style val="2"/>
   <c:chart>
     <c:autoTitleDeleted val="1"/>
     <c:plotArea>
       <c:layout/>
       <c:lineChart>
+        <c:grouping val="standard"/>
         <c:varyColors val="0"/>
         <c:ser>
           <c:idx val="0"/>
@@ -427,9 +399,6 @@
             </c:strRef>
           </c:tx>
           <c:spPr>
-            <a:solidFill>
-              <a:srgbClr val="0D9488"/>
-            </a:solidFill>
             <a:ln w="38100" cap="flat">
               <a:solidFill>
                 <a:srgbClr val="0D9488"/>
@@ -439,31 +408,6 @@
             </a:ln>
             <a:effectLst/>
           </c:spPr>
-          <c:invertIfNegative val="0"/>
-          <c:dLbls>
-            <c:numFmt formatCode="#,##0" sourceLinked="0"/>
-            <c:txPr>
-              <a:bodyPr/>
-              <a:lstStyle/>
-              <a:p>
-                <a:pPr>
-                  <a:defRPr b="0" i="0" strike="noStrike" sz="1200" u="none">
-                    <a:solidFill>
-                      <a:srgbClr val="000000"/>
-                    </a:solidFill>
-                    <a:latin typeface="Arial"/>
-                  </a:defRPr>
-                </a:pPr>
-              </a:p>
-            </c:txPr>
-            <c:showLegendKey val="0"/>
-            <c:showVal val="0"/>
-            <c:showCatName val="0"/>
-            <c:showSerName val="0"/>
-            <c:showPercent val="0"/>
-            <c:showBubbleSize val="0"/>
-            <c:showLeaderLines val="0"/>
-          </c:dLbls>
           <c:marker>
             <c:symbol val="circle"/>
             <c:size val="6"/>
@@ -482,38 +426,36 @@
             </c:spPr>
           </c:marker>
           <c:cat>
-            <c:multiLvlStrRef>
+            <c:strRef>
               <c:f>Sheet1!$A$2:$A$9</c:f>
-              <c:multiLvlStrCache>
+              <c:strCache>
                 <c:ptCount val="8"/>
-                <c:lvl>
-                  <c:pt idx="0">
-                    <c:v>16</c:v>
-                  </c:pt>
-                  <c:pt idx="1">
-                    <c:v>25</c:v>
-                  </c:pt>
-                  <c:pt idx="2">
-                    <c:v>35</c:v>
-                  </c:pt>
-                  <c:pt idx="3">
-                    <c:v>50</c:v>
-                  </c:pt>
-                  <c:pt idx="4">
-                    <c:v>65</c:v>
-                  </c:pt>
-                  <c:pt idx="5">
-                    <c:v>80</c:v>
-                  </c:pt>
-                  <c:pt idx="6">
-                    <c:v>100</c:v>
-                  </c:pt>
-                  <c:pt idx="7">
-                    <c:v>120</c:v>
-                  </c:pt>
-                </c:lvl>
-              </c:multiLvlStrCache>
-            </c:multiLvlStrRef>
+                <c:pt idx="0">
+                  <c:v>16</c:v>
+                </c:pt>
+                <c:pt idx="1">
+                  <c:v>25</c:v>
+                </c:pt>
+                <c:pt idx="2">
+                  <c:v>35</c:v>
+                </c:pt>
+                <c:pt idx="3">
+                  <c:v>50</c:v>
+                </c:pt>
+                <c:pt idx="4">
+                  <c:v>65</c:v>
+                </c:pt>
+                <c:pt idx="5">
+                  <c:v>80</c:v>
+                </c:pt>
+                <c:pt idx="6">
+                  <c:v>100</c:v>
+                </c:pt>
+                <c:pt idx="7">
+                  <c:v>120</c:v>
+                </c:pt>
+              </c:strCache>
+            </c:strRef>
           </c:cat>
           <c:val>
             <c:numRef>
@@ -549,6 +491,11 @@
             </c:numRef>
           </c:val>
           <c:smooth val="0"/>
+          <c:extLst>
+            <c:ext xmlns:c16="http://schemas.microsoft.com/office/drawing/2014/chart" uri="{C3380CC4-5D6E-409C-BE32-E72D297353CC}">
+              <c16:uniqueId val="{00000000-482E-F34D-A216-78E38D56F3FB}"/>
+            </c:ext>
+          </c:extLst>
         </c:ser>
         <c:ser>
           <c:idx val="1"/>
@@ -565,9 +512,6 @@
             </c:strRef>
           </c:tx>
           <c:spPr>
-            <a:solidFill>
-              <a:srgbClr val="D94F04"/>
-            </a:solidFill>
             <a:ln w="38100" cap="flat">
               <a:solidFill>
                 <a:srgbClr val="D94F04"/>
@@ -577,31 +521,6 @@
             </a:ln>
             <a:effectLst/>
           </c:spPr>
-          <c:invertIfNegative val="0"/>
-          <c:dLbls>
-            <c:numFmt formatCode="#,##0" sourceLinked="0"/>
-            <c:txPr>
-              <a:bodyPr/>
-              <a:lstStyle/>
-              <a:p>
-                <a:pPr>
-                  <a:defRPr b="0" i="0" strike="noStrike" sz="1200" u="none">
-                    <a:solidFill>
-                      <a:srgbClr val="000000"/>
-                    </a:solidFill>
-                    <a:latin typeface="Arial"/>
-                  </a:defRPr>
-                </a:pPr>
-              </a:p>
-            </c:txPr>
-            <c:showLegendKey val="0"/>
-            <c:showVal val="0"/>
-            <c:showCatName val="0"/>
-            <c:showSerName val="0"/>
-            <c:showPercent val="0"/>
-            <c:showBubbleSize val="0"/>
-            <c:showLeaderLines val="0"/>
-          </c:dLbls>
           <c:marker>
             <c:symbol val="circle"/>
             <c:size val="6"/>
@@ -620,38 +539,36 @@
             </c:spPr>
           </c:marker>
           <c:cat>
-            <c:multiLvlStrRef>
+            <c:strRef>
               <c:f>Sheet1!$A$2:$A$9</c:f>
-              <c:multiLvlStrCache>
+              <c:strCache>
                 <c:ptCount val="8"/>
-                <c:lvl>
-                  <c:pt idx="0">
-                    <c:v>16</c:v>
-                  </c:pt>
-                  <c:pt idx="1">
-                    <c:v>25</c:v>
-                  </c:pt>
-                  <c:pt idx="2">
-                    <c:v>35</c:v>
-                  </c:pt>
-                  <c:pt idx="3">
-                    <c:v>50</c:v>
-                  </c:pt>
-                  <c:pt idx="4">
-                    <c:v>65</c:v>
-                  </c:pt>
-                  <c:pt idx="5">
-                    <c:v>80</c:v>
-                  </c:pt>
-                  <c:pt idx="6">
-                    <c:v>100</c:v>
-                  </c:pt>
-                  <c:pt idx="7">
-                    <c:v>120</c:v>
-                  </c:pt>
-                </c:lvl>
-              </c:multiLvlStrCache>
-            </c:multiLvlStrRef>
+                <c:pt idx="0">
+                  <c:v>16</c:v>
+                </c:pt>
+                <c:pt idx="1">
+                  <c:v>25</c:v>
+                </c:pt>
+                <c:pt idx="2">
+                  <c:v>35</c:v>
+                </c:pt>
+                <c:pt idx="3">
+                  <c:v>50</c:v>
+                </c:pt>
+                <c:pt idx="4">
+                  <c:v>65</c:v>
+                </c:pt>
+                <c:pt idx="5">
+                  <c:v>80</c:v>
+                </c:pt>
+                <c:pt idx="6">
+                  <c:v>100</c:v>
+                </c:pt>
+                <c:pt idx="7">
+                  <c:v>120</c:v>
+                </c:pt>
+              </c:strCache>
+            </c:strRef>
           </c:cat>
           <c:val>
             <c:numRef>
@@ -687,6 +604,11 @@
             </c:numRef>
           </c:val>
           <c:smooth val="0"/>
+          <c:extLst>
+            <c:ext xmlns:c16="http://schemas.microsoft.com/office/drawing/2014/chart" uri="{C3380CC4-5D6E-409C-BE32-E72D297353CC}">
+              <c16:uniqueId val="{00000001-482E-F34D-A216-78E38D56F3FB}"/>
+            </c:ext>
+          </c:extLst>
         </c:ser>
         <c:ser>
           <c:idx val="2"/>
@@ -703,9 +625,6 @@
             </c:strRef>
           </c:tx>
           <c:spPr>
-            <a:solidFill>
-              <a:srgbClr val="7048C4"/>
-            </a:solidFill>
             <a:ln w="38100" cap="flat">
               <a:solidFill>
                 <a:srgbClr val="7048C4"/>
@@ -715,31 +634,6 @@
             </a:ln>
             <a:effectLst/>
           </c:spPr>
-          <c:invertIfNegative val="0"/>
-          <c:dLbls>
-            <c:numFmt formatCode="#,##0" sourceLinked="0"/>
-            <c:txPr>
-              <a:bodyPr/>
-              <a:lstStyle/>
-              <a:p>
-                <a:pPr>
-                  <a:defRPr b="0" i="0" strike="noStrike" sz="1200" u="none">
-                    <a:solidFill>
-                      <a:srgbClr val="000000"/>
-                    </a:solidFill>
-                    <a:latin typeface="Arial"/>
-                  </a:defRPr>
-                </a:pPr>
-              </a:p>
-            </c:txPr>
-            <c:showLegendKey val="0"/>
-            <c:showVal val="0"/>
-            <c:showCatName val="0"/>
-            <c:showSerName val="0"/>
-            <c:showPercent val="0"/>
-            <c:showBubbleSize val="0"/>
-            <c:showLeaderLines val="0"/>
-          </c:dLbls>
           <c:marker>
             <c:symbol val="circle"/>
             <c:size val="6"/>
@@ -758,38 +652,36 @@
             </c:spPr>
           </c:marker>
           <c:cat>
-            <c:multiLvlStrRef>
+            <c:strRef>
               <c:f>Sheet1!$A$2:$A$9</c:f>
-              <c:multiLvlStrCache>
+              <c:strCache>
                 <c:ptCount val="8"/>
-                <c:lvl>
-                  <c:pt idx="0">
-                    <c:v>16</c:v>
-                  </c:pt>
-                  <c:pt idx="1">
-                    <c:v>25</c:v>
-                  </c:pt>
-                  <c:pt idx="2">
-                    <c:v>35</c:v>
-                  </c:pt>
-                  <c:pt idx="3">
-                    <c:v>50</c:v>
-                  </c:pt>
-                  <c:pt idx="4">
-                    <c:v>65</c:v>
-                  </c:pt>
-                  <c:pt idx="5">
-                    <c:v>80</c:v>
-                  </c:pt>
-                  <c:pt idx="6">
-                    <c:v>100</c:v>
-                  </c:pt>
-                  <c:pt idx="7">
-                    <c:v>120</c:v>
-                  </c:pt>
-                </c:lvl>
-              </c:multiLvlStrCache>
-            </c:multiLvlStrRef>
+                <c:pt idx="0">
+                  <c:v>16</c:v>
+                </c:pt>
+                <c:pt idx="1">
+                  <c:v>25</c:v>
+                </c:pt>
+                <c:pt idx="2">
+                  <c:v>35</c:v>
+                </c:pt>
+                <c:pt idx="3">
+                  <c:v>50</c:v>
+                </c:pt>
+                <c:pt idx="4">
+                  <c:v>65</c:v>
+                </c:pt>
+                <c:pt idx="5">
+                  <c:v>80</c:v>
+                </c:pt>
+                <c:pt idx="6">
+                  <c:v>100</c:v>
+                </c:pt>
+                <c:pt idx="7">
+                  <c:v>120</c:v>
+                </c:pt>
+              </c:strCache>
+            </c:strRef>
           </c:cat>
           <c:val>
             <c:numRef>
@@ -825,35 +717,24 @@
             </c:numRef>
           </c:val>
           <c:smooth val="0"/>
+          <c:extLst>
+            <c:ext xmlns:c16="http://schemas.microsoft.com/office/drawing/2014/chart" uri="{C3380CC4-5D6E-409C-BE32-E72D297353CC}">
+              <c16:uniqueId val="{00000002-482E-F34D-A216-78E38D56F3FB}"/>
+            </c:ext>
+          </c:extLst>
         </c:ser>
         <c:dLbls>
-          <c:numFmt formatCode="#,##0" sourceLinked="0"/>
-          <c:txPr>
-            <a:bodyPr/>
-            <a:lstStyle/>
-            <a:p>
-              <a:pPr>
-                <a:defRPr b="0" i="0" strike="noStrike" sz="1200" u="none">
-                  <a:solidFill>
-                    <a:srgbClr val="000000"/>
-                  </a:solidFill>
-                  <a:latin typeface="Arial"/>
-                </a:defRPr>
-              </a:pPr>
-            </a:p>
-          </c:txPr>
           <c:showLegendKey val="0"/>
           <c:showVal val="0"/>
           <c:showCatName val="0"/>
           <c:showSerName val="0"/>
           <c:showPercent val="0"/>
           <c:showBubbleSize val="0"/>
-          <c:showLeaderLines val="0"/>
         </c:dLbls>
         <c:marker val="1"/>
+        <c:smooth val="0"/>
         <c:axId val="2094734554"/>
         <c:axId val="2094734552"/>
-        <c:axId val="2094734556"/>
       </c:lineChart>
       <c:catAx>
         <c:axId val="2094734554"/>
@@ -892,6 +773,7 @@
         <c:crosses val="autoZero"/>
         <c:auto val="1"/>
         <c:lblAlgn val="ctr"/>
+        <c:lblOffset val="100"/>
         <c:noMultiLvlLbl val="1"/>
       </c:catAx>
       <c:valAx>
@@ -974,6 +856,7 @@
     </c:legend>
     <c:plotVisOnly val="1"/>
     <c:dispBlanksAs val="span"/>
+    <c:showDLblsOverMax val="1"/>
   </c:chart>
   <c:spPr>
     <a:noFill/>
@@ -1010,234 +893,10 @@
           <a:chExt cx="0" cy="0"/>
         </a:xfrm>
       </p:grpSpPr>
-      <p:sp>
-        <p:nvSpPr>
-          <p:cNvPr id="2" name="Header Placeholder 1"/>
-          <p:cNvSpPr>
-            <a:spLocks noGrp="1"/>
-          </p:cNvSpPr>
-          <p:nvPr>
-            <p:ph type="hdr" sz="quarter"/>
-          </p:nvPr>
-        </p:nvSpPr>
-        <p:spPr>
-          <a:xfrm>
-            <a:off x="0" y="0"/>
-            <a:ext cx="2971800" cy="458788"/>
-          </a:xfrm>
-          <a:prstGeom prst="rect">
-            <a:avLst/>
-          </a:prstGeom>
-        </p:spPr>
-        <p:txBody>
-          <a:bodyPr vert="horz" lIns="91440" tIns="45720" rIns="91440" bIns="45720" rtlCol="0"/>
-          <a:lstStyle>
-            <a:lvl1pPr algn="l">
-              <a:defRPr sz="1200"/>
-            </a:lvl1pPr>
-          </a:lstStyle>
-          <a:p>
-            <a:endParaRPr lang="en-US"/>
-          </a:p>
-        </p:txBody>
-      </p:sp>
-      <p:sp>
-        <p:nvSpPr>
-          <p:cNvPr id="3" name="Date Placeholder 2"/>
-          <p:cNvSpPr>
-            <a:spLocks noGrp="1"/>
-          </p:cNvSpPr>
-          <p:nvPr>
-            <p:ph type="dt" idx="1"/>
-          </p:nvPr>
-        </p:nvSpPr>
-        <p:spPr>
-          <a:xfrm>
-            <a:off x="3884613" y="0"/>
-            <a:ext cx="2971800" cy="458788"/>
-          </a:xfrm>
-          <a:prstGeom prst="rect">
-            <a:avLst/>
-          </a:prstGeom>
-        </p:spPr>
-        <p:txBody>
-          <a:bodyPr vert="horz" lIns="91440" tIns="45720" rIns="91440" bIns="45720" rtlCol="0"/>
-          <a:lstStyle>
-            <a:lvl1pPr algn="r">
-              <a:defRPr sz="1200"/>
-            </a:lvl1pPr>
-          </a:lstStyle>
-          <a:p>
-            <a:fld id="{5282F153-3F37-0F45-9E97-73ACFA13230C}" type="datetimeFigureOut">
-              <a:rPr lang="en-US"/>
-              <a:t>7/23/19</a:t>
-            </a:fld>
-            <a:endParaRPr lang="en-US"/>
-          </a:p>
-        </p:txBody>
-      </p:sp>
-      <p:sp>
-        <p:nvSpPr>
-          <p:cNvPr id="4" name="Slide Image Placeholder 3"/>
-          <p:cNvSpPr>
-            <a:spLocks noGrp="1" noRot="1" noChangeAspect="1"/>
-          </p:cNvSpPr>
-          <p:nvPr>
-            <p:ph type="sldImg" idx="2"/>
-          </p:nvPr>
-        </p:nvSpPr>
-        <p:spPr>
-          <a:xfrm>
-            <a:off x="685800" y="1143000"/>
-            <a:ext cx="5486400" cy="3086100"/>
-          </a:xfrm>
-          <a:prstGeom prst="rect">
-            <a:avLst/>
-          </a:prstGeom>
-          <a:noFill/>
-          <a:ln w="12700">
-            <a:solidFill>
-              <a:prstClr val="black"/>
-            </a:solidFill>
-          </a:ln>
-        </p:spPr>
-        <p:txBody>
-          <a:bodyPr vert="horz" lIns="91440" tIns="45720" rIns="91440" bIns="45720" rtlCol="0" anchor="ctr"/>
-          <a:lstStyle/>
-          <a:p>
-            <a:endParaRPr lang="en-US"/>
-          </a:p>
-        </p:txBody>
-      </p:sp>
-      <p:sp>
-        <p:nvSpPr>
-          <p:cNvPr id="5" name="Notes Placeholder 4"/>
-          <p:cNvSpPr>
-            <a:spLocks noGrp="1"/>
-          </p:cNvSpPr>
-          <p:nvPr>
-            <p:ph type="body" sz="quarter" idx="3"/>
-          </p:nvPr>
-        </p:nvSpPr>
-        <p:spPr>
-          <a:xfrm>
-            <a:off x="685800" y="4400550"/>
-            <a:ext cx="5486400" cy="3600450"/>
-          </a:xfrm>
-          <a:prstGeom prst="rect">
-            <a:avLst/>
-          </a:prstGeom>
-        </p:spPr>
-        <p:txBody>
-          <a:bodyPr vert="horz" lIns="91440" tIns="45720" rIns="91440" bIns="45720" rtlCol="0"/>
-          <a:lstStyle/>
-          <a:p>
-            <a:pPr lvl="0"/>
-            <a:r>
-              <a:rPr lang="en-US"/>
-              <a:t>Click to edit Master text styles</a:t>
-            </a:r>
-          </a:p>
-          <a:p>
-            <a:pPr lvl="1"/>
-            <a:r>
-              <a:rPr lang="en-US"/>
-              <a:t>Second level</a:t>
-            </a:r>
-          </a:p>
-          <a:p>
-            <a:pPr lvl="2"/>
-            <a:r>
-              <a:rPr lang="en-US"/>
-              <a:t>Third level</a:t>
-            </a:r>
-          </a:p>
-          <a:p>
-            <a:pPr lvl="3"/>
-            <a:r>
-              <a:rPr lang="en-US"/>
-              <a:t>Fourth level</a:t>
-            </a:r>
-          </a:p>
-          <a:p>
-            <a:pPr lvl="4"/>
-            <a:r>
-              <a:rPr lang="en-US"/>
-              <a:t>Fifth level</a:t>
-            </a:r>
-          </a:p>
-        </p:txBody>
-      </p:sp>
-      <p:sp>
-        <p:nvSpPr>
-          <p:cNvPr id="6" name="Footer Placeholder 5"/>
-          <p:cNvSpPr>
-            <a:spLocks noGrp="1"/>
-          </p:cNvSpPr>
-          <p:nvPr>
-            <p:ph type="ftr" sz="quarter" idx="4"/>
-          </p:nvPr>
-        </p:nvSpPr>
-        <p:spPr>
-          <a:xfrm>
-            <a:off x="0" y="8685213"/>
-            <a:ext cx="2971800" cy="458787"/>
-          </a:xfrm>
-          <a:prstGeom prst="rect">
-            <a:avLst/>
-          </a:prstGeom>
-        </p:spPr>
-        <p:txBody>
-          <a:bodyPr vert="horz" lIns="91440" tIns="45720" rIns="91440" bIns="45720" rtlCol="0" anchor="b"/>
-          <a:lstStyle>
-            <a:lvl1pPr algn="l">
-              <a:defRPr sz="1200"/>
-            </a:lvl1pPr>
-          </a:lstStyle>
-          <a:p>
-            <a:endParaRPr lang="en-US"/>
-          </a:p>
-        </p:txBody>
-      </p:sp>
-      <p:sp>
-        <p:nvSpPr>
-          <p:cNvPr id="7" name="Slide Number Placeholder 6"/>
-          <p:cNvSpPr>
-            <a:spLocks noGrp="1"/>
-          </p:cNvSpPr>
-          <p:nvPr>
-            <p:ph type="sldNum" sz="quarter" idx="5"/>
-          </p:nvPr>
-        </p:nvSpPr>
-        <p:spPr>
-          <a:xfrm>
-            <a:off x="3884613" y="8685213"/>
-            <a:ext cx="2971800" cy="458787"/>
-          </a:xfrm>
-          <a:prstGeom prst="rect">
-            <a:avLst/>
-          </a:prstGeom>
-        </p:spPr>
-        <p:txBody>
-          <a:bodyPr vert="horz" lIns="91440" tIns="45720" rIns="91440" bIns="45720" rtlCol="0" anchor="b"/>
-          <a:lstStyle>
-            <a:lvl1pPr algn="r">
-              <a:defRPr sz="1200"/>
-            </a:lvl1pPr>
-          </a:lstStyle>
-          <a:p>
-            <a:fld id="{CE5E9CC1-C706-0F49-92D6-E571CC5EEA8F}" type="slidenum">
-              <a:rPr lang="en-US"/>
-              <a:t>‹#›</a:t>
-            </a:fld>
-            <a:endParaRPr lang="en-US"/>
-          </a:p>
-        </p:txBody>
-      </p:sp>
     </p:spTree>
     <p:extLst>
       <p:ext uri="{BB962C8B-B14F-4D97-AF65-F5344CB8AC3E}">
-        <p14:creationId xmlns:p14="http://schemas.microsoft.com/office/powerpoint/2010/main" val="1024086991"/>
+        <p14:creationId xmlns:p14="http://schemas.microsoft.com/office/powerpoint/2010/main" val="2179530821"/>
       </p:ext>
     </p:extLst>
   </p:cSld>
@@ -1389,7 +1048,6 @@
 • Two parts: national (primary), state siting (stretch)
 • All data via the Thurro connector, India only</a:t>
             </a:r>
-            <a:endParaRPr lang="en-US" dirty="0"/>
           </a:p>
         </p:txBody>
       </p:sp>
@@ -1483,7 +1141,6 @@
 • Honest caveat: siting may be incentive-driven, as the US IRA wave suggests
 • So the project does not fail if the stretch answer is that incentives decide</a:t>
             </a:r>
-            <a:endParaRPr lang="en-US" dirty="0"/>
           </a:p>
         </p:txBody>
       </p:sp>
@@ -1577,7 +1234,6 @@
 • Do not read the orange detail aloud — point at it, defer to the backup slide
 • Substitute: 34 events hand-coded from exchange filings</a:t>
             </a:r>
-            <a:endParaRPr lang="en-US" dirty="0"/>
           </a:p>
         </p:txBody>
       </p:sp>
@@ -1674,7 +1330,6 @@
 • Lead test: +0.24 at k=0, -0.20 at k=1, +0.40 at k=2, n=39 — say plainly that is noise
 • Cut for time: the production-coverage chart (27% to 60%) — raise it only if asked</a:t>
             </a:r>
-            <a:endParaRPr lang="en-US" dirty="0"/>
           </a:p>
         </p:txBody>
       </p:sp>
@@ -1773,7 +1428,6 @@
 • Say it plainly — that is not evidence of no lead, it is an underpowered test
 • If asked: false-positive rate checks out at 1.5-2.5%, solver validated against statsmodels</a:t>
             </a:r>
-            <a:endParaRPr lang="en-US" dirty="0"/>
           </a:p>
         </p:txBody>
       </p:sp>
@@ -1868,7 +1522,6 @@
 • Step 5: write up, including the negative result on the investment source
 • Close on this: the modelling is not the risk, the dependent variable is</a:t>
             </a:r>
-            <a:endParaRPr lang="en-US" dirty="0"/>
           </a:p>
         </p:txBody>
       </p:sp>
@@ -1963,7 +1616,6 @@
 • Q1 (a better capex feed) is highest value if the answer is yes
 • Fallback if events stay well short of 45-75: pre-register the lag, or pivot to the state panel</a:t>
             </a:r>
-            <a:endParaRPr lang="en-US" dirty="0"/>
           </a:p>
         </p:txBody>
       </p:sp>
@@ -2036,6 +1688,11 @@
 <file path=ppt/slideMasters/slideMaster1.xml><?xml version="1.0" encoding="utf-8"?>
 <p:sldMaster xmlns:a="http://schemas.openxmlformats.org/drawingml/2006/main" xmlns:r="http://schemas.openxmlformats.org/officeDocument/2006/relationships" xmlns:p="http://schemas.openxmlformats.org/presentationml/2006/main">
   <p:cSld>
+    <p:bg>
+      <p:bgRef idx="1001">
+        <a:schemeClr val="bg1"/>
+      </p:bgRef>
+    </p:bg>
     <p:spTree>
       <p:nvGrpSpPr>
         <p:cNvPr id="1" name=""/>
@@ -2318,6 +1975,7 @@
         <a:solidFill>
           <a:srgbClr val="0B3B38"/>
         </a:solidFill>
+        <a:effectLst/>
       </p:bgPr>
     </p:bg>
     <p:spTree>
@@ -2358,6 +2016,13 @@
             <a:prstDash val="solid"/>
           </a:ln>
         </p:spPr>
+        <p:txBody>
+          <a:bodyPr/>
+          <a:lstStyle/>
+          <a:p>
+            <a:endParaRPr lang="en-US"/>
+          </a:p>
+        </p:txBody>
       </p:sp>
       <p:sp>
         <p:nvSpPr>
@@ -2383,6 +2048,13 @@
             <a:prstDash val="solid"/>
           </a:ln>
         </p:spPr>
+        <p:txBody>
+          <a:bodyPr/>
+          <a:lstStyle/>
+          <a:p>
+            <a:endParaRPr lang="en-US"/>
+          </a:p>
+        </p:txBody>
       </p:sp>
       <p:sp>
         <p:nvSpPr>
@@ -2405,11 +2077,11 @@
           <a:bodyPr wrap="square" lIns="0" tIns="0" rIns="0" bIns="0" rtlCol="0" anchor="ctr"/>
           <a:lstStyle/>
           <a:p>
-            <a:pPr indent="0" marL="0">
-              <a:buNone/>
-            </a:pPr>
-            <a:r>
-              <a:rPr lang="en-US" sz="1200" b="1" spc="180" kern="0" dirty="0">
+            <a:pPr marL="0" indent="0">
+              <a:buNone/>
+            </a:pPr>
+            <a:r>
+              <a:rPr lang="en-US" sz="1200" b="1" kern="0" spc="180" dirty="0">
                 <a:solidFill>
                   <a:srgbClr val="6FD8CB"/>
                 </a:solidFill>
@@ -2444,7 +2116,7 @@
           <a:bodyPr wrap="square" lIns="0" tIns="0" rIns="0" bIns="0" rtlCol="0" anchor="ctr"/>
           <a:lstStyle/>
           <a:p>
-            <a:pPr indent="0" marL="0">
+            <a:pPr marL="0" indent="0">
               <a:lnSpc>
                 <a:spcPts val="5200"/>
               </a:lnSpc>
@@ -2464,7 +2136,7 @@
             <a:endParaRPr lang="en-US" sz="4600" dirty="0"/>
           </a:p>
           <a:p>
-            <a:pPr indent="0" marL="0">
+            <a:pPr marL="0" indent="0">
               <a:lnSpc>
                 <a:spcPts val="5200"/>
               </a:lnSpc>
@@ -2506,7 +2178,7 @@
           <a:bodyPr wrap="square" lIns="0" tIns="0" rIns="0" bIns="0" rtlCol="0" anchor="ctr"/>
           <a:lstStyle/>
           <a:p>
-            <a:pPr indent="0" marL="0">
+            <a:pPr marL="0" indent="0">
               <a:buNone/>
             </a:pPr>
             <a:r>
@@ -2545,7 +2217,7 @@
           <a:bodyPr wrap="square" lIns="0" tIns="0" rIns="0" bIns="0" rtlCol="0" anchor="ctr"/>
           <a:lstStyle/>
           <a:p>
-            <a:pPr indent="0" marL="0">
+            <a:pPr marL="0" indent="0">
               <a:buNone/>
             </a:pPr>
             <a:r>
@@ -2579,6 +2251,7 @@
         <a:solidFill>
           <a:srgbClr val="FFFFFF"/>
         </a:solidFill>
+        <a:effectLst/>
       </p:bgPr>
     </p:bg>
     <p:spTree>
@@ -2616,11 +2289,11 @@
           <a:bodyPr wrap="square" lIns="0" tIns="0" rIns="0" bIns="0" rtlCol="0" anchor="ctr"/>
           <a:lstStyle/>
           <a:p>
-            <a:pPr indent="0" marL="0">
-              <a:buNone/>
-            </a:pPr>
-            <a:r>
-              <a:rPr lang="en-US" sz="1200" b="1" spc="160" kern="0" dirty="0">
+            <a:pPr marL="0" indent="0">
+              <a:buNone/>
+            </a:pPr>
+            <a:r>
+              <a:rPr lang="en-US" sz="1200" b="1" kern="0" spc="160" dirty="0">
                 <a:solidFill>
                   <a:srgbClr val="0D9488"/>
                 </a:solidFill>
@@ -2655,7 +2328,7 @@
           <a:bodyPr wrap="square" lIns="0" tIns="0" rIns="0" bIns="0" rtlCol="0" anchor="ctr"/>
           <a:lstStyle/>
           <a:p>
-            <a:pPr indent="0" marL="0">
+            <a:pPr marL="0" indent="0">
               <a:buNone/>
             </a:pPr>
             <a:r>
@@ -2694,7 +2367,7 @@
           <a:bodyPr wrap="square" lIns="0" tIns="0" rIns="0" bIns="0" rtlCol="0" anchor="ctr"/>
           <a:lstStyle/>
           <a:p>
-            <a:pPr indent="0" marL="0">
+            <a:pPr marL="0" indent="0">
               <a:buNone/>
             </a:pPr>
             <a:r>
@@ -2738,6 +2411,13 @@
             <a:prstDash val="solid"/>
           </a:ln>
         </p:spPr>
+        <p:txBody>
+          <a:bodyPr/>
+          <a:lstStyle/>
+          <a:p>
+            <a:endParaRPr lang="en-US"/>
+          </a:p>
+        </p:txBody>
       </p:sp>
       <p:sp>
         <p:nvSpPr>
@@ -2763,6 +2443,13 @@
             <a:prstDash val="solid"/>
           </a:ln>
         </p:spPr>
+        <p:txBody>
+          <a:bodyPr/>
+          <a:lstStyle/>
+          <a:p>
+            <a:endParaRPr lang="en-US"/>
+          </a:p>
+        </p:txBody>
       </p:sp>
       <p:sp>
         <p:nvSpPr>
@@ -2785,11 +2472,11 @@
           <a:bodyPr wrap="square" lIns="0" tIns="0" rIns="0" bIns="0" rtlCol="0" anchor="ctr"/>
           <a:lstStyle/>
           <a:p>
-            <a:pPr indent="0" marL="0">
-              <a:buNone/>
-            </a:pPr>
-            <a:r>
-              <a:rPr lang="en-US" sz="1100" b="1" spc="140" kern="0" dirty="0">
+            <a:pPr marL="0" indent="0">
+              <a:buNone/>
+            </a:pPr>
+            <a:r>
+              <a:rPr lang="en-US" sz="1100" b="1" kern="0" spc="140" dirty="0">
                 <a:solidFill>
                   <a:srgbClr val="0D9488"/>
                 </a:solidFill>
@@ -2824,7 +2511,7 @@
           <a:bodyPr wrap="square" lIns="0" tIns="0" rIns="0" bIns="0" rtlCol="0" anchor="ctr"/>
           <a:lstStyle/>
           <a:p>
-            <a:pPr algn="r" indent="0" marL="0">
+            <a:pPr marL="0" indent="0" algn="r">
               <a:buNone/>
             </a:pPr>
             <a:r>
@@ -2863,7 +2550,7 @@
           <a:bodyPr wrap="square" lIns="0" tIns="0" rIns="0" bIns="0" rtlCol="0" anchor="ctr"/>
           <a:lstStyle/>
           <a:p>
-            <a:pPr indent="0" marL="0">
+            <a:pPr marL="0" indent="0">
               <a:buNone/>
             </a:pPr>
             <a:r>
@@ -2902,7 +2589,7 @@
           <a:bodyPr wrap="square" lIns="0" tIns="0" rIns="0" bIns="0" rtlCol="0" anchor="ctr"/>
           <a:lstStyle/>
           <a:p>
-            <a:pPr indent="0" marL="0">
+            <a:pPr marL="0" indent="0">
               <a:buNone/>
             </a:pPr>
             <a:r>
@@ -2946,6 +2633,13 @@
             <a:prstDash val="solid"/>
           </a:ln>
         </p:spPr>
+        <p:txBody>
+          <a:bodyPr/>
+          <a:lstStyle/>
+          <a:p>
+            <a:endParaRPr lang="en-US"/>
+          </a:p>
+        </p:txBody>
       </p:sp>
       <p:sp>
         <p:nvSpPr>
@@ -2971,6 +2665,13 @@
             <a:prstDash val="solid"/>
           </a:ln>
         </p:spPr>
+        <p:txBody>
+          <a:bodyPr/>
+          <a:lstStyle/>
+          <a:p>
+            <a:endParaRPr lang="en-US"/>
+          </a:p>
+        </p:txBody>
       </p:sp>
       <p:sp>
         <p:nvSpPr>
@@ -2993,11 +2694,11 @@
           <a:bodyPr wrap="square" lIns="0" tIns="0" rIns="0" bIns="0" rtlCol="0" anchor="ctr"/>
           <a:lstStyle/>
           <a:p>
-            <a:pPr indent="0" marL="0">
-              <a:buNone/>
-            </a:pPr>
-            <a:r>
-              <a:rPr lang="en-US" sz="1100" b="1" spc="140" kern="0" dirty="0">
+            <a:pPr marL="0" indent="0">
+              <a:buNone/>
+            </a:pPr>
+            <a:r>
+              <a:rPr lang="en-US" sz="1100" b="1" kern="0" spc="140" dirty="0">
                 <a:solidFill>
                   <a:srgbClr val="7048C4"/>
                 </a:solidFill>
@@ -3032,7 +2733,7 @@
           <a:bodyPr wrap="square" lIns="0" tIns="0" rIns="0" bIns="0" rtlCol="0" anchor="ctr"/>
           <a:lstStyle/>
           <a:p>
-            <a:pPr algn="r" indent="0" marL="0">
+            <a:pPr marL="0" indent="0" algn="r">
               <a:buNone/>
             </a:pPr>
             <a:r>
@@ -3071,7 +2772,7 @@
           <a:bodyPr wrap="square" lIns="0" tIns="0" rIns="0" bIns="0" rtlCol="0" anchor="ctr"/>
           <a:lstStyle/>
           <a:p>
-            <a:pPr indent="0" marL="0">
+            <a:pPr marL="0" indent="0">
               <a:buNone/>
             </a:pPr>
             <a:r>
@@ -3110,7 +2811,7 @@
           <a:bodyPr wrap="square" lIns="0" tIns="0" rIns="0" bIns="0" rtlCol="0" anchor="ctr"/>
           <a:lstStyle/>
           <a:p>
-            <a:pPr indent="0" marL="0">
+            <a:pPr marL="0" indent="0">
               <a:buNone/>
             </a:pPr>
             <a:r>
@@ -3149,7 +2850,7 @@
           <a:bodyPr wrap="square" lIns="0" tIns="0" rIns="0" bIns="0" rtlCol="0" anchor="ctr"/>
           <a:lstStyle/>
           <a:p>
-            <a:pPr indent="0" marL="0">
+            <a:pPr marL="0" indent="0">
               <a:buNone/>
             </a:pPr>
             <a:r>
@@ -3183,6 +2884,7 @@
         <a:solidFill>
           <a:srgbClr val="FFFFFF"/>
         </a:solidFill>
+        <a:effectLst/>
       </p:bgPr>
     </p:bg>
     <p:spTree>
@@ -3220,11 +2922,11 @@
           <a:bodyPr wrap="square" lIns="0" tIns="0" rIns="0" bIns="0" rtlCol="0" anchor="ctr"/>
           <a:lstStyle/>
           <a:p>
-            <a:pPr indent="0" marL="0">
-              <a:buNone/>
-            </a:pPr>
-            <a:r>
-              <a:rPr lang="en-US" sz="1200" b="1" spc="160" kern="0" dirty="0">
+            <a:pPr marL="0" indent="0">
+              <a:buNone/>
+            </a:pPr>
+            <a:r>
+              <a:rPr lang="en-US" sz="1200" b="1" kern="0" spc="160" dirty="0">
                 <a:solidFill>
                   <a:srgbClr val="0D9488"/>
                 </a:solidFill>
@@ -3259,7 +2961,7 @@
           <a:bodyPr wrap="square" lIns="0" tIns="0" rIns="0" bIns="0" rtlCol="0" anchor="ctr"/>
           <a:lstStyle/>
           <a:p>
-            <a:pPr indent="0" marL="0">
+            <a:pPr marL="0" indent="0">
               <a:buNone/>
             </a:pPr>
             <a:r>
@@ -3303,6 +3005,13 @@
             <a:prstDash val="solid"/>
           </a:ln>
         </p:spPr>
+        <p:txBody>
+          <a:bodyPr/>
+          <a:lstStyle/>
+          <a:p>
+            <a:endParaRPr lang="en-US"/>
+          </a:p>
+        </p:txBody>
       </p:sp>
       <p:sp>
         <p:nvSpPr>
@@ -3328,6 +3037,13 @@
             <a:prstDash val="solid"/>
           </a:ln>
         </p:spPr>
+        <p:txBody>
+          <a:bodyPr/>
+          <a:lstStyle/>
+          <a:p>
+            <a:endParaRPr lang="en-US"/>
+          </a:p>
+        </p:txBody>
       </p:sp>
       <p:sp>
         <p:nvSpPr>
@@ -3350,11 +3066,11 @@
           <a:bodyPr wrap="square" lIns="0" tIns="0" rIns="0" bIns="0" rtlCol="0" anchor="ctr"/>
           <a:lstStyle/>
           <a:p>
-            <a:pPr indent="0" marL="0">
-              <a:buNone/>
-            </a:pPr>
-            <a:r>
-              <a:rPr lang="en-US" sz="900" b="1" spc="120" kern="0" dirty="0">
+            <a:pPr marL="0" indent="0">
+              <a:buNone/>
+            </a:pPr>
+            <a:r>
+              <a:rPr lang="en-US" sz="900" b="1" kern="0" spc="120" dirty="0">
                 <a:solidFill>
                   <a:srgbClr val="0D9488"/>
                 </a:solidFill>
@@ -3389,7 +3105,7 @@
           <a:bodyPr wrap="square" lIns="0" tIns="0" rIns="0" bIns="0" rtlCol="0" anchor="ctr"/>
           <a:lstStyle/>
           <a:p>
-            <a:pPr indent="0" marL="0">
+            <a:pPr marL="0" indent="0">
               <a:buNone/>
             </a:pPr>
             <a:r>
@@ -3428,7 +3144,7 @@
           <a:bodyPr wrap="square" lIns="0" tIns="0" rIns="0" bIns="0" rtlCol="0" anchor="ctr"/>
           <a:lstStyle/>
           <a:p>
-            <a:pPr indent="0" marL="0">
+            <a:pPr marL="0" indent="0">
               <a:buNone/>
             </a:pPr>
             <a:r>
@@ -3467,7 +3183,7 @@
           <a:bodyPr wrap="square" lIns="0" tIns="0" rIns="0" bIns="0" rtlCol="0" anchor="ctr"/>
           <a:lstStyle/>
           <a:p>
-            <a:pPr indent="0" marL="0">
+            <a:pPr marL="0" indent="0">
               <a:buNone/>
             </a:pPr>
             <a:r>
@@ -3511,6 +3227,13 @@
             <a:prstDash val="solid"/>
           </a:ln>
         </p:spPr>
+        <p:txBody>
+          <a:bodyPr/>
+          <a:lstStyle/>
+          <a:p>
+            <a:endParaRPr lang="en-US"/>
+          </a:p>
+        </p:txBody>
       </p:sp>
       <p:sp>
         <p:nvSpPr>
@@ -3536,6 +3259,13 @@
             <a:prstDash val="solid"/>
           </a:ln>
         </p:spPr>
+        <p:txBody>
+          <a:bodyPr/>
+          <a:lstStyle/>
+          <a:p>
+            <a:endParaRPr lang="en-US"/>
+          </a:p>
+        </p:txBody>
       </p:sp>
       <p:sp>
         <p:nvSpPr>
@@ -3558,11 +3288,11 @@
           <a:bodyPr wrap="square" lIns="0" tIns="0" rIns="0" bIns="0" rtlCol="0" anchor="ctr"/>
           <a:lstStyle/>
           <a:p>
-            <a:pPr indent="0" marL="0">
-              <a:buNone/>
-            </a:pPr>
-            <a:r>
-              <a:rPr lang="en-US" sz="900" b="1" spc="120" kern="0" dirty="0">
+            <a:pPr marL="0" indent="0">
+              <a:buNone/>
+            </a:pPr>
+            <a:r>
+              <a:rPr lang="en-US" sz="900" b="1" kern="0" spc="120" dirty="0">
                 <a:solidFill>
                   <a:srgbClr val="0D9488"/>
                 </a:solidFill>
@@ -3597,7 +3327,7 @@
           <a:bodyPr wrap="square" lIns="0" tIns="0" rIns="0" bIns="0" rtlCol="0" anchor="ctr"/>
           <a:lstStyle/>
           <a:p>
-            <a:pPr indent="0" marL="0">
+            <a:pPr marL="0" indent="0">
               <a:buNone/>
             </a:pPr>
             <a:r>
@@ -3636,7 +3366,7 @@
           <a:bodyPr wrap="square" lIns="0" tIns="0" rIns="0" bIns="0" rtlCol="0" anchor="ctr"/>
           <a:lstStyle/>
           <a:p>
-            <a:pPr indent="0" marL="0">
+            <a:pPr marL="0" indent="0">
               <a:buNone/>
             </a:pPr>
             <a:r>
@@ -3675,7 +3405,7 @@
           <a:bodyPr wrap="square" lIns="0" tIns="0" rIns="0" bIns="0" rtlCol="0" anchor="ctr"/>
           <a:lstStyle/>
           <a:p>
-            <a:pPr indent="0" marL="0">
+            <a:pPr marL="0" indent="0">
               <a:buNone/>
             </a:pPr>
             <a:r>
@@ -3719,6 +3449,13 @@
             <a:prstDash val="solid"/>
           </a:ln>
         </p:spPr>
+        <p:txBody>
+          <a:bodyPr/>
+          <a:lstStyle/>
+          <a:p>
+            <a:endParaRPr lang="en-US"/>
+          </a:p>
+        </p:txBody>
       </p:sp>
       <p:sp>
         <p:nvSpPr>
@@ -3744,6 +3481,13 @@
             <a:prstDash val="solid"/>
           </a:ln>
         </p:spPr>
+        <p:txBody>
+          <a:bodyPr/>
+          <a:lstStyle/>
+          <a:p>
+            <a:endParaRPr lang="en-US"/>
+          </a:p>
+        </p:txBody>
       </p:sp>
       <p:sp>
         <p:nvSpPr>
@@ -3766,11 +3510,11 @@
           <a:bodyPr wrap="square" lIns="0" tIns="0" rIns="0" bIns="0" rtlCol="0" anchor="ctr"/>
           <a:lstStyle/>
           <a:p>
-            <a:pPr indent="0" marL="0">
-              <a:buNone/>
-            </a:pPr>
-            <a:r>
-              <a:rPr lang="en-US" sz="900" b="1" spc="120" kern="0" dirty="0">
+            <a:pPr marL="0" indent="0">
+              <a:buNone/>
+            </a:pPr>
+            <a:r>
+              <a:rPr lang="en-US" sz="900" b="1" kern="0" spc="120" dirty="0">
                 <a:solidFill>
                   <a:srgbClr val="0D9488"/>
                 </a:solidFill>
@@ -3805,7 +3549,7 @@
           <a:bodyPr wrap="square" lIns="0" tIns="0" rIns="0" bIns="0" rtlCol="0" anchor="ctr"/>
           <a:lstStyle/>
           <a:p>
-            <a:pPr indent="0" marL="0">
+            <a:pPr marL="0" indent="0">
               <a:buNone/>
             </a:pPr>
             <a:r>
@@ -3844,7 +3588,7 @@
           <a:bodyPr wrap="square" lIns="0" tIns="0" rIns="0" bIns="0" rtlCol="0" anchor="ctr"/>
           <a:lstStyle/>
           <a:p>
-            <a:pPr indent="0" marL="0">
+            <a:pPr marL="0" indent="0">
               <a:buNone/>
             </a:pPr>
             <a:r>
@@ -3883,7 +3627,7 @@
           <a:bodyPr wrap="square" lIns="0" tIns="0" rIns="0" bIns="0" rtlCol="0" anchor="ctr"/>
           <a:lstStyle/>
           <a:p>
-            <a:pPr indent="0" marL="0">
+            <a:pPr marL="0" indent="0">
               <a:buNone/>
             </a:pPr>
             <a:r>
@@ -3927,6 +3671,13 @@
             <a:prstDash val="solid"/>
           </a:ln>
         </p:spPr>
+        <p:txBody>
+          <a:bodyPr/>
+          <a:lstStyle/>
+          <a:p>
+            <a:endParaRPr lang="en-US"/>
+          </a:p>
+        </p:txBody>
       </p:sp>
       <p:sp>
         <p:nvSpPr>
@@ -3952,6 +3703,13 @@
             <a:prstDash val="solid"/>
           </a:ln>
         </p:spPr>
+        <p:txBody>
+          <a:bodyPr/>
+          <a:lstStyle/>
+          <a:p>
+            <a:endParaRPr lang="en-US"/>
+          </a:p>
+        </p:txBody>
       </p:sp>
       <p:sp>
         <p:nvSpPr>
@@ -3974,11 +3732,11 @@
           <a:bodyPr wrap="square" lIns="0" tIns="0" rIns="0" bIns="0" rtlCol="0" anchor="ctr"/>
           <a:lstStyle/>
           <a:p>
-            <a:pPr indent="0" marL="0">
-              <a:buNone/>
-            </a:pPr>
-            <a:r>
-              <a:rPr lang="en-US" sz="900" b="1" spc="120" kern="0" dirty="0">
+            <a:pPr marL="0" indent="0">
+              <a:buNone/>
+            </a:pPr>
+            <a:r>
+              <a:rPr lang="en-US" sz="900" b="1" kern="0" spc="120" dirty="0">
                 <a:solidFill>
                   <a:srgbClr val="D94F04"/>
                 </a:solidFill>
@@ -4013,7 +3771,7 @@
           <a:bodyPr wrap="square" lIns="0" tIns="0" rIns="0" bIns="0" rtlCol="0" anchor="ctr"/>
           <a:lstStyle/>
           <a:p>
-            <a:pPr indent="0" marL="0">
+            <a:pPr marL="0" indent="0">
               <a:buNone/>
             </a:pPr>
             <a:r>
@@ -4052,7 +3810,7 @@
           <a:bodyPr wrap="square" lIns="0" tIns="0" rIns="0" bIns="0" rtlCol="0" anchor="ctr"/>
           <a:lstStyle/>
           <a:p>
-            <a:pPr indent="0" marL="0">
+            <a:pPr marL="0" indent="0">
               <a:buNone/>
             </a:pPr>
             <a:r>
@@ -4091,7 +3849,7 @@
           <a:bodyPr wrap="square" lIns="0" tIns="0" rIns="0" bIns="0" rtlCol="0" anchor="ctr"/>
           <a:lstStyle/>
           <a:p>
-            <a:pPr indent="0" marL="0">
+            <a:pPr marL="0" indent="0">
               <a:buNone/>
             </a:pPr>
             <a:r>
@@ -4130,7 +3888,7 @@
           <a:bodyPr wrap="square" lIns="0" tIns="0" rIns="0" bIns="0" rtlCol="0" anchor="ctr"/>
           <a:lstStyle/>
           <a:p>
-            <a:pPr indent="0" marL="0">
+            <a:pPr marL="0" indent="0">
               <a:buNone/>
             </a:pPr>
             <a:r>
@@ -4144,9 +3902,6 @@
               </a:rPr>
               <a:t>The fourth dataset was meant to be the dependent variable. </a:t>
             </a:r>
-            <a:pPr indent="0" marL="0">
-              <a:buNone/>
-            </a:pPr>
             <a:r>
               <a:rPr lang="en-US" sz="1300" dirty="0">
                 <a:solidFill>
@@ -4178,6 +3933,7 @@
         <a:solidFill>
           <a:srgbClr val="FFFFFF"/>
         </a:solidFill>
+        <a:effectLst/>
       </p:bgPr>
     </p:bg>
     <p:spTree>
@@ -4215,11 +3971,11 @@
           <a:bodyPr wrap="square" lIns="0" tIns="0" rIns="0" bIns="0" rtlCol="0" anchor="ctr"/>
           <a:lstStyle/>
           <a:p>
-            <a:pPr indent="0" marL="0">
-              <a:buNone/>
-            </a:pPr>
-            <a:r>
-              <a:rPr lang="en-US" sz="1200" b="1" spc="160" kern="0" dirty="0">
+            <a:pPr marL="0" indent="0">
+              <a:buNone/>
+            </a:pPr>
+            <a:r>
+              <a:rPr lang="en-US" sz="1200" b="1" kern="0" spc="160" dirty="0">
                 <a:solidFill>
                   <a:srgbClr val="0D9488"/>
                 </a:solidFill>
@@ -4254,7 +4010,7 @@
           <a:bodyPr wrap="square" lIns="0" tIns="0" rIns="0" bIns="0" rtlCol="0" anchor="ctr"/>
           <a:lstStyle/>
           <a:p>
-            <a:pPr indent="0" marL="0">
+            <a:pPr marL="0" indent="0">
               <a:buNone/>
             </a:pPr>
             <a:r>
@@ -4274,7 +4030,7 @@
       </p:sp>
       <p:graphicFrame>
         <p:nvGraphicFramePr>
-          <p:cNvPr id="4" name="Chart 0" descr=""/>
+          <p:cNvPr id="4" name="Chart 0"/>
           <p:cNvGraphicFramePr/>
           <p:nvPr/>
         </p:nvGraphicFramePr>
@@ -4282,9 +4038,9 @@
           <a:off x="640080" y="1645920"/>
           <a:ext cx="5623560" cy="2926080"/>
         </p:xfrm>
-        <a:graphic xmlns:a="http://schemas.openxmlformats.org/drawingml/2006/main">
+        <a:graphic>
           <a:graphicData uri="http://schemas.openxmlformats.org/drawingml/2006/chart">
-            <c:chart xmlns:c="http://schemas.openxmlformats.org/drawingml/2006/chart" r:id="rId1"/>
+            <c:chart xmlns:c="http://schemas.openxmlformats.org/drawingml/2006/chart" xmlns:r="http://schemas.openxmlformats.org/officeDocument/2006/relationships" r:id="rId3"/>
           </a:graphicData>
         </a:graphic>
       </p:graphicFrame>
@@ -4309,7 +4065,7 @@
           <a:bodyPr wrap="square" lIns="0" tIns="0" rIns="0" bIns="0" rtlCol="0" anchor="ctr"/>
           <a:lstStyle/>
           <a:p>
-            <a:pPr indent="0" marL="0">
+            <a:pPr marL="0" indent="0">
               <a:buNone/>
             </a:pPr>
             <a:r>
@@ -4353,6 +4109,13 @@
             <a:prstDash val="solid"/>
           </a:ln>
         </p:spPr>
+        <p:txBody>
+          <a:bodyPr/>
+          <a:lstStyle/>
+          <a:p>
+            <a:endParaRPr lang="en-US"/>
+          </a:p>
+        </p:txBody>
       </p:sp>
       <p:sp>
         <p:nvSpPr>
@@ -4375,7 +4138,7 @@
           <a:bodyPr wrap="square" lIns="0" tIns="0" rIns="0" bIns="0" rtlCol="0" anchor="ctr"/>
           <a:lstStyle/>
           <a:p>
-            <a:pPr algn="ctr" indent="0" marL="0">
+            <a:pPr marL="0" indent="0" algn="ctr">
               <a:buNone/>
             </a:pPr>
             <a:r>
@@ -4414,7 +4177,7 @@
           <a:bodyPr wrap="square" lIns="0" tIns="0" rIns="0" bIns="0" rtlCol="0" anchor="ctr"/>
           <a:lstStyle/>
           <a:p>
-            <a:pPr algn="ctr" indent="0" marL="0">
+            <a:pPr marL="0" indent="0" algn="ctr">
               <a:buNone/>
             </a:pPr>
             <a:r>
@@ -4431,7 +4194,7 @@
             <a:endParaRPr lang="en-US" sz="1050" dirty="0"/>
           </a:p>
           <a:p>
-            <a:pPr algn="ctr" indent="0" marL="0">
+            <a:pPr marL="0" indent="0" algn="ctr">
               <a:buNone/>
             </a:pPr>
             <a:r>
@@ -4475,6 +4238,13 @@
             <a:prstDash val="solid"/>
           </a:ln>
         </p:spPr>
+        <p:txBody>
+          <a:bodyPr/>
+          <a:lstStyle/>
+          <a:p>
+            <a:endParaRPr lang="en-US"/>
+          </a:p>
+        </p:txBody>
       </p:sp>
       <p:sp>
         <p:nvSpPr>
@@ -4497,7 +4267,7 @@
           <a:bodyPr wrap="square" lIns="0" tIns="0" rIns="0" bIns="0" rtlCol="0" anchor="ctr"/>
           <a:lstStyle/>
           <a:p>
-            <a:pPr algn="ctr" indent="0" marL="0">
+            <a:pPr marL="0" indent="0" algn="ctr">
               <a:buNone/>
             </a:pPr>
             <a:r>
@@ -4536,7 +4306,7 @@
           <a:bodyPr wrap="square" lIns="0" tIns="0" rIns="0" bIns="0" rtlCol="0" anchor="ctr"/>
           <a:lstStyle/>
           <a:p>
-            <a:pPr algn="ctr" indent="0" marL="0">
+            <a:pPr marL="0" indent="0" algn="ctr">
               <a:buNone/>
             </a:pPr>
             <a:r>
@@ -4553,7 +4323,7 @@
             <a:endParaRPr lang="en-US" sz="1050" dirty="0"/>
           </a:p>
           <a:p>
-            <a:pPr algn="ctr" indent="0" marL="0">
+            <a:pPr marL="0" indent="0" algn="ctr">
               <a:buNone/>
             </a:pPr>
             <a:r>
@@ -4597,6 +4367,13 @@
             <a:prstDash val="solid"/>
           </a:ln>
         </p:spPr>
+        <p:txBody>
+          <a:bodyPr/>
+          <a:lstStyle/>
+          <a:p>
+            <a:endParaRPr lang="en-US"/>
+          </a:p>
+        </p:txBody>
       </p:sp>
       <p:sp>
         <p:nvSpPr>
@@ -4619,7 +4396,7 @@
           <a:bodyPr wrap="square" lIns="0" tIns="0" rIns="0" bIns="0" rtlCol="0" anchor="ctr"/>
           <a:lstStyle/>
           <a:p>
-            <a:pPr algn="ctr" indent="0" marL="0">
+            <a:pPr marL="0" indent="0" algn="ctr">
               <a:buNone/>
             </a:pPr>
             <a:r>
@@ -4658,7 +4435,7 @@
           <a:bodyPr wrap="square" lIns="0" tIns="0" rIns="0" bIns="0" rtlCol="0" anchor="ctr"/>
           <a:lstStyle/>
           <a:p>
-            <a:pPr algn="ctr" indent="0" marL="0">
+            <a:pPr marL="0" indent="0" algn="ctr">
               <a:buNone/>
             </a:pPr>
             <a:r>
@@ -4675,7 +4452,7 @@
             <a:endParaRPr lang="en-US" sz="1050" dirty="0"/>
           </a:p>
           <a:p>
-            <a:pPr algn="ctr" indent="0" marL="0">
+            <a:pPr marL="0" indent="0" algn="ctr">
               <a:buNone/>
             </a:pPr>
             <a:r>
@@ -4719,6 +4496,13 @@
             <a:prstDash val="solid"/>
           </a:ln>
         </p:spPr>
+        <p:txBody>
+          <a:bodyPr/>
+          <a:lstStyle/>
+          <a:p>
+            <a:endParaRPr lang="en-US"/>
+          </a:p>
+        </p:txBody>
       </p:sp>
       <p:sp>
         <p:nvSpPr>
@@ -4741,7 +4525,7 @@
           <a:bodyPr wrap="square" lIns="0" tIns="0" rIns="0" bIns="0" rtlCol="0" anchor="ctr"/>
           <a:lstStyle/>
           <a:p>
-            <a:pPr algn="ctr" indent="0" marL="0">
+            <a:pPr marL="0" indent="0" algn="ctr">
               <a:buNone/>
             </a:pPr>
             <a:r>
@@ -4780,7 +4564,7 @@
           <a:bodyPr wrap="square" lIns="0" tIns="0" rIns="0" bIns="0" rtlCol="0" anchor="ctr"/>
           <a:lstStyle/>
           <a:p>
-            <a:pPr algn="ctr" indent="0" marL="0">
+            <a:pPr marL="0" indent="0" algn="ctr">
               <a:buNone/>
             </a:pPr>
             <a:r>
@@ -4797,7 +4581,7 @@
             <a:endParaRPr lang="en-US" sz="1050" dirty="0"/>
           </a:p>
           <a:p>
-            <a:pPr algn="ctr" indent="0" marL="0">
+            <a:pPr marL="0" indent="0" algn="ctr">
               <a:buNone/>
             </a:pPr>
             <a:r>
@@ -4836,7 +4620,7 @@
           <a:bodyPr wrap="square" lIns="0" tIns="0" rIns="0" bIns="0" rtlCol="0" anchor="ctr"/>
           <a:lstStyle/>
           <a:p>
-            <a:pPr indent="0" marL="0">
+            <a:pPr marL="0" indent="0">
               <a:buNone/>
             </a:pPr>
             <a:r>
@@ -4850,9 +4634,6 @@
               </a:rPr>
               <a:t>Why this matters:  </a:t>
             </a:r>
-            <a:pPr indent="0" marL="0">
-              <a:buNone/>
-            </a:pPr>
             <a:r>
               <a:rPr lang="en-US" sz="1300" dirty="0">
                 <a:solidFill>
@@ -4889,7 +4670,7 @@
           <a:bodyPr wrap="square" lIns="0" tIns="0" rIns="0" bIns="0" rtlCol="0" anchor="ctr"/>
           <a:lstStyle/>
           <a:p>
-            <a:pPr indent="0" marL="0">
+            <a:pPr marL="0" indent="0">
               <a:buNone/>
             </a:pPr>
             <a:r>
@@ -4903,9 +4684,6 @@
               </a:rPr>
               <a:t>First lead test gives +0.24 at k=0, −0.20 at k=1, +0.40 at k=2. </a:t>
             </a:r>
-            <a:pPr indent="0" marL="0">
-              <a:buNone/>
-            </a:pPr>
             <a:r>
               <a:rPr lang="en-US" sz="1300" dirty="0">
                 <a:solidFill>
@@ -4937,6 +4715,7 @@
         <a:solidFill>
           <a:srgbClr val="FFFFFF"/>
         </a:solidFill>
+        <a:effectLst/>
       </p:bgPr>
     </p:bg>
     <p:spTree>
@@ -4974,11 +4753,11 @@
           <a:bodyPr wrap="square" lIns="0" tIns="0" rIns="0" bIns="0" rtlCol="0" anchor="ctr"/>
           <a:lstStyle/>
           <a:p>
-            <a:pPr indent="0" marL="0">
-              <a:buNone/>
-            </a:pPr>
-            <a:r>
-              <a:rPr lang="en-US" sz="1200" b="1" spc="160" kern="0" dirty="0">
+            <a:pPr marL="0" indent="0">
+              <a:buNone/>
+            </a:pPr>
+            <a:r>
+              <a:rPr lang="en-US" sz="1200" b="1" kern="0" spc="160" dirty="0">
                 <a:solidFill>
                   <a:srgbClr val="0D9488"/>
                 </a:solidFill>
@@ -5013,7 +4792,7 @@
           <a:bodyPr wrap="square" lIns="0" tIns="0" rIns="0" bIns="0" rtlCol="0" anchor="ctr"/>
           <a:lstStyle/>
           <a:p>
-            <a:pPr indent="0" marL="0">
+            <a:pPr marL="0" indent="0">
               <a:buNone/>
             </a:pPr>
             <a:r>
@@ -5057,6 +4836,13 @@
             <a:prstDash val="solid"/>
           </a:ln>
         </p:spPr>
+        <p:txBody>
+          <a:bodyPr/>
+          <a:lstStyle/>
+          <a:p>
+            <a:endParaRPr lang="en-US"/>
+          </a:p>
+        </p:txBody>
       </p:sp>
       <p:sp>
         <p:nvSpPr>
@@ -5082,6 +4868,13 @@
             <a:prstDash val="solid"/>
           </a:ln>
         </p:spPr>
+        <p:txBody>
+          <a:bodyPr/>
+          <a:lstStyle/>
+          <a:p>
+            <a:endParaRPr lang="en-US"/>
+          </a:p>
+        </p:txBody>
       </p:sp>
       <p:sp>
         <p:nvSpPr>
@@ -5104,7 +4897,7 @@
           <a:bodyPr wrap="square" lIns="0" tIns="0" rIns="0" bIns="0" rtlCol="0" anchor="ctr"/>
           <a:lstStyle/>
           <a:p>
-            <a:pPr indent="0" marL="0">
+            <a:pPr marL="0" indent="0">
               <a:buNone/>
             </a:pPr>
             <a:r>
@@ -5230,7 +5023,7 @@
       </p:sp>
       <p:graphicFrame>
         <p:nvGraphicFramePr>
-          <p:cNvPr id="8" name="Chart 0" descr=""/>
+          <p:cNvPr id="8" name="Chart 0"/>
           <p:cNvGraphicFramePr/>
           <p:nvPr/>
         </p:nvGraphicFramePr>
@@ -5238,9 +5031,9 @@
           <a:off x="4709160" y="1645920"/>
           <a:ext cx="6830568" cy="2880360"/>
         </p:xfrm>
-        <a:graphic xmlns:a="http://schemas.openxmlformats.org/drawingml/2006/main">
+        <a:graphic>
           <a:graphicData uri="http://schemas.openxmlformats.org/drawingml/2006/chart">
-            <c:chart xmlns:c="http://schemas.openxmlformats.org/drawingml/2006/chart" r:id="rId1"/>
+            <c:chart xmlns:c="http://schemas.openxmlformats.org/drawingml/2006/chart" xmlns:r="http://schemas.openxmlformats.org/officeDocument/2006/relationships" r:id="rId3"/>
           </a:graphicData>
         </a:graphic>
       </p:graphicFrame>
@@ -5265,7 +5058,7 @@
           <a:bodyPr wrap="square" lIns="0" tIns="0" rIns="0" bIns="0" rtlCol="0" anchor="ctr"/>
           <a:lstStyle/>
           <a:p>
-            <a:pPr indent="0" marL="0">
+            <a:pPr marL="0" indent="0">
               <a:buNone/>
             </a:pPr>
             <a:r>
@@ -5309,6 +5102,13 @@
             <a:prstDash val="solid"/>
           </a:ln>
         </p:spPr>
+        <p:txBody>
+          <a:bodyPr/>
+          <a:lstStyle/>
+          <a:p>
+            <a:endParaRPr lang="en-US"/>
+          </a:p>
+        </p:txBody>
       </p:sp>
       <p:sp>
         <p:nvSpPr>
@@ -5331,7 +5131,7 @@
           <a:bodyPr wrap="square" lIns="0" tIns="0" rIns="0" bIns="0" rtlCol="0" anchor="ctr"/>
           <a:lstStyle/>
           <a:p>
-            <a:pPr algn="ctr" indent="0" marL="0">
+            <a:pPr marL="0" indent="0" algn="ctr">
               <a:buNone/>
             </a:pPr>
             <a:r>
@@ -5370,7 +5170,7 @@
           <a:bodyPr wrap="square" lIns="0" tIns="0" rIns="0" bIns="0" rtlCol="0" anchor="ctr"/>
           <a:lstStyle/>
           <a:p>
-            <a:pPr algn="ctr" indent="0" marL="0">
+            <a:pPr marL="0" indent="0" algn="ctr">
               <a:buNone/>
             </a:pPr>
             <a:r>
@@ -5414,6 +5214,13 @@
             <a:prstDash val="solid"/>
           </a:ln>
         </p:spPr>
+        <p:txBody>
+          <a:bodyPr/>
+          <a:lstStyle/>
+          <a:p>
+            <a:endParaRPr lang="en-US"/>
+          </a:p>
+        </p:txBody>
       </p:sp>
       <p:sp>
         <p:nvSpPr>
@@ -5436,7 +5243,7 @@
           <a:bodyPr wrap="square" lIns="0" tIns="0" rIns="0" bIns="0" rtlCol="0" anchor="ctr"/>
           <a:lstStyle/>
           <a:p>
-            <a:pPr algn="ctr" indent="0" marL="0">
+            <a:pPr marL="0" indent="0" algn="ctr">
               <a:buNone/>
             </a:pPr>
             <a:r>
@@ -5475,7 +5282,7 @@
           <a:bodyPr wrap="square" lIns="0" tIns="0" rIns="0" bIns="0" rtlCol="0" anchor="ctr"/>
           <a:lstStyle/>
           <a:p>
-            <a:pPr algn="ctr" indent="0" marL="0">
+            <a:pPr marL="0" indent="0" algn="ctr">
               <a:buNone/>
             </a:pPr>
             <a:r>
@@ -5514,7 +5321,7 @@
           <a:bodyPr wrap="square" lIns="0" tIns="0" rIns="0" bIns="0" rtlCol="0" anchor="ctr"/>
           <a:lstStyle/>
           <a:p>
-            <a:pPr indent="0" marL="0">
+            <a:pPr marL="0" indent="0">
               <a:buNone/>
             </a:pPr>
             <a:r>
@@ -5528,9 +5335,6 @@
               </a:rPr>
               <a:t>At our 16 events a moderate effect is caught 15% of the time. </a:t>
             </a:r>
-            <a:pPr indent="0" marL="0">
-              <a:buNone/>
-            </a:pPr>
             <a:r>
               <a:rPr lang="en-US" sz="1300" dirty="0">
                 <a:solidFill>
@@ -5562,6 +5366,7 @@
         <a:solidFill>
           <a:srgbClr val="FFFFFF"/>
         </a:solidFill>
+        <a:effectLst/>
       </p:bgPr>
     </p:bg>
     <p:spTree>
@@ -5599,11 +5404,11 @@
           <a:bodyPr wrap="square" lIns="0" tIns="0" rIns="0" bIns="0" rtlCol="0" anchor="ctr"/>
           <a:lstStyle/>
           <a:p>
-            <a:pPr indent="0" marL="0">
-              <a:buNone/>
-            </a:pPr>
-            <a:r>
-              <a:rPr lang="en-US" sz="1200" b="1" spc="160" kern="0" dirty="0">
+            <a:pPr marL="0" indent="0">
+              <a:buNone/>
+            </a:pPr>
+            <a:r>
+              <a:rPr lang="en-US" sz="1200" b="1" kern="0" spc="160" dirty="0">
                 <a:solidFill>
                   <a:srgbClr val="0D9488"/>
                 </a:solidFill>
@@ -5638,7 +5443,7 @@
           <a:bodyPr wrap="square" lIns="0" tIns="0" rIns="0" bIns="0" rtlCol="0" anchor="ctr"/>
           <a:lstStyle/>
           <a:p>
-            <a:pPr indent="0" marL="0">
+            <a:pPr marL="0" indent="0">
               <a:buNone/>
             </a:pPr>
             <a:r>
@@ -5680,6 +5485,13 @@
             <a:prstDash val="solid"/>
           </a:ln>
         </p:spPr>
+        <p:txBody>
+          <a:bodyPr/>
+          <a:lstStyle/>
+          <a:p>
+            <a:endParaRPr lang="en-US"/>
+          </a:p>
+        </p:txBody>
       </p:sp>
       <p:sp>
         <p:nvSpPr>
@@ -5702,7 +5514,7 @@
           <a:bodyPr wrap="square" lIns="0" tIns="0" rIns="0" bIns="0" rtlCol="0" anchor="ctr"/>
           <a:lstStyle/>
           <a:p>
-            <a:pPr algn="ctr" indent="0" marL="0">
+            <a:pPr marL="0" indent="0" algn="ctr">
               <a:buNone/>
             </a:pPr>
             <a:r>
@@ -5741,7 +5553,7 @@
           <a:bodyPr wrap="square" lIns="0" tIns="0" rIns="0" bIns="0" rtlCol="0" anchor="ctr"/>
           <a:lstStyle/>
           <a:p>
-            <a:pPr indent="0" marL="0">
+            <a:pPr marL="0" indent="0">
               <a:buNone/>
             </a:pPr>
             <a:r>
@@ -5780,7 +5592,7 @@
           <a:bodyPr wrap="square" lIns="0" tIns="0" rIns="0" bIns="0" rtlCol="0" anchor="ctr"/>
           <a:lstStyle/>
           <a:p>
-            <a:pPr indent="0" marL="0">
+            <a:pPr marL="0" indent="0">
               <a:buNone/>
             </a:pPr>
             <a:r>
@@ -5822,6 +5634,13 @@
             <a:prstDash val="solid"/>
           </a:ln>
         </p:spPr>
+        <p:txBody>
+          <a:bodyPr/>
+          <a:lstStyle/>
+          <a:p>
+            <a:endParaRPr lang="en-US"/>
+          </a:p>
+        </p:txBody>
       </p:sp>
       <p:sp>
         <p:nvSpPr>
@@ -5844,7 +5663,7 @@
           <a:bodyPr wrap="square" lIns="0" tIns="0" rIns="0" bIns="0" rtlCol="0" anchor="ctr"/>
           <a:lstStyle/>
           <a:p>
-            <a:pPr algn="ctr" indent="0" marL="0">
+            <a:pPr marL="0" indent="0" algn="ctr">
               <a:buNone/>
             </a:pPr>
             <a:r>
@@ -5883,7 +5702,7 @@
           <a:bodyPr wrap="square" lIns="0" tIns="0" rIns="0" bIns="0" rtlCol="0" anchor="ctr"/>
           <a:lstStyle/>
           <a:p>
-            <a:pPr indent="0" marL="0">
+            <a:pPr marL="0" indent="0">
               <a:buNone/>
             </a:pPr>
             <a:r>
@@ -5922,7 +5741,7 @@
           <a:bodyPr wrap="square" lIns="0" tIns="0" rIns="0" bIns="0" rtlCol="0" anchor="ctr"/>
           <a:lstStyle/>
           <a:p>
-            <a:pPr indent="0" marL="0">
+            <a:pPr marL="0" indent="0">
               <a:buNone/>
             </a:pPr>
             <a:r>
@@ -5964,6 +5783,13 @@
             <a:prstDash val="solid"/>
           </a:ln>
         </p:spPr>
+        <p:txBody>
+          <a:bodyPr/>
+          <a:lstStyle/>
+          <a:p>
+            <a:endParaRPr lang="en-US"/>
+          </a:p>
+        </p:txBody>
       </p:sp>
       <p:sp>
         <p:nvSpPr>
@@ -5986,7 +5812,7 @@
           <a:bodyPr wrap="square" lIns="0" tIns="0" rIns="0" bIns="0" rtlCol="0" anchor="ctr"/>
           <a:lstStyle/>
           <a:p>
-            <a:pPr algn="ctr" indent="0" marL="0">
+            <a:pPr marL="0" indent="0" algn="ctr">
               <a:buNone/>
             </a:pPr>
             <a:r>
@@ -6025,7 +5851,7 @@
           <a:bodyPr wrap="square" lIns="0" tIns="0" rIns="0" bIns="0" rtlCol="0" anchor="ctr"/>
           <a:lstStyle/>
           <a:p>
-            <a:pPr indent="0" marL="0">
+            <a:pPr marL="0" indent="0">
               <a:buNone/>
             </a:pPr>
             <a:r>
@@ -6064,7 +5890,7 @@
           <a:bodyPr wrap="square" lIns="0" tIns="0" rIns="0" bIns="0" rtlCol="0" anchor="ctr"/>
           <a:lstStyle/>
           <a:p>
-            <a:pPr indent="0" marL="0">
+            <a:pPr marL="0" indent="0">
               <a:buNone/>
             </a:pPr>
             <a:r>
@@ -6106,6 +5932,13 @@
             <a:prstDash val="solid"/>
           </a:ln>
         </p:spPr>
+        <p:txBody>
+          <a:bodyPr/>
+          <a:lstStyle/>
+          <a:p>
+            <a:endParaRPr lang="en-US"/>
+          </a:p>
+        </p:txBody>
       </p:sp>
       <p:sp>
         <p:nvSpPr>
@@ -6128,7 +5961,7 @@
           <a:bodyPr wrap="square" lIns="0" tIns="0" rIns="0" bIns="0" rtlCol="0" anchor="ctr"/>
           <a:lstStyle/>
           <a:p>
-            <a:pPr algn="ctr" indent="0" marL="0">
+            <a:pPr marL="0" indent="0" algn="ctr">
               <a:buNone/>
             </a:pPr>
             <a:r>
@@ -6167,7 +6000,7 @@
           <a:bodyPr wrap="square" lIns="0" tIns="0" rIns="0" bIns="0" rtlCol="0" anchor="ctr"/>
           <a:lstStyle/>
           <a:p>
-            <a:pPr indent="0" marL="0">
+            <a:pPr marL="0" indent="0">
               <a:buNone/>
             </a:pPr>
             <a:r>
@@ -6206,7 +6039,7 @@
           <a:bodyPr wrap="square" lIns="0" tIns="0" rIns="0" bIns="0" rtlCol="0" anchor="ctr"/>
           <a:lstStyle/>
           <a:p>
-            <a:pPr indent="0" marL="0">
+            <a:pPr marL="0" indent="0">
               <a:buNone/>
             </a:pPr>
             <a:r>
@@ -6248,6 +6081,13 @@
             <a:prstDash val="solid"/>
           </a:ln>
         </p:spPr>
+        <p:txBody>
+          <a:bodyPr/>
+          <a:lstStyle/>
+          <a:p>
+            <a:endParaRPr lang="en-US"/>
+          </a:p>
+        </p:txBody>
       </p:sp>
       <p:sp>
         <p:nvSpPr>
@@ -6270,7 +6110,7 @@
           <a:bodyPr wrap="square" lIns="0" tIns="0" rIns="0" bIns="0" rtlCol="0" anchor="ctr"/>
           <a:lstStyle/>
           <a:p>
-            <a:pPr algn="ctr" indent="0" marL="0">
+            <a:pPr marL="0" indent="0" algn="ctr">
               <a:buNone/>
             </a:pPr>
             <a:r>
@@ -6309,7 +6149,7 @@
           <a:bodyPr wrap="square" lIns="0" tIns="0" rIns="0" bIns="0" rtlCol="0" anchor="ctr"/>
           <a:lstStyle/>
           <a:p>
-            <a:pPr indent="0" marL="0">
+            <a:pPr marL="0" indent="0">
               <a:buNone/>
             </a:pPr>
             <a:r>
@@ -6348,7 +6188,7 @@
           <a:bodyPr wrap="square" lIns="0" tIns="0" rIns="0" bIns="0" rtlCol="0" anchor="ctr"/>
           <a:lstStyle/>
           <a:p>
-            <a:pPr indent="0" marL="0">
+            <a:pPr marL="0" indent="0">
               <a:buNone/>
             </a:pPr>
             <a:r>
@@ -6363,6 +6203,48 @@
               <a:t>Including the negative result on the investment source, which is a finding about alt-data coverage in its own right.</a:t>
             </a:r>
             <a:endParaRPr lang="en-US" sz="1250" dirty="0"/>
+          </a:p>
+        </p:txBody>
+      </p:sp>
+      <p:sp>
+        <p:nvSpPr>
+          <p:cNvPr id="24" name="Text 16">
+            <a:extLst>
+              <a:ext uri="{FF2B5EF4-FFF2-40B4-BE49-F238E27FC236}">
+                <a16:creationId xmlns:a16="http://schemas.microsoft.com/office/drawing/2014/main" id="{8D6DF415-B2F2-7FF5-B6B7-A65FAFE9E3FE}"/>
+              </a:ext>
+            </a:extLst>
+          </p:cNvPr>
+          <p:cNvSpPr txBox="1"/>
+          <p:nvPr/>
+        </p:nvSpPr>
+        <p:spPr>
+          <a:xfrm>
+            <a:off x="7799832" y="6062472"/>
+            <a:ext cx="3721608" cy="420624"/>
+          </a:xfrm>
+          <a:prstGeom prst="rect">
+            <a:avLst/>
+          </a:prstGeom>
+          <a:noFill/>
+          <a:ln/>
+        </p:spPr>
+        <p:txBody>
+          <a:bodyPr wrap="square" lIns="0" tIns="0" rIns="0" bIns="0" rtlCol="0" anchor="ctr"/>
+          <a:lstStyle/>
+          <a:p>
+            <a:pPr marL="0" indent="0" algn="r">
+              <a:buNone/>
+            </a:pPr>
+            <a:r>
+              <a:rPr lang="en-US" sz="950" dirty="0">
+                <a:latin typeface="Calibri" pitchFamily="34" charset="0"/>
+                <a:ea typeface="Calibri" pitchFamily="34" charset="-122"/>
+                <a:cs typeface="Calibri" pitchFamily="34" charset="-120"/>
+              </a:rPr>
+              <a:t>Slide design and layout generated with Claude (Anthropic Claude Code)</a:t>
+            </a:r>
+            <a:endParaRPr lang="en-US" sz="950" dirty="0"/>
           </a:p>
         </p:txBody>
       </p:sp>
@@ -6382,6 +6264,7 @@
         <a:solidFill>
           <a:srgbClr val="0B3B38"/>
         </a:solidFill>
+        <a:effectLst/>
       </p:bgPr>
     </p:bg>
     <p:spTree>
@@ -6422,6 +6305,13 @@
             <a:prstDash val="solid"/>
           </a:ln>
         </p:spPr>
+        <p:txBody>
+          <a:bodyPr/>
+          <a:lstStyle/>
+          <a:p>
+            <a:endParaRPr lang="en-US"/>
+          </a:p>
+        </p:txBody>
       </p:sp>
       <p:sp>
         <p:nvSpPr>
@@ -6444,11 +6334,11 @@
           <a:bodyPr wrap="square" lIns="0" tIns="0" rIns="0" bIns="0" rtlCol="0" anchor="ctr"/>
           <a:lstStyle/>
           <a:p>
-            <a:pPr indent="0" marL="0">
-              <a:buNone/>
-            </a:pPr>
-            <a:r>
-              <a:rPr lang="en-US" sz="1200" b="1" spc="160" kern="0" dirty="0">
+            <a:pPr marL="0" indent="0">
+              <a:buNone/>
+            </a:pPr>
+            <a:r>
+              <a:rPr lang="en-US" sz="1200" b="1" kern="0" spc="160" dirty="0">
                 <a:solidFill>
                   <a:srgbClr val="F0A98A"/>
                 </a:solidFill>
@@ -6483,7 +6373,7 @@
           <a:bodyPr wrap="square" lIns="0" tIns="0" rIns="0" bIns="0" rtlCol="0" anchor="ctr"/>
           <a:lstStyle/>
           <a:p>
-            <a:pPr indent="0" marL="0">
+            <a:pPr marL="0" indent="0">
               <a:buNone/>
             </a:pPr>
             <a:r>
@@ -6527,6 +6417,13 @@
             <a:prstDash val="solid"/>
           </a:ln>
         </p:spPr>
+        <p:txBody>
+          <a:bodyPr/>
+          <a:lstStyle/>
+          <a:p>
+            <a:endParaRPr lang="en-US"/>
+          </a:p>
+        </p:txBody>
       </p:sp>
       <p:sp>
         <p:nvSpPr>
@@ -6549,7 +6446,7 @@
           <a:bodyPr wrap="square" lIns="0" tIns="0" rIns="0" bIns="0" rtlCol="0" anchor="ctr"/>
           <a:lstStyle/>
           <a:p>
-            <a:pPr indent="0" marL="0">
+            <a:pPr marL="0" indent="0">
               <a:buNone/>
             </a:pPr>
             <a:r>
@@ -6588,7 +6485,7 @@
           <a:bodyPr wrap="square" lIns="0" tIns="0" rIns="0" bIns="0" rtlCol="0" anchor="ctr"/>
           <a:lstStyle/>
           <a:p>
-            <a:pPr indent="0" marL="0">
+            <a:pPr marL="0" indent="0">
               <a:buNone/>
             </a:pPr>
             <a:r>
@@ -6632,6 +6529,13 @@
             <a:prstDash val="solid"/>
           </a:ln>
         </p:spPr>
+        <p:txBody>
+          <a:bodyPr/>
+          <a:lstStyle/>
+          <a:p>
+            <a:endParaRPr lang="en-US"/>
+          </a:p>
+        </p:txBody>
       </p:sp>
       <p:sp>
         <p:nvSpPr>
@@ -6654,7 +6558,7 @@
           <a:bodyPr wrap="square" lIns="0" tIns="0" rIns="0" bIns="0" rtlCol="0" anchor="ctr"/>
           <a:lstStyle/>
           <a:p>
-            <a:pPr indent="0" marL="0">
+            <a:pPr marL="0" indent="0">
               <a:buNone/>
             </a:pPr>
             <a:r>
@@ -6693,7 +6597,7 @@
           <a:bodyPr wrap="square" lIns="0" tIns="0" rIns="0" bIns="0" rtlCol="0" anchor="ctr"/>
           <a:lstStyle/>
           <a:p>
-            <a:pPr indent="0" marL="0">
+            <a:pPr marL="0" indent="0">
               <a:buNone/>
             </a:pPr>
             <a:r>
@@ -6737,6 +6641,13 @@
             <a:prstDash val="solid"/>
           </a:ln>
         </p:spPr>
+        <p:txBody>
+          <a:bodyPr/>
+          <a:lstStyle/>
+          <a:p>
+            <a:endParaRPr lang="en-US"/>
+          </a:p>
+        </p:txBody>
       </p:sp>
       <p:sp>
         <p:nvSpPr>
@@ -6759,7 +6670,7 @@
           <a:bodyPr wrap="square" lIns="0" tIns="0" rIns="0" bIns="0" rtlCol="0" anchor="ctr"/>
           <a:lstStyle/>
           <a:p>
-            <a:pPr indent="0" marL="0">
+            <a:pPr marL="0" indent="0">
               <a:buNone/>
             </a:pPr>
             <a:r>
@@ -6798,7 +6709,7 @@
           <a:bodyPr wrap="square" lIns="0" tIns="0" rIns="0" bIns="0" rtlCol="0" anchor="ctr"/>
           <a:lstStyle/>
           <a:p>
-            <a:pPr indent="0" marL="0">
+            <a:pPr marL="0" indent="0">
               <a:buNone/>
             </a:pPr>
             <a:r>
@@ -6842,6 +6753,13 @@
             <a:prstDash val="solid"/>
           </a:ln>
         </p:spPr>
+        <p:txBody>
+          <a:bodyPr/>
+          <a:lstStyle/>
+          <a:p>
+            <a:endParaRPr lang="en-US"/>
+          </a:p>
+        </p:txBody>
       </p:sp>
       <p:sp>
         <p:nvSpPr>
@@ -6864,11 +6782,11 @@
           <a:bodyPr wrap="square" lIns="0" tIns="0" rIns="0" bIns="0" rtlCol="0" anchor="ctr"/>
           <a:lstStyle/>
           <a:p>
-            <a:pPr indent="0" marL="0">
-              <a:buNone/>
-            </a:pPr>
-            <a:r>
-              <a:rPr lang="en-US" sz="1050" b="1" spc="120" kern="0" dirty="0">
+            <a:pPr marL="0" indent="0">
+              <a:buNone/>
+            </a:pPr>
+            <a:r>
+              <a:rPr lang="en-US" sz="1050" b="1" kern="0" spc="120" dirty="0">
                 <a:solidFill>
                   <a:srgbClr val="D94F04"/>
                 </a:solidFill>
@@ -7009,7 +6927,7 @@
           <a:bodyPr wrap="square" lIns="0" tIns="0" rIns="0" bIns="0" rtlCol="0" anchor="ctr"/>
           <a:lstStyle/>
           <a:p>
-            <a:pPr indent="0" marL="0">
+            <a:pPr marL="0" indent="0">
               <a:buNone/>
             </a:pPr>
             <a:r>
@@ -7035,20 +6953,20 @@
         </p:nvSpPr>
         <p:spPr>
           <a:xfrm>
-            <a:off x="8183880" y="5907024"/>
-            <a:ext cx="3355848" cy="420624"/>
-          </a:xfrm>
-          <a:prstGeom prst="rect">
-            <a:avLst/>
-          </a:prstGeom>
-          <a:noFill/>
-          <a:ln/>
-        </p:spPr>
-        <p:txBody>
-          <a:bodyPr wrap="square" lIns="0" tIns="0" rIns="0" bIns="0" rtlCol="0" anchor="ctr"/>
-          <a:lstStyle/>
-          <a:p>
-            <a:pPr algn="r" indent="0" marL="0">
+            <a:off x="7818120" y="5907024"/>
+            <a:ext cx="3721608" cy="420624"/>
+          </a:xfrm>
+          <a:prstGeom prst="rect">
+            <a:avLst/>
+          </a:prstGeom>
+          <a:noFill/>
+          <a:ln/>
+        </p:spPr>
+        <p:txBody>
+          <a:bodyPr wrap="square" lIns="0" tIns="0" rIns="0" bIns="0" rtlCol="0" anchor="ctr"/>
+          <a:lstStyle/>
+          <a:p>
+            <a:pPr marL="0" indent="0" algn="r">
               <a:buNone/>
             </a:pPr>
             <a:r>
@@ -7367,4 +7285,319 @@
     </a:ext>
   </a:extLst>
 </a:theme>
+</file>
+
+<file path=ppt/theme/theme2.xml><?xml version="1.0" encoding="utf-8"?>
+<a:theme xmlns:a="http://schemas.openxmlformats.org/drawingml/2006/main" name="Office Theme">
+  <a:themeElements>
+    <a:clrScheme name="Office">
+      <a:dk1>
+        <a:sysClr val="windowText" lastClr="000000"/>
+      </a:dk1>
+      <a:lt1>
+        <a:sysClr val="window" lastClr="FFFFFF"/>
+      </a:lt1>
+      <a:dk2>
+        <a:srgbClr val="0E2841"/>
+      </a:dk2>
+      <a:lt2>
+        <a:srgbClr val="E8E8E8"/>
+      </a:lt2>
+      <a:accent1>
+        <a:srgbClr val="156082"/>
+      </a:accent1>
+      <a:accent2>
+        <a:srgbClr val="E97132"/>
+      </a:accent2>
+      <a:accent3>
+        <a:srgbClr val="196B24"/>
+      </a:accent3>
+      <a:accent4>
+        <a:srgbClr val="0F9ED5"/>
+      </a:accent4>
+      <a:accent5>
+        <a:srgbClr val="A02B93"/>
+      </a:accent5>
+      <a:accent6>
+        <a:srgbClr val="4EA72E"/>
+      </a:accent6>
+      <a:hlink>
+        <a:srgbClr val="467886"/>
+      </a:hlink>
+      <a:folHlink>
+        <a:srgbClr val="96607D"/>
+      </a:folHlink>
+    </a:clrScheme>
+    <a:fontScheme name="Office">
+      <a:majorFont>
+        <a:latin typeface="Aptos Display" panose="02110004020202020204"/>
+        <a:ea typeface=""/>
+        <a:cs typeface=""/>
+        <a:font script="Jpan" typeface="游ゴシック Light"/>
+        <a:font script="Hang" typeface="맑은 고딕"/>
+        <a:font script="Hans" typeface="等线 Light"/>
+        <a:font script="Hant" typeface="新細明體"/>
+        <a:font script="Arab" typeface="Times New Roman"/>
+        <a:font script="Hebr" typeface="Times New Roman"/>
+        <a:font script="Thai" typeface="Angsana New"/>
+        <a:font script="Ethi" typeface="Nyala"/>
+        <a:font script="Beng" typeface="Vrinda"/>
+        <a:font script="Gujr" typeface="Shruti"/>
+        <a:font script="Khmr" typeface="MoolBoran"/>
+        <a:font script="Knda" typeface="Tunga"/>
+        <a:font script="Guru" typeface="Raavi"/>
+        <a:font script="Cans" typeface="Euphemia"/>
+        <a:font script="Cher" typeface="Plantagenet Cherokee"/>
+        <a:font script="Yiii" typeface="Microsoft Yi Baiti"/>
+        <a:font script="Tibt" typeface="Microsoft Himalaya"/>
+        <a:font script="Thaa" typeface="MV Boli"/>
+        <a:font script="Deva" typeface="Mangal"/>
+        <a:font script="Telu" typeface="Gautami"/>
+        <a:font script="Taml" typeface="Latha"/>
+        <a:font script="Syrc" typeface="Estrangelo Edessa"/>
+        <a:font script="Orya" typeface="Kalinga"/>
+        <a:font script="Mlym" typeface="Kartika"/>
+        <a:font script="Laoo" typeface="DokChampa"/>
+        <a:font script="Sinh" typeface="Iskoola Pota"/>
+        <a:font script="Mong" typeface="Mongolian Baiti"/>
+        <a:font script="Viet" typeface="Times New Roman"/>
+        <a:font script="Uigh" typeface="Microsoft Uighur"/>
+        <a:font script="Geor" typeface="Sylfaen"/>
+        <a:font script="Armn" typeface="Arial"/>
+        <a:font script="Bugi" typeface="Leelawadee UI"/>
+        <a:font script="Bopo" typeface="Microsoft JhengHei"/>
+        <a:font script="Java" typeface="Javanese Text"/>
+        <a:font script="Lisu" typeface="Segoe UI"/>
+        <a:font script="Mymr" typeface="Myanmar Text"/>
+        <a:font script="Nkoo" typeface="Ebrima"/>
+        <a:font script="Olck" typeface="Nirmala UI"/>
+        <a:font script="Osma" typeface="Ebrima"/>
+        <a:font script="Phag" typeface="Phagspa"/>
+        <a:font script="Syrn" typeface="Estrangelo Edessa"/>
+        <a:font script="Syrj" typeface="Estrangelo Edessa"/>
+        <a:font script="Syre" typeface="Estrangelo Edessa"/>
+        <a:font script="Sora" typeface="Nirmala UI"/>
+        <a:font script="Tale" typeface="Microsoft Tai Le"/>
+        <a:font script="Talu" typeface="Microsoft New Tai Lue"/>
+        <a:font script="Tfng" typeface="Ebrima"/>
+      </a:majorFont>
+      <a:minorFont>
+        <a:latin typeface="Aptos" panose="02110004020202020204"/>
+        <a:ea typeface=""/>
+        <a:cs typeface=""/>
+        <a:font script="Jpan" typeface="游ゴシック"/>
+        <a:font script="Hang" typeface="맑은 고딕"/>
+        <a:font script="Hans" typeface="等线"/>
+        <a:font script="Hant" typeface="新細明體"/>
+        <a:font script="Arab" typeface="Arial"/>
+        <a:font script="Hebr" typeface="Arial"/>
+        <a:font script="Thai" typeface="Cordia New"/>
+        <a:font script="Ethi" typeface="Nyala"/>
+        <a:font script="Beng" typeface="Vrinda"/>
+        <a:font script="Gujr" typeface="Shruti"/>
+        <a:font script="Khmr" typeface="DaunPenh"/>
+        <a:font script="Knda" typeface="Tunga"/>
+        <a:font script="Guru" typeface="Raavi"/>
+        <a:font script="Cans" typeface="Euphemia"/>
+        <a:font script="Cher" typeface="Plantagenet Cherokee"/>
+        <a:font script="Yiii" typeface="Microsoft Yi Baiti"/>
+        <a:font script="Tibt" typeface="Microsoft Himalaya"/>
+        <a:font script="Thaa" typeface="MV Boli"/>
+        <a:font script="Deva" typeface="Mangal"/>
+        <a:font script="Telu" typeface="Gautami"/>
+        <a:font script="Taml" typeface="Latha"/>
+        <a:font script="Syrc" typeface="Estrangelo Edessa"/>
+        <a:font script="Orya" typeface="Kalinga"/>
+        <a:font script="Mlym" typeface="Kartika"/>
+        <a:font script="Laoo" typeface="DokChampa"/>
+        <a:font script="Sinh" typeface="Iskoola Pota"/>
+        <a:font script="Mong" typeface="Mongolian Baiti"/>
+        <a:font script="Viet" typeface="Arial"/>
+        <a:font script="Uigh" typeface="Microsoft Uighur"/>
+        <a:font script="Geor" typeface="Sylfaen"/>
+        <a:font script="Armn" typeface="Arial"/>
+        <a:font script="Bugi" typeface="Leelawadee UI"/>
+        <a:font script="Bopo" typeface="Microsoft JhengHei"/>
+        <a:font script="Java" typeface="Javanese Text"/>
+        <a:font script="Lisu" typeface="Segoe UI"/>
+        <a:font script="Mymr" typeface="Myanmar Text"/>
+        <a:font script="Nkoo" typeface="Ebrima"/>
+        <a:font script="Olck" typeface="Nirmala UI"/>
+        <a:font script="Osma" typeface="Ebrima"/>
+        <a:font script="Phag" typeface="Phagspa"/>
+        <a:font script="Syrn" typeface="Estrangelo Edessa"/>
+        <a:font script="Syrj" typeface="Estrangelo Edessa"/>
+        <a:font script="Syre" typeface="Estrangelo Edessa"/>
+        <a:font script="Sora" typeface="Nirmala UI"/>
+        <a:font script="Tale" typeface="Microsoft Tai Le"/>
+        <a:font script="Talu" typeface="Microsoft New Tai Lue"/>
+        <a:font script="Tfng" typeface="Ebrima"/>
+      </a:minorFont>
+    </a:fontScheme>
+    <a:fmtScheme name="Office">
+      <a:fillStyleLst>
+        <a:solidFill>
+          <a:schemeClr val="phClr"/>
+        </a:solidFill>
+        <a:gradFill rotWithShape="1">
+          <a:gsLst>
+            <a:gs pos="0">
+              <a:schemeClr val="phClr">
+                <a:lumMod val="110000"/>
+                <a:satMod val="105000"/>
+                <a:tint val="67000"/>
+              </a:schemeClr>
+            </a:gs>
+            <a:gs pos="50000">
+              <a:schemeClr val="phClr">
+                <a:lumMod val="105000"/>
+                <a:satMod val="103000"/>
+                <a:tint val="73000"/>
+              </a:schemeClr>
+            </a:gs>
+            <a:gs pos="100000">
+              <a:schemeClr val="phClr">
+                <a:lumMod val="105000"/>
+                <a:satMod val="109000"/>
+                <a:tint val="81000"/>
+              </a:schemeClr>
+            </a:gs>
+          </a:gsLst>
+          <a:lin ang="5400000" scaled="0"/>
+        </a:gradFill>
+        <a:gradFill rotWithShape="1">
+          <a:gsLst>
+            <a:gs pos="0">
+              <a:schemeClr val="phClr">
+                <a:satMod val="103000"/>
+                <a:lumMod val="102000"/>
+                <a:tint val="94000"/>
+              </a:schemeClr>
+            </a:gs>
+            <a:gs pos="50000">
+              <a:schemeClr val="phClr">
+                <a:satMod val="110000"/>
+                <a:lumMod val="100000"/>
+                <a:shade val="100000"/>
+              </a:schemeClr>
+            </a:gs>
+            <a:gs pos="100000">
+              <a:schemeClr val="phClr">
+                <a:lumMod val="99000"/>
+                <a:satMod val="120000"/>
+                <a:shade val="78000"/>
+              </a:schemeClr>
+            </a:gs>
+          </a:gsLst>
+          <a:lin ang="5400000" scaled="0"/>
+        </a:gradFill>
+      </a:fillStyleLst>
+      <a:lnStyleLst>
+        <a:ln w="12700" cap="flat" cmpd="sng" algn="ctr">
+          <a:solidFill>
+            <a:schemeClr val="phClr"/>
+          </a:solidFill>
+          <a:prstDash val="solid"/>
+          <a:miter lim="800000"/>
+        </a:ln>
+        <a:ln w="19050" cap="flat" cmpd="sng" algn="ctr">
+          <a:solidFill>
+            <a:schemeClr val="phClr"/>
+          </a:solidFill>
+          <a:prstDash val="solid"/>
+          <a:miter lim="800000"/>
+        </a:ln>
+        <a:ln w="25400" cap="flat" cmpd="sng" algn="ctr">
+          <a:solidFill>
+            <a:schemeClr val="phClr"/>
+          </a:solidFill>
+          <a:prstDash val="solid"/>
+          <a:miter lim="800000"/>
+        </a:ln>
+      </a:lnStyleLst>
+      <a:effectStyleLst>
+        <a:effectStyle>
+          <a:effectLst/>
+        </a:effectStyle>
+        <a:effectStyle>
+          <a:effectLst/>
+        </a:effectStyle>
+        <a:effectStyle>
+          <a:effectLst>
+            <a:outerShdw blurRad="57150" dist="19050" dir="5400000" algn="ctr" rotWithShape="0">
+              <a:srgbClr val="000000">
+                <a:alpha val="63000"/>
+              </a:srgbClr>
+            </a:outerShdw>
+          </a:effectLst>
+        </a:effectStyle>
+      </a:effectStyleLst>
+      <a:bgFillStyleLst>
+        <a:solidFill>
+          <a:schemeClr val="phClr"/>
+        </a:solidFill>
+        <a:solidFill>
+          <a:schemeClr val="phClr">
+            <a:tint val="95000"/>
+            <a:satMod val="170000"/>
+          </a:schemeClr>
+        </a:solidFill>
+        <a:gradFill rotWithShape="1">
+          <a:gsLst>
+            <a:gs pos="0">
+              <a:schemeClr val="phClr">
+                <a:tint val="93000"/>
+                <a:satMod val="150000"/>
+                <a:shade val="98000"/>
+                <a:lumMod val="102000"/>
+              </a:schemeClr>
+            </a:gs>
+            <a:gs pos="50000">
+              <a:schemeClr val="phClr">
+                <a:tint val="98000"/>
+                <a:satMod val="130000"/>
+                <a:shade val="90000"/>
+                <a:lumMod val="103000"/>
+              </a:schemeClr>
+            </a:gs>
+            <a:gs pos="100000">
+              <a:schemeClr val="phClr">
+                <a:shade val="63000"/>
+                <a:satMod val="120000"/>
+              </a:schemeClr>
+            </a:gs>
+          </a:gsLst>
+          <a:lin ang="5400000" scaled="0"/>
+        </a:gradFill>
+      </a:bgFillStyleLst>
+    </a:fmtScheme>
+  </a:themeElements>
+  <a:objectDefaults>
+    <a:lnDef>
+      <a:spPr/>
+      <a:bodyPr/>
+      <a:lstStyle/>
+      <a:style>
+        <a:lnRef idx="2">
+          <a:schemeClr val="accent1"/>
+        </a:lnRef>
+        <a:fillRef idx="0">
+          <a:schemeClr val="accent1"/>
+        </a:fillRef>
+        <a:effectRef idx="1">
+          <a:schemeClr val="accent1"/>
+        </a:effectRef>
+        <a:fontRef idx="minor">
+          <a:schemeClr val="tx1"/>
+        </a:fontRef>
+      </a:style>
+    </a:lnDef>
+  </a:objectDefaults>
+  <a:extraClrSchemeLst/>
+  <a:extLst>
+    <a:ext uri="{05A4C25C-085E-4340-85A3-A5531E510DB2}">
+      <thm15:themeFamily xmlns:thm15="http://schemas.microsoft.com/office/thememl/2012/main" name="Office Theme" id="{2E142A2C-CD16-42D6-873A-C26D2A0506FA}" vid="{1BDDFF52-6CD6-40A5-AB3C-68EB2F1E4D0A}"/>
+    </a:ext>
+  </a:extLst>
+</a:theme>
 </file>